--- a/docs/Ramer_Design_Thinking.pptx
+++ b/docs/Ramer_Design_Thinking.pptx
@@ -3481,34 +3481,9 @@
           </a:p>
         </p:txBody>
       </p:sp>
-      <p:sp>
-        <p:nvSpPr>
-          <p:cNvPr id="6" name="Shape 3"/>
-          <p:cNvSpPr/>
-          <p:nvPr/>
-        </p:nvSpPr>
-        <p:spPr>
-          <a:xfrm>
-            <a:off x="548640" y="3840480"/>
-            <a:ext cx="594360" cy="594360"/>
-          </a:xfrm>
-          <a:prstGeom prst="ellipse">
-            <a:avLst/>
-          </a:prstGeom>
-          <a:solidFill>
-            <a:srgbClr val="FFFFFF"/>
-          </a:solidFill>
-          <a:ln w="12700">
-            <a:solidFill>
-              <a:srgbClr val="FFFFFF"/>
-            </a:solidFill>
-            <a:prstDash val="solid"/>
-          </a:ln>
-        </p:spPr>
-      </p:sp>
       <p:pic>
         <p:nvPicPr>
-          <p:cNvPr id="7" name="Image 0" descr="preencoded.png">    </p:cNvPr>
+          <p:cNvPr id="6" name="Image 0" descr="preencoded.png">    </p:cNvPr>
           <p:cNvPicPr>
             <a:picLocks noChangeAspect="1"/>
           </p:cNvPicPr>
@@ -3522,42 +3497,17 @@
         </p:blipFill>
         <p:spPr>
           <a:xfrm>
-            <a:off x="703174" y="3995014"/>
-            <a:ext cx="285293" cy="285293"/>
+            <a:off x="548640" y="3959352"/>
+            <a:ext cx="356616" cy="356616"/>
           </a:xfrm>
           <a:prstGeom prst="rect">
             <a:avLst/>
           </a:prstGeom>
         </p:spPr>
       </p:pic>
-      <p:sp>
-        <p:nvSpPr>
-          <p:cNvPr id="8" name="Shape 4"/>
-          <p:cNvSpPr/>
-          <p:nvPr/>
-        </p:nvSpPr>
-        <p:spPr>
-          <a:xfrm>
-            <a:off x="1417320" y="3840480"/>
-            <a:ext cx="594360" cy="594360"/>
-          </a:xfrm>
-          <a:prstGeom prst="ellipse">
-            <a:avLst/>
-          </a:prstGeom>
-          <a:solidFill>
-            <a:srgbClr val="FFFFFF"/>
-          </a:solidFill>
-          <a:ln w="12700">
-            <a:solidFill>
-              <a:srgbClr val="FFFFFF"/>
-            </a:solidFill>
-            <a:prstDash val="solid"/>
-          </a:ln>
-        </p:spPr>
-      </p:sp>
       <p:pic>
         <p:nvPicPr>
-          <p:cNvPr id="9" name="Image 1" descr="preencoded.png">    </p:cNvPr>
+          <p:cNvPr id="7" name="Image 1" descr="preencoded.png">    </p:cNvPr>
           <p:cNvPicPr>
             <a:picLocks noChangeAspect="1"/>
           </p:cNvPicPr>
@@ -3571,42 +3521,17 @@
         </p:blipFill>
         <p:spPr>
           <a:xfrm>
-            <a:off x="1571854" y="3995014"/>
-            <a:ext cx="285293" cy="285293"/>
+            <a:off x="1417320" y="3959352"/>
+            <a:ext cx="356616" cy="356616"/>
           </a:xfrm>
           <a:prstGeom prst="rect">
             <a:avLst/>
           </a:prstGeom>
         </p:spPr>
       </p:pic>
-      <p:sp>
-        <p:nvSpPr>
-          <p:cNvPr id="10" name="Shape 5"/>
-          <p:cNvSpPr/>
-          <p:nvPr/>
-        </p:nvSpPr>
-        <p:spPr>
-          <a:xfrm>
-            <a:off x="2286000" y="3840480"/>
-            <a:ext cx="594360" cy="594360"/>
-          </a:xfrm>
-          <a:prstGeom prst="ellipse">
-            <a:avLst/>
-          </a:prstGeom>
-          <a:solidFill>
-            <a:srgbClr val="FFFFFF"/>
-          </a:solidFill>
-          <a:ln w="12700">
-            <a:solidFill>
-              <a:srgbClr val="FFFFFF"/>
-            </a:solidFill>
-            <a:prstDash val="solid"/>
-          </a:ln>
-        </p:spPr>
-      </p:sp>
       <p:pic>
         <p:nvPicPr>
-          <p:cNvPr id="11" name="Image 2" descr="preencoded.png">    </p:cNvPr>
+          <p:cNvPr id="8" name="Image 2" descr="preencoded.png">    </p:cNvPr>
           <p:cNvPicPr>
             <a:picLocks noChangeAspect="1"/>
           </p:cNvPicPr>
@@ -3620,42 +3545,17 @@
         </p:blipFill>
         <p:spPr>
           <a:xfrm>
-            <a:off x="2440534" y="3995014"/>
-            <a:ext cx="285293" cy="285293"/>
+            <a:off x="2286000" y="3959352"/>
+            <a:ext cx="356616" cy="356616"/>
           </a:xfrm>
           <a:prstGeom prst="rect">
             <a:avLst/>
           </a:prstGeom>
         </p:spPr>
       </p:pic>
-      <p:sp>
-        <p:nvSpPr>
-          <p:cNvPr id="12" name="Shape 6"/>
-          <p:cNvSpPr/>
-          <p:nvPr/>
-        </p:nvSpPr>
-        <p:spPr>
-          <a:xfrm>
-            <a:off x="3154680" y="3840480"/>
-            <a:ext cx="594360" cy="594360"/>
-          </a:xfrm>
-          <a:prstGeom prst="ellipse">
-            <a:avLst/>
-          </a:prstGeom>
-          <a:solidFill>
-            <a:srgbClr val="FFFFFF"/>
-          </a:solidFill>
-          <a:ln w="12700">
-            <a:solidFill>
-              <a:srgbClr val="FFFFFF"/>
-            </a:solidFill>
-            <a:prstDash val="solid"/>
-          </a:ln>
-        </p:spPr>
-      </p:sp>
       <p:pic>
         <p:nvPicPr>
-          <p:cNvPr id="13" name="Image 3" descr="preencoded.png">    </p:cNvPr>
+          <p:cNvPr id="9" name="Image 3" descr="preencoded.png">    </p:cNvPr>
           <p:cNvPicPr>
             <a:picLocks noChangeAspect="1"/>
           </p:cNvPicPr>
@@ -3669,42 +3569,17 @@
         </p:blipFill>
         <p:spPr>
           <a:xfrm>
-            <a:off x="3309214" y="3995014"/>
-            <a:ext cx="285293" cy="285293"/>
+            <a:off x="3154680" y="3959352"/>
+            <a:ext cx="356616" cy="356616"/>
           </a:xfrm>
           <a:prstGeom prst="rect">
             <a:avLst/>
           </a:prstGeom>
         </p:spPr>
       </p:pic>
-      <p:sp>
-        <p:nvSpPr>
-          <p:cNvPr id="14" name="Shape 7"/>
-          <p:cNvSpPr/>
-          <p:nvPr/>
-        </p:nvSpPr>
-        <p:spPr>
-          <a:xfrm>
-            <a:off x="4023360" y="3840480"/>
-            <a:ext cx="594360" cy="594360"/>
-          </a:xfrm>
-          <a:prstGeom prst="ellipse">
-            <a:avLst/>
-          </a:prstGeom>
-          <a:solidFill>
-            <a:srgbClr val="FFFFFF"/>
-          </a:solidFill>
-          <a:ln w="12700">
-            <a:solidFill>
-              <a:srgbClr val="FFFFFF"/>
-            </a:solidFill>
-            <a:prstDash val="solid"/>
-          </a:ln>
-        </p:spPr>
-      </p:sp>
       <p:pic>
         <p:nvPicPr>
-          <p:cNvPr id="15" name="Image 4" descr="preencoded.png">    </p:cNvPr>
+          <p:cNvPr id="10" name="Image 4" descr="preencoded.png">    </p:cNvPr>
           <p:cNvPicPr>
             <a:picLocks noChangeAspect="1"/>
           </p:cNvPicPr>
@@ -3718,8 +3593,8 @@
         </p:blipFill>
         <p:spPr>
           <a:xfrm>
-            <a:off x="4177894" y="3995014"/>
-            <a:ext cx="285293" cy="285293"/>
+            <a:off x="4023360" y="3959352"/>
+            <a:ext cx="356616" cy="356616"/>
           </a:xfrm>
           <a:prstGeom prst="rect">
             <a:avLst/>
@@ -3836,18 +3711,81 @@
           </a:p>
         </p:txBody>
       </p:sp>
-      <p:sp>
-        <p:nvSpPr>
-          <p:cNvPr id="5" name="Shape 2"/>
+      <p:pic>
+        <p:nvPicPr>
+          <p:cNvPr id="5" name="Image 0" descr="preencoded.png">    </p:cNvPr>
+          <p:cNvPicPr>
+            <a:picLocks noChangeAspect="1"/>
+          </p:cNvPicPr>
+          <p:nvPr/>
+        </p:nvPicPr>
+        <p:blipFill>
+          <a:blip r:embed="rId1"/>
+          <a:stretch>
+            <a:fillRect/>
+          </a:stretch>
+        </p:blipFill>
+        <p:spPr>
+          <a:xfrm>
+            <a:off x="548640" y="2880360"/>
+            <a:ext cx="548640" cy="548640"/>
+          </a:xfrm>
+          <a:prstGeom prst="rect">
+            <a:avLst/>
+          </a:prstGeom>
+        </p:spPr>
+      </p:pic>
+      <p:sp>
+        <p:nvSpPr>
+          <p:cNvPr id="6" name="Text 2"/>
+          <p:cNvSpPr txBox="1"/>
+          <p:nvPr/>
+        </p:nvSpPr>
+        <p:spPr>
+          <a:xfrm>
+            <a:off x="1691640" y="2697480"/>
+            <a:ext cx="2377440" cy="914400"/>
+          </a:xfrm>
+          <a:prstGeom prst="rect">
+            <a:avLst/>
+          </a:prstGeom>
+          <a:noFill/>
+          <a:ln/>
+        </p:spPr>
+        <p:txBody>
+          <a:bodyPr wrap="square" lIns="0" tIns="0" rIns="0" bIns="0" rtlCol="0" anchor="ctr"/>
+          <a:lstStyle/>
+          <a:p>
+            <a:pPr indent="0" marL="0">
+              <a:buNone/>
+            </a:pPr>
+            <a:r>
+              <a:rPr lang="en-US" sz="1500" i="1" dirty="0">
+                <a:solidFill>
+                  <a:srgbClr val="BFBFBF"/>
+                </a:solidFill>
+                <a:latin typeface="Arial" pitchFamily="34" charset="0"/>
+                <a:ea typeface="Arial" pitchFamily="34" charset="-122"/>
+                <a:cs typeface="Arial" pitchFamily="34" charset="-120"/>
+              </a:rPr>
+              <a:t>Go wide first, then choose.</a:t>
+            </a:r>
+            <a:endParaRPr lang="en-US" sz="1500" dirty="0"/>
+          </a:p>
+        </p:txBody>
+      </p:sp>
+      <p:sp>
+        <p:nvSpPr>
+          <p:cNvPr id="7" name="Shape 3"/>
           <p:cNvSpPr/>
           <p:nvPr/>
         </p:nvSpPr>
         <p:spPr>
           <a:xfrm>
-            <a:off x="548640" y="2697480"/>
-            <a:ext cx="914400" cy="914400"/>
-          </a:xfrm>
-          <a:prstGeom prst="ellipse">
+            <a:off x="4480560" y="457200"/>
+            <a:ext cx="4206240" cy="4206240"/>
+          </a:xfrm>
+          <a:prstGeom prst="rect">
             <a:avLst/>
           </a:prstGeom>
           <a:solidFill>
@@ -3861,97 +3799,9 @@
           </a:ln>
         </p:spPr>
       </p:sp>
-      <p:pic>
-        <p:nvPicPr>
-          <p:cNvPr id="6" name="Image 0" descr="preencoded.png">    </p:cNvPr>
-          <p:cNvPicPr>
-            <a:picLocks noChangeAspect="1"/>
-          </p:cNvPicPr>
-          <p:nvPr/>
-        </p:nvPicPr>
-        <p:blipFill>
-          <a:blip r:embed="rId1"/>
-          <a:stretch>
-            <a:fillRect/>
-          </a:stretch>
-        </p:blipFill>
-        <p:spPr>
-          <a:xfrm>
-            <a:off x="786384" y="2935224"/>
-            <a:ext cx="438912" cy="438912"/>
-          </a:xfrm>
-          <a:prstGeom prst="rect">
-            <a:avLst/>
-          </a:prstGeom>
-        </p:spPr>
-      </p:pic>
-      <p:sp>
-        <p:nvSpPr>
-          <p:cNvPr id="7" name="Text 3"/>
-          <p:cNvSpPr txBox="1"/>
-          <p:nvPr/>
-        </p:nvSpPr>
-        <p:spPr>
-          <a:xfrm>
-            <a:off x="1691640" y="2697480"/>
-            <a:ext cx="2377440" cy="914400"/>
-          </a:xfrm>
-          <a:prstGeom prst="rect">
-            <a:avLst/>
-          </a:prstGeom>
-          <a:noFill/>
-          <a:ln/>
-        </p:spPr>
-        <p:txBody>
-          <a:bodyPr wrap="square" lIns="0" tIns="0" rIns="0" bIns="0" rtlCol="0" anchor="ctr"/>
-          <a:lstStyle/>
-          <a:p>
-            <a:pPr indent="0" marL="0">
-              <a:buNone/>
-            </a:pPr>
-            <a:r>
-              <a:rPr lang="en-US" sz="1500" i="1" dirty="0">
-                <a:solidFill>
-                  <a:srgbClr val="BFBFBF"/>
-                </a:solidFill>
-                <a:latin typeface="Arial" pitchFamily="34" charset="0"/>
-                <a:ea typeface="Arial" pitchFamily="34" charset="-122"/>
-                <a:cs typeface="Arial" pitchFamily="34" charset="-120"/>
-              </a:rPr>
-              <a:t>Go wide first, then choose.</a:t>
-            </a:r>
-            <a:endParaRPr lang="en-US" sz="1500" dirty="0"/>
-          </a:p>
-        </p:txBody>
-      </p:sp>
-      <p:sp>
-        <p:nvSpPr>
-          <p:cNvPr id="8" name="Shape 4"/>
-          <p:cNvSpPr/>
-          <p:nvPr/>
-        </p:nvSpPr>
-        <p:spPr>
-          <a:xfrm>
-            <a:off x="4480560" y="457200"/>
-            <a:ext cx="4206240" cy="4206240"/>
-          </a:xfrm>
-          <a:prstGeom prst="rect">
-            <a:avLst/>
-          </a:prstGeom>
-          <a:solidFill>
-            <a:srgbClr val="FFFFFF"/>
-          </a:solidFill>
-          <a:ln w="12700">
-            <a:solidFill>
-              <a:srgbClr val="FFFFFF"/>
-            </a:solidFill>
-            <a:prstDash val="solid"/>
-          </a:ln>
-        </p:spPr>
-      </p:sp>
-      <p:sp>
-        <p:nvSpPr>
-          <p:cNvPr id="9" name="Text 5"/>
+      <p:sp>
+        <p:nvSpPr>
+          <p:cNvPr id="8" name="Text 4"/>
           <p:cNvSpPr txBox="1"/>
           <p:nvPr/>
         </p:nvSpPr>
@@ -3990,7 +3840,7 @@
       </p:sp>
       <p:sp>
         <p:nvSpPr>
-          <p:cNvPr id="10" name="Text 6"/>
+          <p:cNvPr id="9" name="Text 5"/>
           <p:cNvSpPr txBox="1"/>
           <p:nvPr/>
         </p:nvSpPr>
@@ -4029,7 +3879,7 @@
       </p:sp>
       <p:sp>
         <p:nvSpPr>
-          <p:cNvPr id="11" name="Text 7"/>
+          <p:cNvPr id="10" name="Text 6"/>
           <p:cNvSpPr txBox="1"/>
           <p:nvPr/>
         </p:nvSpPr>
@@ -4068,7 +3918,7 @@
       </p:sp>
       <p:sp>
         <p:nvSpPr>
-          <p:cNvPr id="12" name="Text 8"/>
+          <p:cNvPr id="11" name="Text 7"/>
           <p:cNvSpPr txBox="1"/>
           <p:nvPr/>
         </p:nvSpPr>
@@ -4107,7 +3957,7 @@
       </p:sp>
       <p:sp>
         <p:nvSpPr>
-          <p:cNvPr id="13" name="Text 9"/>
+          <p:cNvPr id="12" name="Text 8"/>
           <p:cNvSpPr txBox="1"/>
           <p:nvPr/>
         </p:nvSpPr>
@@ -4146,7 +3996,7 @@
       </p:sp>
       <p:sp>
         <p:nvSpPr>
-          <p:cNvPr id="14" name="Text 10"/>
+          <p:cNvPr id="13" name="Text 9"/>
           <p:cNvSpPr txBox="1"/>
           <p:nvPr/>
         </p:nvSpPr>
@@ -5580,18 +5430,374 @@
           </a:ln>
         </p:spPr>
       </p:sp>
-      <p:sp>
-        <p:nvSpPr>
-          <p:cNvPr id="8" name="Shape 5"/>
+      <p:pic>
+        <p:nvPicPr>
+          <p:cNvPr id="8" name="Image 0" descr="preencoded.png">    </p:cNvPr>
+          <p:cNvPicPr>
+            <a:picLocks noChangeAspect="1"/>
+          </p:cNvPicPr>
+          <p:nvPr/>
+        </p:nvPicPr>
+        <p:blipFill>
+          <a:blip r:embed="rId1"/>
+          <a:stretch>
+            <a:fillRect/>
+          </a:stretch>
+        </p:blipFill>
+        <p:spPr>
+          <a:xfrm>
+            <a:off x="685800" y="1545336"/>
+            <a:ext cx="384048" cy="384048"/>
+          </a:xfrm>
+          <a:prstGeom prst="rect">
+            <a:avLst/>
+          </a:prstGeom>
+        </p:spPr>
+      </p:pic>
+      <p:sp>
+        <p:nvSpPr>
+          <p:cNvPr id="9" name="Text 5"/>
+          <p:cNvSpPr txBox="1"/>
+          <p:nvPr/>
+        </p:nvSpPr>
+        <p:spPr>
+          <a:xfrm>
+            <a:off x="685800" y="2240280"/>
+            <a:ext cx="2194560" cy="365760"/>
+          </a:xfrm>
+          <a:prstGeom prst="rect">
+            <a:avLst/>
+          </a:prstGeom>
+          <a:noFill/>
+          <a:ln/>
+        </p:spPr>
+        <p:txBody>
+          <a:bodyPr wrap="square" lIns="0" tIns="0" rIns="0" bIns="0" rtlCol="0" anchor="ctr"/>
+          <a:lstStyle/>
+          <a:p>
+            <a:pPr indent="0" marL="0">
+              <a:buNone/>
+            </a:pPr>
+            <a:r>
+              <a:rPr lang="en-US" sz="1700" b="1" dirty="0">
+                <a:solidFill>
+                  <a:srgbClr val="000000"/>
+                </a:solidFill>
+                <a:latin typeface="Arial" pitchFamily="34" charset="0"/>
+                <a:ea typeface="Arial" pitchFamily="34" charset="-122"/>
+                <a:cs typeface="Arial" pitchFamily="34" charset="-120"/>
+              </a:rPr>
+              <a:t>Is the pain real?</a:t>
+            </a:r>
+            <a:endParaRPr lang="en-US" sz="1700" dirty="0"/>
+          </a:p>
+        </p:txBody>
+      </p:sp>
+      <p:sp>
+        <p:nvSpPr>
+          <p:cNvPr id="10" name="Text 6"/>
+          <p:cNvSpPr txBox="1"/>
+          <p:nvPr/>
+        </p:nvSpPr>
+        <p:spPr>
+          <a:xfrm>
+            <a:off x="685800" y="2651760"/>
+            <a:ext cx="2194560" cy="731520"/>
+          </a:xfrm>
+          <a:prstGeom prst="rect">
+            <a:avLst/>
+          </a:prstGeom>
+          <a:noFill/>
+          <a:ln/>
+        </p:spPr>
+        <p:txBody>
+          <a:bodyPr wrap="square" lIns="0" tIns="0" rIns="0" bIns="0" rtlCol="0" anchor="t"/>
+          <a:lstStyle/>
+          <a:p>
+            <a:pPr indent="0" marL="0">
+              <a:buNone/>
+            </a:pPr>
+            <a:r>
+              <a:rPr lang="en-US" sz="1300" dirty="0">
+                <a:solidFill>
+                  <a:srgbClr val="262626"/>
+                </a:solidFill>
+                <a:latin typeface="Arial" pitchFamily="34" charset="0"/>
+                <a:ea typeface="Arial" pitchFamily="34" charset="-122"/>
+                <a:cs typeface="Arial" pitchFamily="34" charset="-120"/>
+              </a:rPr>
+              <a:t>Did real users complain about it without being asked?</a:t>
+            </a:r>
+            <a:endParaRPr lang="en-US" sz="1300" dirty="0"/>
+          </a:p>
+        </p:txBody>
+      </p:sp>
+      <p:sp>
+        <p:nvSpPr>
+          <p:cNvPr id="11" name="Shape 7"/>
           <p:cNvSpPr/>
           <p:nvPr/>
         </p:nvSpPr>
         <p:spPr>
           <a:xfrm>
-            <a:off x="685800" y="1417320"/>
-            <a:ext cx="640080" cy="640080"/>
-          </a:xfrm>
-          <a:prstGeom prst="ellipse">
+            <a:off x="3246120" y="1188720"/>
+            <a:ext cx="2606040" cy="2286000"/>
+          </a:xfrm>
+          <a:prstGeom prst="rect">
+            <a:avLst/>
+          </a:prstGeom>
+          <a:solidFill>
+            <a:srgbClr val="FFFFFF"/>
+          </a:solidFill>
+          <a:ln w="19050">
+            <a:solidFill>
+              <a:srgbClr val="000000"/>
+            </a:solidFill>
+            <a:prstDash val="solid"/>
+          </a:ln>
+        </p:spPr>
+      </p:sp>
+      <p:pic>
+        <p:nvPicPr>
+          <p:cNvPr id="12" name="Image 1" descr="preencoded.png">    </p:cNvPr>
+          <p:cNvPicPr>
+            <a:picLocks noChangeAspect="1"/>
+          </p:cNvPicPr>
+          <p:nvPr/>
+        </p:nvPicPr>
+        <p:blipFill>
+          <a:blip r:embed="rId2"/>
+          <a:stretch>
+            <a:fillRect/>
+          </a:stretch>
+        </p:blipFill>
+        <p:spPr>
+          <a:xfrm>
+            <a:off x="3474720" y="1545336"/>
+            <a:ext cx="384048" cy="384048"/>
+          </a:xfrm>
+          <a:prstGeom prst="rect">
+            <a:avLst/>
+          </a:prstGeom>
+        </p:spPr>
+      </p:pic>
+      <p:sp>
+        <p:nvSpPr>
+          <p:cNvPr id="13" name="Text 8"/>
+          <p:cNvSpPr txBox="1"/>
+          <p:nvPr/>
+        </p:nvSpPr>
+        <p:spPr>
+          <a:xfrm>
+            <a:off x="3474720" y="2240280"/>
+            <a:ext cx="2194560" cy="365760"/>
+          </a:xfrm>
+          <a:prstGeom prst="rect">
+            <a:avLst/>
+          </a:prstGeom>
+          <a:noFill/>
+          <a:ln/>
+        </p:spPr>
+        <p:txBody>
+          <a:bodyPr wrap="square" lIns="0" tIns="0" rIns="0" bIns="0" rtlCol="0" anchor="ctr"/>
+          <a:lstStyle/>
+          <a:p>
+            <a:pPr indent="0" marL="0">
+              <a:buNone/>
+            </a:pPr>
+            <a:r>
+              <a:rPr lang="en-US" sz="1700" b="1" dirty="0">
+                <a:solidFill>
+                  <a:srgbClr val="000000"/>
+                </a:solidFill>
+                <a:latin typeface="Arial" pitchFamily="34" charset="0"/>
+                <a:ea typeface="Arial" pitchFamily="34" charset="-122"/>
+                <a:cs typeface="Arial" pitchFamily="34" charset="-120"/>
+              </a:rPr>
+              <a:t>Is it still unsolved?</a:t>
+            </a:r>
+            <a:endParaRPr lang="en-US" sz="1700" dirty="0"/>
+          </a:p>
+        </p:txBody>
+      </p:sp>
+      <p:sp>
+        <p:nvSpPr>
+          <p:cNvPr id="14" name="Text 9"/>
+          <p:cNvSpPr txBox="1"/>
+          <p:nvPr/>
+        </p:nvSpPr>
+        <p:spPr>
+          <a:xfrm>
+            <a:off x="3474720" y="2651760"/>
+            <a:ext cx="2194560" cy="731520"/>
+          </a:xfrm>
+          <a:prstGeom prst="rect">
+            <a:avLst/>
+          </a:prstGeom>
+          <a:noFill/>
+          <a:ln/>
+        </p:spPr>
+        <p:txBody>
+          <a:bodyPr wrap="square" lIns="0" tIns="0" rIns="0" bIns="0" rtlCol="0" anchor="t"/>
+          <a:lstStyle/>
+          <a:p>
+            <a:pPr indent="0" marL="0">
+              <a:buNone/>
+            </a:pPr>
+            <a:r>
+              <a:rPr lang="en-US" sz="1300" dirty="0">
+                <a:solidFill>
+                  <a:srgbClr val="262626"/>
+                </a:solidFill>
+                <a:latin typeface="Arial" pitchFamily="34" charset="0"/>
+                <a:ea typeface="Arial" pitchFamily="34" charset="-122"/>
+                <a:cs typeface="Arial" pitchFamily="34" charset="-120"/>
+              </a:rPr>
+              <a:t>Does Ollama or another tool already do this well?</a:t>
+            </a:r>
+            <a:endParaRPr lang="en-US" sz="1300" dirty="0"/>
+          </a:p>
+        </p:txBody>
+      </p:sp>
+      <p:sp>
+        <p:nvSpPr>
+          <p:cNvPr id="15" name="Shape 10"/>
+          <p:cNvSpPr/>
+          <p:nvPr/>
+        </p:nvSpPr>
+        <p:spPr>
+          <a:xfrm>
+            <a:off x="6035040" y="1188720"/>
+            <a:ext cx="2606040" cy="2286000"/>
+          </a:xfrm>
+          <a:prstGeom prst="rect">
+            <a:avLst/>
+          </a:prstGeom>
+          <a:solidFill>
+            <a:srgbClr val="FFFFFF"/>
+          </a:solidFill>
+          <a:ln w="19050">
+            <a:solidFill>
+              <a:srgbClr val="000000"/>
+            </a:solidFill>
+            <a:prstDash val="solid"/>
+          </a:ln>
+        </p:spPr>
+      </p:sp>
+      <p:pic>
+        <p:nvPicPr>
+          <p:cNvPr id="16" name="Image 2" descr="preencoded.png">    </p:cNvPr>
+          <p:cNvPicPr>
+            <a:picLocks noChangeAspect="1"/>
+          </p:cNvPicPr>
+          <p:nvPr/>
+        </p:nvPicPr>
+        <p:blipFill>
+          <a:blip r:embed="rId3"/>
+          <a:stretch>
+            <a:fillRect/>
+          </a:stretch>
+        </p:blipFill>
+        <p:spPr>
+          <a:xfrm>
+            <a:off x="6263640" y="1545336"/>
+            <a:ext cx="384048" cy="384048"/>
+          </a:xfrm>
+          <a:prstGeom prst="rect">
+            <a:avLst/>
+          </a:prstGeom>
+        </p:spPr>
+      </p:pic>
+      <p:sp>
+        <p:nvSpPr>
+          <p:cNvPr id="17" name="Text 11"/>
+          <p:cNvSpPr txBox="1"/>
+          <p:nvPr/>
+        </p:nvSpPr>
+        <p:spPr>
+          <a:xfrm>
+            <a:off x="6263640" y="2240280"/>
+            <a:ext cx="2194560" cy="365760"/>
+          </a:xfrm>
+          <a:prstGeom prst="rect">
+            <a:avLst/>
+          </a:prstGeom>
+          <a:noFill/>
+          <a:ln/>
+        </p:spPr>
+        <p:txBody>
+          <a:bodyPr wrap="square" lIns="0" tIns="0" rIns="0" bIns="0" rtlCol="0" anchor="ctr"/>
+          <a:lstStyle/>
+          <a:p>
+            <a:pPr indent="0" marL="0">
+              <a:buNone/>
+            </a:pPr>
+            <a:r>
+              <a:rPr lang="en-US" sz="1700" b="1" dirty="0">
+                <a:solidFill>
+                  <a:srgbClr val="000000"/>
+                </a:solidFill>
+                <a:latin typeface="Arial" pitchFamily="34" charset="0"/>
+                <a:ea typeface="Arial" pitchFamily="34" charset="-122"/>
+                <a:cs typeface="Arial" pitchFamily="34" charset="-120"/>
+              </a:rPr>
+              <a:t>Can we measure it?</a:t>
+            </a:r>
+            <a:endParaRPr lang="en-US" sz="1700" dirty="0"/>
+          </a:p>
+        </p:txBody>
+      </p:sp>
+      <p:sp>
+        <p:nvSpPr>
+          <p:cNvPr id="18" name="Text 12"/>
+          <p:cNvSpPr txBox="1"/>
+          <p:nvPr/>
+        </p:nvSpPr>
+        <p:spPr>
+          <a:xfrm>
+            <a:off x="6263640" y="2651760"/>
+            <a:ext cx="2194560" cy="731520"/>
+          </a:xfrm>
+          <a:prstGeom prst="rect">
+            <a:avLst/>
+          </a:prstGeom>
+          <a:noFill/>
+          <a:ln/>
+        </p:spPr>
+        <p:txBody>
+          <a:bodyPr wrap="square" lIns="0" tIns="0" rIns="0" bIns="0" rtlCol="0" anchor="t"/>
+          <a:lstStyle/>
+          <a:p>
+            <a:pPr indent="0" marL="0">
+              <a:buNone/>
+            </a:pPr>
+            <a:r>
+              <a:rPr lang="en-US" sz="1300" dirty="0">
+                <a:solidFill>
+                  <a:srgbClr val="262626"/>
+                </a:solidFill>
+                <a:latin typeface="Arial" pitchFamily="34" charset="0"/>
+                <a:ea typeface="Arial" pitchFamily="34" charset="-122"/>
+                <a:cs typeface="Arial" pitchFamily="34" charset="-120"/>
+              </a:rPr>
+              <a:t>Can we prove a win with numbers on a real machine?</a:t>
+            </a:r>
+            <a:endParaRPr lang="en-US" sz="1300" dirty="0"/>
+          </a:p>
+        </p:txBody>
+      </p:sp>
+      <p:sp>
+        <p:nvSpPr>
+          <p:cNvPr id="19" name="Shape 13"/>
+          <p:cNvSpPr/>
+          <p:nvPr/>
+        </p:nvSpPr>
+        <p:spPr>
+          <a:xfrm>
+            <a:off x="457200" y="3794760"/>
+            <a:ext cx="8229600" cy="731520"/>
+          </a:xfrm>
+          <a:prstGeom prst="rect">
             <a:avLst/>
           </a:prstGeom>
           <a:solidFill>
@@ -5605,440 +5811,9 @@
           </a:ln>
         </p:spPr>
       </p:sp>
-      <p:pic>
-        <p:nvPicPr>
-          <p:cNvPr id="9" name="Image 0" descr="preencoded.png">    </p:cNvPr>
-          <p:cNvPicPr>
-            <a:picLocks noChangeAspect="1"/>
-          </p:cNvPicPr>
-          <p:nvPr/>
-        </p:nvPicPr>
-        <p:blipFill>
-          <a:blip r:embed="rId1"/>
-          <a:stretch>
-            <a:fillRect/>
-          </a:stretch>
-        </p:blipFill>
-        <p:spPr>
-          <a:xfrm>
-            <a:off x="852221" y="1583741"/>
-            <a:ext cx="307238" cy="307238"/>
-          </a:xfrm>
-          <a:prstGeom prst="rect">
-            <a:avLst/>
-          </a:prstGeom>
-        </p:spPr>
-      </p:pic>
-      <p:sp>
-        <p:nvSpPr>
-          <p:cNvPr id="10" name="Text 6"/>
-          <p:cNvSpPr txBox="1"/>
-          <p:nvPr/>
-        </p:nvSpPr>
-        <p:spPr>
-          <a:xfrm>
-            <a:off x="685800" y="2240280"/>
-            <a:ext cx="2194560" cy="365760"/>
-          </a:xfrm>
-          <a:prstGeom prst="rect">
-            <a:avLst/>
-          </a:prstGeom>
-          <a:noFill/>
-          <a:ln/>
-        </p:spPr>
-        <p:txBody>
-          <a:bodyPr wrap="square" lIns="0" tIns="0" rIns="0" bIns="0" rtlCol="0" anchor="ctr"/>
-          <a:lstStyle/>
-          <a:p>
-            <a:pPr indent="0" marL="0">
-              <a:buNone/>
-            </a:pPr>
-            <a:r>
-              <a:rPr lang="en-US" sz="1700" b="1" dirty="0">
-                <a:solidFill>
-                  <a:srgbClr val="000000"/>
-                </a:solidFill>
-                <a:latin typeface="Arial" pitchFamily="34" charset="0"/>
-                <a:ea typeface="Arial" pitchFamily="34" charset="-122"/>
-                <a:cs typeface="Arial" pitchFamily="34" charset="-120"/>
-              </a:rPr>
-              <a:t>Is the pain real?</a:t>
-            </a:r>
-            <a:endParaRPr lang="en-US" sz="1700" dirty="0"/>
-          </a:p>
-        </p:txBody>
-      </p:sp>
-      <p:sp>
-        <p:nvSpPr>
-          <p:cNvPr id="11" name="Text 7"/>
-          <p:cNvSpPr txBox="1"/>
-          <p:nvPr/>
-        </p:nvSpPr>
-        <p:spPr>
-          <a:xfrm>
-            <a:off x="685800" y="2651760"/>
-            <a:ext cx="2194560" cy="731520"/>
-          </a:xfrm>
-          <a:prstGeom prst="rect">
-            <a:avLst/>
-          </a:prstGeom>
-          <a:noFill/>
-          <a:ln/>
-        </p:spPr>
-        <p:txBody>
-          <a:bodyPr wrap="square" lIns="0" tIns="0" rIns="0" bIns="0" rtlCol="0" anchor="t"/>
-          <a:lstStyle/>
-          <a:p>
-            <a:pPr indent="0" marL="0">
-              <a:buNone/>
-            </a:pPr>
-            <a:r>
-              <a:rPr lang="en-US" sz="1300" dirty="0">
-                <a:solidFill>
-                  <a:srgbClr val="262626"/>
-                </a:solidFill>
-                <a:latin typeface="Arial" pitchFamily="34" charset="0"/>
-                <a:ea typeface="Arial" pitchFamily="34" charset="-122"/>
-                <a:cs typeface="Arial" pitchFamily="34" charset="-120"/>
-              </a:rPr>
-              <a:t>Did real users complain about it without being asked?</a:t>
-            </a:r>
-            <a:endParaRPr lang="en-US" sz="1300" dirty="0"/>
-          </a:p>
-        </p:txBody>
-      </p:sp>
-      <p:sp>
-        <p:nvSpPr>
-          <p:cNvPr id="12" name="Shape 8"/>
-          <p:cNvSpPr/>
-          <p:nvPr/>
-        </p:nvSpPr>
-        <p:spPr>
-          <a:xfrm>
-            <a:off x="3246120" y="1188720"/>
-            <a:ext cx="2606040" cy="2286000"/>
-          </a:xfrm>
-          <a:prstGeom prst="rect">
-            <a:avLst/>
-          </a:prstGeom>
-          <a:solidFill>
-            <a:srgbClr val="FFFFFF"/>
-          </a:solidFill>
-          <a:ln w="19050">
-            <a:solidFill>
-              <a:srgbClr val="000000"/>
-            </a:solidFill>
-            <a:prstDash val="solid"/>
-          </a:ln>
-        </p:spPr>
-      </p:sp>
-      <p:sp>
-        <p:nvSpPr>
-          <p:cNvPr id="13" name="Shape 9"/>
-          <p:cNvSpPr/>
-          <p:nvPr/>
-        </p:nvSpPr>
-        <p:spPr>
-          <a:xfrm>
-            <a:off x="3474720" y="1417320"/>
-            <a:ext cx="640080" cy="640080"/>
-          </a:xfrm>
-          <a:prstGeom prst="ellipse">
-            <a:avLst/>
-          </a:prstGeom>
-          <a:solidFill>
-            <a:srgbClr val="000000"/>
-          </a:solidFill>
-          <a:ln w="12700">
-            <a:solidFill>
-              <a:srgbClr val="000000"/>
-            </a:solidFill>
-            <a:prstDash val="solid"/>
-          </a:ln>
-        </p:spPr>
-      </p:sp>
-      <p:pic>
-        <p:nvPicPr>
-          <p:cNvPr id="14" name="Image 1" descr="preencoded.png">    </p:cNvPr>
-          <p:cNvPicPr>
-            <a:picLocks noChangeAspect="1"/>
-          </p:cNvPicPr>
-          <p:nvPr/>
-        </p:nvPicPr>
-        <p:blipFill>
-          <a:blip r:embed="rId2"/>
-          <a:stretch>
-            <a:fillRect/>
-          </a:stretch>
-        </p:blipFill>
-        <p:spPr>
-          <a:xfrm>
-            <a:off x="3641141" y="1583741"/>
-            <a:ext cx="307238" cy="307238"/>
-          </a:xfrm>
-          <a:prstGeom prst="rect">
-            <a:avLst/>
-          </a:prstGeom>
-        </p:spPr>
-      </p:pic>
-      <p:sp>
-        <p:nvSpPr>
-          <p:cNvPr id="15" name="Text 10"/>
-          <p:cNvSpPr txBox="1"/>
-          <p:nvPr/>
-        </p:nvSpPr>
-        <p:spPr>
-          <a:xfrm>
-            <a:off x="3474720" y="2240280"/>
-            <a:ext cx="2194560" cy="365760"/>
-          </a:xfrm>
-          <a:prstGeom prst="rect">
-            <a:avLst/>
-          </a:prstGeom>
-          <a:noFill/>
-          <a:ln/>
-        </p:spPr>
-        <p:txBody>
-          <a:bodyPr wrap="square" lIns="0" tIns="0" rIns="0" bIns="0" rtlCol="0" anchor="ctr"/>
-          <a:lstStyle/>
-          <a:p>
-            <a:pPr indent="0" marL="0">
-              <a:buNone/>
-            </a:pPr>
-            <a:r>
-              <a:rPr lang="en-US" sz="1700" b="1" dirty="0">
-                <a:solidFill>
-                  <a:srgbClr val="000000"/>
-                </a:solidFill>
-                <a:latin typeface="Arial" pitchFamily="34" charset="0"/>
-                <a:ea typeface="Arial" pitchFamily="34" charset="-122"/>
-                <a:cs typeface="Arial" pitchFamily="34" charset="-120"/>
-              </a:rPr>
-              <a:t>Is it still unsolved?</a:t>
-            </a:r>
-            <a:endParaRPr lang="en-US" sz="1700" dirty="0"/>
-          </a:p>
-        </p:txBody>
-      </p:sp>
-      <p:sp>
-        <p:nvSpPr>
-          <p:cNvPr id="16" name="Text 11"/>
-          <p:cNvSpPr txBox="1"/>
-          <p:nvPr/>
-        </p:nvSpPr>
-        <p:spPr>
-          <a:xfrm>
-            <a:off x="3474720" y="2651760"/>
-            <a:ext cx="2194560" cy="731520"/>
-          </a:xfrm>
-          <a:prstGeom prst="rect">
-            <a:avLst/>
-          </a:prstGeom>
-          <a:noFill/>
-          <a:ln/>
-        </p:spPr>
-        <p:txBody>
-          <a:bodyPr wrap="square" lIns="0" tIns="0" rIns="0" bIns="0" rtlCol="0" anchor="t"/>
-          <a:lstStyle/>
-          <a:p>
-            <a:pPr indent="0" marL="0">
-              <a:buNone/>
-            </a:pPr>
-            <a:r>
-              <a:rPr lang="en-US" sz="1300" dirty="0">
-                <a:solidFill>
-                  <a:srgbClr val="262626"/>
-                </a:solidFill>
-                <a:latin typeface="Arial" pitchFamily="34" charset="0"/>
-                <a:ea typeface="Arial" pitchFamily="34" charset="-122"/>
-                <a:cs typeface="Arial" pitchFamily="34" charset="-120"/>
-              </a:rPr>
-              <a:t>Does Ollama or another tool already do this well?</a:t>
-            </a:r>
-            <a:endParaRPr lang="en-US" sz="1300" dirty="0"/>
-          </a:p>
-        </p:txBody>
-      </p:sp>
-      <p:sp>
-        <p:nvSpPr>
-          <p:cNvPr id="17" name="Shape 12"/>
-          <p:cNvSpPr/>
-          <p:nvPr/>
-        </p:nvSpPr>
-        <p:spPr>
-          <a:xfrm>
-            <a:off x="6035040" y="1188720"/>
-            <a:ext cx="2606040" cy="2286000"/>
-          </a:xfrm>
-          <a:prstGeom prst="rect">
-            <a:avLst/>
-          </a:prstGeom>
-          <a:solidFill>
-            <a:srgbClr val="FFFFFF"/>
-          </a:solidFill>
-          <a:ln w="19050">
-            <a:solidFill>
-              <a:srgbClr val="000000"/>
-            </a:solidFill>
-            <a:prstDash val="solid"/>
-          </a:ln>
-        </p:spPr>
-      </p:sp>
-      <p:sp>
-        <p:nvSpPr>
-          <p:cNvPr id="18" name="Shape 13"/>
-          <p:cNvSpPr/>
-          <p:nvPr/>
-        </p:nvSpPr>
-        <p:spPr>
-          <a:xfrm>
-            <a:off x="6263640" y="1417320"/>
-            <a:ext cx="640080" cy="640080"/>
-          </a:xfrm>
-          <a:prstGeom prst="ellipse">
-            <a:avLst/>
-          </a:prstGeom>
-          <a:solidFill>
-            <a:srgbClr val="000000"/>
-          </a:solidFill>
-          <a:ln w="12700">
-            <a:solidFill>
-              <a:srgbClr val="000000"/>
-            </a:solidFill>
-            <a:prstDash val="solid"/>
-          </a:ln>
-        </p:spPr>
-      </p:sp>
-      <p:pic>
-        <p:nvPicPr>
-          <p:cNvPr id="19" name="Image 2" descr="preencoded.png">    </p:cNvPr>
-          <p:cNvPicPr>
-            <a:picLocks noChangeAspect="1"/>
-          </p:cNvPicPr>
-          <p:nvPr/>
-        </p:nvPicPr>
-        <p:blipFill>
-          <a:blip r:embed="rId3"/>
-          <a:stretch>
-            <a:fillRect/>
-          </a:stretch>
-        </p:blipFill>
-        <p:spPr>
-          <a:xfrm>
-            <a:off x="6430061" y="1583741"/>
-            <a:ext cx="307238" cy="307238"/>
-          </a:xfrm>
-          <a:prstGeom prst="rect">
-            <a:avLst/>
-          </a:prstGeom>
-        </p:spPr>
-      </p:pic>
       <p:sp>
         <p:nvSpPr>
           <p:cNvPr id="20" name="Text 14"/>
-          <p:cNvSpPr txBox="1"/>
-          <p:nvPr/>
-        </p:nvSpPr>
-        <p:spPr>
-          <a:xfrm>
-            <a:off x="6263640" y="2240280"/>
-            <a:ext cx="2194560" cy="365760"/>
-          </a:xfrm>
-          <a:prstGeom prst="rect">
-            <a:avLst/>
-          </a:prstGeom>
-          <a:noFill/>
-          <a:ln/>
-        </p:spPr>
-        <p:txBody>
-          <a:bodyPr wrap="square" lIns="0" tIns="0" rIns="0" bIns="0" rtlCol="0" anchor="ctr"/>
-          <a:lstStyle/>
-          <a:p>
-            <a:pPr indent="0" marL="0">
-              <a:buNone/>
-            </a:pPr>
-            <a:r>
-              <a:rPr lang="en-US" sz="1700" b="1" dirty="0">
-                <a:solidFill>
-                  <a:srgbClr val="000000"/>
-                </a:solidFill>
-                <a:latin typeface="Arial" pitchFamily="34" charset="0"/>
-                <a:ea typeface="Arial" pitchFamily="34" charset="-122"/>
-                <a:cs typeface="Arial" pitchFamily="34" charset="-120"/>
-              </a:rPr>
-              <a:t>Can we measure it?</a:t>
-            </a:r>
-            <a:endParaRPr lang="en-US" sz="1700" dirty="0"/>
-          </a:p>
-        </p:txBody>
-      </p:sp>
-      <p:sp>
-        <p:nvSpPr>
-          <p:cNvPr id="21" name="Text 15"/>
-          <p:cNvSpPr txBox="1"/>
-          <p:nvPr/>
-        </p:nvSpPr>
-        <p:spPr>
-          <a:xfrm>
-            <a:off x="6263640" y="2651760"/>
-            <a:ext cx="2194560" cy="731520"/>
-          </a:xfrm>
-          <a:prstGeom prst="rect">
-            <a:avLst/>
-          </a:prstGeom>
-          <a:noFill/>
-          <a:ln/>
-        </p:spPr>
-        <p:txBody>
-          <a:bodyPr wrap="square" lIns="0" tIns="0" rIns="0" bIns="0" rtlCol="0" anchor="t"/>
-          <a:lstStyle/>
-          <a:p>
-            <a:pPr indent="0" marL="0">
-              <a:buNone/>
-            </a:pPr>
-            <a:r>
-              <a:rPr lang="en-US" sz="1300" dirty="0">
-                <a:solidFill>
-                  <a:srgbClr val="262626"/>
-                </a:solidFill>
-                <a:latin typeface="Arial" pitchFamily="34" charset="0"/>
-                <a:ea typeface="Arial" pitchFamily="34" charset="-122"/>
-                <a:cs typeface="Arial" pitchFamily="34" charset="-120"/>
-              </a:rPr>
-              <a:t>Can we prove a win with numbers on a real machine?</a:t>
-            </a:r>
-            <a:endParaRPr lang="en-US" sz="1300" dirty="0"/>
-          </a:p>
-        </p:txBody>
-      </p:sp>
-      <p:sp>
-        <p:nvSpPr>
-          <p:cNvPr id="22" name="Shape 16"/>
-          <p:cNvSpPr/>
-          <p:nvPr/>
-        </p:nvSpPr>
-        <p:spPr>
-          <a:xfrm>
-            <a:off x="457200" y="3794760"/>
-            <a:ext cx="8229600" cy="731520"/>
-          </a:xfrm>
-          <a:prstGeom prst="rect">
-            <a:avLst/>
-          </a:prstGeom>
-          <a:solidFill>
-            <a:srgbClr val="000000"/>
-          </a:solidFill>
-          <a:ln w="12700">
-            <a:solidFill>
-              <a:srgbClr val="000000"/>
-            </a:solidFill>
-            <a:prstDash val="solid"/>
-          </a:ln>
-        </p:spPr>
-      </p:sp>
-      <p:sp>
-        <p:nvSpPr>
-          <p:cNvPr id="23" name="Text 17"/>
           <p:cNvSpPr txBox="1"/>
           <p:nvPr/>
         </p:nvSpPr>
@@ -6185,18 +5960,81 @@
           </a:p>
         </p:txBody>
       </p:sp>
-      <p:sp>
-        <p:nvSpPr>
-          <p:cNvPr id="5" name="Shape 2"/>
+      <p:pic>
+        <p:nvPicPr>
+          <p:cNvPr id="5" name="Image 0" descr="preencoded.png">    </p:cNvPr>
+          <p:cNvPicPr>
+            <a:picLocks noChangeAspect="1"/>
+          </p:cNvPicPr>
+          <p:nvPr/>
+        </p:nvPicPr>
+        <p:blipFill>
+          <a:blip r:embed="rId1"/>
+          <a:stretch>
+            <a:fillRect/>
+          </a:stretch>
+        </p:blipFill>
+        <p:spPr>
+          <a:xfrm>
+            <a:off x="548640" y="2880360"/>
+            <a:ext cx="548640" cy="548640"/>
+          </a:xfrm>
+          <a:prstGeom prst="rect">
+            <a:avLst/>
+          </a:prstGeom>
+        </p:spPr>
+      </p:pic>
+      <p:sp>
+        <p:nvSpPr>
+          <p:cNvPr id="6" name="Text 2"/>
+          <p:cNvSpPr txBox="1"/>
+          <p:nvPr/>
+        </p:nvSpPr>
+        <p:spPr>
+          <a:xfrm>
+            <a:off x="1691640" y="2697480"/>
+            <a:ext cx="2377440" cy="914400"/>
+          </a:xfrm>
+          <a:prstGeom prst="rect">
+            <a:avLst/>
+          </a:prstGeom>
+          <a:noFill/>
+          <a:ln/>
+        </p:spPr>
+        <p:txBody>
+          <a:bodyPr wrap="square" lIns="0" tIns="0" rIns="0" bIns="0" rtlCol="0" anchor="ctr"/>
+          <a:lstStyle/>
+          <a:p>
+            <a:pPr indent="0" marL="0">
+              <a:buNone/>
+            </a:pPr>
+            <a:r>
+              <a:rPr lang="en-US" sz="1500" i="1" dirty="0">
+                <a:solidFill>
+                  <a:srgbClr val="BFBFBF"/>
+                </a:solidFill>
+                <a:latin typeface="Arial" pitchFamily="34" charset="0"/>
+                <a:ea typeface="Arial" pitchFamily="34" charset="-122"/>
+                <a:cs typeface="Arial" pitchFamily="34" charset="-120"/>
+              </a:rPr>
+              <a:t>Build it fast, build it real.</a:t>
+            </a:r>
+            <a:endParaRPr lang="en-US" sz="1500" dirty="0"/>
+          </a:p>
+        </p:txBody>
+      </p:sp>
+      <p:sp>
+        <p:nvSpPr>
+          <p:cNvPr id="7" name="Shape 3"/>
           <p:cNvSpPr/>
           <p:nvPr/>
         </p:nvSpPr>
         <p:spPr>
           <a:xfrm>
-            <a:off x="548640" y="2697480"/>
-            <a:ext cx="914400" cy="914400"/>
-          </a:xfrm>
-          <a:prstGeom prst="ellipse">
+            <a:off x="4480560" y="457200"/>
+            <a:ext cx="4206240" cy="4206240"/>
+          </a:xfrm>
+          <a:prstGeom prst="rect">
             <a:avLst/>
           </a:prstGeom>
           <a:solidFill>
@@ -6210,97 +6048,9 @@
           </a:ln>
         </p:spPr>
       </p:sp>
-      <p:pic>
-        <p:nvPicPr>
-          <p:cNvPr id="6" name="Image 0" descr="preencoded.png">    </p:cNvPr>
-          <p:cNvPicPr>
-            <a:picLocks noChangeAspect="1"/>
-          </p:cNvPicPr>
-          <p:nvPr/>
-        </p:nvPicPr>
-        <p:blipFill>
-          <a:blip r:embed="rId1"/>
-          <a:stretch>
-            <a:fillRect/>
-          </a:stretch>
-        </p:blipFill>
-        <p:spPr>
-          <a:xfrm>
-            <a:off x="786384" y="2935224"/>
-            <a:ext cx="438912" cy="438912"/>
-          </a:xfrm>
-          <a:prstGeom prst="rect">
-            <a:avLst/>
-          </a:prstGeom>
-        </p:spPr>
-      </p:pic>
-      <p:sp>
-        <p:nvSpPr>
-          <p:cNvPr id="7" name="Text 3"/>
-          <p:cNvSpPr txBox="1"/>
-          <p:nvPr/>
-        </p:nvSpPr>
-        <p:spPr>
-          <a:xfrm>
-            <a:off x="1691640" y="2697480"/>
-            <a:ext cx="2377440" cy="914400"/>
-          </a:xfrm>
-          <a:prstGeom prst="rect">
-            <a:avLst/>
-          </a:prstGeom>
-          <a:noFill/>
-          <a:ln/>
-        </p:spPr>
-        <p:txBody>
-          <a:bodyPr wrap="square" lIns="0" tIns="0" rIns="0" bIns="0" rtlCol="0" anchor="ctr"/>
-          <a:lstStyle/>
-          <a:p>
-            <a:pPr indent="0" marL="0">
-              <a:buNone/>
-            </a:pPr>
-            <a:r>
-              <a:rPr lang="en-US" sz="1500" i="1" dirty="0">
-                <a:solidFill>
-                  <a:srgbClr val="BFBFBF"/>
-                </a:solidFill>
-                <a:latin typeface="Arial" pitchFamily="34" charset="0"/>
-                <a:ea typeface="Arial" pitchFamily="34" charset="-122"/>
-                <a:cs typeface="Arial" pitchFamily="34" charset="-120"/>
-              </a:rPr>
-              <a:t>Build it fast, build it real.</a:t>
-            </a:r>
-            <a:endParaRPr lang="en-US" sz="1500" dirty="0"/>
-          </a:p>
-        </p:txBody>
-      </p:sp>
-      <p:sp>
-        <p:nvSpPr>
-          <p:cNvPr id="8" name="Shape 4"/>
-          <p:cNvSpPr/>
-          <p:nvPr/>
-        </p:nvSpPr>
-        <p:spPr>
-          <a:xfrm>
-            <a:off x="4480560" y="457200"/>
-            <a:ext cx="4206240" cy="4206240"/>
-          </a:xfrm>
-          <a:prstGeom prst="rect">
-            <a:avLst/>
-          </a:prstGeom>
-          <a:solidFill>
-            <a:srgbClr val="FFFFFF"/>
-          </a:solidFill>
-          <a:ln w="12700">
-            <a:solidFill>
-              <a:srgbClr val="FFFFFF"/>
-            </a:solidFill>
-            <a:prstDash val="solid"/>
-          </a:ln>
-        </p:spPr>
-      </p:sp>
-      <p:sp>
-        <p:nvSpPr>
-          <p:cNvPr id="9" name="Text 5"/>
+      <p:sp>
+        <p:nvSpPr>
+          <p:cNvPr id="8" name="Text 4"/>
           <p:cNvSpPr txBox="1"/>
           <p:nvPr/>
         </p:nvSpPr>
@@ -6339,7 +6089,7 @@
       </p:sp>
       <p:sp>
         <p:nvSpPr>
-          <p:cNvPr id="10" name="Text 6"/>
+          <p:cNvPr id="9" name="Text 5"/>
           <p:cNvSpPr txBox="1"/>
           <p:nvPr/>
         </p:nvSpPr>
@@ -6378,7 +6128,7 @@
       </p:sp>
       <p:sp>
         <p:nvSpPr>
-          <p:cNvPr id="11" name="Text 7"/>
+          <p:cNvPr id="10" name="Text 6"/>
           <p:cNvSpPr txBox="1"/>
           <p:nvPr/>
         </p:nvSpPr>
@@ -6417,7 +6167,7 @@
       </p:sp>
       <p:sp>
         <p:nvSpPr>
-          <p:cNvPr id="12" name="Text 8"/>
+          <p:cNvPr id="11" name="Text 7"/>
           <p:cNvSpPr txBox="1"/>
           <p:nvPr/>
         </p:nvSpPr>
@@ -6456,7 +6206,7 @@
       </p:sp>
       <p:sp>
         <p:nvSpPr>
-          <p:cNvPr id="13" name="Text 9"/>
+          <p:cNvPr id="12" name="Text 8"/>
           <p:cNvSpPr txBox="1"/>
           <p:nvPr/>
         </p:nvSpPr>
@@ -6495,7 +6245,7 @@
       </p:sp>
       <p:sp>
         <p:nvSpPr>
-          <p:cNvPr id="14" name="Text 10"/>
+          <p:cNvPr id="13" name="Text 9"/>
           <p:cNvSpPr txBox="1"/>
           <p:nvPr/>
         </p:nvSpPr>
@@ -6745,34 +6495,9 @@
           </a:ln>
         </p:spPr>
       </p:sp>
-      <p:sp>
-        <p:nvSpPr>
-          <p:cNvPr id="8" name="Shape 5"/>
-          <p:cNvSpPr/>
-          <p:nvPr/>
-        </p:nvSpPr>
-        <p:spPr>
-          <a:xfrm>
-            <a:off x="685800" y="1417320"/>
-            <a:ext cx="640080" cy="640080"/>
-          </a:xfrm>
-          <a:prstGeom prst="ellipse">
-            <a:avLst/>
-          </a:prstGeom>
-          <a:solidFill>
-            <a:srgbClr val="FFFFFF"/>
-          </a:solidFill>
-          <a:ln w="12700">
-            <a:solidFill>
-              <a:srgbClr val="FFFFFF"/>
-            </a:solidFill>
-            <a:prstDash val="solid"/>
-          </a:ln>
-        </p:spPr>
-      </p:sp>
       <p:pic>
         <p:nvPicPr>
-          <p:cNvPr id="9" name="Image 0" descr="preencoded.png">    </p:cNvPr>
+          <p:cNvPr id="8" name="Image 0" descr="preencoded.png">    </p:cNvPr>
           <p:cNvPicPr>
             <a:picLocks noChangeAspect="1"/>
           </p:cNvPicPr>
@@ -6786,8 +6511,8 @@
         </p:blipFill>
         <p:spPr>
           <a:xfrm>
-            <a:off x="852221" y="1583741"/>
-            <a:ext cx="307238" cy="307238"/>
+            <a:off x="685800" y="1545336"/>
+            <a:ext cx="384048" cy="384048"/>
           </a:xfrm>
           <a:prstGeom prst="rect">
             <a:avLst/>
@@ -6796,7 +6521,7 @@
       </p:pic>
       <p:sp>
         <p:nvSpPr>
-          <p:cNvPr id="10" name="Text 6"/>
+          <p:cNvPr id="9" name="Text 5"/>
           <p:cNvSpPr txBox="1"/>
           <p:nvPr/>
         </p:nvSpPr>
@@ -6835,7 +6560,7 @@
       </p:sp>
       <p:sp>
         <p:nvSpPr>
-          <p:cNvPr id="11" name="Text 7"/>
+          <p:cNvPr id="10" name="Text 6"/>
           <p:cNvSpPr txBox="1"/>
           <p:nvPr/>
         </p:nvSpPr>
@@ -6874,7 +6599,7 @@
       </p:sp>
       <p:sp>
         <p:nvSpPr>
-          <p:cNvPr id="12" name="Shape 8"/>
+          <p:cNvPr id="11" name="Shape 7"/>
           <p:cNvSpPr/>
           <p:nvPr/>
         </p:nvSpPr>
@@ -6897,34 +6622,9 @@
           </a:ln>
         </p:spPr>
       </p:sp>
-      <p:sp>
-        <p:nvSpPr>
-          <p:cNvPr id="13" name="Shape 9"/>
-          <p:cNvSpPr/>
-          <p:nvPr/>
-        </p:nvSpPr>
-        <p:spPr>
-          <a:xfrm>
-            <a:off x="3474720" y="1417320"/>
-            <a:ext cx="640080" cy="640080"/>
-          </a:xfrm>
-          <a:prstGeom prst="ellipse">
-            <a:avLst/>
-          </a:prstGeom>
-          <a:solidFill>
-            <a:srgbClr val="000000"/>
-          </a:solidFill>
-          <a:ln w="12700">
-            <a:solidFill>
-              <a:srgbClr val="000000"/>
-            </a:solidFill>
-            <a:prstDash val="solid"/>
-          </a:ln>
-        </p:spPr>
-      </p:sp>
       <p:pic>
         <p:nvPicPr>
-          <p:cNvPr id="14" name="Image 1" descr="preencoded.png">    </p:cNvPr>
+          <p:cNvPr id="12" name="Image 1" descr="preencoded.png">    </p:cNvPr>
           <p:cNvPicPr>
             <a:picLocks noChangeAspect="1"/>
           </p:cNvPicPr>
@@ -6938,8 +6638,8 @@
         </p:blipFill>
         <p:spPr>
           <a:xfrm>
-            <a:off x="3641141" y="1583741"/>
-            <a:ext cx="307238" cy="307238"/>
+            <a:off x="3474720" y="1545336"/>
+            <a:ext cx="384048" cy="384048"/>
           </a:xfrm>
           <a:prstGeom prst="rect">
             <a:avLst/>
@@ -6948,7 +6648,7 @@
       </p:pic>
       <p:sp>
         <p:nvSpPr>
-          <p:cNvPr id="15" name="Text 10"/>
+          <p:cNvPr id="13" name="Text 8"/>
           <p:cNvSpPr txBox="1"/>
           <p:nvPr/>
         </p:nvSpPr>
@@ -6987,7 +6687,7 @@
       </p:sp>
       <p:sp>
         <p:nvSpPr>
-          <p:cNvPr id="16" name="Text 11"/>
+          <p:cNvPr id="14" name="Text 9"/>
           <p:cNvSpPr txBox="1"/>
           <p:nvPr/>
         </p:nvSpPr>
@@ -7026,7 +6726,7 @@
       </p:sp>
       <p:sp>
         <p:nvSpPr>
-          <p:cNvPr id="17" name="Shape 12"/>
+          <p:cNvPr id="15" name="Shape 10"/>
           <p:cNvSpPr/>
           <p:nvPr/>
         </p:nvSpPr>
@@ -7049,34 +6749,9 @@
           </a:ln>
         </p:spPr>
       </p:sp>
-      <p:sp>
-        <p:nvSpPr>
-          <p:cNvPr id="18" name="Shape 13"/>
-          <p:cNvSpPr/>
-          <p:nvPr/>
-        </p:nvSpPr>
-        <p:spPr>
-          <a:xfrm>
-            <a:off x="6263640" y="1417320"/>
-            <a:ext cx="640080" cy="640080"/>
-          </a:xfrm>
-          <a:prstGeom prst="ellipse">
-            <a:avLst/>
-          </a:prstGeom>
-          <a:solidFill>
-            <a:srgbClr val="000000"/>
-          </a:solidFill>
-          <a:ln w="12700">
-            <a:solidFill>
-              <a:srgbClr val="000000"/>
-            </a:solidFill>
-            <a:prstDash val="solid"/>
-          </a:ln>
-        </p:spPr>
-      </p:sp>
       <p:pic>
         <p:nvPicPr>
-          <p:cNvPr id="19" name="Image 2" descr="preencoded.png">    </p:cNvPr>
+          <p:cNvPr id="16" name="Image 2" descr="preencoded.png">    </p:cNvPr>
           <p:cNvPicPr>
             <a:picLocks noChangeAspect="1"/>
           </p:cNvPicPr>
@@ -7090,8 +6765,8 @@
         </p:blipFill>
         <p:spPr>
           <a:xfrm>
-            <a:off x="6430061" y="1583741"/>
-            <a:ext cx="307238" cy="307238"/>
+            <a:off x="6263640" y="1545336"/>
+            <a:ext cx="384048" cy="384048"/>
           </a:xfrm>
           <a:prstGeom prst="rect">
             <a:avLst/>
@@ -7100,7 +6775,7 @@
       </p:pic>
       <p:sp>
         <p:nvSpPr>
-          <p:cNvPr id="20" name="Text 14"/>
+          <p:cNvPr id="17" name="Text 11"/>
           <p:cNvSpPr txBox="1"/>
           <p:nvPr/>
         </p:nvSpPr>
@@ -7139,7 +6814,7 @@
       </p:sp>
       <p:sp>
         <p:nvSpPr>
-          <p:cNvPr id="21" name="Text 15"/>
+          <p:cNvPr id="18" name="Text 12"/>
           <p:cNvSpPr txBox="1"/>
           <p:nvPr/>
         </p:nvSpPr>
@@ -7178,7 +6853,7 @@
       </p:sp>
       <p:sp>
         <p:nvSpPr>
-          <p:cNvPr id="22" name="Shape 16"/>
+          <p:cNvPr id="19" name="Shape 13"/>
           <p:cNvSpPr/>
           <p:nvPr/>
         </p:nvSpPr>
@@ -7203,7 +6878,7 @@
       </p:sp>
       <p:sp>
         <p:nvSpPr>
-          <p:cNvPr id="23" name="Text 17"/>
+          <p:cNvPr id="20" name="Text 14"/>
           <p:cNvSpPr txBox="1"/>
           <p:nvPr/>
         </p:nvSpPr>
@@ -8120,18 +7795,81 @@
           </a:p>
         </p:txBody>
       </p:sp>
-      <p:sp>
-        <p:nvSpPr>
-          <p:cNvPr id="5" name="Shape 2"/>
+      <p:pic>
+        <p:nvPicPr>
+          <p:cNvPr id="5" name="Image 0" descr="preencoded.png">    </p:cNvPr>
+          <p:cNvPicPr>
+            <a:picLocks noChangeAspect="1"/>
+          </p:cNvPicPr>
+          <p:nvPr/>
+        </p:nvPicPr>
+        <p:blipFill>
+          <a:blip r:embed="rId1"/>
+          <a:stretch>
+            <a:fillRect/>
+          </a:stretch>
+        </p:blipFill>
+        <p:spPr>
+          <a:xfrm>
+            <a:off x="548640" y="2880360"/>
+            <a:ext cx="548640" cy="548640"/>
+          </a:xfrm>
+          <a:prstGeom prst="rect">
+            <a:avLst/>
+          </a:prstGeom>
+        </p:spPr>
+      </p:pic>
+      <p:sp>
+        <p:nvSpPr>
+          <p:cNvPr id="6" name="Text 2"/>
+          <p:cNvSpPr txBox="1"/>
+          <p:nvPr/>
+        </p:nvSpPr>
+        <p:spPr>
+          <a:xfrm>
+            <a:off x="1691640" y="2697480"/>
+            <a:ext cx="2377440" cy="914400"/>
+          </a:xfrm>
+          <a:prstGeom prst="rect">
+            <a:avLst/>
+          </a:prstGeom>
+          <a:noFill/>
+          <a:ln/>
+        </p:spPr>
+        <p:txBody>
+          <a:bodyPr wrap="square" lIns="0" tIns="0" rIns="0" bIns="0" rtlCol="0" anchor="ctr"/>
+          <a:lstStyle/>
+          <a:p>
+            <a:pPr indent="0" marL="0">
+              <a:buNone/>
+            </a:pPr>
+            <a:r>
+              <a:rPr lang="en-US" sz="1500" i="1" dirty="0">
+                <a:solidFill>
+                  <a:srgbClr val="BFBFBF"/>
+                </a:solidFill>
+                <a:latin typeface="Arial" pitchFamily="34" charset="0"/>
+                <a:ea typeface="Arial" pitchFamily="34" charset="-122"/>
+                <a:cs typeface="Arial" pitchFamily="34" charset="-120"/>
+              </a:rPr>
+              <a:t>Measure honestly, even the bad news.</a:t>
+            </a:r>
+            <a:endParaRPr lang="en-US" sz="1500" dirty="0"/>
+          </a:p>
+        </p:txBody>
+      </p:sp>
+      <p:sp>
+        <p:nvSpPr>
+          <p:cNvPr id="7" name="Shape 3"/>
           <p:cNvSpPr/>
           <p:nvPr/>
         </p:nvSpPr>
         <p:spPr>
           <a:xfrm>
-            <a:off x="548640" y="2697480"/>
-            <a:ext cx="914400" cy="914400"/>
-          </a:xfrm>
-          <a:prstGeom prst="ellipse">
+            <a:off x="4480560" y="457200"/>
+            <a:ext cx="4206240" cy="4206240"/>
+          </a:xfrm>
+          <a:prstGeom prst="rect">
             <a:avLst/>
           </a:prstGeom>
           <a:solidFill>
@@ -8145,97 +7883,9 @@
           </a:ln>
         </p:spPr>
       </p:sp>
-      <p:pic>
-        <p:nvPicPr>
-          <p:cNvPr id="6" name="Image 0" descr="preencoded.png">    </p:cNvPr>
-          <p:cNvPicPr>
-            <a:picLocks noChangeAspect="1"/>
-          </p:cNvPicPr>
-          <p:nvPr/>
-        </p:nvPicPr>
-        <p:blipFill>
-          <a:blip r:embed="rId1"/>
-          <a:stretch>
-            <a:fillRect/>
-          </a:stretch>
-        </p:blipFill>
-        <p:spPr>
-          <a:xfrm>
-            <a:off x="786384" y="2935224"/>
-            <a:ext cx="438912" cy="438912"/>
-          </a:xfrm>
-          <a:prstGeom prst="rect">
-            <a:avLst/>
-          </a:prstGeom>
-        </p:spPr>
-      </p:pic>
-      <p:sp>
-        <p:nvSpPr>
-          <p:cNvPr id="7" name="Text 3"/>
-          <p:cNvSpPr txBox="1"/>
-          <p:nvPr/>
-        </p:nvSpPr>
-        <p:spPr>
-          <a:xfrm>
-            <a:off x="1691640" y="2697480"/>
-            <a:ext cx="2377440" cy="914400"/>
-          </a:xfrm>
-          <a:prstGeom prst="rect">
-            <a:avLst/>
-          </a:prstGeom>
-          <a:noFill/>
-          <a:ln/>
-        </p:spPr>
-        <p:txBody>
-          <a:bodyPr wrap="square" lIns="0" tIns="0" rIns="0" bIns="0" rtlCol="0" anchor="ctr"/>
-          <a:lstStyle/>
-          <a:p>
-            <a:pPr indent="0" marL="0">
-              <a:buNone/>
-            </a:pPr>
-            <a:r>
-              <a:rPr lang="en-US" sz="1500" i="1" dirty="0">
-                <a:solidFill>
-                  <a:srgbClr val="BFBFBF"/>
-                </a:solidFill>
-                <a:latin typeface="Arial" pitchFamily="34" charset="0"/>
-                <a:ea typeface="Arial" pitchFamily="34" charset="-122"/>
-                <a:cs typeface="Arial" pitchFamily="34" charset="-120"/>
-              </a:rPr>
-              <a:t>Measure honestly, even the bad news.</a:t>
-            </a:r>
-            <a:endParaRPr lang="en-US" sz="1500" dirty="0"/>
-          </a:p>
-        </p:txBody>
-      </p:sp>
-      <p:sp>
-        <p:nvSpPr>
-          <p:cNvPr id="8" name="Shape 4"/>
-          <p:cNvSpPr/>
-          <p:nvPr/>
-        </p:nvSpPr>
-        <p:spPr>
-          <a:xfrm>
-            <a:off x="4480560" y="457200"/>
-            <a:ext cx="4206240" cy="4206240"/>
-          </a:xfrm>
-          <a:prstGeom prst="rect">
-            <a:avLst/>
-          </a:prstGeom>
-          <a:solidFill>
-            <a:srgbClr val="FFFFFF"/>
-          </a:solidFill>
-          <a:ln w="12700">
-            <a:solidFill>
-              <a:srgbClr val="FFFFFF"/>
-            </a:solidFill>
-            <a:prstDash val="solid"/>
-          </a:ln>
-        </p:spPr>
-      </p:sp>
-      <p:sp>
-        <p:nvSpPr>
-          <p:cNvPr id="9" name="Text 5"/>
+      <p:sp>
+        <p:nvSpPr>
+          <p:cNvPr id="8" name="Text 4"/>
           <p:cNvSpPr txBox="1"/>
           <p:nvPr/>
         </p:nvSpPr>
@@ -8274,7 +7924,7 @@
       </p:sp>
       <p:sp>
         <p:nvSpPr>
-          <p:cNvPr id="10" name="Text 6"/>
+          <p:cNvPr id="9" name="Text 5"/>
           <p:cNvSpPr txBox="1"/>
           <p:nvPr/>
         </p:nvSpPr>
@@ -8313,7 +7963,7 @@
       </p:sp>
       <p:sp>
         <p:nvSpPr>
-          <p:cNvPr id="11" name="Text 7"/>
+          <p:cNvPr id="10" name="Text 6"/>
           <p:cNvSpPr txBox="1"/>
           <p:nvPr/>
         </p:nvSpPr>
@@ -8352,7 +8002,7 @@
       </p:sp>
       <p:sp>
         <p:nvSpPr>
-          <p:cNvPr id="12" name="Text 8"/>
+          <p:cNvPr id="11" name="Text 7"/>
           <p:cNvSpPr txBox="1"/>
           <p:nvPr/>
         </p:nvSpPr>
@@ -8391,7 +8041,7 @@
       </p:sp>
       <p:sp>
         <p:nvSpPr>
-          <p:cNvPr id="13" name="Text 9"/>
+          <p:cNvPr id="12" name="Text 8"/>
           <p:cNvSpPr txBox="1"/>
           <p:nvPr/>
         </p:nvSpPr>
@@ -8430,7 +8080,7 @@
       </p:sp>
       <p:sp>
         <p:nvSpPr>
-          <p:cNvPr id="14" name="Text 10"/>
+          <p:cNvPr id="13" name="Text 9"/>
           <p:cNvSpPr txBox="1"/>
           <p:nvPr/>
         </p:nvSpPr>
@@ -8680,34 +8330,9 @@
           </a:ln>
         </p:spPr>
       </p:sp>
-      <p:sp>
-        <p:nvSpPr>
-          <p:cNvPr id="8" name="Shape 5"/>
-          <p:cNvSpPr/>
-          <p:nvPr/>
-        </p:nvSpPr>
-        <p:spPr>
-          <a:xfrm>
-            <a:off x="685800" y="1417320"/>
-            <a:ext cx="594360" cy="594360"/>
-          </a:xfrm>
-          <a:prstGeom prst="ellipse">
-            <a:avLst/>
-          </a:prstGeom>
-          <a:solidFill>
-            <a:srgbClr val="000000"/>
-          </a:solidFill>
-          <a:ln w="12700">
-            <a:solidFill>
-              <a:srgbClr val="000000"/>
-            </a:solidFill>
-            <a:prstDash val="solid"/>
-          </a:ln>
-        </p:spPr>
-      </p:sp>
       <p:pic>
         <p:nvPicPr>
-          <p:cNvPr id="9" name="Image 0" descr="preencoded.png">    </p:cNvPr>
+          <p:cNvPr id="8" name="Image 0" descr="preencoded.png">    </p:cNvPr>
           <p:cNvPicPr>
             <a:picLocks noChangeAspect="1"/>
           </p:cNvPicPr>
@@ -8721,8 +8346,8 @@
         </p:blipFill>
         <p:spPr>
           <a:xfrm>
-            <a:off x="840334" y="1571854"/>
-            <a:ext cx="285293" cy="285293"/>
+            <a:off x="685800" y="1536192"/>
+            <a:ext cx="356616" cy="356616"/>
           </a:xfrm>
           <a:prstGeom prst="rect">
             <a:avLst/>
@@ -8731,7 +8356,7 @@
       </p:pic>
       <p:sp>
         <p:nvSpPr>
-          <p:cNvPr id="10" name="Text 6"/>
+          <p:cNvPr id="9" name="Text 5"/>
           <p:cNvSpPr txBox="1"/>
           <p:nvPr/>
         </p:nvSpPr>
@@ -8770,7 +8395,7 @@
       </p:sp>
       <p:sp>
         <p:nvSpPr>
-          <p:cNvPr id="11" name="Text 7"/>
+          <p:cNvPr id="10" name="Text 6"/>
           <p:cNvSpPr txBox="1"/>
           <p:nvPr/>
         </p:nvSpPr>
@@ -8809,7 +8434,7 @@
       </p:sp>
       <p:sp>
         <p:nvSpPr>
-          <p:cNvPr id="12" name="Shape 8"/>
+          <p:cNvPr id="11" name="Shape 7"/>
           <p:cNvSpPr/>
           <p:nvPr/>
         </p:nvSpPr>
@@ -8832,34 +8457,9 @@
           </a:ln>
         </p:spPr>
       </p:sp>
-      <p:sp>
-        <p:nvSpPr>
-          <p:cNvPr id="13" name="Shape 9"/>
-          <p:cNvSpPr/>
-          <p:nvPr/>
-        </p:nvSpPr>
-        <p:spPr>
-          <a:xfrm>
-            <a:off x="2770632" y="1417320"/>
-            <a:ext cx="594360" cy="594360"/>
-          </a:xfrm>
-          <a:prstGeom prst="ellipse">
-            <a:avLst/>
-          </a:prstGeom>
-          <a:solidFill>
-            <a:srgbClr val="000000"/>
-          </a:solidFill>
-          <a:ln w="12700">
-            <a:solidFill>
-              <a:srgbClr val="000000"/>
-            </a:solidFill>
-            <a:prstDash val="solid"/>
-          </a:ln>
-        </p:spPr>
-      </p:sp>
       <p:pic>
         <p:nvPicPr>
-          <p:cNvPr id="14" name="Image 1" descr="preencoded.png">    </p:cNvPr>
+          <p:cNvPr id="12" name="Image 1" descr="preencoded.png">    </p:cNvPr>
           <p:cNvPicPr>
             <a:picLocks noChangeAspect="1"/>
           </p:cNvPicPr>
@@ -8873,8 +8473,8 @@
         </p:blipFill>
         <p:spPr>
           <a:xfrm>
-            <a:off x="2925166" y="1571854"/>
-            <a:ext cx="285293" cy="285293"/>
+            <a:off x="2770632" y="1536192"/>
+            <a:ext cx="356616" cy="356616"/>
           </a:xfrm>
           <a:prstGeom prst="rect">
             <a:avLst/>
@@ -8883,7 +8483,7 @@
       </p:pic>
       <p:sp>
         <p:nvSpPr>
-          <p:cNvPr id="15" name="Text 10"/>
+          <p:cNvPr id="13" name="Text 8"/>
           <p:cNvSpPr txBox="1"/>
           <p:nvPr/>
         </p:nvSpPr>
@@ -8922,7 +8522,7 @@
       </p:sp>
       <p:sp>
         <p:nvSpPr>
-          <p:cNvPr id="16" name="Text 11"/>
+          <p:cNvPr id="14" name="Text 9"/>
           <p:cNvSpPr txBox="1"/>
           <p:nvPr/>
         </p:nvSpPr>
@@ -8961,7 +8561,7 @@
       </p:sp>
       <p:sp>
         <p:nvSpPr>
-          <p:cNvPr id="17" name="Shape 12"/>
+          <p:cNvPr id="15" name="Shape 10"/>
           <p:cNvSpPr/>
           <p:nvPr/>
         </p:nvSpPr>
@@ -8984,34 +8584,9 @@
           </a:ln>
         </p:spPr>
       </p:sp>
-      <p:sp>
-        <p:nvSpPr>
-          <p:cNvPr id="18" name="Shape 13"/>
-          <p:cNvSpPr/>
-          <p:nvPr/>
-        </p:nvSpPr>
-        <p:spPr>
-          <a:xfrm>
-            <a:off x="4855464" y="1417320"/>
-            <a:ext cx="594360" cy="594360"/>
-          </a:xfrm>
-          <a:prstGeom prst="ellipse">
-            <a:avLst/>
-          </a:prstGeom>
-          <a:solidFill>
-            <a:srgbClr val="000000"/>
-          </a:solidFill>
-          <a:ln w="12700">
-            <a:solidFill>
-              <a:srgbClr val="000000"/>
-            </a:solidFill>
-            <a:prstDash val="solid"/>
-          </a:ln>
-        </p:spPr>
-      </p:sp>
       <p:pic>
         <p:nvPicPr>
-          <p:cNvPr id="19" name="Image 2" descr="preencoded.png">    </p:cNvPr>
+          <p:cNvPr id="16" name="Image 2" descr="preencoded.png">    </p:cNvPr>
           <p:cNvPicPr>
             <a:picLocks noChangeAspect="1"/>
           </p:cNvPicPr>
@@ -9025,8 +8600,8 @@
         </p:blipFill>
         <p:spPr>
           <a:xfrm>
-            <a:off x="5009998" y="1571854"/>
-            <a:ext cx="285293" cy="285293"/>
+            <a:off x="4855464" y="1536192"/>
+            <a:ext cx="356616" cy="356616"/>
           </a:xfrm>
           <a:prstGeom prst="rect">
             <a:avLst/>
@@ -9035,7 +8610,7 @@
       </p:pic>
       <p:sp>
         <p:nvSpPr>
-          <p:cNvPr id="20" name="Text 14"/>
+          <p:cNvPr id="17" name="Text 11"/>
           <p:cNvSpPr txBox="1"/>
           <p:nvPr/>
         </p:nvSpPr>
@@ -9074,7 +8649,7 @@
       </p:sp>
       <p:sp>
         <p:nvSpPr>
-          <p:cNvPr id="21" name="Text 15"/>
+          <p:cNvPr id="18" name="Text 12"/>
           <p:cNvSpPr txBox="1"/>
           <p:nvPr/>
         </p:nvSpPr>
@@ -9113,7 +8688,7 @@
       </p:sp>
       <p:sp>
         <p:nvSpPr>
-          <p:cNvPr id="22" name="Shape 16"/>
+          <p:cNvPr id="19" name="Shape 13"/>
           <p:cNvSpPr/>
           <p:nvPr/>
         </p:nvSpPr>
@@ -9136,34 +8711,9 @@
           </a:ln>
         </p:spPr>
       </p:sp>
-      <p:sp>
-        <p:nvSpPr>
-          <p:cNvPr id="23" name="Shape 17"/>
-          <p:cNvSpPr/>
-          <p:nvPr/>
-        </p:nvSpPr>
-        <p:spPr>
-          <a:xfrm>
-            <a:off x="6940296" y="1417320"/>
-            <a:ext cx="594360" cy="594360"/>
-          </a:xfrm>
-          <a:prstGeom prst="ellipse">
-            <a:avLst/>
-          </a:prstGeom>
-          <a:solidFill>
-            <a:srgbClr val="FFFFFF"/>
-          </a:solidFill>
-          <a:ln w="12700">
-            <a:solidFill>
-              <a:srgbClr val="FFFFFF"/>
-            </a:solidFill>
-            <a:prstDash val="solid"/>
-          </a:ln>
-        </p:spPr>
-      </p:sp>
       <p:pic>
         <p:nvPicPr>
-          <p:cNvPr id="24" name="Image 3" descr="preencoded.png">    </p:cNvPr>
+          <p:cNvPr id="20" name="Image 3" descr="preencoded.png">    </p:cNvPr>
           <p:cNvPicPr>
             <a:picLocks noChangeAspect="1"/>
           </p:cNvPicPr>
@@ -9177,8 +8727,8 @@
         </p:blipFill>
         <p:spPr>
           <a:xfrm>
-            <a:off x="7094830" y="1571854"/>
-            <a:ext cx="285293" cy="285293"/>
+            <a:off x="6940296" y="1536192"/>
+            <a:ext cx="356616" cy="356616"/>
           </a:xfrm>
           <a:prstGeom prst="rect">
             <a:avLst/>
@@ -9187,7 +8737,7 @@
       </p:pic>
       <p:sp>
         <p:nvSpPr>
-          <p:cNvPr id="25" name="Text 18"/>
+          <p:cNvPr id="21" name="Text 14"/>
           <p:cNvSpPr txBox="1"/>
           <p:nvPr/>
         </p:nvSpPr>
@@ -9226,7 +8776,7 @@
       </p:sp>
       <p:sp>
         <p:nvSpPr>
-          <p:cNvPr id="26" name="Text 19"/>
+          <p:cNvPr id="22" name="Text 15"/>
           <p:cNvSpPr txBox="1"/>
           <p:nvPr/>
         </p:nvSpPr>
@@ -9265,7 +8815,7 @@
       </p:sp>
       <p:sp>
         <p:nvSpPr>
-          <p:cNvPr id="27" name="Text 20"/>
+          <p:cNvPr id="23" name="Text 16"/>
           <p:cNvSpPr txBox="1"/>
           <p:nvPr/>
         </p:nvSpPr>
@@ -10425,34 +9975,9 @@
           </a:p>
         </p:txBody>
       </p:sp>
-      <p:sp>
-        <p:nvSpPr>
-          <p:cNvPr id="7" name="Shape 4"/>
-          <p:cNvSpPr/>
-          <p:nvPr/>
-        </p:nvSpPr>
-        <p:spPr>
-          <a:xfrm>
-            <a:off x="822960" y="1188720"/>
-            <a:ext cx="914400" cy="914400"/>
-          </a:xfrm>
-          <a:prstGeom prst="ellipse">
-            <a:avLst/>
-          </a:prstGeom>
-          <a:solidFill>
-            <a:srgbClr val="FFFFFF"/>
-          </a:solidFill>
-          <a:ln w="19050">
-            <a:solidFill>
-              <a:srgbClr val="000000"/>
-            </a:solidFill>
-            <a:prstDash val="solid"/>
-          </a:ln>
-        </p:spPr>
-      </p:sp>
       <p:pic>
         <p:nvPicPr>
-          <p:cNvPr id="8" name="Image 0" descr="preencoded.png">    </p:cNvPr>
+          <p:cNvPr id="7" name="Image 0" descr="preencoded.png">    </p:cNvPr>
           <p:cNvPicPr>
             <a:picLocks noChangeAspect="1"/>
           </p:cNvPicPr>
@@ -10466,8 +9991,8 @@
         </p:blipFill>
         <p:spPr>
           <a:xfrm>
-            <a:off x="1060704" y="1426464"/>
-            <a:ext cx="438912" cy="438912"/>
+            <a:off x="960120" y="1280160"/>
+            <a:ext cx="640080" cy="640080"/>
           </a:xfrm>
           <a:prstGeom prst="rect">
             <a:avLst/>
@@ -10476,7 +10001,7 @@
       </p:pic>
       <p:sp>
         <p:nvSpPr>
-          <p:cNvPr id="9" name="Text 5"/>
+          <p:cNvPr id="8" name="Text 4"/>
           <p:cNvSpPr txBox="1"/>
           <p:nvPr/>
         </p:nvSpPr>
@@ -10515,7 +10040,7 @@
       </p:sp>
       <p:sp>
         <p:nvSpPr>
-          <p:cNvPr id="10" name="Text 6"/>
+          <p:cNvPr id="9" name="Text 5"/>
           <p:cNvSpPr txBox="1"/>
           <p:nvPr/>
         </p:nvSpPr>
@@ -10554,7 +10079,7 @@
       </p:sp>
       <p:pic>
         <p:nvPicPr>
-          <p:cNvPr id="11" name="Image 1" descr="preencoded.png">    </p:cNvPr>
+          <p:cNvPr id="10" name="Image 1" descr="preencoded.png">    </p:cNvPr>
           <p:cNvPicPr>
             <a:picLocks noChangeAspect="1"/>
           </p:cNvPicPr>
@@ -10578,443 +10103,14 @@
       </p:pic>
       <p:sp>
         <p:nvSpPr>
-          <p:cNvPr id="12" name="Shape 7"/>
+          <p:cNvPr id="11" name="Shape 6"/>
           <p:cNvSpPr/>
           <p:nvPr/>
         </p:nvSpPr>
         <p:spPr>
           <a:xfrm>
-            <a:off x="2971800" y="1188720"/>
-            <a:ext cx="914400" cy="914400"/>
-          </a:xfrm>
-          <a:prstGeom prst="ellipse">
-            <a:avLst/>
-          </a:prstGeom>
-          <a:solidFill>
-            <a:srgbClr val="000000"/>
-          </a:solidFill>
-          <a:ln w="19050">
-            <a:solidFill>
-              <a:srgbClr val="000000"/>
-            </a:solidFill>
-            <a:prstDash val="solid"/>
-          </a:ln>
-        </p:spPr>
-      </p:sp>
-      <p:pic>
-        <p:nvPicPr>
-          <p:cNvPr id="13" name="Image 2" descr="preencoded.png">    </p:cNvPr>
-          <p:cNvPicPr>
-            <a:picLocks noChangeAspect="1"/>
-          </p:cNvPicPr>
-          <p:nvPr/>
-        </p:nvPicPr>
-        <p:blipFill>
-          <a:blip r:embed="rId3"/>
-          <a:stretch>
-            <a:fillRect/>
-          </a:stretch>
-        </p:blipFill>
-        <p:spPr>
-          <a:xfrm>
-            <a:off x="3209544" y="1426464"/>
-            <a:ext cx="438912" cy="438912"/>
-          </a:xfrm>
-          <a:prstGeom prst="rect">
-            <a:avLst/>
-          </a:prstGeom>
-        </p:spPr>
-      </p:pic>
-      <p:sp>
-        <p:nvSpPr>
-          <p:cNvPr id="14" name="Text 8"/>
-          <p:cNvSpPr txBox="1"/>
-          <p:nvPr/>
-        </p:nvSpPr>
-        <p:spPr>
-          <a:xfrm>
-            <a:off x="2560320" y="2194560"/>
-            <a:ext cx="1737360" cy="320040"/>
-          </a:xfrm>
-          <a:prstGeom prst="rect">
-            <a:avLst/>
-          </a:prstGeom>
-          <a:noFill/>
-          <a:ln/>
-        </p:spPr>
-        <p:txBody>
-          <a:bodyPr wrap="square" lIns="0" tIns="0" rIns="0" bIns="0" rtlCol="0" anchor="ctr"/>
-          <a:lstStyle/>
-          <a:p>
-            <a:pPr algn="ctr" indent="0" marL="0">
-              <a:buNone/>
-            </a:pPr>
-            <a:r>
-              <a:rPr lang="en-US" sz="1600" b="1" dirty="0">
-                <a:solidFill>
-                  <a:srgbClr val="000000"/>
-                </a:solidFill>
-                <a:latin typeface="Arial" pitchFamily="34" charset="0"/>
-                <a:ea typeface="Arial" pitchFamily="34" charset="-122"/>
-                <a:cs typeface="Arial" pitchFamily="34" charset="-120"/>
-              </a:rPr>
-              <a:t>Ramer</a:t>
-            </a:r>
-            <a:endParaRPr lang="en-US" sz="1600" dirty="0"/>
-          </a:p>
-        </p:txBody>
-      </p:sp>
-      <p:sp>
-        <p:nvSpPr>
-          <p:cNvPr id="15" name="Text 9"/>
-          <p:cNvSpPr txBox="1"/>
-          <p:nvPr/>
-        </p:nvSpPr>
-        <p:spPr>
-          <a:xfrm>
-            <a:off x="2560320" y="2514600"/>
-            <a:ext cx="1737360" cy="274320"/>
-          </a:xfrm>
-          <a:prstGeom prst="rect">
-            <a:avLst/>
-          </a:prstGeom>
-          <a:noFill/>
-          <a:ln/>
-        </p:spPr>
-        <p:txBody>
-          <a:bodyPr wrap="square" lIns="0" tIns="0" rIns="0" bIns="0" rtlCol="0" anchor="ctr"/>
-          <a:lstStyle/>
-          <a:p>
-            <a:pPr algn="ctr" indent="0" marL="0">
-              <a:buNone/>
-            </a:pPr>
-            <a:r>
-              <a:rPr lang="en-US" sz="1100" dirty="0">
-                <a:solidFill>
-                  <a:srgbClr val="595959"/>
-                </a:solidFill>
-                <a:latin typeface="Arial" pitchFamily="34" charset="0"/>
-                <a:ea typeface="Arial" pitchFamily="34" charset="-122"/>
-                <a:cs typeface="Arial" pitchFamily="34" charset="-120"/>
-              </a:rPr>
-              <a:t>the new middle layer</a:t>
-            </a:r>
-            <a:endParaRPr lang="en-US" sz="1100" dirty="0"/>
-          </a:p>
-        </p:txBody>
-      </p:sp>
-      <p:pic>
-        <p:nvPicPr>
-          <p:cNvPr id="16" name="Image 3" descr="preencoded.png">    </p:cNvPr>
-          <p:cNvPicPr>
-            <a:picLocks noChangeAspect="1"/>
-          </p:cNvPicPr>
-          <p:nvPr/>
-        </p:nvPicPr>
-        <p:blipFill>
-          <a:blip r:embed="rId4"/>
-          <a:stretch>
-            <a:fillRect/>
-          </a:stretch>
-        </p:blipFill>
-        <p:spPr>
-          <a:xfrm>
-            <a:off x="4251960" y="1499616"/>
-            <a:ext cx="274320" cy="274320"/>
-          </a:xfrm>
-          <a:prstGeom prst="rect">
-            <a:avLst/>
-          </a:prstGeom>
-        </p:spPr>
-      </p:pic>
-      <p:sp>
-        <p:nvSpPr>
-          <p:cNvPr id="17" name="Shape 10"/>
-          <p:cNvSpPr/>
-          <p:nvPr/>
-        </p:nvSpPr>
-        <p:spPr>
-          <a:xfrm>
-            <a:off x="5120640" y="1188720"/>
-            <a:ext cx="914400" cy="914400"/>
-          </a:xfrm>
-          <a:prstGeom prst="ellipse">
-            <a:avLst/>
-          </a:prstGeom>
-          <a:solidFill>
-            <a:srgbClr val="FFFFFF"/>
-          </a:solidFill>
-          <a:ln w="19050">
-            <a:solidFill>
-              <a:srgbClr val="000000"/>
-            </a:solidFill>
-            <a:prstDash val="solid"/>
-          </a:ln>
-        </p:spPr>
-      </p:sp>
-      <p:pic>
-        <p:nvPicPr>
-          <p:cNvPr id="18" name="Image 4" descr="preencoded.png">    </p:cNvPr>
-          <p:cNvPicPr>
-            <a:picLocks noChangeAspect="1"/>
-          </p:cNvPicPr>
-          <p:nvPr/>
-        </p:nvPicPr>
-        <p:blipFill>
-          <a:blip r:embed="rId5"/>
-          <a:stretch>
-            <a:fillRect/>
-          </a:stretch>
-        </p:blipFill>
-        <p:spPr>
-          <a:xfrm>
-            <a:off x="5358384" y="1426464"/>
-            <a:ext cx="438912" cy="438912"/>
-          </a:xfrm>
-          <a:prstGeom prst="rect">
-            <a:avLst/>
-          </a:prstGeom>
-        </p:spPr>
-      </p:pic>
-      <p:sp>
-        <p:nvSpPr>
-          <p:cNvPr id="19" name="Text 11"/>
-          <p:cNvSpPr txBox="1"/>
-          <p:nvPr/>
-        </p:nvSpPr>
-        <p:spPr>
-          <a:xfrm>
-            <a:off x="4709160" y="2194560"/>
-            <a:ext cx="1737360" cy="320040"/>
-          </a:xfrm>
-          <a:prstGeom prst="rect">
-            <a:avLst/>
-          </a:prstGeom>
-          <a:noFill/>
-          <a:ln/>
-        </p:spPr>
-        <p:txBody>
-          <a:bodyPr wrap="square" lIns="0" tIns="0" rIns="0" bIns="0" rtlCol="0" anchor="ctr"/>
-          <a:lstStyle/>
-          <a:p>
-            <a:pPr algn="ctr" indent="0" marL="0">
-              <a:buNone/>
-            </a:pPr>
-            <a:r>
-              <a:rPr lang="en-US" sz="1600" b="1" dirty="0">
-                <a:solidFill>
-                  <a:srgbClr val="000000"/>
-                </a:solidFill>
-                <a:latin typeface="Arial" pitchFamily="34" charset="0"/>
-                <a:ea typeface="Arial" pitchFamily="34" charset="-122"/>
-                <a:cs typeface="Arial" pitchFamily="34" charset="-120"/>
-              </a:rPr>
-              <a:t>Ollama</a:t>
-            </a:r>
-            <a:endParaRPr lang="en-US" sz="1600" dirty="0"/>
-          </a:p>
-        </p:txBody>
-      </p:sp>
-      <p:sp>
-        <p:nvSpPr>
-          <p:cNvPr id="20" name="Text 12"/>
-          <p:cNvSpPr txBox="1"/>
-          <p:nvPr/>
-        </p:nvSpPr>
-        <p:spPr>
-          <a:xfrm>
-            <a:off x="4709160" y="2514600"/>
-            <a:ext cx="1737360" cy="274320"/>
-          </a:xfrm>
-          <a:prstGeom prst="rect">
-            <a:avLst/>
-          </a:prstGeom>
-          <a:noFill/>
-          <a:ln/>
-        </p:spPr>
-        <p:txBody>
-          <a:bodyPr wrap="square" lIns="0" tIns="0" rIns="0" bIns="0" rtlCol="0" anchor="ctr"/>
-          <a:lstStyle/>
-          <a:p>
-            <a:pPr algn="ctr" indent="0" marL="0">
-              <a:buNone/>
-            </a:pPr>
-            <a:r>
-              <a:rPr lang="en-US" sz="1100" dirty="0">
-                <a:solidFill>
-                  <a:srgbClr val="595959"/>
-                </a:solidFill>
-                <a:latin typeface="Arial" pitchFamily="34" charset="0"/>
-                <a:ea typeface="Arial" pitchFamily="34" charset="-122"/>
-                <a:cs typeface="Arial" pitchFamily="34" charset="-120"/>
-              </a:rPr>
-              <a:t>runs the model</a:t>
-            </a:r>
-            <a:endParaRPr lang="en-US" sz="1100" dirty="0"/>
-          </a:p>
-        </p:txBody>
-      </p:sp>
-      <p:pic>
-        <p:nvPicPr>
-          <p:cNvPr id="21" name="Image 5" descr="preencoded.png">    </p:cNvPr>
-          <p:cNvPicPr>
-            <a:picLocks noChangeAspect="1"/>
-          </p:cNvPicPr>
-          <p:nvPr/>
-        </p:nvPicPr>
-        <p:blipFill>
-          <a:blip r:embed="rId6"/>
-          <a:stretch>
-            <a:fillRect/>
-          </a:stretch>
-        </p:blipFill>
-        <p:spPr>
-          <a:xfrm>
-            <a:off x="6400800" y="1499616"/>
-            <a:ext cx="274320" cy="274320"/>
-          </a:xfrm>
-          <a:prstGeom prst="rect">
-            <a:avLst/>
-          </a:prstGeom>
-        </p:spPr>
-      </p:pic>
-      <p:sp>
-        <p:nvSpPr>
-          <p:cNvPr id="22" name="Shape 13"/>
-          <p:cNvSpPr/>
-          <p:nvPr/>
-        </p:nvSpPr>
-        <p:spPr>
-          <a:xfrm>
-            <a:off x="7269480" y="1188720"/>
-            <a:ext cx="914400" cy="914400"/>
-          </a:xfrm>
-          <a:prstGeom prst="ellipse">
-            <a:avLst/>
-          </a:prstGeom>
-          <a:solidFill>
-            <a:srgbClr val="FFFFFF"/>
-          </a:solidFill>
-          <a:ln w="19050">
-            <a:solidFill>
-              <a:srgbClr val="000000"/>
-            </a:solidFill>
-            <a:prstDash val="solid"/>
-          </a:ln>
-        </p:spPr>
-      </p:sp>
-      <p:pic>
-        <p:nvPicPr>
-          <p:cNvPr id="23" name="Image 6" descr="preencoded.png">    </p:cNvPr>
-          <p:cNvPicPr>
-            <a:picLocks noChangeAspect="1"/>
-          </p:cNvPicPr>
-          <p:nvPr/>
-        </p:nvPicPr>
-        <p:blipFill>
-          <a:blip r:embed="rId7"/>
-          <a:stretch>
-            <a:fillRect/>
-          </a:stretch>
-        </p:blipFill>
-        <p:spPr>
-          <a:xfrm>
-            <a:off x="7507224" y="1426464"/>
-            <a:ext cx="438912" cy="438912"/>
-          </a:xfrm>
-          <a:prstGeom prst="rect">
-            <a:avLst/>
-          </a:prstGeom>
-        </p:spPr>
-      </p:pic>
-      <p:sp>
-        <p:nvSpPr>
-          <p:cNvPr id="24" name="Text 14"/>
-          <p:cNvSpPr txBox="1"/>
-          <p:nvPr/>
-        </p:nvSpPr>
-        <p:spPr>
-          <a:xfrm>
-            <a:off x="6858000" y="2194560"/>
-            <a:ext cx="1737360" cy="320040"/>
-          </a:xfrm>
-          <a:prstGeom prst="rect">
-            <a:avLst/>
-          </a:prstGeom>
-          <a:noFill/>
-          <a:ln/>
-        </p:spPr>
-        <p:txBody>
-          <a:bodyPr wrap="square" lIns="0" tIns="0" rIns="0" bIns="0" rtlCol="0" anchor="ctr"/>
-          <a:lstStyle/>
-          <a:p>
-            <a:pPr algn="ctr" indent="0" marL="0">
-              <a:buNone/>
-            </a:pPr>
-            <a:r>
-              <a:rPr lang="en-US" sz="1600" b="1" dirty="0">
-                <a:solidFill>
-                  <a:srgbClr val="000000"/>
-                </a:solidFill>
-                <a:latin typeface="Arial" pitchFamily="34" charset="0"/>
-                <a:ea typeface="Arial" pitchFamily="34" charset="-122"/>
-                <a:cs typeface="Arial" pitchFamily="34" charset="-120"/>
-              </a:rPr>
-              <a:t>Your GPU</a:t>
-            </a:r>
-            <a:endParaRPr lang="en-US" sz="1600" dirty="0"/>
-          </a:p>
-        </p:txBody>
-      </p:sp>
-      <p:sp>
-        <p:nvSpPr>
-          <p:cNvPr id="25" name="Text 15"/>
-          <p:cNvSpPr txBox="1"/>
-          <p:nvPr/>
-        </p:nvSpPr>
-        <p:spPr>
-          <a:xfrm>
-            <a:off x="6858000" y="2514600"/>
-            <a:ext cx="1737360" cy="274320"/>
-          </a:xfrm>
-          <a:prstGeom prst="rect">
-            <a:avLst/>
-          </a:prstGeom>
-          <a:noFill/>
-          <a:ln/>
-        </p:spPr>
-        <p:txBody>
-          <a:bodyPr wrap="square" lIns="0" tIns="0" rIns="0" bIns="0" rtlCol="0" anchor="ctr"/>
-          <a:lstStyle/>
-          <a:p>
-            <a:pPr algn="ctr" indent="0" marL="0">
-              <a:buNone/>
-            </a:pPr>
-            <a:r>
-              <a:rPr lang="en-US" sz="1100" dirty="0">
-                <a:solidFill>
-                  <a:srgbClr val="595959"/>
-                </a:solidFill>
-                <a:latin typeface="Arial" pitchFamily="34" charset="0"/>
-                <a:ea typeface="Arial" pitchFamily="34" charset="-122"/>
-                <a:cs typeface="Arial" pitchFamily="34" charset="-120"/>
-              </a:rPr>
-              <a:t>used far better</a:t>
-            </a:r>
-            <a:endParaRPr lang="en-US" sz="1100" dirty="0"/>
-          </a:p>
-        </p:txBody>
-      </p:sp>
-      <p:sp>
-        <p:nvSpPr>
-          <p:cNvPr id="26" name="Shape 16"/>
-          <p:cNvSpPr/>
-          <p:nvPr/>
-        </p:nvSpPr>
-        <p:spPr>
-          <a:xfrm>
-            <a:off x="457200" y="3063240"/>
-            <a:ext cx="2606040" cy="1508760"/>
+            <a:off x="2560320" y="1097280"/>
+            <a:ext cx="1737360" cy="1783080"/>
           </a:xfrm>
           <a:prstGeom prst="rect">
             <a:avLst/>
@@ -11030,32 +10126,56 @@
           </a:ln>
         </p:spPr>
       </p:sp>
-      <p:sp>
-        <p:nvSpPr>
-          <p:cNvPr id="27" name="Text 17"/>
-          <p:cNvSpPr txBox="1"/>
-          <p:nvPr/>
-        </p:nvSpPr>
-        <p:spPr>
-          <a:xfrm>
-            <a:off x="640080" y="3200400"/>
-            <a:ext cx="2240280" cy="274320"/>
-          </a:xfrm>
-          <a:prstGeom prst="rect">
-            <a:avLst/>
-          </a:prstGeom>
-          <a:noFill/>
-          <a:ln/>
-        </p:spPr>
-        <p:txBody>
-          <a:bodyPr wrap="square" lIns="0" tIns="0" rIns="0" bIns="0" rtlCol="0" anchor="ctr"/>
-          <a:lstStyle/>
-          <a:p>
-            <a:pPr indent="0" marL="0">
-              <a:buNone/>
-            </a:pPr>
-            <a:r>
-              <a:rPr lang="en-US" sz="1400" b="1" dirty="0">
+      <p:pic>
+        <p:nvPicPr>
+          <p:cNvPr id="12" name="Image 2" descr="preencoded.png">    </p:cNvPr>
+          <p:cNvPicPr>
+            <a:picLocks noChangeAspect="1"/>
+          </p:cNvPicPr>
+          <p:nvPr/>
+        </p:nvPicPr>
+        <p:blipFill>
+          <a:blip r:embed="rId3"/>
+          <a:stretch>
+            <a:fillRect/>
+          </a:stretch>
+        </p:blipFill>
+        <p:spPr>
+          <a:xfrm>
+            <a:off x="3108960" y="1280160"/>
+            <a:ext cx="640080" cy="640080"/>
+          </a:xfrm>
+          <a:prstGeom prst="rect">
+            <a:avLst/>
+          </a:prstGeom>
+        </p:spPr>
+      </p:pic>
+      <p:sp>
+        <p:nvSpPr>
+          <p:cNvPr id="13" name="Text 7"/>
+          <p:cNvSpPr txBox="1"/>
+          <p:nvPr/>
+        </p:nvSpPr>
+        <p:spPr>
+          <a:xfrm>
+            <a:off x="2560320" y="2194560"/>
+            <a:ext cx="1737360" cy="320040"/>
+          </a:xfrm>
+          <a:prstGeom prst="rect">
+            <a:avLst/>
+          </a:prstGeom>
+          <a:noFill/>
+          <a:ln/>
+        </p:spPr>
+        <p:txBody>
+          <a:bodyPr wrap="square" lIns="0" tIns="0" rIns="0" bIns="0" rtlCol="0" anchor="ctr"/>
+          <a:lstStyle/>
+          <a:p>
+            <a:pPr algn="ctr" indent="0" marL="0">
+              <a:buNone/>
+            </a:pPr>
+            <a:r>
+              <a:rPr lang="en-US" sz="1600" b="1" dirty="0">
                 <a:solidFill>
                   <a:srgbClr val="000000"/>
                 </a:solidFill>
@@ -11063,60 +10183,312 @@
                 <a:ea typeface="Arial" pitchFamily="34" charset="-122"/>
                 <a:cs typeface="Arial" pitchFamily="34" charset="-120"/>
               </a:rPr>
-              <a:t>Finds the best split</a:t>
-            </a:r>
-            <a:endParaRPr lang="en-US" sz="1400" dirty="0"/>
-          </a:p>
-        </p:txBody>
-      </p:sp>
-      <p:sp>
-        <p:nvSpPr>
-          <p:cNvPr id="28" name="Text 18"/>
-          <p:cNvSpPr txBox="1"/>
-          <p:nvPr/>
-        </p:nvSpPr>
-        <p:spPr>
-          <a:xfrm>
-            <a:off x="640080" y="3520440"/>
-            <a:ext cx="2240280" cy="1005840"/>
-          </a:xfrm>
-          <a:prstGeom prst="rect">
-            <a:avLst/>
-          </a:prstGeom>
-          <a:noFill/>
-          <a:ln/>
-        </p:spPr>
-        <p:txBody>
-          <a:bodyPr wrap="square" lIns="0" tIns="0" rIns="0" bIns="0" rtlCol="0" anchor="t"/>
-          <a:lstStyle/>
-          <a:p>
-            <a:pPr indent="0" marL="0">
-              <a:buNone/>
-            </a:pPr>
-            <a:r>
-              <a:rPr lang="en-US" sz="1200" dirty="0">
-                <a:solidFill>
-                  <a:srgbClr val="262626"/>
-                </a:solidFill>
-                <a:latin typeface="Arial" pitchFamily="34" charset="0"/>
-                <a:ea typeface="Arial" pitchFamily="34" charset="-122"/>
-                <a:cs typeface="Arial" pitchFamily="34" charset="-120"/>
-              </a:rPr>
-              <a:t>Decides how much of a model sits on the GPU and how much on the CPU, instead of Ollama's cautious default.</a:t>
-            </a:r>
-            <a:endParaRPr lang="en-US" sz="1200" dirty="0"/>
-          </a:p>
-        </p:txBody>
-      </p:sp>
-      <p:sp>
-        <p:nvSpPr>
-          <p:cNvPr id="29" name="Shape 19"/>
+              <a:t>Ramer</a:t>
+            </a:r>
+            <a:endParaRPr lang="en-US" sz="1600" dirty="0"/>
+          </a:p>
+        </p:txBody>
+      </p:sp>
+      <p:sp>
+        <p:nvSpPr>
+          <p:cNvPr id="14" name="Text 8"/>
+          <p:cNvSpPr txBox="1"/>
+          <p:nvPr/>
+        </p:nvSpPr>
+        <p:spPr>
+          <a:xfrm>
+            <a:off x="2560320" y="2514600"/>
+            <a:ext cx="1737360" cy="274320"/>
+          </a:xfrm>
+          <a:prstGeom prst="rect">
+            <a:avLst/>
+          </a:prstGeom>
+          <a:noFill/>
+          <a:ln/>
+        </p:spPr>
+        <p:txBody>
+          <a:bodyPr wrap="square" lIns="0" tIns="0" rIns="0" bIns="0" rtlCol="0" anchor="ctr"/>
+          <a:lstStyle/>
+          <a:p>
+            <a:pPr algn="ctr" indent="0" marL="0">
+              <a:buNone/>
+            </a:pPr>
+            <a:r>
+              <a:rPr lang="en-US" sz="1100" dirty="0">
+                <a:solidFill>
+                  <a:srgbClr val="595959"/>
+                </a:solidFill>
+                <a:latin typeface="Arial" pitchFamily="34" charset="0"/>
+                <a:ea typeface="Arial" pitchFamily="34" charset="-122"/>
+                <a:cs typeface="Arial" pitchFamily="34" charset="-120"/>
+              </a:rPr>
+              <a:t>the new middle layer</a:t>
+            </a:r>
+            <a:endParaRPr lang="en-US" sz="1100" dirty="0"/>
+          </a:p>
+        </p:txBody>
+      </p:sp>
+      <p:pic>
+        <p:nvPicPr>
+          <p:cNvPr id="15" name="Image 3" descr="preencoded.png">    </p:cNvPr>
+          <p:cNvPicPr>
+            <a:picLocks noChangeAspect="1"/>
+          </p:cNvPicPr>
+          <p:nvPr/>
+        </p:nvPicPr>
+        <p:blipFill>
+          <a:blip r:embed="rId4"/>
+          <a:stretch>
+            <a:fillRect/>
+          </a:stretch>
+        </p:blipFill>
+        <p:spPr>
+          <a:xfrm>
+            <a:off x="4251960" y="1499616"/>
+            <a:ext cx="274320" cy="274320"/>
+          </a:xfrm>
+          <a:prstGeom prst="rect">
+            <a:avLst/>
+          </a:prstGeom>
+        </p:spPr>
+      </p:pic>
+      <p:pic>
+        <p:nvPicPr>
+          <p:cNvPr id="16" name="Image 4" descr="preencoded.png">    </p:cNvPr>
+          <p:cNvPicPr>
+            <a:picLocks noChangeAspect="1"/>
+          </p:cNvPicPr>
+          <p:nvPr/>
+        </p:nvPicPr>
+        <p:blipFill>
+          <a:blip r:embed="rId5"/>
+          <a:stretch>
+            <a:fillRect/>
+          </a:stretch>
+        </p:blipFill>
+        <p:spPr>
+          <a:xfrm>
+            <a:off x="5257800" y="1280160"/>
+            <a:ext cx="640080" cy="640080"/>
+          </a:xfrm>
+          <a:prstGeom prst="rect">
+            <a:avLst/>
+          </a:prstGeom>
+        </p:spPr>
+      </p:pic>
+      <p:sp>
+        <p:nvSpPr>
+          <p:cNvPr id="17" name="Text 9"/>
+          <p:cNvSpPr txBox="1"/>
+          <p:nvPr/>
+        </p:nvSpPr>
+        <p:spPr>
+          <a:xfrm>
+            <a:off x="4709160" y="2194560"/>
+            <a:ext cx="1737360" cy="320040"/>
+          </a:xfrm>
+          <a:prstGeom prst="rect">
+            <a:avLst/>
+          </a:prstGeom>
+          <a:noFill/>
+          <a:ln/>
+        </p:spPr>
+        <p:txBody>
+          <a:bodyPr wrap="square" lIns="0" tIns="0" rIns="0" bIns="0" rtlCol="0" anchor="ctr"/>
+          <a:lstStyle/>
+          <a:p>
+            <a:pPr algn="ctr" indent="0" marL="0">
+              <a:buNone/>
+            </a:pPr>
+            <a:r>
+              <a:rPr lang="en-US" sz="1600" b="1" dirty="0">
+                <a:solidFill>
+                  <a:srgbClr val="000000"/>
+                </a:solidFill>
+                <a:latin typeface="Arial" pitchFamily="34" charset="0"/>
+                <a:ea typeface="Arial" pitchFamily="34" charset="-122"/>
+                <a:cs typeface="Arial" pitchFamily="34" charset="-120"/>
+              </a:rPr>
+              <a:t>Ollama</a:t>
+            </a:r>
+            <a:endParaRPr lang="en-US" sz="1600" dirty="0"/>
+          </a:p>
+        </p:txBody>
+      </p:sp>
+      <p:sp>
+        <p:nvSpPr>
+          <p:cNvPr id="18" name="Text 10"/>
+          <p:cNvSpPr txBox="1"/>
+          <p:nvPr/>
+        </p:nvSpPr>
+        <p:spPr>
+          <a:xfrm>
+            <a:off x="4709160" y="2514600"/>
+            <a:ext cx="1737360" cy="274320"/>
+          </a:xfrm>
+          <a:prstGeom prst="rect">
+            <a:avLst/>
+          </a:prstGeom>
+          <a:noFill/>
+          <a:ln/>
+        </p:spPr>
+        <p:txBody>
+          <a:bodyPr wrap="square" lIns="0" tIns="0" rIns="0" bIns="0" rtlCol="0" anchor="ctr"/>
+          <a:lstStyle/>
+          <a:p>
+            <a:pPr algn="ctr" indent="0" marL="0">
+              <a:buNone/>
+            </a:pPr>
+            <a:r>
+              <a:rPr lang="en-US" sz="1100" dirty="0">
+                <a:solidFill>
+                  <a:srgbClr val="595959"/>
+                </a:solidFill>
+                <a:latin typeface="Arial" pitchFamily="34" charset="0"/>
+                <a:ea typeface="Arial" pitchFamily="34" charset="-122"/>
+                <a:cs typeface="Arial" pitchFamily="34" charset="-120"/>
+              </a:rPr>
+              <a:t>runs the model</a:t>
+            </a:r>
+            <a:endParaRPr lang="en-US" sz="1100" dirty="0"/>
+          </a:p>
+        </p:txBody>
+      </p:sp>
+      <p:pic>
+        <p:nvPicPr>
+          <p:cNvPr id="19" name="Image 5" descr="preencoded.png">    </p:cNvPr>
+          <p:cNvPicPr>
+            <a:picLocks noChangeAspect="1"/>
+          </p:cNvPicPr>
+          <p:nvPr/>
+        </p:nvPicPr>
+        <p:blipFill>
+          <a:blip r:embed="rId6"/>
+          <a:stretch>
+            <a:fillRect/>
+          </a:stretch>
+        </p:blipFill>
+        <p:spPr>
+          <a:xfrm>
+            <a:off x="6400800" y="1499616"/>
+            <a:ext cx="274320" cy="274320"/>
+          </a:xfrm>
+          <a:prstGeom prst="rect">
+            <a:avLst/>
+          </a:prstGeom>
+        </p:spPr>
+      </p:pic>
+      <p:pic>
+        <p:nvPicPr>
+          <p:cNvPr id="20" name="Image 6" descr="preencoded.png">    </p:cNvPr>
+          <p:cNvPicPr>
+            <a:picLocks noChangeAspect="1"/>
+          </p:cNvPicPr>
+          <p:nvPr/>
+        </p:nvPicPr>
+        <p:blipFill>
+          <a:blip r:embed="rId7"/>
+          <a:stretch>
+            <a:fillRect/>
+          </a:stretch>
+        </p:blipFill>
+        <p:spPr>
+          <a:xfrm>
+            <a:off x="7406640" y="1280160"/>
+            <a:ext cx="640080" cy="640080"/>
+          </a:xfrm>
+          <a:prstGeom prst="rect">
+            <a:avLst/>
+          </a:prstGeom>
+        </p:spPr>
+      </p:pic>
+      <p:sp>
+        <p:nvSpPr>
+          <p:cNvPr id="21" name="Text 11"/>
+          <p:cNvSpPr txBox="1"/>
+          <p:nvPr/>
+        </p:nvSpPr>
+        <p:spPr>
+          <a:xfrm>
+            <a:off x="6858000" y="2194560"/>
+            <a:ext cx="1737360" cy="320040"/>
+          </a:xfrm>
+          <a:prstGeom prst="rect">
+            <a:avLst/>
+          </a:prstGeom>
+          <a:noFill/>
+          <a:ln/>
+        </p:spPr>
+        <p:txBody>
+          <a:bodyPr wrap="square" lIns="0" tIns="0" rIns="0" bIns="0" rtlCol="0" anchor="ctr"/>
+          <a:lstStyle/>
+          <a:p>
+            <a:pPr algn="ctr" indent="0" marL="0">
+              <a:buNone/>
+            </a:pPr>
+            <a:r>
+              <a:rPr lang="en-US" sz="1600" b="1" dirty="0">
+                <a:solidFill>
+                  <a:srgbClr val="000000"/>
+                </a:solidFill>
+                <a:latin typeface="Arial" pitchFamily="34" charset="0"/>
+                <a:ea typeface="Arial" pitchFamily="34" charset="-122"/>
+                <a:cs typeface="Arial" pitchFamily="34" charset="-120"/>
+              </a:rPr>
+              <a:t>Your GPU</a:t>
+            </a:r>
+            <a:endParaRPr lang="en-US" sz="1600" dirty="0"/>
+          </a:p>
+        </p:txBody>
+      </p:sp>
+      <p:sp>
+        <p:nvSpPr>
+          <p:cNvPr id="22" name="Text 12"/>
+          <p:cNvSpPr txBox="1"/>
+          <p:nvPr/>
+        </p:nvSpPr>
+        <p:spPr>
+          <a:xfrm>
+            <a:off x="6858000" y="2514600"/>
+            <a:ext cx="1737360" cy="274320"/>
+          </a:xfrm>
+          <a:prstGeom prst="rect">
+            <a:avLst/>
+          </a:prstGeom>
+          <a:noFill/>
+          <a:ln/>
+        </p:spPr>
+        <p:txBody>
+          <a:bodyPr wrap="square" lIns="0" tIns="0" rIns="0" bIns="0" rtlCol="0" anchor="ctr"/>
+          <a:lstStyle/>
+          <a:p>
+            <a:pPr algn="ctr" indent="0" marL="0">
+              <a:buNone/>
+            </a:pPr>
+            <a:r>
+              <a:rPr lang="en-US" sz="1100" dirty="0">
+                <a:solidFill>
+                  <a:srgbClr val="595959"/>
+                </a:solidFill>
+                <a:latin typeface="Arial" pitchFamily="34" charset="0"/>
+                <a:ea typeface="Arial" pitchFamily="34" charset="-122"/>
+                <a:cs typeface="Arial" pitchFamily="34" charset="-120"/>
+              </a:rPr>
+              <a:t>used far better</a:t>
+            </a:r>
+            <a:endParaRPr lang="en-US" sz="1100" dirty="0"/>
+          </a:p>
+        </p:txBody>
+      </p:sp>
+      <p:sp>
+        <p:nvSpPr>
+          <p:cNvPr id="23" name="Shape 13"/>
           <p:cNvSpPr/>
           <p:nvPr/>
         </p:nvSpPr>
         <p:spPr>
           <a:xfrm>
-            <a:off x="3246120" y="3063240"/>
+            <a:off x="457200" y="3063240"/>
             <a:ext cx="2606040" cy="1508760"/>
           </a:xfrm>
           <a:prstGeom prst="rect">
@@ -11135,13 +10507,13 @@
       </p:sp>
       <p:sp>
         <p:nvSpPr>
-          <p:cNvPr id="30" name="Text 20"/>
-          <p:cNvSpPr txBox="1"/>
-          <p:nvPr/>
-        </p:nvSpPr>
-        <p:spPr>
-          <a:xfrm>
-            <a:off x="3429000" y="3200400"/>
+          <p:cNvPr id="24" name="Text 14"/>
+          <p:cNvSpPr txBox="1"/>
+          <p:nvPr/>
+        </p:nvSpPr>
+        <p:spPr>
+          <a:xfrm>
+            <a:off x="640080" y="3200400"/>
             <a:ext cx="2240280" cy="274320"/>
           </a:xfrm>
           <a:prstGeom prst="rect">
@@ -11166,7 +10538,7 @@
                 <a:ea typeface="Arial" pitchFamily="34" charset="-122"/>
                 <a:cs typeface="Arial" pitchFamily="34" charset="-120"/>
               </a:rPr>
-              <a:t>Shares the GPU fairly</a:t>
+              <a:t>Finds the best split</a:t>
             </a:r>
             <a:endParaRPr lang="en-US" sz="1400" dirty="0"/>
           </a:p>
@@ -11174,13 +10546,13 @@
       </p:sp>
       <p:sp>
         <p:nvSpPr>
-          <p:cNvPr id="31" name="Text 21"/>
-          <p:cNvSpPr txBox="1"/>
-          <p:nvPr/>
-        </p:nvSpPr>
-        <p:spPr>
-          <a:xfrm>
-            <a:off x="3429000" y="3520440"/>
+          <p:cNvPr id="25" name="Text 15"/>
+          <p:cNvSpPr txBox="1"/>
+          <p:nvPr/>
+        </p:nvSpPr>
+        <p:spPr>
+          <a:xfrm>
+            <a:off x="640080" y="3520440"/>
             <a:ext cx="2240280" cy="1005840"/>
           </a:xfrm>
           <a:prstGeom prst="rect">
@@ -11205,7 +10577,7 @@
                 <a:ea typeface="Arial" pitchFamily="34" charset="-122"/>
                 <a:cs typeface="Arial" pitchFamily="34" charset="-120"/>
               </a:rPr>
-              <a:t>When several agents want the GPU at once, Ramer lines them up so models are not constantly swapped out.</a:t>
+              <a:t>Decides how much of a model sits on the GPU and how much on the CPU, instead of Ollama's cautious default.</a:t>
             </a:r>
             <a:endParaRPr lang="en-US" sz="1200" dirty="0"/>
           </a:p>
@@ -11213,13 +10585,13 @@
       </p:sp>
       <p:sp>
         <p:nvSpPr>
-          <p:cNvPr id="32" name="Shape 22"/>
+          <p:cNvPr id="26" name="Shape 16"/>
           <p:cNvSpPr/>
           <p:nvPr/>
         </p:nvSpPr>
         <p:spPr>
           <a:xfrm>
-            <a:off x="6035040" y="3063240"/>
+            <a:off x="3246120" y="3063240"/>
             <a:ext cx="2606040" cy="1508760"/>
           </a:xfrm>
           <a:prstGeom prst="rect">
@@ -11238,7 +10610,110 @@
       </p:sp>
       <p:sp>
         <p:nvSpPr>
-          <p:cNvPr id="33" name="Text 23"/>
+          <p:cNvPr id="27" name="Text 17"/>
+          <p:cNvSpPr txBox="1"/>
+          <p:nvPr/>
+        </p:nvSpPr>
+        <p:spPr>
+          <a:xfrm>
+            <a:off x="3429000" y="3200400"/>
+            <a:ext cx="2240280" cy="274320"/>
+          </a:xfrm>
+          <a:prstGeom prst="rect">
+            <a:avLst/>
+          </a:prstGeom>
+          <a:noFill/>
+          <a:ln/>
+        </p:spPr>
+        <p:txBody>
+          <a:bodyPr wrap="square" lIns="0" tIns="0" rIns="0" bIns="0" rtlCol="0" anchor="ctr"/>
+          <a:lstStyle/>
+          <a:p>
+            <a:pPr indent="0" marL="0">
+              <a:buNone/>
+            </a:pPr>
+            <a:r>
+              <a:rPr lang="en-US" sz="1400" b="1" dirty="0">
+                <a:solidFill>
+                  <a:srgbClr val="000000"/>
+                </a:solidFill>
+                <a:latin typeface="Arial" pitchFamily="34" charset="0"/>
+                <a:ea typeface="Arial" pitchFamily="34" charset="-122"/>
+                <a:cs typeface="Arial" pitchFamily="34" charset="-120"/>
+              </a:rPr>
+              <a:t>Shares the GPU fairly</a:t>
+            </a:r>
+            <a:endParaRPr lang="en-US" sz="1400" dirty="0"/>
+          </a:p>
+        </p:txBody>
+      </p:sp>
+      <p:sp>
+        <p:nvSpPr>
+          <p:cNvPr id="28" name="Text 18"/>
+          <p:cNvSpPr txBox="1"/>
+          <p:nvPr/>
+        </p:nvSpPr>
+        <p:spPr>
+          <a:xfrm>
+            <a:off x="3429000" y="3520440"/>
+            <a:ext cx="2240280" cy="1005840"/>
+          </a:xfrm>
+          <a:prstGeom prst="rect">
+            <a:avLst/>
+          </a:prstGeom>
+          <a:noFill/>
+          <a:ln/>
+        </p:spPr>
+        <p:txBody>
+          <a:bodyPr wrap="square" lIns="0" tIns="0" rIns="0" bIns="0" rtlCol="0" anchor="t"/>
+          <a:lstStyle/>
+          <a:p>
+            <a:pPr indent="0" marL="0">
+              <a:buNone/>
+            </a:pPr>
+            <a:r>
+              <a:rPr lang="en-US" sz="1200" dirty="0">
+                <a:solidFill>
+                  <a:srgbClr val="262626"/>
+                </a:solidFill>
+                <a:latin typeface="Arial" pitchFamily="34" charset="0"/>
+                <a:ea typeface="Arial" pitchFamily="34" charset="-122"/>
+                <a:cs typeface="Arial" pitchFamily="34" charset="-120"/>
+              </a:rPr>
+              <a:t>When several agents want the GPU at once, Ramer lines them up so models are not constantly swapped out.</a:t>
+            </a:r>
+            <a:endParaRPr lang="en-US" sz="1200" dirty="0"/>
+          </a:p>
+        </p:txBody>
+      </p:sp>
+      <p:sp>
+        <p:nvSpPr>
+          <p:cNvPr id="29" name="Shape 19"/>
+          <p:cNvSpPr/>
+          <p:nvPr/>
+        </p:nvSpPr>
+        <p:spPr>
+          <a:xfrm>
+            <a:off x="6035040" y="3063240"/>
+            <a:ext cx="2606040" cy="1508760"/>
+          </a:xfrm>
+          <a:prstGeom prst="rect">
+            <a:avLst/>
+          </a:prstGeom>
+          <a:solidFill>
+            <a:srgbClr val="F2F2F2"/>
+          </a:solidFill>
+          <a:ln w="12700">
+            <a:solidFill>
+              <a:srgbClr val="F2F2F2"/>
+            </a:solidFill>
+            <a:prstDash val="solid"/>
+          </a:ln>
+        </p:spPr>
+      </p:sp>
+      <p:sp>
+        <p:nvSpPr>
+          <p:cNvPr id="30" name="Text 20"/>
           <p:cNvSpPr txBox="1"/>
           <p:nvPr/>
         </p:nvSpPr>
@@ -11277,7 +10752,7 @@
       </p:sp>
       <p:sp>
         <p:nvSpPr>
-          <p:cNvPr id="34" name="Text 24"/>
+          <p:cNvPr id="31" name="Text 21"/>
           <p:cNvSpPr txBox="1"/>
           <p:nvPr/>
         </p:nvSpPr>
@@ -11527,34 +11002,9 @@
           </a:ln>
         </p:spPr>
       </p:sp>
-      <p:sp>
-        <p:nvSpPr>
-          <p:cNvPr id="8" name="Shape 5"/>
-          <p:cNvSpPr/>
-          <p:nvPr/>
-        </p:nvSpPr>
-        <p:spPr>
-          <a:xfrm>
-            <a:off x="731520" y="1417320"/>
-            <a:ext cx="548640" cy="548640"/>
-          </a:xfrm>
-          <a:prstGeom prst="ellipse">
-            <a:avLst/>
-          </a:prstGeom>
-          <a:solidFill>
-            <a:srgbClr val="FFFFFF"/>
-          </a:solidFill>
-          <a:ln w="12700">
-            <a:solidFill>
-              <a:srgbClr val="FFFFFF"/>
-            </a:solidFill>
-            <a:prstDash val="solid"/>
-          </a:ln>
-        </p:spPr>
-      </p:sp>
       <p:pic>
         <p:nvPicPr>
-          <p:cNvPr id="9" name="Image 0" descr="preencoded.png">    </p:cNvPr>
+          <p:cNvPr id="8" name="Image 0" descr="preencoded.png">    </p:cNvPr>
           <p:cNvPicPr>
             <a:picLocks noChangeAspect="1"/>
           </p:cNvPicPr>
@@ -11568,8 +11018,8 @@
         </p:blipFill>
         <p:spPr>
           <a:xfrm>
-            <a:off x="874166" y="1559966"/>
-            <a:ext cx="263347" cy="263347"/>
+            <a:off x="731520" y="1527048"/>
+            <a:ext cx="329184" cy="329184"/>
           </a:xfrm>
           <a:prstGeom prst="rect">
             <a:avLst/>
@@ -11578,7 +11028,7 @@
       </p:pic>
       <p:sp>
         <p:nvSpPr>
-          <p:cNvPr id="10" name="Text 6"/>
+          <p:cNvPr id="9" name="Text 5"/>
           <p:cNvSpPr txBox="1"/>
           <p:nvPr/>
         </p:nvSpPr>
@@ -11617,7 +11067,7 @@
       </p:sp>
       <p:sp>
         <p:nvSpPr>
-          <p:cNvPr id="11" name="Text 7"/>
+          <p:cNvPr id="10" name="Text 6"/>
           <p:cNvSpPr txBox="1"/>
           <p:nvPr/>
         </p:nvSpPr>
@@ -11702,7 +11152,7 @@
       </p:sp>
       <p:sp>
         <p:nvSpPr>
-          <p:cNvPr id="12" name="Shape 8"/>
+          <p:cNvPr id="11" name="Shape 7"/>
           <p:cNvSpPr/>
           <p:nvPr/>
         </p:nvSpPr>
@@ -11725,34 +11175,9 @@
           </a:ln>
         </p:spPr>
       </p:sp>
-      <p:sp>
-        <p:nvSpPr>
-          <p:cNvPr id="13" name="Shape 9"/>
-          <p:cNvSpPr/>
-          <p:nvPr/>
-        </p:nvSpPr>
-        <p:spPr>
-          <a:xfrm>
-            <a:off x="4937760" y="1417320"/>
-            <a:ext cx="548640" cy="548640"/>
-          </a:xfrm>
-          <a:prstGeom prst="ellipse">
-            <a:avLst/>
-          </a:prstGeom>
-          <a:solidFill>
-            <a:srgbClr val="000000"/>
-          </a:solidFill>
-          <a:ln w="12700">
-            <a:solidFill>
-              <a:srgbClr val="000000"/>
-            </a:solidFill>
-            <a:prstDash val="solid"/>
-          </a:ln>
-        </p:spPr>
-      </p:sp>
       <p:pic>
         <p:nvPicPr>
-          <p:cNvPr id="14" name="Image 1" descr="preencoded.png">    </p:cNvPr>
+          <p:cNvPr id="12" name="Image 1" descr="preencoded.png">    </p:cNvPr>
           <p:cNvPicPr>
             <a:picLocks noChangeAspect="1"/>
           </p:cNvPicPr>
@@ -11766,8 +11191,8 @@
         </p:blipFill>
         <p:spPr>
           <a:xfrm>
-            <a:off x="5080406" y="1559966"/>
-            <a:ext cx="263347" cy="263347"/>
+            <a:off x="4937760" y="1527048"/>
+            <a:ext cx="329184" cy="329184"/>
           </a:xfrm>
           <a:prstGeom prst="rect">
             <a:avLst/>
@@ -11776,7 +11201,7 @@
       </p:pic>
       <p:sp>
         <p:nvSpPr>
-          <p:cNvPr id="15" name="Text 10"/>
+          <p:cNvPr id="13" name="Text 8"/>
           <p:cNvSpPr txBox="1"/>
           <p:nvPr/>
         </p:nvSpPr>
@@ -11815,7 +11240,7 @@
       </p:sp>
       <p:sp>
         <p:nvSpPr>
-          <p:cNvPr id="16" name="Text 11"/>
+          <p:cNvPr id="14" name="Text 9"/>
           <p:cNvSpPr txBox="1"/>
           <p:nvPr/>
         </p:nvSpPr>
@@ -12088,55 +11513,81 @@
       </p:sp>
       <p:sp>
         <p:nvSpPr>
-          <p:cNvPr id="7" name="Shape 4"/>
-          <p:cNvSpPr/>
-          <p:nvPr/>
-        </p:nvSpPr>
-        <p:spPr>
-          <a:xfrm>
-            <a:off x="1051560" y="1554480"/>
-            <a:ext cx="2560320" cy="2560320"/>
-          </a:xfrm>
-          <a:prstGeom prst="ellipse">
-            <a:avLst/>
-          </a:prstGeom>
-          <a:solidFill>
-            <a:srgbClr val="FFFFFF">
-              <a:alpha val="0"/>
-            </a:srgbClr>
-          </a:solidFill>
-          <a:ln w="19050">
-            <a:solidFill>
-              <a:srgbClr val="BFBFBF"/>
-            </a:solidFill>
-            <a:prstDash val="dash"/>
-          </a:ln>
-        </p:spPr>
-      </p:sp>
-      <p:sp>
-        <p:nvSpPr>
-          <p:cNvPr id="8" name="Shape 5"/>
-          <p:cNvSpPr/>
-          <p:nvPr/>
-        </p:nvSpPr>
-        <p:spPr>
-          <a:xfrm>
-            <a:off x="2011680" y="1234440"/>
-            <a:ext cx="640080" cy="640080"/>
-          </a:xfrm>
-          <a:prstGeom prst="ellipse">
-            <a:avLst/>
-          </a:prstGeom>
-          <a:solidFill>
-            <a:srgbClr val="000000"/>
-          </a:solidFill>
-          <a:ln w="12700">
-            <a:solidFill>
-              <a:srgbClr val="000000"/>
-            </a:solidFill>
-            <a:prstDash val="solid"/>
-          </a:ln>
-        </p:spPr>
+          <p:cNvPr id="7" name="Text 4"/>
+          <p:cNvSpPr txBox="1"/>
+          <p:nvPr/>
+        </p:nvSpPr>
+        <p:spPr>
+          <a:xfrm>
+            <a:off x="457200" y="1234440"/>
+            <a:ext cx="548640" cy="411480"/>
+          </a:xfrm>
+          <a:prstGeom prst="rect">
+            <a:avLst/>
+          </a:prstGeom>
+          <a:noFill/>
+          <a:ln/>
+        </p:spPr>
+        <p:txBody>
+          <a:bodyPr wrap="square" lIns="0" tIns="0" rIns="0" bIns="0" rtlCol="0" anchor="ctr"/>
+          <a:lstStyle/>
+          <a:p>
+            <a:pPr indent="0" marL="0">
+              <a:buNone/>
+            </a:pPr>
+            <a:r>
+              <a:rPr lang="en-US" sz="1400" b="1" dirty="0">
+                <a:solidFill>
+                  <a:srgbClr val="8C8C8C"/>
+                </a:solidFill>
+                <a:latin typeface="Arial" pitchFamily="34" charset="0"/>
+                <a:ea typeface="Arial" pitchFamily="34" charset="-122"/>
+                <a:cs typeface="Arial" pitchFamily="34" charset="-120"/>
+              </a:rPr>
+              <a:t>01</a:t>
+            </a:r>
+            <a:endParaRPr lang="en-US" sz="1400" dirty="0"/>
+          </a:p>
+        </p:txBody>
+      </p:sp>
+      <p:sp>
+        <p:nvSpPr>
+          <p:cNvPr id="8" name="Text 5"/>
+          <p:cNvSpPr txBox="1"/>
+          <p:nvPr/>
+        </p:nvSpPr>
+        <p:spPr>
+          <a:xfrm>
+            <a:off x="1005840" y="1234440"/>
+            <a:ext cx="2103120" cy="411480"/>
+          </a:xfrm>
+          <a:prstGeom prst="rect">
+            <a:avLst/>
+          </a:prstGeom>
+          <a:noFill/>
+          <a:ln/>
+        </p:spPr>
+        <p:txBody>
+          <a:bodyPr wrap="square" lIns="0" tIns="0" rIns="0" bIns="0" rtlCol="0" anchor="ctr"/>
+          <a:lstStyle/>
+          <a:p>
+            <a:pPr indent="0" marL="0">
+              <a:buNone/>
+            </a:pPr>
+            <a:r>
+              <a:rPr lang="en-US" sz="2000" b="1" dirty="0">
+                <a:solidFill>
+                  <a:srgbClr val="000000"/>
+                </a:solidFill>
+                <a:latin typeface="Arial" pitchFamily="34" charset="0"/>
+                <a:ea typeface="Arial" pitchFamily="34" charset="-122"/>
+                <a:cs typeface="Arial" pitchFamily="34" charset="-120"/>
+              </a:rPr>
+              <a:t>Empathize</a:t>
+            </a:r>
+            <a:endParaRPr lang="en-US" sz="2000" dirty="0"/>
+          </a:p>
+        </p:txBody>
       </p:sp>
       <p:pic>
         <p:nvPicPr>
@@ -12154,8 +11605,8 @@
         </p:blipFill>
         <p:spPr>
           <a:xfrm>
-            <a:off x="2178101" y="1400861"/>
-            <a:ext cx="307238" cy="307238"/>
+            <a:off x="3246120" y="1298448"/>
+            <a:ext cx="292608" cy="292608"/>
           </a:xfrm>
           <a:prstGeom prst="rect">
             <a:avLst/>
@@ -12164,32 +11615,85 @@
       </p:pic>
       <p:sp>
         <p:nvSpPr>
-          <p:cNvPr id="10" name="Shape 6"/>
-          <p:cNvSpPr/>
-          <p:nvPr/>
-        </p:nvSpPr>
-        <p:spPr>
-          <a:xfrm>
-            <a:off x="3229185" y="2119009"/>
-            <a:ext cx="640080" cy="640080"/>
-          </a:xfrm>
-          <a:prstGeom prst="ellipse">
-            <a:avLst/>
-          </a:prstGeom>
-          <a:solidFill>
-            <a:srgbClr val="000000"/>
-          </a:solidFill>
-          <a:ln w="12700">
-            <a:solidFill>
-              <a:srgbClr val="000000"/>
-            </a:solidFill>
-            <a:prstDash val="solid"/>
-          </a:ln>
-        </p:spPr>
+          <p:cNvPr id="10" name="Text 6"/>
+          <p:cNvSpPr txBox="1"/>
+          <p:nvPr/>
+        </p:nvSpPr>
+        <p:spPr>
+          <a:xfrm>
+            <a:off x="457200" y="1783080"/>
+            <a:ext cx="548640" cy="411480"/>
+          </a:xfrm>
+          <a:prstGeom prst="rect">
+            <a:avLst/>
+          </a:prstGeom>
+          <a:noFill/>
+          <a:ln/>
+        </p:spPr>
+        <p:txBody>
+          <a:bodyPr wrap="square" lIns="0" tIns="0" rIns="0" bIns="0" rtlCol="0" anchor="ctr"/>
+          <a:lstStyle/>
+          <a:p>
+            <a:pPr indent="0" marL="0">
+              <a:buNone/>
+            </a:pPr>
+            <a:r>
+              <a:rPr lang="en-US" sz="1400" b="1" dirty="0">
+                <a:solidFill>
+                  <a:srgbClr val="8C8C8C"/>
+                </a:solidFill>
+                <a:latin typeface="Arial" pitchFamily="34" charset="0"/>
+                <a:ea typeface="Arial" pitchFamily="34" charset="-122"/>
+                <a:cs typeface="Arial" pitchFamily="34" charset="-120"/>
+              </a:rPr>
+              <a:t>02</a:t>
+            </a:r>
+            <a:endParaRPr lang="en-US" sz="1400" dirty="0"/>
+          </a:p>
+        </p:txBody>
+      </p:sp>
+      <p:sp>
+        <p:nvSpPr>
+          <p:cNvPr id="11" name="Text 7"/>
+          <p:cNvSpPr txBox="1"/>
+          <p:nvPr/>
+        </p:nvSpPr>
+        <p:spPr>
+          <a:xfrm>
+            <a:off x="1005840" y="1783080"/>
+            <a:ext cx="2103120" cy="411480"/>
+          </a:xfrm>
+          <a:prstGeom prst="rect">
+            <a:avLst/>
+          </a:prstGeom>
+          <a:noFill/>
+          <a:ln/>
+        </p:spPr>
+        <p:txBody>
+          <a:bodyPr wrap="square" lIns="0" tIns="0" rIns="0" bIns="0" rtlCol="0" anchor="ctr"/>
+          <a:lstStyle/>
+          <a:p>
+            <a:pPr indent="0" marL="0">
+              <a:buNone/>
+            </a:pPr>
+            <a:r>
+              <a:rPr lang="en-US" sz="2000" b="1" dirty="0">
+                <a:solidFill>
+                  <a:srgbClr val="000000"/>
+                </a:solidFill>
+                <a:latin typeface="Arial" pitchFamily="34" charset="0"/>
+                <a:ea typeface="Arial" pitchFamily="34" charset="-122"/>
+                <a:cs typeface="Arial" pitchFamily="34" charset="-120"/>
+              </a:rPr>
+              <a:t>Define</a:t>
+            </a:r>
+            <a:endParaRPr lang="en-US" sz="2000" dirty="0"/>
+          </a:p>
+        </p:txBody>
       </p:sp>
       <p:pic>
         <p:nvPicPr>
-          <p:cNvPr id="11" name="Image 1" descr="preencoded.png">    </p:cNvPr>
+          <p:cNvPr id="12" name="Image 1" descr="preencoded.png">    </p:cNvPr>
           <p:cNvPicPr>
             <a:picLocks noChangeAspect="1"/>
           </p:cNvPicPr>
@@ -12203,8 +11707,8 @@
         </p:blipFill>
         <p:spPr>
           <a:xfrm>
-            <a:off x="3395605" y="2285430"/>
-            <a:ext cx="307238" cy="307238"/>
+            <a:off x="3246120" y="1847088"/>
+            <a:ext cx="292608" cy="292608"/>
           </a:xfrm>
           <a:prstGeom prst="rect">
             <a:avLst/>
@@ -12213,32 +11717,85 @@
       </p:pic>
       <p:sp>
         <p:nvSpPr>
-          <p:cNvPr id="12" name="Shape 7"/>
-          <p:cNvSpPr/>
-          <p:nvPr/>
-        </p:nvSpPr>
-        <p:spPr>
-          <a:xfrm>
-            <a:off x="2764139" y="3550271"/>
-            <a:ext cx="640080" cy="640080"/>
-          </a:xfrm>
-          <a:prstGeom prst="ellipse">
-            <a:avLst/>
-          </a:prstGeom>
-          <a:solidFill>
-            <a:srgbClr val="000000"/>
-          </a:solidFill>
-          <a:ln w="12700">
-            <a:solidFill>
-              <a:srgbClr val="000000"/>
-            </a:solidFill>
-            <a:prstDash val="solid"/>
-          </a:ln>
-        </p:spPr>
+          <p:cNvPr id="13" name="Text 8"/>
+          <p:cNvSpPr txBox="1"/>
+          <p:nvPr/>
+        </p:nvSpPr>
+        <p:spPr>
+          <a:xfrm>
+            <a:off x="457200" y="2331720"/>
+            <a:ext cx="548640" cy="411480"/>
+          </a:xfrm>
+          <a:prstGeom prst="rect">
+            <a:avLst/>
+          </a:prstGeom>
+          <a:noFill/>
+          <a:ln/>
+        </p:spPr>
+        <p:txBody>
+          <a:bodyPr wrap="square" lIns="0" tIns="0" rIns="0" bIns="0" rtlCol="0" anchor="ctr"/>
+          <a:lstStyle/>
+          <a:p>
+            <a:pPr indent="0" marL="0">
+              <a:buNone/>
+            </a:pPr>
+            <a:r>
+              <a:rPr lang="en-US" sz="1400" b="1" dirty="0">
+                <a:solidFill>
+                  <a:srgbClr val="8C8C8C"/>
+                </a:solidFill>
+                <a:latin typeface="Arial" pitchFamily="34" charset="0"/>
+                <a:ea typeface="Arial" pitchFamily="34" charset="-122"/>
+                <a:cs typeface="Arial" pitchFamily="34" charset="-120"/>
+              </a:rPr>
+              <a:t>03</a:t>
+            </a:r>
+            <a:endParaRPr lang="en-US" sz="1400" dirty="0"/>
+          </a:p>
+        </p:txBody>
+      </p:sp>
+      <p:sp>
+        <p:nvSpPr>
+          <p:cNvPr id="14" name="Text 9"/>
+          <p:cNvSpPr txBox="1"/>
+          <p:nvPr/>
+        </p:nvSpPr>
+        <p:spPr>
+          <a:xfrm>
+            <a:off x="1005840" y="2331720"/>
+            <a:ext cx="2103120" cy="411480"/>
+          </a:xfrm>
+          <a:prstGeom prst="rect">
+            <a:avLst/>
+          </a:prstGeom>
+          <a:noFill/>
+          <a:ln/>
+        </p:spPr>
+        <p:txBody>
+          <a:bodyPr wrap="square" lIns="0" tIns="0" rIns="0" bIns="0" rtlCol="0" anchor="ctr"/>
+          <a:lstStyle/>
+          <a:p>
+            <a:pPr indent="0" marL="0">
+              <a:buNone/>
+            </a:pPr>
+            <a:r>
+              <a:rPr lang="en-US" sz="2000" b="1" dirty="0">
+                <a:solidFill>
+                  <a:srgbClr val="000000"/>
+                </a:solidFill>
+                <a:latin typeface="Arial" pitchFamily="34" charset="0"/>
+                <a:ea typeface="Arial" pitchFamily="34" charset="-122"/>
+                <a:cs typeface="Arial" pitchFamily="34" charset="-120"/>
+              </a:rPr>
+              <a:t>Ideate</a:t>
+            </a:r>
+            <a:endParaRPr lang="en-US" sz="2000" dirty="0"/>
+          </a:p>
+        </p:txBody>
       </p:sp>
       <p:pic>
         <p:nvPicPr>
-          <p:cNvPr id="13" name="Image 2" descr="preencoded.png">    </p:cNvPr>
+          <p:cNvPr id="15" name="Image 2" descr="preencoded.png">    </p:cNvPr>
           <p:cNvPicPr>
             <a:picLocks noChangeAspect="1"/>
           </p:cNvPicPr>
@@ -12252,8 +11809,8 @@
         </p:blipFill>
         <p:spPr>
           <a:xfrm>
-            <a:off x="2930560" y="3716692"/>
-            <a:ext cx="307238" cy="307238"/>
+            <a:off x="3246120" y="2395728"/>
+            <a:ext cx="292608" cy="292608"/>
           </a:xfrm>
           <a:prstGeom prst="rect">
             <a:avLst/>
@@ -12262,32 +11819,85 @@
       </p:pic>
       <p:sp>
         <p:nvSpPr>
-          <p:cNvPr id="14" name="Shape 8"/>
-          <p:cNvSpPr/>
-          <p:nvPr/>
-        </p:nvSpPr>
-        <p:spPr>
-          <a:xfrm>
-            <a:off x="1259221" y="3550271"/>
-            <a:ext cx="640080" cy="640080"/>
-          </a:xfrm>
-          <a:prstGeom prst="ellipse">
-            <a:avLst/>
-          </a:prstGeom>
-          <a:solidFill>
-            <a:srgbClr val="000000"/>
-          </a:solidFill>
-          <a:ln w="12700">
-            <a:solidFill>
-              <a:srgbClr val="000000"/>
-            </a:solidFill>
-            <a:prstDash val="solid"/>
-          </a:ln>
-        </p:spPr>
+          <p:cNvPr id="16" name="Text 10"/>
+          <p:cNvSpPr txBox="1"/>
+          <p:nvPr/>
+        </p:nvSpPr>
+        <p:spPr>
+          <a:xfrm>
+            <a:off x="457200" y="2880360"/>
+            <a:ext cx="548640" cy="411480"/>
+          </a:xfrm>
+          <a:prstGeom prst="rect">
+            <a:avLst/>
+          </a:prstGeom>
+          <a:noFill/>
+          <a:ln/>
+        </p:spPr>
+        <p:txBody>
+          <a:bodyPr wrap="square" lIns="0" tIns="0" rIns="0" bIns="0" rtlCol="0" anchor="ctr"/>
+          <a:lstStyle/>
+          <a:p>
+            <a:pPr indent="0" marL="0">
+              <a:buNone/>
+            </a:pPr>
+            <a:r>
+              <a:rPr lang="en-US" sz="1400" b="1" dirty="0">
+                <a:solidFill>
+                  <a:srgbClr val="8C8C8C"/>
+                </a:solidFill>
+                <a:latin typeface="Arial" pitchFamily="34" charset="0"/>
+                <a:ea typeface="Arial" pitchFamily="34" charset="-122"/>
+                <a:cs typeface="Arial" pitchFamily="34" charset="-120"/>
+              </a:rPr>
+              <a:t>04</a:t>
+            </a:r>
+            <a:endParaRPr lang="en-US" sz="1400" dirty="0"/>
+          </a:p>
+        </p:txBody>
+      </p:sp>
+      <p:sp>
+        <p:nvSpPr>
+          <p:cNvPr id="17" name="Text 11"/>
+          <p:cNvSpPr txBox="1"/>
+          <p:nvPr/>
+        </p:nvSpPr>
+        <p:spPr>
+          <a:xfrm>
+            <a:off x="1005840" y="2880360"/>
+            <a:ext cx="2103120" cy="411480"/>
+          </a:xfrm>
+          <a:prstGeom prst="rect">
+            <a:avLst/>
+          </a:prstGeom>
+          <a:noFill/>
+          <a:ln/>
+        </p:spPr>
+        <p:txBody>
+          <a:bodyPr wrap="square" lIns="0" tIns="0" rIns="0" bIns="0" rtlCol="0" anchor="ctr"/>
+          <a:lstStyle/>
+          <a:p>
+            <a:pPr indent="0" marL="0">
+              <a:buNone/>
+            </a:pPr>
+            <a:r>
+              <a:rPr lang="en-US" sz="2000" b="1" dirty="0">
+                <a:solidFill>
+                  <a:srgbClr val="000000"/>
+                </a:solidFill>
+                <a:latin typeface="Arial" pitchFamily="34" charset="0"/>
+                <a:ea typeface="Arial" pitchFamily="34" charset="-122"/>
+                <a:cs typeface="Arial" pitchFamily="34" charset="-120"/>
+              </a:rPr>
+              <a:t>Prototype</a:t>
+            </a:r>
+            <a:endParaRPr lang="en-US" sz="2000" dirty="0"/>
+          </a:p>
+        </p:txBody>
       </p:sp>
       <p:pic>
         <p:nvPicPr>
-          <p:cNvPr id="15" name="Image 3" descr="preencoded.png">    </p:cNvPr>
+          <p:cNvPr id="18" name="Image 3" descr="preencoded.png">    </p:cNvPr>
           <p:cNvPicPr>
             <a:picLocks noChangeAspect="1"/>
           </p:cNvPicPr>
@@ -12301,8 +11911,8 @@
         </p:blipFill>
         <p:spPr>
           <a:xfrm>
-            <a:off x="1425642" y="3716692"/>
-            <a:ext cx="307238" cy="307238"/>
+            <a:off x="3246120" y="2944368"/>
+            <a:ext cx="292608" cy="292608"/>
           </a:xfrm>
           <a:prstGeom prst="rect">
             <a:avLst/>
@@ -12311,32 +11921,85 @@
       </p:pic>
       <p:sp>
         <p:nvSpPr>
-          <p:cNvPr id="16" name="Shape 9"/>
-          <p:cNvSpPr/>
-          <p:nvPr/>
-        </p:nvSpPr>
-        <p:spPr>
-          <a:xfrm>
-            <a:off x="794175" y="2119009"/>
-            <a:ext cx="640080" cy="640080"/>
-          </a:xfrm>
-          <a:prstGeom prst="ellipse">
-            <a:avLst/>
-          </a:prstGeom>
-          <a:solidFill>
-            <a:srgbClr val="000000"/>
-          </a:solidFill>
-          <a:ln w="12700">
-            <a:solidFill>
-              <a:srgbClr val="000000"/>
-            </a:solidFill>
-            <a:prstDash val="solid"/>
-          </a:ln>
-        </p:spPr>
+          <p:cNvPr id="19" name="Text 12"/>
+          <p:cNvSpPr txBox="1"/>
+          <p:nvPr/>
+        </p:nvSpPr>
+        <p:spPr>
+          <a:xfrm>
+            <a:off x="457200" y="3429000"/>
+            <a:ext cx="548640" cy="411480"/>
+          </a:xfrm>
+          <a:prstGeom prst="rect">
+            <a:avLst/>
+          </a:prstGeom>
+          <a:noFill/>
+          <a:ln/>
+        </p:spPr>
+        <p:txBody>
+          <a:bodyPr wrap="square" lIns="0" tIns="0" rIns="0" bIns="0" rtlCol="0" anchor="ctr"/>
+          <a:lstStyle/>
+          <a:p>
+            <a:pPr indent="0" marL="0">
+              <a:buNone/>
+            </a:pPr>
+            <a:r>
+              <a:rPr lang="en-US" sz="1400" b="1" dirty="0">
+                <a:solidFill>
+                  <a:srgbClr val="8C8C8C"/>
+                </a:solidFill>
+                <a:latin typeface="Arial" pitchFamily="34" charset="0"/>
+                <a:ea typeface="Arial" pitchFamily="34" charset="-122"/>
+                <a:cs typeface="Arial" pitchFamily="34" charset="-120"/>
+              </a:rPr>
+              <a:t>05</a:t>
+            </a:r>
+            <a:endParaRPr lang="en-US" sz="1400" dirty="0"/>
+          </a:p>
+        </p:txBody>
+      </p:sp>
+      <p:sp>
+        <p:nvSpPr>
+          <p:cNvPr id="20" name="Text 13"/>
+          <p:cNvSpPr txBox="1"/>
+          <p:nvPr/>
+        </p:nvSpPr>
+        <p:spPr>
+          <a:xfrm>
+            <a:off x="1005840" y="3429000"/>
+            <a:ext cx="2103120" cy="411480"/>
+          </a:xfrm>
+          <a:prstGeom prst="rect">
+            <a:avLst/>
+          </a:prstGeom>
+          <a:noFill/>
+          <a:ln/>
+        </p:spPr>
+        <p:txBody>
+          <a:bodyPr wrap="square" lIns="0" tIns="0" rIns="0" bIns="0" rtlCol="0" anchor="ctr"/>
+          <a:lstStyle/>
+          <a:p>
+            <a:pPr indent="0" marL="0">
+              <a:buNone/>
+            </a:pPr>
+            <a:r>
+              <a:rPr lang="en-US" sz="2000" b="1" dirty="0">
+                <a:solidFill>
+                  <a:srgbClr val="000000"/>
+                </a:solidFill>
+                <a:latin typeface="Arial" pitchFamily="34" charset="0"/>
+                <a:ea typeface="Arial" pitchFamily="34" charset="-122"/>
+                <a:cs typeface="Arial" pitchFamily="34" charset="-120"/>
+              </a:rPr>
+              <a:t>Test</a:t>
+            </a:r>
+            <a:endParaRPr lang="en-US" sz="2000" dirty="0"/>
+          </a:p>
+        </p:txBody>
       </p:sp>
       <p:pic>
         <p:nvPicPr>
-          <p:cNvPr id="17" name="Image 4" descr="preencoded.png">    </p:cNvPr>
+          <p:cNvPr id="21" name="Image 4" descr="preencoded.png">    </p:cNvPr>
           <p:cNvPicPr>
             <a:picLocks noChangeAspect="1"/>
           </p:cNvPicPr>
@@ -12350,8 +12013,8 @@
         </p:blipFill>
         <p:spPr>
           <a:xfrm>
-            <a:off x="960596" y="2285430"/>
-            <a:ext cx="307238" cy="307238"/>
+            <a:off x="3246120" y="3493008"/>
+            <a:ext cx="292608" cy="292608"/>
           </a:xfrm>
           <a:prstGeom prst="rect">
             <a:avLst/>
@@ -12360,7 +12023,7 @@
       </p:pic>
       <p:pic>
         <p:nvPicPr>
-          <p:cNvPr id="18" name="Image 5" descr="preencoded.png">    </p:cNvPr>
+          <p:cNvPr id="22" name="Image 5" descr="preencoded.png">    </p:cNvPr>
           <p:cNvPicPr>
             <a:picLocks noChangeAspect="1"/>
           </p:cNvPicPr>
@@ -12374,8 +12037,8 @@
         </p:blipFill>
         <p:spPr>
           <a:xfrm>
-            <a:off x="2057400" y="2423160"/>
-            <a:ext cx="548640" cy="548640"/>
+            <a:off x="457200" y="4069080"/>
+            <a:ext cx="320040" cy="320040"/>
           </a:xfrm>
           <a:prstGeom prst="rect">
             <a:avLst/>
@@ -12384,30 +12047,30 @@
       </p:pic>
       <p:sp>
         <p:nvSpPr>
-          <p:cNvPr id="19" name="Text 10"/>
-          <p:cNvSpPr txBox="1"/>
-          <p:nvPr/>
-        </p:nvSpPr>
-        <p:spPr>
-          <a:xfrm>
-            <a:off x="1691640" y="3017520"/>
-            <a:ext cx="1280160" cy="274320"/>
-          </a:xfrm>
-          <a:prstGeom prst="rect">
-            <a:avLst/>
-          </a:prstGeom>
-          <a:noFill/>
-          <a:ln/>
-        </p:spPr>
-        <p:txBody>
-          <a:bodyPr wrap="square" lIns="0" tIns="0" rIns="0" bIns="0" rtlCol="0" anchor="ctr"/>
-          <a:lstStyle/>
-          <a:p>
-            <a:pPr algn="ctr" indent="0" marL="0">
-              <a:buNone/>
-            </a:pPr>
-            <a:r>
-              <a:rPr lang="en-US" sz="1200" b="1" dirty="0">
+          <p:cNvPr id="23" name="Text 14"/>
+          <p:cNvSpPr txBox="1"/>
+          <p:nvPr/>
+        </p:nvSpPr>
+        <p:spPr>
+          <a:xfrm>
+            <a:off x="1005840" y="4069080"/>
+            <a:ext cx="2743200" cy="320040"/>
+          </a:xfrm>
+          <a:prstGeom prst="rect">
+            <a:avLst/>
+          </a:prstGeom>
+          <a:noFill/>
+          <a:ln/>
+        </p:spPr>
+        <p:txBody>
+          <a:bodyPr wrap="square" lIns="0" tIns="0" rIns="0" bIns="0" rtlCol="0" anchor="ctr"/>
+          <a:lstStyle/>
+          <a:p>
+            <a:pPr indent="0" marL="0">
+              <a:buNone/>
+            </a:pPr>
+            <a:r>
+              <a:rPr lang="en-US" sz="1400" i="1" dirty="0">
                 <a:solidFill>
                   <a:srgbClr val="595959"/>
                 </a:solidFill>
@@ -12415,15 +12078,15 @@
                 <a:ea typeface="Arial" pitchFamily="34" charset="-122"/>
                 <a:cs typeface="Arial" pitchFamily="34" charset="-120"/>
               </a:rPr>
-              <a:t>repeat</a:t>
-            </a:r>
-            <a:endParaRPr lang="en-US" sz="1200" dirty="0"/>
-          </a:p>
-        </p:txBody>
-      </p:sp>
-      <p:sp>
-        <p:nvSpPr>
-          <p:cNvPr id="20" name="Text 11"/>
+              <a:t>…and back to 01</a:t>
+            </a:r>
+            <a:endParaRPr lang="en-US" sz="1400" dirty="0"/>
+          </a:p>
+        </p:txBody>
+      </p:sp>
+      <p:sp>
+        <p:nvSpPr>
+          <p:cNvPr id="24" name="Text 15"/>
           <p:cNvSpPr txBox="1"/>
           <p:nvPr/>
         </p:nvSpPr>
@@ -12462,7 +12125,7 @@
       </p:sp>
       <p:sp>
         <p:nvSpPr>
-          <p:cNvPr id="21" name="Text 12"/>
+          <p:cNvPr id="25" name="Text 16"/>
           <p:cNvSpPr txBox="1"/>
           <p:nvPr/>
         </p:nvSpPr>
@@ -12903,41 +12566,723 @@
           </a:p>
         </p:txBody>
       </p:sp>
-      <p:sp>
-        <p:nvSpPr>
-          <p:cNvPr id="7" name="Shape 4"/>
+      <p:pic>
+        <p:nvPicPr>
+          <p:cNvPr id="7" name="Image 0" descr="preencoded.png">    </p:cNvPr>
+          <p:cNvPicPr>
+            <a:picLocks noChangeAspect="1"/>
+          </p:cNvPicPr>
+          <p:nvPr/>
+        </p:nvPicPr>
+        <p:blipFill>
+          <a:blip r:embed="rId1"/>
+          <a:stretch>
+            <a:fillRect/>
+          </a:stretch>
+        </p:blipFill>
+        <p:spPr>
+          <a:xfrm>
+            <a:off x="758952" y="1353312"/>
+            <a:ext cx="493776" cy="493776"/>
+          </a:xfrm>
+          <a:prstGeom prst="rect">
+            <a:avLst/>
+          </a:prstGeom>
+        </p:spPr>
+      </p:pic>
+      <p:sp>
+        <p:nvSpPr>
+          <p:cNvPr id="8" name="Text 4"/>
+          <p:cNvSpPr txBox="1"/>
+          <p:nvPr/>
+        </p:nvSpPr>
+        <p:spPr>
+          <a:xfrm>
+            <a:off x="182880" y="2148840"/>
+            <a:ext cx="1645920" cy="228600"/>
+          </a:xfrm>
+          <a:prstGeom prst="rect">
+            <a:avLst/>
+          </a:prstGeom>
+          <a:noFill/>
+          <a:ln/>
+        </p:spPr>
+        <p:txBody>
+          <a:bodyPr wrap="square" lIns="0" tIns="0" rIns="0" bIns="0" rtlCol="0" anchor="ctr"/>
+          <a:lstStyle/>
+          <a:p>
+            <a:pPr algn="ctr" indent="0" marL="0">
+              <a:buNone/>
+            </a:pPr>
+            <a:r>
+              <a:rPr lang="en-US" sz="1100" b="1" dirty="0">
+                <a:solidFill>
+                  <a:srgbClr val="8C8C8C"/>
+                </a:solidFill>
+                <a:latin typeface="Arial" pitchFamily="34" charset="0"/>
+                <a:ea typeface="Arial" pitchFamily="34" charset="-122"/>
+                <a:cs typeface="Arial" pitchFamily="34" charset="-120"/>
+              </a:rPr>
+              <a:t>01</a:t>
+            </a:r>
+            <a:endParaRPr lang="en-US" sz="1100" dirty="0"/>
+          </a:p>
+        </p:txBody>
+      </p:sp>
+      <p:sp>
+        <p:nvSpPr>
+          <p:cNvPr id="9" name="Text 5"/>
+          <p:cNvSpPr txBox="1"/>
+          <p:nvPr/>
+        </p:nvSpPr>
+        <p:spPr>
+          <a:xfrm>
+            <a:off x="182880" y="2377440"/>
+            <a:ext cx="1645920" cy="365760"/>
+          </a:xfrm>
+          <a:prstGeom prst="rect">
+            <a:avLst/>
+          </a:prstGeom>
+          <a:noFill/>
+          <a:ln/>
+        </p:spPr>
+        <p:txBody>
+          <a:bodyPr wrap="square" lIns="0" tIns="0" rIns="0" bIns="0" rtlCol="0" anchor="ctr"/>
+          <a:lstStyle/>
+          <a:p>
+            <a:pPr algn="ctr" indent="0" marL="0">
+              <a:buNone/>
+            </a:pPr>
+            <a:r>
+              <a:rPr lang="en-US" sz="1800" b="1" dirty="0">
+                <a:solidFill>
+                  <a:srgbClr val="000000"/>
+                </a:solidFill>
+                <a:latin typeface="Arial" pitchFamily="34" charset="0"/>
+                <a:ea typeface="Arial" pitchFamily="34" charset="-122"/>
+                <a:cs typeface="Arial" pitchFamily="34" charset="-120"/>
+              </a:rPr>
+              <a:t>Empathize</a:t>
+            </a:r>
+            <a:endParaRPr lang="en-US" sz="1800" dirty="0"/>
+          </a:p>
+        </p:txBody>
+      </p:sp>
+      <p:sp>
+        <p:nvSpPr>
+          <p:cNvPr id="10" name="Text 6"/>
+          <p:cNvSpPr txBox="1"/>
+          <p:nvPr/>
+        </p:nvSpPr>
+        <p:spPr>
+          <a:xfrm>
+            <a:off x="228600" y="2788920"/>
+            <a:ext cx="1554480" cy="822960"/>
+          </a:xfrm>
+          <a:prstGeom prst="rect">
+            <a:avLst/>
+          </a:prstGeom>
+          <a:noFill/>
+          <a:ln/>
+        </p:spPr>
+        <p:txBody>
+          <a:bodyPr wrap="square" lIns="0" tIns="0" rIns="0" bIns="0" rtlCol="0" anchor="t"/>
+          <a:lstStyle/>
+          <a:p>
+            <a:pPr algn="ctr" indent="0" marL="0">
+              <a:buNone/>
+            </a:pPr>
+            <a:r>
+              <a:rPr lang="en-US" sz="1200" dirty="0">
+                <a:solidFill>
+                  <a:srgbClr val="595959"/>
+                </a:solidFill>
+                <a:latin typeface="Arial" pitchFamily="34" charset="0"/>
+                <a:ea typeface="Arial" pitchFamily="34" charset="-122"/>
+                <a:cs typeface="Arial" pitchFamily="34" charset="-120"/>
+              </a:rPr>
+              <a:t>Who is struggling, and how does it feel?</a:t>
+            </a:r>
+            <a:endParaRPr lang="en-US" sz="1200" dirty="0"/>
+          </a:p>
+        </p:txBody>
+      </p:sp>
+      <p:pic>
+        <p:nvPicPr>
+          <p:cNvPr id="11" name="Image 1" descr="preencoded.png">    </p:cNvPr>
+          <p:cNvPicPr>
+            <a:picLocks noChangeAspect="1"/>
+          </p:cNvPicPr>
+          <p:nvPr/>
+        </p:nvPicPr>
+        <p:blipFill>
+          <a:blip r:embed="rId2"/>
+          <a:stretch>
+            <a:fillRect/>
+          </a:stretch>
+        </p:blipFill>
+        <p:spPr>
+          <a:xfrm>
+            <a:off x="2542032" y="1353312"/>
+            <a:ext cx="493776" cy="493776"/>
+          </a:xfrm>
+          <a:prstGeom prst="rect">
+            <a:avLst/>
+          </a:prstGeom>
+        </p:spPr>
+      </p:pic>
+      <p:sp>
+        <p:nvSpPr>
+          <p:cNvPr id="12" name="Text 7"/>
+          <p:cNvSpPr txBox="1"/>
+          <p:nvPr/>
+        </p:nvSpPr>
+        <p:spPr>
+          <a:xfrm>
+            <a:off x="1965960" y="2148840"/>
+            <a:ext cx="1645920" cy="228600"/>
+          </a:xfrm>
+          <a:prstGeom prst="rect">
+            <a:avLst/>
+          </a:prstGeom>
+          <a:noFill/>
+          <a:ln/>
+        </p:spPr>
+        <p:txBody>
+          <a:bodyPr wrap="square" lIns="0" tIns="0" rIns="0" bIns="0" rtlCol="0" anchor="ctr"/>
+          <a:lstStyle/>
+          <a:p>
+            <a:pPr algn="ctr" indent="0" marL="0">
+              <a:buNone/>
+            </a:pPr>
+            <a:r>
+              <a:rPr lang="en-US" sz="1100" b="1" dirty="0">
+                <a:solidFill>
+                  <a:srgbClr val="8C8C8C"/>
+                </a:solidFill>
+                <a:latin typeface="Arial" pitchFamily="34" charset="0"/>
+                <a:ea typeface="Arial" pitchFamily="34" charset="-122"/>
+                <a:cs typeface="Arial" pitchFamily="34" charset="-120"/>
+              </a:rPr>
+              <a:t>02</a:t>
+            </a:r>
+            <a:endParaRPr lang="en-US" sz="1100" dirty="0"/>
+          </a:p>
+        </p:txBody>
+      </p:sp>
+      <p:sp>
+        <p:nvSpPr>
+          <p:cNvPr id="13" name="Text 8"/>
+          <p:cNvSpPr txBox="1"/>
+          <p:nvPr/>
+        </p:nvSpPr>
+        <p:spPr>
+          <a:xfrm>
+            <a:off x="1965960" y="2377440"/>
+            <a:ext cx="1645920" cy="365760"/>
+          </a:xfrm>
+          <a:prstGeom prst="rect">
+            <a:avLst/>
+          </a:prstGeom>
+          <a:noFill/>
+          <a:ln/>
+        </p:spPr>
+        <p:txBody>
+          <a:bodyPr wrap="square" lIns="0" tIns="0" rIns="0" bIns="0" rtlCol="0" anchor="ctr"/>
+          <a:lstStyle/>
+          <a:p>
+            <a:pPr algn="ctr" indent="0" marL="0">
+              <a:buNone/>
+            </a:pPr>
+            <a:r>
+              <a:rPr lang="en-US" sz="1800" b="1" dirty="0">
+                <a:solidFill>
+                  <a:srgbClr val="000000"/>
+                </a:solidFill>
+                <a:latin typeface="Arial" pitchFamily="34" charset="0"/>
+                <a:ea typeface="Arial" pitchFamily="34" charset="-122"/>
+                <a:cs typeface="Arial" pitchFamily="34" charset="-120"/>
+              </a:rPr>
+              <a:t>Define</a:t>
+            </a:r>
+            <a:endParaRPr lang="en-US" sz="1800" dirty="0"/>
+          </a:p>
+        </p:txBody>
+      </p:sp>
+      <p:sp>
+        <p:nvSpPr>
+          <p:cNvPr id="14" name="Text 9"/>
+          <p:cNvSpPr txBox="1"/>
+          <p:nvPr/>
+        </p:nvSpPr>
+        <p:spPr>
+          <a:xfrm>
+            <a:off x="2011680" y="2788920"/>
+            <a:ext cx="1554480" cy="822960"/>
+          </a:xfrm>
+          <a:prstGeom prst="rect">
+            <a:avLst/>
+          </a:prstGeom>
+          <a:noFill/>
+          <a:ln/>
+        </p:spPr>
+        <p:txBody>
+          <a:bodyPr wrap="square" lIns="0" tIns="0" rIns="0" bIns="0" rtlCol="0" anchor="t"/>
+          <a:lstStyle/>
+          <a:p>
+            <a:pPr algn="ctr" indent="0" marL="0">
+              <a:buNone/>
+            </a:pPr>
+            <a:r>
+              <a:rPr lang="en-US" sz="1200" dirty="0">
+                <a:solidFill>
+                  <a:srgbClr val="595959"/>
+                </a:solidFill>
+                <a:latin typeface="Arial" pitchFamily="34" charset="0"/>
+                <a:ea typeface="Arial" pitchFamily="34" charset="-122"/>
+                <a:cs typeface="Arial" pitchFamily="34" charset="-120"/>
+              </a:rPr>
+              <a:t>What exactly is the problem?</a:t>
+            </a:r>
+            <a:endParaRPr lang="en-US" sz="1200" dirty="0"/>
+          </a:p>
+        </p:txBody>
+      </p:sp>
+      <p:pic>
+        <p:nvPicPr>
+          <p:cNvPr id="15" name="Image 2" descr="preencoded.png">    </p:cNvPr>
+          <p:cNvPicPr>
+            <a:picLocks noChangeAspect="1"/>
+          </p:cNvPicPr>
+          <p:nvPr/>
+        </p:nvPicPr>
+        <p:blipFill>
+          <a:blip r:embed="rId3"/>
+          <a:stretch>
+            <a:fillRect/>
+          </a:stretch>
+        </p:blipFill>
+        <p:spPr>
+          <a:xfrm>
+            <a:off x="4325112" y="1353312"/>
+            <a:ext cx="493776" cy="493776"/>
+          </a:xfrm>
+          <a:prstGeom prst="rect">
+            <a:avLst/>
+          </a:prstGeom>
+        </p:spPr>
+      </p:pic>
+      <p:sp>
+        <p:nvSpPr>
+          <p:cNvPr id="16" name="Text 10"/>
+          <p:cNvSpPr txBox="1"/>
+          <p:nvPr/>
+        </p:nvSpPr>
+        <p:spPr>
+          <a:xfrm>
+            <a:off x="3749040" y="2148840"/>
+            <a:ext cx="1645920" cy="228600"/>
+          </a:xfrm>
+          <a:prstGeom prst="rect">
+            <a:avLst/>
+          </a:prstGeom>
+          <a:noFill/>
+          <a:ln/>
+        </p:spPr>
+        <p:txBody>
+          <a:bodyPr wrap="square" lIns="0" tIns="0" rIns="0" bIns="0" rtlCol="0" anchor="ctr"/>
+          <a:lstStyle/>
+          <a:p>
+            <a:pPr algn="ctr" indent="0" marL="0">
+              <a:buNone/>
+            </a:pPr>
+            <a:r>
+              <a:rPr lang="en-US" sz="1100" b="1" dirty="0">
+                <a:solidFill>
+                  <a:srgbClr val="8C8C8C"/>
+                </a:solidFill>
+                <a:latin typeface="Arial" pitchFamily="34" charset="0"/>
+                <a:ea typeface="Arial" pitchFamily="34" charset="-122"/>
+                <a:cs typeface="Arial" pitchFamily="34" charset="-120"/>
+              </a:rPr>
+              <a:t>03</a:t>
+            </a:r>
+            <a:endParaRPr lang="en-US" sz="1100" dirty="0"/>
+          </a:p>
+        </p:txBody>
+      </p:sp>
+      <p:sp>
+        <p:nvSpPr>
+          <p:cNvPr id="17" name="Text 11"/>
+          <p:cNvSpPr txBox="1"/>
+          <p:nvPr/>
+        </p:nvSpPr>
+        <p:spPr>
+          <a:xfrm>
+            <a:off x="3749040" y="2377440"/>
+            <a:ext cx="1645920" cy="365760"/>
+          </a:xfrm>
+          <a:prstGeom prst="rect">
+            <a:avLst/>
+          </a:prstGeom>
+          <a:noFill/>
+          <a:ln/>
+        </p:spPr>
+        <p:txBody>
+          <a:bodyPr wrap="square" lIns="0" tIns="0" rIns="0" bIns="0" rtlCol="0" anchor="ctr"/>
+          <a:lstStyle/>
+          <a:p>
+            <a:pPr algn="ctr" indent="0" marL="0">
+              <a:buNone/>
+            </a:pPr>
+            <a:r>
+              <a:rPr lang="en-US" sz="1800" b="1" dirty="0">
+                <a:solidFill>
+                  <a:srgbClr val="000000"/>
+                </a:solidFill>
+                <a:latin typeface="Arial" pitchFamily="34" charset="0"/>
+                <a:ea typeface="Arial" pitchFamily="34" charset="-122"/>
+                <a:cs typeface="Arial" pitchFamily="34" charset="-120"/>
+              </a:rPr>
+              <a:t>Ideate</a:t>
+            </a:r>
+            <a:endParaRPr lang="en-US" sz="1800" dirty="0"/>
+          </a:p>
+        </p:txBody>
+      </p:sp>
+      <p:sp>
+        <p:nvSpPr>
+          <p:cNvPr id="18" name="Text 12"/>
+          <p:cNvSpPr txBox="1"/>
+          <p:nvPr/>
+        </p:nvSpPr>
+        <p:spPr>
+          <a:xfrm>
+            <a:off x="3794760" y="2788920"/>
+            <a:ext cx="1554480" cy="822960"/>
+          </a:xfrm>
+          <a:prstGeom prst="rect">
+            <a:avLst/>
+          </a:prstGeom>
+          <a:noFill/>
+          <a:ln/>
+        </p:spPr>
+        <p:txBody>
+          <a:bodyPr wrap="square" lIns="0" tIns="0" rIns="0" bIns="0" rtlCol="0" anchor="t"/>
+          <a:lstStyle/>
+          <a:p>
+            <a:pPr algn="ctr" indent="0" marL="0">
+              <a:buNone/>
+            </a:pPr>
+            <a:r>
+              <a:rPr lang="en-US" sz="1200" dirty="0">
+                <a:solidFill>
+                  <a:srgbClr val="595959"/>
+                </a:solidFill>
+                <a:latin typeface="Arial" pitchFamily="34" charset="0"/>
+                <a:ea typeface="Arial" pitchFamily="34" charset="-122"/>
+                <a:cs typeface="Arial" pitchFamily="34" charset="-120"/>
+              </a:rPr>
+              <a:t>What could we do about it?</a:t>
+            </a:r>
+            <a:endParaRPr lang="en-US" sz="1200" dirty="0"/>
+          </a:p>
+        </p:txBody>
+      </p:sp>
+      <p:pic>
+        <p:nvPicPr>
+          <p:cNvPr id="19" name="Image 3" descr="preencoded.png">    </p:cNvPr>
+          <p:cNvPicPr>
+            <a:picLocks noChangeAspect="1"/>
+          </p:cNvPicPr>
+          <p:nvPr/>
+        </p:nvPicPr>
+        <p:blipFill>
+          <a:blip r:embed="rId4"/>
+          <a:stretch>
+            <a:fillRect/>
+          </a:stretch>
+        </p:blipFill>
+        <p:spPr>
+          <a:xfrm>
+            <a:off x="6108192" y="1353312"/>
+            <a:ext cx="493776" cy="493776"/>
+          </a:xfrm>
+          <a:prstGeom prst="rect">
+            <a:avLst/>
+          </a:prstGeom>
+        </p:spPr>
+      </p:pic>
+      <p:sp>
+        <p:nvSpPr>
+          <p:cNvPr id="20" name="Text 13"/>
+          <p:cNvSpPr txBox="1"/>
+          <p:nvPr/>
+        </p:nvSpPr>
+        <p:spPr>
+          <a:xfrm>
+            <a:off x="5532120" y="2148840"/>
+            <a:ext cx="1645920" cy="228600"/>
+          </a:xfrm>
+          <a:prstGeom prst="rect">
+            <a:avLst/>
+          </a:prstGeom>
+          <a:noFill/>
+          <a:ln/>
+        </p:spPr>
+        <p:txBody>
+          <a:bodyPr wrap="square" lIns="0" tIns="0" rIns="0" bIns="0" rtlCol="0" anchor="ctr"/>
+          <a:lstStyle/>
+          <a:p>
+            <a:pPr algn="ctr" indent="0" marL="0">
+              <a:buNone/>
+            </a:pPr>
+            <a:r>
+              <a:rPr lang="en-US" sz="1100" b="1" dirty="0">
+                <a:solidFill>
+                  <a:srgbClr val="8C8C8C"/>
+                </a:solidFill>
+                <a:latin typeface="Arial" pitchFamily="34" charset="0"/>
+                <a:ea typeface="Arial" pitchFamily="34" charset="-122"/>
+                <a:cs typeface="Arial" pitchFamily="34" charset="-120"/>
+              </a:rPr>
+              <a:t>04</a:t>
+            </a:r>
+            <a:endParaRPr lang="en-US" sz="1100" dirty="0"/>
+          </a:p>
+        </p:txBody>
+      </p:sp>
+      <p:sp>
+        <p:nvSpPr>
+          <p:cNvPr id="21" name="Text 14"/>
+          <p:cNvSpPr txBox="1"/>
+          <p:nvPr/>
+        </p:nvSpPr>
+        <p:spPr>
+          <a:xfrm>
+            <a:off x="5532120" y="2377440"/>
+            <a:ext cx="1645920" cy="365760"/>
+          </a:xfrm>
+          <a:prstGeom prst="rect">
+            <a:avLst/>
+          </a:prstGeom>
+          <a:noFill/>
+          <a:ln/>
+        </p:spPr>
+        <p:txBody>
+          <a:bodyPr wrap="square" lIns="0" tIns="0" rIns="0" bIns="0" rtlCol="0" anchor="ctr"/>
+          <a:lstStyle/>
+          <a:p>
+            <a:pPr algn="ctr" indent="0" marL="0">
+              <a:buNone/>
+            </a:pPr>
+            <a:r>
+              <a:rPr lang="en-US" sz="1800" b="1" dirty="0">
+                <a:solidFill>
+                  <a:srgbClr val="000000"/>
+                </a:solidFill>
+                <a:latin typeface="Arial" pitchFamily="34" charset="0"/>
+                <a:ea typeface="Arial" pitchFamily="34" charset="-122"/>
+                <a:cs typeface="Arial" pitchFamily="34" charset="-120"/>
+              </a:rPr>
+              <a:t>Prototype</a:t>
+            </a:r>
+            <a:endParaRPr lang="en-US" sz="1800" dirty="0"/>
+          </a:p>
+        </p:txBody>
+      </p:sp>
+      <p:sp>
+        <p:nvSpPr>
+          <p:cNvPr id="22" name="Text 15"/>
+          <p:cNvSpPr txBox="1"/>
+          <p:nvPr/>
+        </p:nvSpPr>
+        <p:spPr>
+          <a:xfrm>
+            <a:off x="5577840" y="2788920"/>
+            <a:ext cx="1554480" cy="822960"/>
+          </a:xfrm>
+          <a:prstGeom prst="rect">
+            <a:avLst/>
+          </a:prstGeom>
+          <a:noFill/>
+          <a:ln/>
+        </p:spPr>
+        <p:txBody>
+          <a:bodyPr wrap="square" lIns="0" tIns="0" rIns="0" bIns="0" rtlCol="0" anchor="t"/>
+          <a:lstStyle/>
+          <a:p>
+            <a:pPr algn="ctr" indent="0" marL="0">
+              <a:buNone/>
+            </a:pPr>
+            <a:r>
+              <a:rPr lang="en-US" sz="1200" dirty="0">
+                <a:solidFill>
+                  <a:srgbClr val="595959"/>
+                </a:solidFill>
+                <a:latin typeface="Arial" pitchFamily="34" charset="0"/>
+                <a:ea typeface="Arial" pitchFamily="34" charset="-122"/>
+                <a:cs typeface="Arial" pitchFamily="34" charset="-120"/>
+              </a:rPr>
+              <a:t>Can we build a quick version?</a:t>
+            </a:r>
+            <a:endParaRPr lang="en-US" sz="1200" dirty="0"/>
+          </a:p>
+        </p:txBody>
+      </p:sp>
+      <p:pic>
+        <p:nvPicPr>
+          <p:cNvPr id="23" name="Image 4" descr="preencoded.png">    </p:cNvPr>
+          <p:cNvPicPr>
+            <a:picLocks noChangeAspect="1"/>
+          </p:cNvPicPr>
+          <p:nvPr/>
+        </p:nvPicPr>
+        <p:blipFill>
+          <a:blip r:embed="rId5"/>
+          <a:stretch>
+            <a:fillRect/>
+          </a:stretch>
+        </p:blipFill>
+        <p:spPr>
+          <a:xfrm>
+            <a:off x="7891272" y="1353312"/>
+            <a:ext cx="493776" cy="493776"/>
+          </a:xfrm>
+          <a:prstGeom prst="rect">
+            <a:avLst/>
+          </a:prstGeom>
+        </p:spPr>
+      </p:pic>
+      <p:sp>
+        <p:nvSpPr>
+          <p:cNvPr id="24" name="Text 16"/>
+          <p:cNvSpPr txBox="1"/>
+          <p:nvPr/>
+        </p:nvSpPr>
+        <p:spPr>
+          <a:xfrm>
+            <a:off x="7315200" y="2148840"/>
+            <a:ext cx="1645920" cy="228600"/>
+          </a:xfrm>
+          <a:prstGeom prst="rect">
+            <a:avLst/>
+          </a:prstGeom>
+          <a:noFill/>
+          <a:ln/>
+        </p:spPr>
+        <p:txBody>
+          <a:bodyPr wrap="square" lIns="0" tIns="0" rIns="0" bIns="0" rtlCol="0" anchor="ctr"/>
+          <a:lstStyle/>
+          <a:p>
+            <a:pPr algn="ctr" indent="0" marL="0">
+              <a:buNone/>
+            </a:pPr>
+            <a:r>
+              <a:rPr lang="en-US" sz="1100" b="1" dirty="0">
+                <a:solidFill>
+                  <a:srgbClr val="8C8C8C"/>
+                </a:solidFill>
+                <a:latin typeface="Arial" pitchFamily="34" charset="0"/>
+                <a:ea typeface="Arial" pitchFamily="34" charset="-122"/>
+                <a:cs typeface="Arial" pitchFamily="34" charset="-120"/>
+              </a:rPr>
+              <a:t>05</a:t>
+            </a:r>
+            <a:endParaRPr lang="en-US" sz="1100" dirty="0"/>
+          </a:p>
+        </p:txBody>
+      </p:sp>
+      <p:sp>
+        <p:nvSpPr>
+          <p:cNvPr id="25" name="Text 17"/>
+          <p:cNvSpPr txBox="1"/>
+          <p:nvPr/>
+        </p:nvSpPr>
+        <p:spPr>
+          <a:xfrm>
+            <a:off x="7315200" y="2377440"/>
+            <a:ext cx="1645920" cy="365760"/>
+          </a:xfrm>
+          <a:prstGeom prst="rect">
+            <a:avLst/>
+          </a:prstGeom>
+          <a:noFill/>
+          <a:ln/>
+        </p:spPr>
+        <p:txBody>
+          <a:bodyPr wrap="square" lIns="0" tIns="0" rIns="0" bIns="0" rtlCol="0" anchor="ctr"/>
+          <a:lstStyle/>
+          <a:p>
+            <a:pPr algn="ctr" indent="0" marL="0">
+              <a:buNone/>
+            </a:pPr>
+            <a:r>
+              <a:rPr lang="en-US" sz="1800" b="1" dirty="0">
+                <a:solidFill>
+                  <a:srgbClr val="000000"/>
+                </a:solidFill>
+                <a:latin typeface="Arial" pitchFamily="34" charset="0"/>
+                <a:ea typeface="Arial" pitchFamily="34" charset="-122"/>
+                <a:cs typeface="Arial" pitchFamily="34" charset="-120"/>
+              </a:rPr>
+              <a:t>Test</a:t>
+            </a:r>
+            <a:endParaRPr lang="en-US" sz="1800" dirty="0"/>
+          </a:p>
+        </p:txBody>
+      </p:sp>
+      <p:sp>
+        <p:nvSpPr>
+          <p:cNvPr id="26" name="Text 18"/>
+          <p:cNvSpPr txBox="1"/>
+          <p:nvPr/>
+        </p:nvSpPr>
+        <p:spPr>
+          <a:xfrm>
+            <a:off x="7360920" y="2788920"/>
+            <a:ext cx="1554480" cy="822960"/>
+          </a:xfrm>
+          <a:prstGeom prst="rect">
+            <a:avLst/>
+          </a:prstGeom>
+          <a:noFill/>
+          <a:ln/>
+        </p:spPr>
+        <p:txBody>
+          <a:bodyPr wrap="square" lIns="0" tIns="0" rIns="0" bIns="0" rtlCol="0" anchor="t"/>
+          <a:lstStyle/>
+          <a:p>
+            <a:pPr algn="ctr" indent="0" marL="0">
+              <a:buNone/>
+            </a:pPr>
+            <a:r>
+              <a:rPr lang="en-US" sz="1200" dirty="0">
+                <a:solidFill>
+                  <a:srgbClr val="595959"/>
+                </a:solidFill>
+                <a:latin typeface="Arial" pitchFamily="34" charset="0"/>
+                <a:ea typeface="Arial" pitchFamily="34" charset="-122"/>
+                <a:cs typeface="Arial" pitchFamily="34" charset="-120"/>
+              </a:rPr>
+              <a:t>Does it really work?</a:t>
+            </a:r>
+            <a:endParaRPr lang="en-US" sz="1200" dirty="0"/>
+          </a:p>
+        </p:txBody>
+      </p:sp>
+      <p:sp>
+        <p:nvSpPr>
+          <p:cNvPr id="27" name="Shape 19"/>
           <p:cNvSpPr/>
           <p:nvPr/>
         </p:nvSpPr>
         <p:spPr>
           <a:xfrm>
-            <a:off x="1005840" y="1600200"/>
-            <a:ext cx="7132320" cy="0"/>
-          </a:xfrm>
-          <a:prstGeom prst="line">
-            <a:avLst/>
-          </a:prstGeom>
-          <a:noFill/>
-          <a:ln w="19050">
-            <a:solidFill>
-              <a:srgbClr val="BFBFBF"/>
-            </a:solidFill>
-            <a:prstDash val="dash"/>
-          </a:ln>
-        </p:spPr>
-      </p:sp>
-      <p:sp>
-        <p:nvSpPr>
-          <p:cNvPr id="8" name="Shape 5"/>
-          <p:cNvSpPr/>
-          <p:nvPr/>
-        </p:nvSpPr>
-        <p:spPr>
-          <a:xfrm>
-            <a:off x="594360" y="1188720"/>
-            <a:ext cx="822960" cy="822960"/>
-          </a:xfrm>
-          <a:prstGeom prst="ellipse">
+            <a:off x="457200" y="3931920"/>
+            <a:ext cx="8229600" cy="640080"/>
+          </a:xfrm>
+          <a:prstGeom prst="rect">
             <a:avLst/>
           </a:prstGeom>
           <a:solidFill>
@@ -12951,839 +13296,9 @@
           </a:ln>
         </p:spPr>
       </p:sp>
-      <p:pic>
-        <p:nvPicPr>
-          <p:cNvPr id="9" name="Image 0" descr="preencoded.png">    </p:cNvPr>
-          <p:cNvPicPr>
-            <a:picLocks noChangeAspect="1"/>
-          </p:cNvPicPr>
-          <p:nvPr/>
-        </p:nvPicPr>
-        <p:blipFill>
-          <a:blip r:embed="rId1"/>
-          <a:stretch>
-            <a:fillRect/>
-          </a:stretch>
-        </p:blipFill>
-        <p:spPr>
-          <a:xfrm>
-            <a:off x="808330" y="1402690"/>
-            <a:ext cx="395021" cy="395021"/>
-          </a:xfrm>
-          <a:prstGeom prst="rect">
-            <a:avLst/>
-          </a:prstGeom>
-        </p:spPr>
-      </p:pic>
-      <p:sp>
-        <p:nvSpPr>
-          <p:cNvPr id="10" name="Text 6"/>
-          <p:cNvSpPr txBox="1"/>
-          <p:nvPr/>
-        </p:nvSpPr>
-        <p:spPr>
-          <a:xfrm>
-            <a:off x="182880" y="2148840"/>
-            <a:ext cx="1645920" cy="228600"/>
-          </a:xfrm>
-          <a:prstGeom prst="rect">
-            <a:avLst/>
-          </a:prstGeom>
-          <a:noFill/>
-          <a:ln/>
-        </p:spPr>
-        <p:txBody>
-          <a:bodyPr wrap="square" lIns="0" tIns="0" rIns="0" bIns="0" rtlCol="0" anchor="ctr"/>
-          <a:lstStyle/>
-          <a:p>
-            <a:pPr algn="ctr" indent="0" marL="0">
-              <a:buNone/>
-            </a:pPr>
-            <a:r>
-              <a:rPr lang="en-US" sz="1100" b="1" dirty="0">
-                <a:solidFill>
-                  <a:srgbClr val="8C8C8C"/>
-                </a:solidFill>
-                <a:latin typeface="Arial" pitchFamily="34" charset="0"/>
-                <a:ea typeface="Arial" pitchFamily="34" charset="-122"/>
-                <a:cs typeface="Arial" pitchFamily="34" charset="-120"/>
-              </a:rPr>
-              <a:t>01</a:t>
-            </a:r>
-            <a:endParaRPr lang="en-US" sz="1100" dirty="0"/>
-          </a:p>
-        </p:txBody>
-      </p:sp>
-      <p:sp>
-        <p:nvSpPr>
-          <p:cNvPr id="11" name="Text 7"/>
-          <p:cNvSpPr txBox="1"/>
-          <p:nvPr/>
-        </p:nvSpPr>
-        <p:spPr>
-          <a:xfrm>
-            <a:off x="182880" y="2377440"/>
-            <a:ext cx="1645920" cy="365760"/>
-          </a:xfrm>
-          <a:prstGeom prst="rect">
-            <a:avLst/>
-          </a:prstGeom>
-          <a:noFill/>
-          <a:ln/>
-        </p:spPr>
-        <p:txBody>
-          <a:bodyPr wrap="square" lIns="0" tIns="0" rIns="0" bIns="0" rtlCol="0" anchor="ctr"/>
-          <a:lstStyle/>
-          <a:p>
-            <a:pPr algn="ctr" indent="0" marL="0">
-              <a:buNone/>
-            </a:pPr>
-            <a:r>
-              <a:rPr lang="en-US" sz="1800" b="1" dirty="0">
-                <a:solidFill>
-                  <a:srgbClr val="000000"/>
-                </a:solidFill>
-                <a:latin typeface="Arial" pitchFamily="34" charset="0"/>
-                <a:ea typeface="Arial" pitchFamily="34" charset="-122"/>
-                <a:cs typeface="Arial" pitchFamily="34" charset="-120"/>
-              </a:rPr>
-              <a:t>Empathize</a:t>
-            </a:r>
-            <a:endParaRPr lang="en-US" sz="1800" dirty="0"/>
-          </a:p>
-        </p:txBody>
-      </p:sp>
-      <p:sp>
-        <p:nvSpPr>
-          <p:cNvPr id="12" name="Text 8"/>
-          <p:cNvSpPr txBox="1"/>
-          <p:nvPr/>
-        </p:nvSpPr>
-        <p:spPr>
-          <a:xfrm>
-            <a:off x="228600" y="2788920"/>
-            <a:ext cx="1554480" cy="822960"/>
-          </a:xfrm>
-          <a:prstGeom prst="rect">
-            <a:avLst/>
-          </a:prstGeom>
-          <a:noFill/>
-          <a:ln/>
-        </p:spPr>
-        <p:txBody>
-          <a:bodyPr wrap="square" lIns="0" tIns="0" rIns="0" bIns="0" rtlCol="0" anchor="t"/>
-          <a:lstStyle/>
-          <a:p>
-            <a:pPr algn="ctr" indent="0" marL="0">
-              <a:buNone/>
-            </a:pPr>
-            <a:r>
-              <a:rPr lang="en-US" sz="1200" dirty="0">
-                <a:solidFill>
-                  <a:srgbClr val="595959"/>
-                </a:solidFill>
-                <a:latin typeface="Arial" pitchFamily="34" charset="0"/>
-                <a:ea typeface="Arial" pitchFamily="34" charset="-122"/>
-                <a:cs typeface="Arial" pitchFamily="34" charset="-120"/>
-              </a:rPr>
-              <a:t>Who is struggling, and how does it feel?</a:t>
-            </a:r>
-            <a:endParaRPr lang="en-US" sz="1200" dirty="0"/>
-          </a:p>
-        </p:txBody>
-      </p:sp>
-      <p:sp>
-        <p:nvSpPr>
-          <p:cNvPr id="13" name="Shape 9"/>
-          <p:cNvSpPr/>
-          <p:nvPr/>
-        </p:nvSpPr>
-        <p:spPr>
-          <a:xfrm>
-            <a:off x="2377440" y="1188720"/>
-            <a:ext cx="822960" cy="822960"/>
-          </a:xfrm>
-          <a:prstGeom prst="ellipse">
-            <a:avLst/>
-          </a:prstGeom>
-          <a:solidFill>
-            <a:srgbClr val="000000"/>
-          </a:solidFill>
-          <a:ln w="12700">
-            <a:solidFill>
-              <a:srgbClr val="000000"/>
-            </a:solidFill>
-            <a:prstDash val="solid"/>
-          </a:ln>
-        </p:spPr>
-      </p:sp>
-      <p:pic>
-        <p:nvPicPr>
-          <p:cNvPr id="14" name="Image 1" descr="preencoded.png">    </p:cNvPr>
-          <p:cNvPicPr>
-            <a:picLocks noChangeAspect="1"/>
-          </p:cNvPicPr>
-          <p:nvPr/>
-        </p:nvPicPr>
-        <p:blipFill>
-          <a:blip r:embed="rId2"/>
-          <a:stretch>
-            <a:fillRect/>
-          </a:stretch>
-        </p:blipFill>
-        <p:spPr>
-          <a:xfrm>
-            <a:off x="2591410" y="1402690"/>
-            <a:ext cx="395021" cy="395021"/>
-          </a:xfrm>
-          <a:prstGeom prst="rect">
-            <a:avLst/>
-          </a:prstGeom>
-        </p:spPr>
-      </p:pic>
-      <p:sp>
-        <p:nvSpPr>
-          <p:cNvPr id="15" name="Text 10"/>
-          <p:cNvSpPr txBox="1"/>
-          <p:nvPr/>
-        </p:nvSpPr>
-        <p:spPr>
-          <a:xfrm>
-            <a:off x="1965960" y="2148840"/>
-            <a:ext cx="1645920" cy="228600"/>
-          </a:xfrm>
-          <a:prstGeom prst="rect">
-            <a:avLst/>
-          </a:prstGeom>
-          <a:noFill/>
-          <a:ln/>
-        </p:spPr>
-        <p:txBody>
-          <a:bodyPr wrap="square" lIns="0" tIns="0" rIns="0" bIns="0" rtlCol="0" anchor="ctr"/>
-          <a:lstStyle/>
-          <a:p>
-            <a:pPr algn="ctr" indent="0" marL="0">
-              <a:buNone/>
-            </a:pPr>
-            <a:r>
-              <a:rPr lang="en-US" sz="1100" b="1" dirty="0">
-                <a:solidFill>
-                  <a:srgbClr val="8C8C8C"/>
-                </a:solidFill>
-                <a:latin typeface="Arial" pitchFamily="34" charset="0"/>
-                <a:ea typeface="Arial" pitchFamily="34" charset="-122"/>
-                <a:cs typeface="Arial" pitchFamily="34" charset="-120"/>
-              </a:rPr>
-              <a:t>02</a:t>
-            </a:r>
-            <a:endParaRPr lang="en-US" sz="1100" dirty="0"/>
-          </a:p>
-        </p:txBody>
-      </p:sp>
-      <p:sp>
-        <p:nvSpPr>
-          <p:cNvPr id="16" name="Text 11"/>
-          <p:cNvSpPr txBox="1"/>
-          <p:nvPr/>
-        </p:nvSpPr>
-        <p:spPr>
-          <a:xfrm>
-            <a:off x="1965960" y="2377440"/>
-            <a:ext cx="1645920" cy="365760"/>
-          </a:xfrm>
-          <a:prstGeom prst="rect">
-            <a:avLst/>
-          </a:prstGeom>
-          <a:noFill/>
-          <a:ln/>
-        </p:spPr>
-        <p:txBody>
-          <a:bodyPr wrap="square" lIns="0" tIns="0" rIns="0" bIns="0" rtlCol="0" anchor="ctr"/>
-          <a:lstStyle/>
-          <a:p>
-            <a:pPr algn="ctr" indent="0" marL="0">
-              <a:buNone/>
-            </a:pPr>
-            <a:r>
-              <a:rPr lang="en-US" sz="1800" b="1" dirty="0">
-                <a:solidFill>
-                  <a:srgbClr val="000000"/>
-                </a:solidFill>
-                <a:latin typeface="Arial" pitchFamily="34" charset="0"/>
-                <a:ea typeface="Arial" pitchFamily="34" charset="-122"/>
-                <a:cs typeface="Arial" pitchFamily="34" charset="-120"/>
-              </a:rPr>
-              <a:t>Define</a:t>
-            </a:r>
-            <a:endParaRPr lang="en-US" sz="1800" dirty="0"/>
-          </a:p>
-        </p:txBody>
-      </p:sp>
-      <p:sp>
-        <p:nvSpPr>
-          <p:cNvPr id="17" name="Text 12"/>
-          <p:cNvSpPr txBox="1"/>
-          <p:nvPr/>
-        </p:nvSpPr>
-        <p:spPr>
-          <a:xfrm>
-            <a:off x="2011680" y="2788920"/>
-            <a:ext cx="1554480" cy="822960"/>
-          </a:xfrm>
-          <a:prstGeom prst="rect">
-            <a:avLst/>
-          </a:prstGeom>
-          <a:noFill/>
-          <a:ln/>
-        </p:spPr>
-        <p:txBody>
-          <a:bodyPr wrap="square" lIns="0" tIns="0" rIns="0" bIns="0" rtlCol="0" anchor="t"/>
-          <a:lstStyle/>
-          <a:p>
-            <a:pPr algn="ctr" indent="0" marL="0">
-              <a:buNone/>
-            </a:pPr>
-            <a:r>
-              <a:rPr lang="en-US" sz="1200" dirty="0">
-                <a:solidFill>
-                  <a:srgbClr val="595959"/>
-                </a:solidFill>
-                <a:latin typeface="Arial" pitchFamily="34" charset="0"/>
-                <a:ea typeface="Arial" pitchFamily="34" charset="-122"/>
-                <a:cs typeface="Arial" pitchFamily="34" charset="-120"/>
-              </a:rPr>
-              <a:t>What exactly is the problem?</a:t>
-            </a:r>
-            <a:endParaRPr lang="en-US" sz="1200" dirty="0"/>
-          </a:p>
-        </p:txBody>
-      </p:sp>
-      <p:sp>
-        <p:nvSpPr>
-          <p:cNvPr id="18" name="Shape 13"/>
-          <p:cNvSpPr/>
-          <p:nvPr/>
-        </p:nvSpPr>
-        <p:spPr>
-          <a:xfrm>
-            <a:off x="4160520" y="1188720"/>
-            <a:ext cx="822960" cy="822960"/>
-          </a:xfrm>
-          <a:prstGeom prst="ellipse">
-            <a:avLst/>
-          </a:prstGeom>
-          <a:solidFill>
-            <a:srgbClr val="000000"/>
-          </a:solidFill>
-          <a:ln w="12700">
-            <a:solidFill>
-              <a:srgbClr val="000000"/>
-            </a:solidFill>
-            <a:prstDash val="solid"/>
-          </a:ln>
-        </p:spPr>
-      </p:sp>
-      <p:pic>
-        <p:nvPicPr>
-          <p:cNvPr id="19" name="Image 2" descr="preencoded.png">    </p:cNvPr>
-          <p:cNvPicPr>
-            <a:picLocks noChangeAspect="1"/>
-          </p:cNvPicPr>
-          <p:nvPr/>
-        </p:nvPicPr>
-        <p:blipFill>
-          <a:blip r:embed="rId3"/>
-          <a:stretch>
-            <a:fillRect/>
-          </a:stretch>
-        </p:blipFill>
-        <p:spPr>
-          <a:xfrm>
-            <a:off x="4374490" y="1402690"/>
-            <a:ext cx="395021" cy="395021"/>
-          </a:xfrm>
-          <a:prstGeom prst="rect">
-            <a:avLst/>
-          </a:prstGeom>
-        </p:spPr>
-      </p:pic>
-      <p:sp>
-        <p:nvSpPr>
-          <p:cNvPr id="20" name="Text 14"/>
-          <p:cNvSpPr txBox="1"/>
-          <p:nvPr/>
-        </p:nvSpPr>
-        <p:spPr>
-          <a:xfrm>
-            <a:off x="3749040" y="2148840"/>
-            <a:ext cx="1645920" cy="228600"/>
-          </a:xfrm>
-          <a:prstGeom prst="rect">
-            <a:avLst/>
-          </a:prstGeom>
-          <a:noFill/>
-          <a:ln/>
-        </p:spPr>
-        <p:txBody>
-          <a:bodyPr wrap="square" lIns="0" tIns="0" rIns="0" bIns="0" rtlCol="0" anchor="ctr"/>
-          <a:lstStyle/>
-          <a:p>
-            <a:pPr algn="ctr" indent="0" marL="0">
-              <a:buNone/>
-            </a:pPr>
-            <a:r>
-              <a:rPr lang="en-US" sz="1100" b="1" dirty="0">
-                <a:solidFill>
-                  <a:srgbClr val="8C8C8C"/>
-                </a:solidFill>
-                <a:latin typeface="Arial" pitchFamily="34" charset="0"/>
-                <a:ea typeface="Arial" pitchFamily="34" charset="-122"/>
-                <a:cs typeface="Arial" pitchFamily="34" charset="-120"/>
-              </a:rPr>
-              <a:t>03</a:t>
-            </a:r>
-            <a:endParaRPr lang="en-US" sz="1100" dirty="0"/>
-          </a:p>
-        </p:txBody>
-      </p:sp>
-      <p:sp>
-        <p:nvSpPr>
-          <p:cNvPr id="21" name="Text 15"/>
-          <p:cNvSpPr txBox="1"/>
-          <p:nvPr/>
-        </p:nvSpPr>
-        <p:spPr>
-          <a:xfrm>
-            <a:off x="3749040" y="2377440"/>
-            <a:ext cx="1645920" cy="365760"/>
-          </a:xfrm>
-          <a:prstGeom prst="rect">
-            <a:avLst/>
-          </a:prstGeom>
-          <a:noFill/>
-          <a:ln/>
-        </p:spPr>
-        <p:txBody>
-          <a:bodyPr wrap="square" lIns="0" tIns="0" rIns="0" bIns="0" rtlCol="0" anchor="ctr"/>
-          <a:lstStyle/>
-          <a:p>
-            <a:pPr algn="ctr" indent="0" marL="0">
-              <a:buNone/>
-            </a:pPr>
-            <a:r>
-              <a:rPr lang="en-US" sz="1800" b="1" dirty="0">
-                <a:solidFill>
-                  <a:srgbClr val="000000"/>
-                </a:solidFill>
-                <a:latin typeface="Arial" pitchFamily="34" charset="0"/>
-                <a:ea typeface="Arial" pitchFamily="34" charset="-122"/>
-                <a:cs typeface="Arial" pitchFamily="34" charset="-120"/>
-              </a:rPr>
-              <a:t>Ideate</a:t>
-            </a:r>
-            <a:endParaRPr lang="en-US" sz="1800" dirty="0"/>
-          </a:p>
-        </p:txBody>
-      </p:sp>
-      <p:sp>
-        <p:nvSpPr>
-          <p:cNvPr id="22" name="Text 16"/>
-          <p:cNvSpPr txBox="1"/>
-          <p:nvPr/>
-        </p:nvSpPr>
-        <p:spPr>
-          <a:xfrm>
-            <a:off x="3794760" y="2788920"/>
-            <a:ext cx="1554480" cy="822960"/>
-          </a:xfrm>
-          <a:prstGeom prst="rect">
-            <a:avLst/>
-          </a:prstGeom>
-          <a:noFill/>
-          <a:ln/>
-        </p:spPr>
-        <p:txBody>
-          <a:bodyPr wrap="square" lIns="0" tIns="0" rIns="0" bIns="0" rtlCol="0" anchor="t"/>
-          <a:lstStyle/>
-          <a:p>
-            <a:pPr algn="ctr" indent="0" marL="0">
-              <a:buNone/>
-            </a:pPr>
-            <a:r>
-              <a:rPr lang="en-US" sz="1200" dirty="0">
-                <a:solidFill>
-                  <a:srgbClr val="595959"/>
-                </a:solidFill>
-                <a:latin typeface="Arial" pitchFamily="34" charset="0"/>
-                <a:ea typeface="Arial" pitchFamily="34" charset="-122"/>
-                <a:cs typeface="Arial" pitchFamily="34" charset="-120"/>
-              </a:rPr>
-              <a:t>What could we do about it?</a:t>
-            </a:r>
-            <a:endParaRPr lang="en-US" sz="1200" dirty="0"/>
-          </a:p>
-        </p:txBody>
-      </p:sp>
-      <p:sp>
-        <p:nvSpPr>
-          <p:cNvPr id="23" name="Shape 17"/>
-          <p:cNvSpPr/>
-          <p:nvPr/>
-        </p:nvSpPr>
-        <p:spPr>
-          <a:xfrm>
-            <a:off x="5943600" y="1188720"/>
-            <a:ext cx="822960" cy="822960"/>
-          </a:xfrm>
-          <a:prstGeom prst="ellipse">
-            <a:avLst/>
-          </a:prstGeom>
-          <a:solidFill>
-            <a:srgbClr val="000000"/>
-          </a:solidFill>
-          <a:ln w="12700">
-            <a:solidFill>
-              <a:srgbClr val="000000"/>
-            </a:solidFill>
-            <a:prstDash val="solid"/>
-          </a:ln>
-        </p:spPr>
-      </p:sp>
-      <p:pic>
-        <p:nvPicPr>
-          <p:cNvPr id="24" name="Image 3" descr="preencoded.png">    </p:cNvPr>
-          <p:cNvPicPr>
-            <a:picLocks noChangeAspect="1"/>
-          </p:cNvPicPr>
-          <p:nvPr/>
-        </p:nvPicPr>
-        <p:blipFill>
-          <a:blip r:embed="rId4"/>
-          <a:stretch>
-            <a:fillRect/>
-          </a:stretch>
-        </p:blipFill>
-        <p:spPr>
-          <a:xfrm>
-            <a:off x="6157570" y="1402690"/>
-            <a:ext cx="395021" cy="395021"/>
-          </a:xfrm>
-          <a:prstGeom prst="rect">
-            <a:avLst/>
-          </a:prstGeom>
-        </p:spPr>
-      </p:pic>
-      <p:sp>
-        <p:nvSpPr>
-          <p:cNvPr id="25" name="Text 18"/>
-          <p:cNvSpPr txBox="1"/>
-          <p:nvPr/>
-        </p:nvSpPr>
-        <p:spPr>
-          <a:xfrm>
-            <a:off x="5532120" y="2148840"/>
-            <a:ext cx="1645920" cy="228600"/>
-          </a:xfrm>
-          <a:prstGeom prst="rect">
-            <a:avLst/>
-          </a:prstGeom>
-          <a:noFill/>
-          <a:ln/>
-        </p:spPr>
-        <p:txBody>
-          <a:bodyPr wrap="square" lIns="0" tIns="0" rIns="0" bIns="0" rtlCol="0" anchor="ctr"/>
-          <a:lstStyle/>
-          <a:p>
-            <a:pPr algn="ctr" indent="0" marL="0">
-              <a:buNone/>
-            </a:pPr>
-            <a:r>
-              <a:rPr lang="en-US" sz="1100" b="1" dirty="0">
-                <a:solidFill>
-                  <a:srgbClr val="8C8C8C"/>
-                </a:solidFill>
-                <a:latin typeface="Arial" pitchFamily="34" charset="0"/>
-                <a:ea typeface="Arial" pitchFamily="34" charset="-122"/>
-                <a:cs typeface="Arial" pitchFamily="34" charset="-120"/>
-              </a:rPr>
-              <a:t>04</a:t>
-            </a:r>
-            <a:endParaRPr lang="en-US" sz="1100" dirty="0"/>
-          </a:p>
-        </p:txBody>
-      </p:sp>
-      <p:sp>
-        <p:nvSpPr>
-          <p:cNvPr id="26" name="Text 19"/>
-          <p:cNvSpPr txBox="1"/>
-          <p:nvPr/>
-        </p:nvSpPr>
-        <p:spPr>
-          <a:xfrm>
-            <a:off x="5532120" y="2377440"/>
-            <a:ext cx="1645920" cy="365760"/>
-          </a:xfrm>
-          <a:prstGeom prst="rect">
-            <a:avLst/>
-          </a:prstGeom>
-          <a:noFill/>
-          <a:ln/>
-        </p:spPr>
-        <p:txBody>
-          <a:bodyPr wrap="square" lIns="0" tIns="0" rIns="0" bIns="0" rtlCol="0" anchor="ctr"/>
-          <a:lstStyle/>
-          <a:p>
-            <a:pPr algn="ctr" indent="0" marL="0">
-              <a:buNone/>
-            </a:pPr>
-            <a:r>
-              <a:rPr lang="en-US" sz="1800" b="1" dirty="0">
-                <a:solidFill>
-                  <a:srgbClr val="000000"/>
-                </a:solidFill>
-                <a:latin typeface="Arial" pitchFamily="34" charset="0"/>
-                <a:ea typeface="Arial" pitchFamily="34" charset="-122"/>
-                <a:cs typeface="Arial" pitchFamily="34" charset="-120"/>
-              </a:rPr>
-              <a:t>Prototype</a:t>
-            </a:r>
-            <a:endParaRPr lang="en-US" sz="1800" dirty="0"/>
-          </a:p>
-        </p:txBody>
-      </p:sp>
-      <p:sp>
-        <p:nvSpPr>
-          <p:cNvPr id="27" name="Text 20"/>
-          <p:cNvSpPr txBox="1"/>
-          <p:nvPr/>
-        </p:nvSpPr>
-        <p:spPr>
-          <a:xfrm>
-            <a:off x="5577840" y="2788920"/>
-            <a:ext cx="1554480" cy="822960"/>
-          </a:xfrm>
-          <a:prstGeom prst="rect">
-            <a:avLst/>
-          </a:prstGeom>
-          <a:noFill/>
-          <a:ln/>
-        </p:spPr>
-        <p:txBody>
-          <a:bodyPr wrap="square" lIns="0" tIns="0" rIns="0" bIns="0" rtlCol="0" anchor="t"/>
-          <a:lstStyle/>
-          <a:p>
-            <a:pPr algn="ctr" indent="0" marL="0">
-              <a:buNone/>
-            </a:pPr>
-            <a:r>
-              <a:rPr lang="en-US" sz="1200" dirty="0">
-                <a:solidFill>
-                  <a:srgbClr val="595959"/>
-                </a:solidFill>
-                <a:latin typeface="Arial" pitchFamily="34" charset="0"/>
-                <a:ea typeface="Arial" pitchFamily="34" charset="-122"/>
-                <a:cs typeface="Arial" pitchFamily="34" charset="-120"/>
-              </a:rPr>
-              <a:t>Can we build a quick version?</a:t>
-            </a:r>
-            <a:endParaRPr lang="en-US" sz="1200" dirty="0"/>
-          </a:p>
-        </p:txBody>
-      </p:sp>
-      <p:sp>
-        <p:nvSpPr>
-          <p:cNvPr id="28" name="Shape 21"/>
-          <p:cNvSpPr/>
-          <p:nvPr/>
-        </p:nvSpPr>
-        <p:spPr>
-          <a:xfrm>
-            <a:off x="7726680" y="1188720"/>
-            <a:ext cx="822960" cy="822960"/>
-          </a:xfrm>
-          <a:prstGeom prst="ellipse">
-            <a:avLst/>
-          </a:prstGeom>
-          <a:solidFill>
-            <a:srgbClr val="000000"/>
-          </a:solidFill>
-          <a:ln w="12700">
-            <a:solidFill>
-              <a:srgbClr val="000000"/>
-            </a:solidFill>
-            <a:prstDash val="solid"/>
-          </a:ln>
-        </p:spPr>
-      </p:sp>
-      <p:pic>
-        <p:nvPicPr>
-          <p:cNvPr id="29" name="Image 4" descr="preencoded.png">    </p:cNvPr>
-          <p:cNvPicPr>
-            <a:picLocks noChangeAspect="1"/>
-          </p:cNvPicPr>
-          <p:nvPr/>
-        </p:nvPicPr>
-        <p:blipFill>
-          <a:blip r:embed="rId5"/>
-          <a:stretch>
-            <a:fillRect/>
-          </a:stretch>
-        </p:blipFill>
-        <p:spPr>
-          <a:xfrm>
-            <a:off x="7940650" y="1402690"/>
-            <a:ext cx="395021" cy="395021"/>
-          </a:xfrm>
-          <a:prstGeom prst="rect">
-            <a:avLst/>
-          </a:prstGeom>
-        </p:spPr>
-      </p:pic>
-      <p:sp>
-        <p:nvSpPr>
-          <p:cNvPr id="30" name="Text 22"/>
-          <p:cNvSpPr txBox="1"/>
-          <p:nvPr/>
-        </p:nvSpPr>
-        <p:spPr>
-          <a:xfrm>
-            <a:off x="7315200" y="2148840"/>
-            <a:ext cx="1645920" cy="228600"/>
-          </a:xfrm>
-          <a:prstGeom prst="rect">
-            <a:avLst/>
-          </a:prstGeom>
-          <a:noFill/>
-          <a:ln/>
-        </p:spPr>
-        <p:txBody>
-          <a:bodyPr wrap="square" lIns="0" tIns="0" rIns="0" bIns="0" rtlCol="0" anchor="ctr"/>
-          <a:lstStyle/>
-          <a:p>
-            <a:pPr algn="ctr" indent="0" marL="0">
-              <a:buNone/>
-            </a:pPr>
-            <a:r>
-              <a:rPr lang="en-US" sz="1100" b="1" dirty="0">
-                <a:solidFill>
-                  <a:srgbClr val="8C8C8C"/>
-                </a:solidFill>
-                <a:latin typeface="Arial" pitchFamily="34" charset="0"/>
-                <a:ea typeface="Arial" pitchFamily="34" charset="-122"/>
-                <a:cs typeface="Arial" pitchFamily="34" charset="-120"/>
-              </a:rPr>
-              <a:t>05</a:t>
-            </a:r>
-            <a:endParaRPr lang="en-US" sz="1100" dirty="0"/>
-          </a:p>
-        </p:txBody>
-      </p:sp>
-      <p:sp>
-        <p:nvSpPr>
-          <p:cNvPr id="31" name="Text 23"/>
-          <p:cNvSpPr txBox="1"/>
-          <p:nvPr/>
-        </p:nvSpPr>
-        <p:spPr>
-          <a:xfrm>
-            <a:off x="7315200" y="2377440"/>
-            <a:ext cx="1645920" cy="365760"/>
-          </a:xfrm>
-          <a:prstGeom prst="rect">
-            <a:avLst/>
-          </a:prstGeom>
-          <a:noFill/>
-          <a:ln/>
-        </p:spPr>
-        <p:txBody>
-          <a:bodyPr wrap="square" lIns="0" tIns="0" rIns="0" bIns="0" rtlCol="0" anchor="ctr"/>
-          <a:lstStyle/>
-          <a:p>
-            <a:pPr algn="ctr" indent="0" marL="0">
-              <a:buNone/>
-            </a:pPr>
-            <a:r>
-              <a:rPr lang="en-US" sz="1800" b="1" dirty="0">
-                <a:solidFill>
-                  <a:srgbClr val="000000"/>
-                </a:solidFill>
-                <a:latin typeface="Arial" pitchFamily="34" charset="0"/>
-                <a:ea typeface="Arial" pitchFamily="34" charset="-122"/>
-                <a:cs typeface="Arial" pitchFamily="34" charset="-120"/>
-              </a:rPr>
-              <a:t>Test</a:t>
-            </a:r>
-            <a:endParaRPr lang="en-US" sz="1800" dirty="0"/>
-          </a:p>
-        </p:txBody>
-      </p:sp>
-      <p:sp>
-        <p:nvSpPr>
-          <p:cNvPr id="32" name="Text 24"/>
-          <p:cNvSpPr txBox="1"/>
-          <p:nvPr/>
-        </p:nvSpPr>
-        <p:spPr>
-          <a:xfrm>
-            <a:off x="7360920" y="2788920"/>
-            <a:ext cx="1554480" cy="822960"/>
-          </a:xfrm>
-          <a:prstGeom prst="rect">
-            <a:avLst/>
-          </a:prstGeom>
-          <a:noFill/>
-          <a:ln/>
-        </p:spPr>
-        <p:txBody>
-          <a:bodyPr wrap="square" lIns="0" tIns="0" rIns="0" bIns="0" rtlCol="0" anchor="t"/>
-          <a:lstStyle/>
-          <a:p>
-            <a:pPr algn="ctr" indent="0" marL="0">
-              <a:buNone/>
-            </a:pPr>
-            <a:r>
-              <a:rPr lang="en-US" sz="1200" dirty="0">
-                <a:solidFill>
-                  <a:srgbClr val="595959"/>
-                </a:solidFill>
-                <a:latin typeface="Arial" pitchFamily="34" charset="0"/>
-                <a:ea typeface="Arial" pitchFamily="34" charset="-122"/>
-                <a:cs typeface="Arial" pitchFamily="34" charset="-120"/>
-              </a:rPr>
-              <a:t>Does it really work?</a:t>
-            </a:r>
-            <a:endParaRPr lang="en-US" sz="1200" dirty="0"/>
-          </a:p>
-        </p:txBody>
-      </p:sp>
-      <p:sp>
-        <p:nvSpPr>
-          <p:cNvPr id="33" name="Shape 25"/>
-          <p:cNvSpPr/>
-          <p:nvPr/>
-        </p:nvSpPr>
-        <p:spPr>
-          <a:xfrm>
-            <a:off x="457200" y="3931920"/>
-            <a:ext cx="8229600" cy="640080"/>
-          </a:xfrm>
-          <a:prstGeom prst="rect">
-            <a:avLst/>
-          </a:prstGeom>
-          <a:solidFill>
-            <a:srgbClr val="000000"/>
-          </a:solidFill>
-          <a:ln w="12700">
-            <a:solidFill>
-              <a:srgbClr val="000000"/>
-            </a:solidFill>
-            <a:prstDash val="solid"/>
-          </a:ln>
-        </p:spPr>
-      </p:sp>
-      <p:sp>
-        <p:nvSpPr>
-          <p:cNvPr id="34" name="Text 26"/>
+      <p:sp>
+        <p:nvSpPr>
+          <p:cNvPr id="28" name="Text 20"/>
           <p:cNvSpPr txBox="1"/>
           <p:nvPr/>
         </p:nvSpPr>
@@ -13930,18 +13445,81 @@
           </a:p>
         </p:txBody>
       </p:sp>
-      <p:sp>
-        <p:nvSpPr>
-          <p:cNvPr id="5" name="Shape 2"/>
+      <p:pic>
+        <p:nvPicPr>
+          <p:cNvPr id="5" name="Image 0" descr="preencoded.png">    </p:cNvPr>
+          <p:cNvPicPr>
+            <a:picLocks noChangeAspect="1"/>
+          </p:cNvPicPr>
+          <p:nvPr/>
+        </p:nvPicPr>
+        <p:blipFill>
+          <a:blip r:embed="rId1"/>
+          <a:stretch>
+            <a:fillRect/>
+          </a:stretch>
+        </p:blipFill>
+        <p:spPr>
+          <a:xfrm>
+            <a:off x="548640" y="2880360"/>
+            <a:ext cx="548640" cy="548640"/>
+          </a:xfrm>
+          <a:prstGeom prst="rect">
+            <a:avLst/>
+          </a:prstGeom>
+        </p:spPr>
+      </p:pic>
+      <p:sp>
+        <p:nvSpPr>
+          <p:cNvPr id="6" name="Text 2"/>
+          <p:cNvSpPr txBox="1"/>
+          <p:nvPr/>
+        </p:nvSpPr>
+        <p:spPr>
+          <a:xfrm>
+            <a:off x="1691640" y="2697480"/>
+            <a:ext cx="2377440" cy="914400"/>
+          </a:xfrm>
+          <a:prstGeom prst="rect">
+            <a:avLst/>
+          </a:prstGeom>
+          <a:noFill/>
+          <a:ln/>
+        </p:spPr>
+        <p:txBody>
+          <a:bodyPr wrap="square" lIns="0" tIns="0" rIns="0" bIns="0" rtlCol="0" anchor="ctr"/>
+          <a:lstStyle/>
+          <a:p>
+            <a:pPr indent="0" marL="0">
+              <a:buNone/>
+            </a:pPr>
+            <a:r>
+              <a:rPr lang="en-US" sz="1500" i="1" dirty="0">
+                <a:solidFill>
+                  <a:srgbClr val="BFBFBF"/>
+                </a:solidFill>
+                <a:latin typeface="Arial" pitchFamily="34" charset="0"/>
+                <a:ea typeface="Arial" pitchFamily="34" charset="-122"/>
+                <a:cs typeface="Arial" pitchFamily="34" charset="-120"/>
+              </a:rPr>
+              <a:t>Start with people, not technology.</a:t>
+            </a:r>
+            <a:endParaRPr lang="en-US" sz="1500" dirty="0"/>
+          </a:p>
+        </p:txBody>
+      </p:sp>
+      <p:sp>
+        <p:nvSpPr>
+          <p:cNvPr id="7" name="Shape 3"/>
           <p:cNvSpPr/>
           <p:nvPr/>
         </p:nvSpPr>
         <p:spPr>
           <a:xfrm>
-            <a:off x="548640" y="2697480"/>
-            <a:ext cx="914400" cy="914400"/>
-          </a:xfrm>
-          <a:prstGeom prst="ellipse">
+            <a:off x="4480560" y="457200"/>
+            <a:ext cx="4206240" cy="4206240"/>
+          </a:xfrm>
+          <a:prstGeom prst="rect">
             <a:avLst/>
           </a:prstGeom>
           <a:solidFill>
@@ -13955,97 +13533,9 @@
           </a:ln>
         </p:spPr>
       </p:sp>
-      <p:pic>
-        <p:nvPicPr>
-          <p:cNvPr id="6" name="Image 0" descr="preencoded.png">    </p:cNvPr>
-          <p:cNvPicPr>
-            <a:picLocks noChangeAspect="1"/>
-          </p:cNvPicPr>
-          <p:nvPr/>
-        </p:nvPicPr>
-        <p:blipFill>
-          <a:blip r:embed="rId1"/>
-          <a:stretch>
-            <a:fillRect/>
-          </a:stretch>
-        </p:blipFill>
-        <p:spPr>
-          <a:xfrm>
-            <a:off x="786384" y="2935224"/>
-            <a:ext cx="438912" cy="438912"/>
-          </a:xfrm>
-          <a:prstGeom prst="rect">
-            <a:avLst/>
-          </a:prstGeom>
-        </p:spPr>
-      </p:pic>
-      <p:sp>
-        <p:nvSpPr>
-          <p:cNvPr id="7" name="Text 3"/>
-          <p:cNvSpPr txBox="1"/>
-          <p:nvPr/>
-        </p:nvSpPr>
-        <p:spPr>
-          <a:xfrm>
-            <a:off x="1691640" y="2697480"/>
-            <a:ext cx="2377440" cy="914400"/>
-          </a:xfrm>
-          <a:prstGeom prst="rect">
-            <a:avLst/>
-          </a:prstGeom>
-          <a:noFill/>
-          <a:ln/>
-        </p:spPr>
-        <p:txBody>
-          <a:bodyPr wrap="square" lIns="0" tIns="0" rIns="0" bIns="0" rtlCol="0" anchor="ctr"/>
-          <a:lstStyle/>
-          <a:p>
-            <a:pPr indent="0" marL="0">
-              <a:buNone/>
-            </a:pPr>
-            <a:r>
-              <a:rPr lang="en-US" sz="1500" i="1" dirty="0">
-                <a:solidFill>
-                  <a:srgbClr val="BFBFBF"/>
-                </a:solidFill>
-                <a:latin typeface="Arial" pitchFamily="34" charset="0"/>
-                <a:ea typeface="Arial" pitchFamily="34" charset="-122"/>
-                <a:cs typeface="Arial" pitchFamily="34" charset="-120"/>
-              </a:rPr>
-              <a:t>Start with people, not technology.</a:t>
-            </a:r>
-            <a:endParaRPr lang="en-US" sz="1500" dirty="0"/>
-          </a:p>
-        </p:txBody>
-      </p:sp>
-      <p:sp>
-        <p:nvSpPr>
-          <p:cNvPr id="8" name="Shape 4"/>
-          <p:cNvSpPr/>
-          <p:nvPr/>
-        </p:nvSpPr>
-        <p:spPr>
-          <a:xfrm>
-            <a:off x="4480560" y="457200"/>
-            <a:ext cx="4206240" cy="4206240"/>
-          </a:xfrm>
-          <a:prstGeom prst="rect">
-            <a:avLst/>
-          </a:prstGeom>
-          <a:solidFill>
-            <a:srgbClr val="FFFFFF"/>
-          </a:solidFill>
-          <a:ln w="12700">
-            <a:solidFill>
-              <a:srgbClr val="FFFFFF"/>
-            </a:solidFill>
-            <a:prstDash val="solid"/>
-          </a:ln>
-        </p:spPr>
-      </p:sp>
-      <p:sp>
-        <p:nvSpPr>
-          <p:cNvPr id="9" name="Text 5"/>
+      <p:sp>
+        <p:nvSpPr>
+          <p:cNvPr id="8" name="Text 4"/>
           <p:cNvSpPr txBox="1"/>
           <p:nvPr/>
         </p:nvSpPr>
@@ -14084,7 +13574,7 @@
       </p:sp>
       <p:sp>
         <p:nvSpPr>
-          <p:cNvPr id="10" name="Text 6"/>
+          <p:cNvPr id="9" name="Text 5"/>
           <p:cNvSpPr txBox="1"/>
           <p:nvPr/>
         </p:nvSpPr>
@@ -14123,7 +13613,7 @@
       </p:sp>
       <p:sp>
         <p:nvSpPr>
-          <p:cNvPr id="11" name="Text 7"/>
+          <p:cNvPr id="10" name="Text 6"/>
           <p:cNvSpPr txBox="1"/>
           <p:nvPr/>
         </p:nvSpPr>
@@ -14162,7 +13652,7 @@
       </p:sp>
       <p:sp>
         <p:nvSpPr>
-          <p:cNvPr id="12" name="Text 8"/>
+          <p:cNvPr id="11" name="Text 7"/>
           <p:cNvSpPr txBox="1"/>
           <p:nvPr/>
         </p:nvSpPr>
@@ -14201,7 +13691,7 @@
       </p:sp>
       <p:sp>
         <p:nvSpPr>
-          <p:cNvPr id="13" name="Text 9"/>
+          <p:cNvPr id="12" name="Text 8"/>
           <p:cNvSpPr txBox="1"/>
           <p:nvPr/>
         </p:nvSpPr>
@@ -14240,7 +13730,7 @@
       </p:sp>
       <p:sp>
         <p:nvSpPr>
-          <p:cNvPr id="14" name="Text 10"/>
+          <p:cNvPr id="13" name="Text 9"/>
           <p:cNvSpPr txBox="1"/>
           <p:nvPr/>
         </p:nvSpPr>
@@ -15137,34 +14627,9 @@
           </a:ln>
         </p:spPr>
       </p:sp>
-      <p:sp>
-        <p:nvSpPr>
-          <p:cNvPr id="8" name="Shape 5"/>
-          <p:cNvSpPr/>
-          <p:nvPr/>
-        </p:nvSpPr>
-        <p:spPr>
-          <a:xfrm>
-            <a:off x="1234440" y="1463040"/>
-            <a:ext cx="1188720" cy="1188720"/>
-          </a:xfrm>
-          <a:prstGeom prst="ellipse">
-            <a:avLst/>
-          </a:prstGeom>
-          <a:solidFill>
-            <a:srgbClr val="FFFFFF"/>
-          </a:solidFill>
-          <a:ln w="12700">
-            <a:solidFill>
-              <a:srgbClr val="FFFFFF"/>
-            </a:solidFill>
-            <a:prstDash val="solid"/>
-          </a:ln>
-        </p:spPr>
-      </p:sp>
       <p:pic>
         <p:nvPicPr>
-          <p:cNvPr id="9" name="Image 0" descr="preencoded.png">    </p:cNvPr>
+          <p:cNvPr id="8" name="Image 0" descr="preencoded.png">    </p:cNvPr>
           <p:cNvPicPr>
             <a:picLocks noChangeAspect="1"/>
           </p:cNvPicPr>
@@ -15178,8 +14643,8 @@
         </p:blipFill>
         <p:spPr>
           <a:xfrm>
-            <a:off x="1543507" y="1772107"/>
-            <a:ext cx="570586" cy="570586"/>
+            <a:off x="1234440" y="1700784"/>
+            <a:ext cx="713232" cy="713232"/>
           </a:xfrm>
           <a:prstGeom prst="rect">
             <a:avLst/>
@@ -15188,7 +14653,7 @@
       </p:pic>
       <p:sp>
         <p:nvSpPr>
-          <p:cNvPr id="10" name="Text 6"/>
+          <p:cNvPr id="9" name="Text 5"/>
           <p:cNvSpPr txBox="1"/>
           <p:nvPr/>
         </p:nvSpPr>
@@ -15227,7 +14692,7 @@
       </p:sp>
       <p:sp>
         <p:nvSpPr>
-          <p:cNvPr id="11" name="Text 7"/>
+          <p:cNvPr id="10" name="Text 6"/>
           <p:cNvSpPr txBox="1"/>
           <p:nvPr/>
         </p:nvSpPr>
@@ -15266,7 +14731,7 @@
       </p:sp>
       <p:sp>
         <p:nvSpPr>
-          <p:cNvPr id="12" name="Text 8"/>
+          <p:cNvPr id="11" name="Text 7"/>
           <p:cNvSpPr txBox="1"/>
           <p:nvPr/>
         </p:nvSpPr>
@@ -15305,7 +14770,7 @@
       </p:sp>
       <p:sp>
         <p:nvSpPr>
-          <p:cNvPr id="13" name="Text 9"/>
+          <p:cNvPr id="12" name="Text 8"/>
           <p:cNvSpPr txBox="1"/>
           <p:nvPr/>
         </p:nvSpPr>
@@ -15344,7 +14809,7 @@
       </p:sp>
       <p:sp>
         <p:nvSpPr>
-          <p:cNvPr id="14" name="Text 10"/>
+          <p:cNvPr id="13" name="Text 9"/>
           <p:cNvSpPr txBox="1"/>
           <p:nvPr/>
         </p:nvSpPr>
@@ -15383,7 +14848,7 @@
       </p:sp>
       <p:sp>
         <p:nvSpPr>
-          <p:cNvPr id="15" name="Text 11"/>
+          <p:cNvPr id="14" name="Text 10"/>
           <p:cNvSpPr txBox="1"/>
           <p:nvPr/>
         </p:nvSpPr>
@@ -15422,7 +14887,7 @@
       </p:sp>
       <p:sp>
         <p:nvSpPr>
-          <p:cNvPr id="16" name="Text 12"/>
+          <p:cNvPr id="15" name="Text 11"/>
           <p:cNvSpPr txBox="1"/>
           <p:nvPr/>
         </p:nvSpPr>
@@ -15461,7 +14926,7 @@
       </p:sp>
       <p:sp>
         <p:nvSpPr>
-          <p:cNvPr id="17" name="Text 13"/>
+          <p:cNvPr id="16" name="Text 12"/>
           <p:cNvSpPr txBox="1"/>
           <p:nvPr/>
         </p:nvSpPr>
@@ -15500,7 +14965,7 @@
       </p:sp>
       <p:sp>
         <p:nvSpPr>
-          <p:cNvPr id="18" name="Text 14"/>
+          <p:cNvPr id="17" name="Text 13"/>
           <p:cNvSpPr txBox="1"/>
           <p:nvPr/>
         </p:nvSpPr>
@@ -15539,7 +15004,7 @@
       </p:sp>
       <p:sp>
         <p:nvSpPr>
-          <p:cNvPr id="19" name="Text 15"/>
+          <p:cNvPr id="18" name="Text 14"/>
           <p:cNvSpPr txBox="1"/>
           <p:nvPr/>
         </p:nvSpPr>
@@ -15686,18 +15151,81 @@
           </a:p>
         </p:txBody>
       </p:sp>
-      <p:sp>
-        <p:nvSpPr>
-          <p:cNvPr id="5" name="Shape 2"/>
+      <p:pic>
+        <p:nvPicPr>
+          <p:cNvPr id="5" name="Image 0" descr="preencoded.png">    </p:cNvPr>
+          <p:cNvPicPr>
+            <a:picLocks noChangeAspect="1"/>
+          </p:cNvPicPr>
+          <p:nvPr/>
+        </p:nvPicPr>
+        <p:blipFill>
+          <a:blip r:embed="rId1"/>
+          <a:stretch>
+            <a:fillRect/>
+          </a:stretch>
+        </p:blipFill>
+        <p:spPr>
+          <a:xfrm>
+            <a:off x="548640" y="2880360"/>
+            <a:ext cx="548640" cy="548640"/>
+          </a:xfrm>
+          <a:prstGeom prst="rect">
+            <a:avLst/>
+          </a:prstGeom>
+        </p:spPr>
+      </p:pic>
+      <p:sp>
+        <p:nvSpPr>
+          <p:cNvPr id="6" name="Text 2"/>
+          <p:cNvSpPr txBox="1"/>
+          <p:nvPr/>
+        </p:nvSpPr>
+        <p:spPr>
+          <a:xfrm>
+            <a:off x="1691640" y="2697480"/>
+            <a:ext cx="2377440" cy="914400"/>
+          </a:xfrm>
+          <a:prstGeom prst="rect">
+            <a:avLst/>
+          </a:prstGeom>
+          <a:noFill/>
+          <a:ln/>
+        </p:spPr>
+        <p:txBody>
+          <a:bodyPr wrap="square" lIns="0" tIns="0" rIns="0" bIns="0" rtlCol="0" anchor="ctr"/>
+          <a:lstStyle/>
+          <a:p>
+            <a:pPr indent="0" marL="0">
+              <a:buNone/>
+            </a:pPr>
+            <a:r>
+              <a:rPr lang="en-US" sz="1500" i="1" dirty="0">
+                <a:solidFill>
+                  <a:srgbClr val="BFBFBF"/>
+                </a:solidFill>
+                <a:latin typeface="Arial" pitchFamily="34" charset="0"/>
+                <a:ea typeface="Arial" pitchFamily="34" charset="-122"/>
+                <a:cs typeface="Arial" pitchFamily="34" charset="-120"/>
+              </a:rPr>
+              <a:t>A clear problem is half the solution.</a:t>
+            </a:r>
+            <a:endParaRPr lang="en-US" sz="1500" dirty="0"/>
+          </a:p>
+        </p:txBody>
+      </p:sp>
+      <p:sp>
+        <p:nvSpPr>
+          <p:cNvPr id="7" name="Shape 3"/>
           <p:cNvSpPr/>
           <p:nvPr/>
         </p:nvSpPr>
         <p:spPr>
           <a:xfrm>
-            <a:off x="548640" y="2697480"/>
-            <a:ext cx="914400" cy="914400"/>
-          </a:xfrm>
-          <a:prstGeom prst="ellipse">
+            <a:off x="4480560" y="457200"/>
+            <a:ext cx="4206240" cy="4206240"/>
+          </a:xfrm>
+          <a:prstGeom prst="rect">
             <a:avLst/>
           </a:prstGeom>
           <a:solidFill>
@@ -15711,97 +15239,9 @@
           </a:ln>
         </p:spPr>
       </p:sp>
-      <p:pic>
-        <p:nvPicPr>
-          <p:cNvPr id="6" name="Image 0" descr="preencoded.png">    </p:cNvPr>
-          <p:cNvPicPr>
-            <a:picLocks noChangeAspect="1"/>
-          </p:cNvPicPr>
-          <p:nvPr/>
-        </p:nvPicPr>
-        <p:blipFill>
-          <a:blip r:embed="rId1"/>
-          <a:stretch>
-            <a:fillRect/>
-          </a:stretch>
-        </p:blipFill>
-        <p:spPr>
-          <a:xfrm>
-            <a:off x="786384" y="2935224"/>
-            <a:ext cx="438912" cy="438912"/>
-          </a:xfrm>
-          <a:prstGeom prst="rect">
-            <a:avLst/>
-          </a:prstGeom>
-        </p:spPr>
-      </p:pic>
-      <p:sp>
-        <p:nvSpPr>
-          <p:cNvPr id="7" name="Text 3"/>
-          <p:cNvSpPr txBox="1"/>
-          <p:nvPr/>
-        </p:nvSpPr>
-        <p:spPr>
-          <a:xfrm>
-            <a:off x="1691640" y="2697480"/>
-            <a:ext cx="2377440" cy="914400"/>
-          </a:xfrm>
-          <a:prstGeom prst="rect">
-            <a:avLst/>
-          </a:prstGeom>
-          <a:noFill/>
-          <a:ln/>
-        </p:spPr>
-        <p:txBody>
-          <a:bodyPr wrap="square" lIns="0" tIns="0" rIns="0" bIns="0" rtlCol="0" anchor="ctr"/>
-          <a:lstStyle/>
-          <a:p>
-            <a:pPr indent="0" marL="0">
-              <a:buNone/>
-            </a:pPr>
-            <a:r>
-              <a:rPr lang="en-US" sz="1500" i="1" dirty="0">
-                <a:solidFill>
-                  <a:srgbClr val="BFBFBF"/>
-                </a:solidFill>
-                <a:latin typeface="Arial" pitchFamily="34" charset="0"/>
-                <a:ea typeface="Arial" pitchFamily="34" charset="-122"/>
-                <a:cs typeface="Arial" pitchFamily="34" charset="-120"/>
-              </a:rPr>
-              <a:t>A clear problem is half the solution.</a:t>
-            </a:r>
-            <a:endParaRPr lang="en-US" sz="1500" dirty="0"/>
-          </a:p>
-        </p:txBody>
-      </p:sp>
-      <p:sp>
-        <p:nvSpPr>
-          <p:cNvPr id="8" name="Shape 4"/>
-          <p:cNvSpPr/>
-          <p:nvPr/>
-        </p:nvSpPr>
-        <p:spPr>
-          <a:xfrm>
-            <a:off x="4480560" y="457200"/>
-            <a:ext cx="4206240" cy="4206240"/>
-          </a:xfrm>
-          <a:prstGeom prst="rect">
-            <a:avLst/>
-          </a:prstGeom>
-          <a:solidFill>
-            <a:srgbClr val="FFFFFF"/>
-          </a:solidFill>
-          <a:ln w="12700">
-            <a:solidFill>
-              <a:srgbClr val="FFFFFF"/>
-            </a:solidFill>
-            <a:prstDash val="solid"/>
-          </a:ln>
-        </p:spPr>
-      </p:sp>
-      <p:sp>
-        <p:nvSpPr>
-          <p:cNvPr id="9" name="Text 5"/>
+      <p:sp>
+        <p:nvSpPr>
+          <p:cNvPr id="8" name="Text 4"/>
           <p:cNvSpPr txBox="1"/>
           <p:nvPr/>
         </p:nvSpPr>
@@ -15840,7 +15280,7 @@
       </p:sp>
       <p:sp>
         <p:nvSpPr>
-          <p:cNvPr id="10" name="Text 6"/>
+          <p:cNvPr id="9" name="Text 5"/>
           <p:cNvSpPr txBox="1"/>
           <p:nvPr/>
         </p:nvSpPr>
@@ -15879,7 +15319,7 @@
       </p:sp>
       <p:sp>
         <p:nvSpPr>
-          <p:cNvPr id="11" name="Text 7"/>
+          <p:cNvPr id="10" name="Text 6"/>
           <p:cNvSpPr txBox="1"/>
           <p:nvPr/>
         </p:nvSpPr>
@@ -15918,7 +15358,7 @@
       </p:sp>
       <p:sp>
         <p:nvSpPr>
-          <p:cNvPr id="12" name="Text 8"/>
+          <p:cNvPr id="11" name="Text 7"/>
           <p:cNvSpPr txBox="1"/>
           <p:nvPr/>
         </p:nvSpPr>
@@ -15957,7 +15397,7 @@
       </p:sp>
       <p:sp>
         <p:nvSpPr>
-          <p:cNvPr id="13" name="Text 9"/>
+          <p:cNvPr id="12" name="Text 8"/>
           <p:cNvSpPr txBox="1"/>
           <p:nvPr/>
         </p:nvSpPr>
@@ -15996,7 +15436,7 @@
       </p:sp>
       <p:sp>
         <p:nvSpPr>
-          <p:cNvPr id="14" name="Text 10"/>
+          <p:cNvPr id="13" name="Text 9"/>
           <p:cNvSpPr txBox="1"/>
           <p:nvPr/>
         </p:nvSpPr>
@@ -16324,34 +15764,9 @@
           </a:ln>
         </p:spPr>
       </p:sp>
-      <p:sp>
-        <p:nvSpPr>
-          <p:cNvPr id="10" name="Shape 7"/>
-          <p:cNvSpPr/>
-          <p:nvPr/>
-        </p:nvSpPr>
-        <p:spPr>
-          <a:xfrm>
-            <a:off x="685800" y="3017520"/>
-            <a:ext cx="457200" cy="457200"/>
-          </a:xfrm>
-          <a:prstGeom prst="ellipse">
-            <a:avLst/>
-          </a:prstGeom>
-          <a:solidFill>
-            <a:srgbClr val="000000"/>
-          </a:solidFill>
-          <a:ln w="12700">
-            <a:solidFill>
-              <a:srgbClr val="000000"/>
-            </a:solidFill>
-            <a:prstDash val="solid"/>
-          </a:ln>
-        </p:spPr>
-      </p:sp>
       <p:pic>
         <p:nvPicPr>
-          <p:cNvPr id="11" name="Image 0" descr="preencoded.png">    </p:cNvPr>
+          <p:cNvPr id="10" name="Image 0" descr="preencoded.png">    </p:cNvPr>
           <p:cNvPicPr>
             <a:picLocks noChangeAspect="1"/>
           </p:cNvPicPr>
@@ -16365,8 +15780,8 @@
         </p:blipFill>
         <p:spPr>
           <a:xfrm>
-            <a:off x="804672" y="3136392"/>
-            <a:ext cx="219456" cy="219456"/>
+            <a:off x="685800" y="3108960"/>
+            <a:ext cx="274320" cy="274320"/>
           </a:xfrm>
           <a:prstGeom prst="rect">
             <a:avLst/>
@@ -16375,7 +15790,7 @@
       </p:pic>
       <p:sp>
         <p:nvSpPr>
-          <p:cNvPr id="12" name="Text 8"/>
+          <p:cNvPr id="11" name="Text 7"/>
           <p:cNvSpPr txBox="1"/>
           <p:nvPr/>
         </p:nvSpPr>
@@ -16414,7 +15829,7 @@
       </p:sp>
       <p:sp>
         <p:nvSpPr>
-          <p:cNvPr id="13" name="Text 9"/>
+          <p:cNvPr id="12" name="Text 8"/>
           <p:cNvSpPr txBox="1"/>
           <p:nvPr/>
         </p:nvSpPr>
@@ -16453,7 +15868,7 @@
       </p:sp>
       <p:sp>
         <p:nvSpPr>
-          <p:cNvPr id="14" name="Shape 10"/>
+          <p:cNvPr id="13" name="Shape 9"/>
           <p:cNvSpPr/>
           <p:nvPr/>
         </p:nvSpPr>
@@ -16476,34 +15891,9 @@
           </a:ln>
         </p:spPr>
       </p:sp>
-      <p:sp>
-        <p:nvSpPr>
-          <p:cNvPr id="15" name="Shape 11"/>
-          <p:cNvSpPr/>
-          <p:nvPr/>
-        </p:nvSpPr>
-        <p:spPr>
-          <a:xfrm>
-            <a:off x="3474720" y="3017520"/>
-            <a:ext cx="457200" cy="457200"/>
-          </a:xfrm>
-          <a:prstGeom prst="ellipse">
-            <a:avLst/>
-          </a:prstGeom>
-          <a:solidFill>
-            <a:srgbClr val="000000"/>
-          </a:solidFill>
-          <a:ln w="12700">
-            <a:solidFill>
-              <a:srgbClr val="000000"/>
-            </a:solidFill>
-            <a:prstDash val="solid"/>
-          </a:ln>
-        </p:spPr>
-      </p:sp>
       <p:pic>
         <p:nvPicPr>
-          <p:cNvPr id="16" name="Image 1" descr="preencoded.png">    </p:cNvPr>
+          <p:cNvPr id="14" name="Image 1" descr="preencoded.png">    </p:cNvPr>
           <p:cNvPicPr>
             <a:picLocks noChangeAspect="1"/>
           </p:cNvPicPr>
@@ -16517,8 +15907,8 @@
         </p:blipFill>
         <p:spPr>
           <a:xfrm>
-            <a:off x="3593592" y="3136392"/>
-            <a:ext cx="219456" cy="219456"/>
+            <a:off x="3474720" y="3108960"/>
+            <a:ext cx="274320" cy="274320"/>
           </a:xfrm>
           <a:prstGeom prst="rect">
             <a:avLst/>
@@ -16527,7 +15917,7 @@
       </p:pic>
       <p:sp>
         <p:nvSpPr>
-          <p:cNvPr id="17" name="Text 12"/>
+          <p:cNvPr id="15" name="Text 10"/>
           <p:cNvSpPr txBox="1"/>
           <p:nvPr/>
         </p:nvSpPr>
@@ -16566,7 +15956,7 @@
       </p:sp>
       <p:sp>
         <p:nvSpPr>
-          <p:cNvPr id="18" name="Text 13"/>
+          <p:cNvPr id="16" name="Text 11"/>
           <p:cNvSpPr txBox="1"/>
           <p:nvPr/>
         </p:nvSpPr>
@@ -16605,7 +15995,7 @@
       </p:sp>
       <p:sp>
         <p:nvSpPr>
-          <p:cNvPr id="19" name="Shape 14"/>
+          <p:cNvPr id="17" name="Shape 12"/>
           <p:cNvSpPr/>
           <p:nvPr/>
         </p:nvSpPr>
@@ -16628,34 +16018,9 @@
           </a:ln>
         </p:spPr>
       </p:sp>
-      <p:sp>
-        <p:nvSpPr>
-          <p:cNvPr id="20" name="Shape 15"/>
-          <p:cNvSpPr/>
-          <p:nvPr/>
-        </p:nvSpPr>
-        <p:spPr>
-          <a:xfrm>
-            <a:off x="6263640" y="3017520"/>
-            <a:ext cx="457200" cy="457200"/>
-          </a:xfrm>
-          <a:prstGeom prst="ellipse">
-            <a:avLst/>
-          </a:prstGeom>
-          <a:solidFill>
-            <a:srgbClr val="000000"/>
-          </a:solidFill>
-          <a:ln w="12700">
-            <a:solidFill>
-              <a:srgbClr val="000000"/>
-            </a:solidFill>
-            <a:prstDash val="solid"/>
-          </a:ln>
-        </p:spPr>
-      </p:sp>
       <p:pic>
         <p:nvPicPr>
-          <p:cNvPr id="21" name="Image 2" descr="preencoded.png">    </p:cNvPr>
+          <p:cNvPr id="18" name="Image 2" descr="preencoded.png">    </p:cNvPr>
           <p:cNvPicPr>
             <a:picLocks noChangeAspect="1"/>
           </p:cNvPicPr>
@@ -16669,8 +16034,8 @@
         </p:blipFill>
         <p:spPr>
           <a:xfrm>
-            <a:off x="6382512" y="3136392"/>
-            <a:ext cx="219456" cy="219456"/>
+            <a:off x="6263640" y="3108960"/>
+            <a:ext cx="274320" cy="274320"/>
           </a:xfrm>
           <a:prstGeom prst="rect">
             <a:avLst/>
@@ -16679,7 +16044,7 @@
       </p:pic>
       <p:sp>
         <p:nvSpPr>
-          <p:cNvPr id="22" name="Text 16"/>
+          <p:cNvPr id="19" name="Text 13"/>
           <p:cNvSpPr txBox="1"/>
           <p:nvPr/>
         </p:nvSpPr>
@@ -16718,7 +16083,7 @@
       </p:sp>
       <p:sp>
         <p:nvSpPr>
-          <p:cNvPr id="23" name="Text 17"/>
+          <p:cNvPr id="20" name="Text 14"/>
           <p:cNvSpPr txBox="1"/>
           <p:nvPr/>
         </p:nvSpPr>

--- a/docs/Ramer_Design_Thinking.pptx
+++ b/docs/Ramer_Design_Thinking.pptx
@@ -3481,126 +3481,6 @@
           </a:p>
         </p:txBody>
       </p:sp>
-      <p:pic>
-        <p:nvPicPr>
-          <p:cNvPr id="6" name="Image 0" descr="preencoded.png">    </p:cNvPr>
-          <p:cNvPicPr>
-            <a:picLocks noChangeAspect="1"/>
-          </p:cNvPicPr>
-          <p:nvPr/>
-        </p:nvPicPr>
-        <p:blipFill>
-          <a:blip r:embed="rId1"/>
-          <a:stretch>
-            <a:fillRect/>
-          </a:stretch>
-        </p:blipFill>
-        <p:spPr>
-          <a:xfrm>
-            <a:off x="548640" y="3959352"/>
-            <a:ext cx="356616" cy="356616"/>
-          </a:xfrm>
-          <a:prstGeom prst="rect">
-            <a:avLst/>
-          </a:prstGeom>
-        </p:spPr>
-      </p:pic>
-      <p:pic>
-        <p:nvPicPr>
-          <p:cNvPr id="7" name="Image 1" descr="preencoded.png">    </p:cNvPr>
-          <p:cNvPicPr>
-            <a:picLocks noChangeAspect="1"/>
-          </p:cNvPicPr>
-          <p:nvPr/>
-        </p:nvPicPr>
-        <p:blipFill>
-          <a:blip r:embed="rId2"/>
-          <a:stretch>
-            <a:fillRect/>
-          </a:stretch>
-        </p:blipFill>
-        <p:spPr>
-          <a:xfrm>
-            <a:off x="1417320" y="3959352"/>
-            <a:ext cx="356616" cy="356616"/>
-          </a:xfrm>
-          <a:prstGeom prst="rect">
-            <a:avLst/>
-          </a:prstGeom>
-        </p:spPr>
-      </p:pic>
-      <p:pic>
-        <p:nvPicPr>
-          <p:cNvPr id="8" name="Image 2" descr="preencoded.png">    </p:cNvPr>
-          <p:cNvPicPr>
-            <a:picLocks noChangeAspect="1"/>
-          </p:cNvPicPr>
-          <p:nvPr/>
-        </p:nvPicPr>
-        <p:blipFill>
-          <a:blip r:embed="rId3"/>
-          <a:stretch>
-            <a:fillRect/>
-          </a:stretch>
-        </p:blipFill>
-        <p:spPr>
-          <a:xfrm>
-            <a:off x="2286000" y="3959352"/>
-            <a:ext cx="356616" cy="356616"/>
-          </a:xfrm>
-          <a:prstGeom prst="rect">
-            <a:avLst/>
-          </a:prstGeom>
-        </p:spPr>
-      </p:pic>
-      <p:pic>
-        <p:nvPicPr>
-          <p:cNvPr id="9" name="Image 3" descr="preencoded.png">    </p:cNvPr>
-          <p:cNvPicPr>
-            <a:picLocks noChangeAspect="1"/>
-          </p:cNvPicPr>
-          <p:nvPr/>
-        </p:nvPicPr>
-        <p:blipFill>
-          <a:blip r:embed="rId4"/>
-          <a:stretch>
-            <a:fillRect/>
-          </a:stretch>
-        </p:blipFill>
-        <p:spPr>
-          <a:xfrm>
-            <a:off x="3154680" y="3959352"/>
-            <a:ext cx="356616" cy="356616"/>
-          </a:xfrm>
-          <a:prstGeom prst="rect">
-            <a:avLst/>
-          </a:prstGeom>
-        </p:spPr>
-      </p:pic>
-      <p:pic>
-        <p:nvPicPr>
-          <p:cNvPr id="10" name="Image 4" descr="preencoded.png">    </p:cNvPr>
-          <p:cNvPicPr>
-            <a:picLocks noChangeAspect="1"/>
-          </p:cNvPicPr>
-          <p:nvPr/>
-        </p:nvPicPr>
-        <p:blipFill>
-          <a:blip r:embed="rId5"/>
-          <a:stretch>
-            <a:fillRect/>
-          </a:stretch>
-        </p:blipFill>
-        <p:spPr>
-          <a:xfrm>
-            <a:off x="4023360" y="3959352"/>
-            <a:ext cx="356616" cy="356616"/>
-          </a:xfrm>
-          <a:prstGeom prst="rect">
-            <a:avLst/>
-          </a:prstGeom>
-        </p:spPr>
-      </p:pic>
     </p:spTree>
   </p:cSld>
   <p:clrMapOvr>
@@ -3711,56 +3591,32 @@
           </a:p>
         </p:txBody>
       </p:sp>
-      <p:pic>
-        <p:nvPicPr>
-          <p:cNvPr id="5" name="Image 0" descr="preencoded.png">    </p:cNvPr>
-          <p:cNvPicPr>
-            <a:picLocks noChangeAspect="1"/>
-          </p:cNvPicPr>
-          <p:nvPr/>
-        </p:nvPicPr>
-        <p:blipFill>
-          <a:blip r:embed="rId1"/>
-          <a:stretch>
-            <a:fillRect/>
-          </a:stretch>
-        </p:blipFill>
-        <p:spPr>
-          <a:xfrm>
-            <a:off x="548640" y="2880360"/>
-            <a:ext cx="548640" cy="548640"/>
-          </a:xfrm>
-          <a:prstGeom prst="rect">
-            <a:avLst/>
-          </a:prstGeom>
-        </p:spPr>
-      </p:pic>
-      <p:sp>
-        <p:nvSpPr>
-          <p:cNvPr id="6" name="Text 2"/>
-          <p:cNvSpPr txBox="1"/>
-          <p:nvPr/>
-        </p:nvSpPr>
-        <p:spPr>
-          <a:xfrm>
-            <a:off x="1691640" y="2697480"/>
-            <a:ext cx="2377440" cy="914400"/>
-          </a:xfrm>
-          <a:prstGeom prst="rect">
-            <a:avLst/>
-          </a:prstGeom>
-          <a:noFill/>
-          <a:ln/>
-        </p:spPr>
-        <p:txBody>
-          <a:bodyPr wrap="square" lIns="0" tIns="0" rIns="0" bIns="0" rtlCol="0" anchor="ctr"/>
-          <a:lstStyle/>
-          <a:p>
-            <a:pPr indent="0" marL="0">
-              <a:buNone/>
-            </a:pPr>
-            <a:r>
-              <a:rPr lang="en-US" sz="1500" i="1" dirty="0">
+      <p:sp>
+        <p:nvSpPr>
+          <p:cNvPr id="5" name="Text 2"/>
+          <p:cNvSpPr txBox="1"/>
+          <p:nvPr/>
+        </p:nvSpPr>
+        <p:spPr>
+          <a:xfrm>
+            <a:off x="548640" y="2697480"/>
+            <a:ext cx="3474720" cy="914400"/>
+          </a:xfrm>
+          <a:prstGeom prst="rect">
+            <a:avLst/>
+          </a:prstGeom>
+          <a:noFill/>
+          <a:ln/>
+        </p:spPr>
+        <p:txBody>
+          <a:bodyPr wrap="square" lIns="0" tIns="0" rIns="0" bIns="0" rtlCol="0" anchor="t"/>
+          <a:lstStyle/>
+          <a:p>
+            <a:pPr indent="0" marL="0">
+              <a:buNone/>
+            </a:pPr>
+            <a:r>
+              <a:rPr lang="en-US" sz="1800" i="1" dirty="0">
                 <a:solidFill>
                   <a:srgbClr val="BFBFBF"/>
                 </a:solidFill>
@@ -3770,13 +3626,13 @@
               </a:rPr>
               <a:t>Go wide first, then choose.</a:t>
             </a:r>
-            <a:endParaRPr lang="en-US" sz="1500" dirty="0"/>
-          </a:p>
-        </p:txBody>
-      </p:sp>
-      <p:sp>
-        <p:nvSpPr>
-          <p:cNvPr id="7" name="Shape 3"/>
+            <a:endParaRPr lang="en-US" sz="1800" dirty="0"/>
+          </a:p>
+        </p:txBody>
+      </p:sp>
+      <p:sp>
+        <p:nvSpPr>
+          <p:cNvPr id="6" name="Shape 3"/>
           <p:cNvSpPr/>
           <p:nvPr/>
         </p:nvSpPr>
@@ -3801,7 +3657,7 @@
       </p:sp>
       <p:sp>
         <p:nvSpPr>
-          <p:cNvPr id="8" name="Text 4"/>
+          <p:cNvPr id="7" name="Text 4"/>
           <p:cNvSpPr txBox="1"/>
           <p:nvPr/>
         </p:nvSpPr>
@@ -3840,7 +3696,7 @@
       </p:sp>
       <p:sp>
         <p:nvSpPr>
-          <p:cNvPr id="9" name="Text 5"/>
+          <p:cNvPr id="8" name="Text 5"/>
           <p:cNvSpPr txBox="1"/>
           <p:nvPr/>
         </p:nvSpPr>
@@ -3879,7 +3735,7 @@
       </p:sp>
       <p:sp>
         <p:nvSpPr>
-          <p:cNvPr id="10" name="Text 6"/>
+          <p:cNvPr id="9" name="Text 6"/>
           <p:cNvSpPr txBox="1"/>
           <p:nvPr/>
         </p:nvSpPr>
@@ -3918,7 +3774,7 @@
       </p:sp>
       <p:sp>
         <p:nvSpPr>
-          <p:cNvPr id="11" name="Text 7"/>
+          <p:cNvPr id="10" name="Text 7"/>
           <p:cNvSpPr txBox="1"/>
           <p:nvPr/>
         </p:nvSpPr>
@@ -3957,7 +3813,7 @@
       </p:sp>
       <p:sp>
         <p:nvSpPr>
-          <p:cNvPr id="12" name="Text 8"/>
+          <p:cNvPr id="11" name="Text 8"/>
           <p:cNvSpPr txBox="1"/>
           <p:nvPr/>
         </p:nvSpPr>
@@ -3996,7 +3852,7 @@
       </p:sp>
       <p:sp>
         <p:nvSpPr>
-          <p:cNvPr id="13" name="Text 9"/>
+          <p:cNvPr id="12" name="Text 9"/>
           <p:cNvSpPr txBox="1"/>
           <p:nvPr/>
         </p:nvSpPr>
@@ -4246,39 +4102,15 @@
           </a:ln>
         </p:spPr>
       </p:sp>
-      <p:pic>
-        <p:nvPicPr>
-          <p:cNvPr id="8" name="Image 0" descr="preencoded.png">    </p:cNvPr>
-          <p:cNvPicPr>
-            <a:picLocks noChangeAspect="1"/>
-          </p:cNvPicPr>
-          <p:nvPr/>
-        </p:nvPicPr>
-        <p:blipFill>
-          <a:blip r:embed="rId1"/>
-          <a:stretch>
-            <a:fillRect/>
-          </a:stretch>
-        </p:blipFill>
-        <p:spPr>
-          <a:xfrm>
-            <a:off x="685800" y="1389888"/>
-            <a:ext cx="256032" cy="256032"/>
-          </a:xfrm>
-          <a:prstGeom prst="rect">
-            <a:avLst/>
-          </a:prstGeom>
-        </p:spPr>
-      </p:pic>
-      <p:sp>
-        <p:nvSpPr>
-          <p:cNvPr id="9" name="Text 5"/>
-          <p:cNvSpPr txBox="1"/>
-          <p:nvPr/>
-        </p:nvSpPr>
-        <p:spPr>
-          <a:xfrm>
-            <a:off x="1051560" y="1371600"/>
+      <p:sp>
+        <p:nvSpPr>
+          <p:cNvPr id="8" name="Text 5"/>
+          <p:cNvSpPr txBox="1"/>
+          <p:nvPr/>
+        </p:nvSpPr>
+        <p:spPr>
+          <a:xfrm>
+            <a:off x="685800" y="1371600"/>
             <a:ext cx="1371600" cy="292608"/>
           </a:xfrm>
           <a:prstGeom prst="rect">
@@ -4311,7 +4143,7 @@
       </p:sp>
       <p:sp>
         <p:nvSpPr>
-          <p:cNvPr id="10" name="Text 6"/>
+          <p:cNvPr id="9" name="Text 6"/>
           <p:cNvSpPr txBox="1"/>
           <p:nvPr/>
         </p:nvSpPr>
@@ -4350,7 +4182,7 @@
       </p:sp>
       <p:sp>
         <p:nvSpPr>
-          <p:cNvPr id="11" name="Text 7"/>
+          <p:cNvPr id="10" name="Text 7"/>
           <p:cNvSpPr txBox="1"/>
           <p:nvPr/>
         </p:nvSpPr>
@@ -4389,7 +4221,7 @@
       </p:sp>
       <p:sp>
         <p:nvSpPr>
-          <p:cNvPr id="12" name="Shape 8"/>
+          <p:cNvPr id="11" name="Shape 8"/>
           <p:cNvSpPr/>
           <p:nvPr/>
         </p:nvSpPr>
@@ -4412,39 +4244,15 @@
           </a:ln>
         </p:spPr>
       </p:sp>
-      <p:pic>
-        <p:nvPicPr>
-          <p:cNvPr id="13" name="Image 1" descr="preencoded.png">    </p:cNvPr>
-          <p:cNvPicPr>
-            <a:picLocks noChangeAspect="1"/>
-          </p:cNvPicPr>
-          <p:nvPr/>
-        </p:nvPicPr>
-        <p:blipFill>
-          <a:blip r:embed="rId2"/>
-          <a:stretch>
-            <a:fillRect/>
-          </a:stretch>
-        </p:blipFill>
-        <p:spPr>
-          <a:xfrm>
-            <a:off x="3474720" y="1389888"/>
-            <a:ext cx="256032" cy="256032"/>
-          </a:xfrm>
-          <a:prstGeom prst="rect">
-            <a:avLst/>
-          </a:prstGeom>
-        </p:spPr>
-      </p:pic>
-      <p:sp>
-        <p:nvSpPr>
-          <p:cNvPr id="14" name="Text 9"/>
-          <p:cNvSpPr txBox="1"/>
-          <p:nvPr/>
-        </p:nvSpPr>
-        <p:spPr>
-          <a:xfrm>
-            <a:off x="3840480" y="1371600"/>
+      <p:sp>
+        <p:nvSpPr>
+          <p:cNvPr id="12" name="Text 9"/>
+          <p:cNvSpPr txBox="1"/>
+          <p:nvPr/>
+        </p:nvSpPr>
+        <p:spPr>
+          <a:xfrm>
+            <a:off x="3474720" y="1371600"/>
             <a:ext cx="1371600" cy="292608"/>
           </a:xfrm>
           <a:prstGeom prst="rect">
@@ -4477,7 +4285,7 @@
       </p:sp>
       <p:sp>
         <p:nvSpPr>
-          <p:cNvPr id="15" name="Text 10"/>
+          <p:cNvPr id="13" name="Text 10"/>
           <p:cNvSpPr txBox="1"/>
           <p:nvPr/>
         </p:nvSpPr>
@@ -4516,7 +4324,7 @@
       </p:sp>
       <p:sp>
         <p:nvSpPr>
-          <p:cNvPr id="16" name="Text 11"/>
+          <p:cNvPr id="14" name="Text 11"/>
           <p:cNvSpPr txBox="1"/>
           <p:nvPr/>
         </p:nvSpPr>
@@ -4555,7 +4363,7 @@
       </p:sp>
       <p:sp>
         <p:nvSpPr>
-          <p:cNvPr id="17" name="Shape 12"/>
+          <p:cNvPr id="15" name="Shape 12"/>
           <p:cNvSpPr/>
           <p:nvPr/>
         </p:nvSpPr>
@@ -4578,39 +4386,15 @@
           </a:ln>
         </p:spPr>
       </p:sp>
-      <p:pic>
-        <p:nvPicPr>
-          <p:cNvPr id="18" name="Image 2" descr="preencoded.png">    </p:cNvPr>
-          <p:cNvPicPr>
-            <a:picLocks noChangeAspect="1"/>
-          </p:cNvPicPr>
-          <p:nvPr/>
-        </p:nvPicPr>
-        <p:blipFill>
-          <a:blip r:embed="rId3"/>
-          <a:stretch>
-            <a:fillRect/>
-          </a:stretch>
-        </p:blipFill>
-        <p:spPr>
-          <a:xfrm>
-            <a:off x="6263640" y="1389888"/>
-            <a:ext cx="256032" cy="256032"/>
-          </a:xfrm>
-          <a:prstGeom prst="rect">
-            <a:avLst/>
-          </a:prstGeom>
-        </p:spPr>
-      </p:pic>
-      <p:sp>
-        <p:nvSpPr>
-          <p:cNvPr id="19" name="Text 13"/>
-          <p:cNvSpPr txBox="1"/>
-          <p:nvPr/>
-        </p:nvSpPr>
-        <p:spPr>
-          <a:xfrm>
-            <a:off x="6629400" y="1371600"/>
+      <p:sp>
+        <p:nvSpPr>
+          <p:cNvPr id="16" name="Text 13"/>
+          <p:cNvSpPr txBox="1"/>
+          <p:nvPr/>
+        </p:nvSpPr>
+        <p:spPr>
+          <a:xfrm>
+            <a:off x="6263640" y="1371600"/>
             <a:ext cx="1371600" cy="292608"/>
           </a:xfrm>
           <a:prstGeom prst="rect">
@@ -4643,7 +4427,7 @@
       </p:sp>
       <p:sp>
         <p:nvSpPr>
-          <p:cNvPr id="20" name="Text 14"/>
+          <p:cNvPr id="17" name="Text 14"/>
           <p:cNvSpPr txBox="1"/>
           <p:nvPr/>
         </p:nvSpPr>
@@ -4682,7 +4466,7 @@
       </p:sp>
       <p:sp>
         <p:nvSpPr>
-          <p:cNvPr id="21" name="Text 15"/>
+          <p:cNvPr id="18" name="Text 15"/>
           <p:cNvSpPr txBox="1"/>
           <p:nvPr/>
         </p:nvSpPr>
@@ -4721,7 +4505,7 @@
       </p:sp>
       <p:sp>
         <p:nvSpPr>
-          <p:cNvPr id="22" name="Shape 16"/>
+          <p:cNvPr id="19" name="Shape 16"/>
           <p:cNvSpPr/>
           <p:nvPr/>
         </p:nvSpPr>
@@ -4744,39 +4528,15 @@
           </a:ln>
         </p:spPr>
       </p:sp>
-      <p:pic>
-        <p:nvPicPr>
-          <p:cNvPr id="23" name="Image 3" descr="preencoded.png">    </p:cNvPr>
-          <p:cNvPicPr>
-            <a:picLocks noChangeAspect="1"/>
-          </p:cNvPicPr>
-          <p:nvPr/>
-        </p:nvPicPr>
-        <p:blipFill>
-          <a:blip r:embed="rId4"/>
-          <a:stretch>
-            <a:fillRect/>
-          </a:stretch>
-        </p:blipFill>
-        <p:spPr>
-          <a:xfrm>
-            <a:off x="685800" y="3081528"/>
-            <a:ext cx="256032" cy="256032"/>
-          </a:xfrm>
-          <a:prstGeom prst="rect">
-            <a:avLst/>
-          </a:prstGeom>
-        </p:spPr>
-      </p:pic>
-      <p:sp>
-        <p:nvSpPr>
-          <p:cNvPr id="24" name="Text 17"/>
-          <p:cNvSpPr txBox="1"/>
-          <p:nvPr/>
-        </p:nvSpPr>
-        <p:spPr>
-          <a:xfrm>
-            <a:off x="1051560" y="3063240"/>
+      <p:sp>
+        <p:nvSpPr>
+          <p:cNvPr id="20" name="Text 17"/>
+          <p:cNvSpPr txBox="1"/>
+          <p:nvPr/>
+        </p:nvSpPr>
+        <p:spPr>
+          <a:xfrm>
+            <a:off x="685800" y="3063240"/>
             <a:ext cx="1371600" cy="292608"/>
           </a:xfrm>
           <a:prstGeom prst="rect">
@@ -4809,7 +4569,7 @@
       </p:sp>
       <p:sp>
         <p:nvSpPr>
-          <p:cNvPr id="25" name="Text 18"/>
+          <p:cNvPr id="21" name="Text 18"/>
           <p:cNvSpPr txBox="1"/>
           <p:nvPr/>
         </p:nvSpPr>
@@ -4848,7 +4608,7 @@
       </p:sp>
       <p:sp>
         <p:nvSpPr>
-          <p:cNvPr id="26" name="Text 19"/>
+          <p:cNvPr id="22" name="Text 19"/>
           <p:cNvSpPr txBox="1"/>
           <p:nvPr/>
         </p:nvSpPr>
@@ -4887,7 +4647,7 @@
       </p:sp>
       <p:sp>
         <p:nvSpPr>
-          <p:cNvPr id="27" name="Shape 20"/>
+          <p:cNvPr id="23" name="Shape 20"/>
           <p:cNvSpPr/>
           <p:nvPr/>
         </p:nvSpPr>
@@ -4910,39 +4670,15 @@
           </a:ln>
         </p:spPr>
       </p:sp>
-      <p:pic>
-        <p:nvPicPr>
-          <p:cNvPr id="28" name="Image 4" descr="preencoded.png">    </p:cNvPr>
-          <p:cNvPicPr>
-            <a:picLocks noChangeAspect="1"/>
-          </p:cNvPicPr>
-          <p:nvPr/>
-        </p:nvPicPr>
-        <p:blipFill>
-          <a:blip r:embed="rId5"/>
-          <a:stretch>
-            <a:fillRect/>
-          </a:stretch>
-        </p:blipFill>
-        <p:spPr>
-          <a:xfrm>
-            <a:off x="3474720" y="3081528"/>
-            <a:ext cx="256032" cy="256032"/>
-          </a:xfrm>
-          <a:prstGeom prst="rect">
-            <a:avLst/>
-          </a:prstGeom>
-        </p:spPr>
-      </p:pic>
-      <p:sp>
-        <p:nvSpPr>
-          <p:cNvPr id="29" name="Text 21"/>
-          <p:cNvSpPr txBox="1"/>
-          <p:nvPr/>
-        </p:nvSpPr>
-        <p:spPr>
-          <a:xfrm>
-            <a:off x="3840480" y="3063240"/>
+      <p:sp>
+        <p:nvSpPr>
+          <p:cNvPr id="24" name="Text 21"/>
+          <p:cNvSpPr txBox="1"/>
+          <p:nvPr/>
+        </p:nvSpPr>
+        <p:spPr>
+          <a:xfrm>
+            <a:off x="3474720" y="3063240"/>
             <a:ext cx="1371600" cy="292608"/>
           </a:xfrm>
           <a:prstGeom prst="rect">
@@ -4975,7 +4711,7 @@
       </p:sp>
       <p:sp>
         <p:nvSpPr>
-          <p:cNvPr id="30" name="Text 22"/>
+          <p:cNvPr id="25" name="Text 22"/>
           <p:cNvSpPr txBox="1"/>
           <p:nvPr/>
         </p:nvSpPr>
@@ -5014,7 +4750,7 @@
       </p:sp>
       <p:sp>
         <p:nvSpPr>
-          <p:cNvPr id="31" name="Text 23"/>
+          <p:cNvPr id="26" name="Text 23"/>
           <p:cNvSpPr txBox="1"/>
           <p:nvPr/>
         </p:nvSpPr>
@@ -5053,7 +4789,7 @@
       </p:sp>
       <p:sp>
         <p:nvSpPr>
-          <p:cNvPr id="32" name="Shape 24"/>
+          <p:cNvPr id="27" name="Shape 24"/>
           <p:cNvSpPr/>
           <p:nvPr/>
         </p:nvSpPr>
@@ -5076,39 +4812,15 @@
           </a:ln>
         </p:spPr>
       </p:sp>
-      <p:pic>
-        <p:nvPicPr>
-          <p:cNvPr id="33" name="Image 5" descr="preencoded.png">    </p:cNvPr>
-          <p:cNvPicPr>
-            <a:picLocks noChangeAspect="1"/>
-          </p:cNvPicPr>
-          <p:nvPr/>
-        </p:nvPicPr>
-        <p:blipFill>
-          <a:blip r:embed="rId6"/>
-          <a:stretch>
-            <a:fillRect/>
-          </a:stretch>
-        </p:blipFill>
-        <p:spPr>
-          <a:xfrm>
-            <a:off x="6263640" y="3081528"/>
-            <a:ext cx="256032" cy="256032"/>
-          </a:xfrm>
-          <a:prstGeom prst="rect">
-            <a:avLst/>
-          </a:prstGeom>
-        </p:spPr>
-      </p:pic>
-      <p:sp>
-        <p:nvSpPr>
-          <p:cNvPr id="34" name="Text 25"/>
-          <p:cNvSpPr txBox="1"/>
-          <p:nvPr/>
-        </p:nvSpPr>
-        <p:spPr>
-          <a:xfrm>
-            <a:off x="6629400" y="3063240"/>
+      <p:sp>
+        <p:nvSpPr>
+          <p:cNvPr id="28" name="Text 25"/>
+          <p:cNvSpPr txBox="1"/>
+          <p:nvPr/>
+        </p:nvSpPr>
+        <p:spPr>
+          <a:xfrm>
+            <a:off x="6263640" y="3063240"/>
             <a:ext cx="1371600" cy="292608"/>
           </a:xfrm>
           <a:prstGeom prst="rect">
@@ -5141,7 +4853,7 @@
       </p:sp>
       <p:sp>
         <p:nvSpPr>
-          <p:cNvPr id="35" name="Text 26"/>
+          <p:cNvPr id="29" name="Text 26"/>
           <p:cNvSpPr txBox="1"/>
           <p:nvPr/>
         </p:nvSpPr>
@@ -5180,7 +4892,7 @@
       </p:sp>
       <p:sp>
         <p:nvSpPr>
-          <p:cNvPr id="36" name="Text 27"/>
+          <p:cNvPr id="30" name="Text 27"/>
           <p:cNvSpPr txBox="1"/>
           <p:nvPr/>
         </p:nvSpPr>
@@ -5430,33 +5142,48 @@
           </a:ln>
         </p:spPr>
       </p:sp>
-      <p:pic>
-        <p:nvPicPr>
-          <p:cNvPr id="8" name="Image 0" descr="preencoded.png">    </p:cNvPr>
-          <p:cNvPicPr>
-            <a:picLocks noChangeAspect="1"/>
-          </p:cNvPicPr>
-          <p:nvPr/>
-        </p:nvPicPr>
-        <p:blipFill>
-          <a:blip r:embed="rId1"/>
-          <a:stretch>
-            <a:fillRect/>
-          </a:stretch>
-        </p:blipFill>
-        <p:spPr>
-          <a:xfrm>
-            <a:off x="685800" y="1545336"/>
-            <a:ext cx="384048" cy="384048"/>
-          </a:xfrm>
-          <a:prstGeom prst="rect">
-            <a:avLst/>
-          </a:prstGeom>
-        </p:spPr>
-      </p:pic>
-      <p:sp>
-        <p:nvSpPr>
-          <p:cNvPr id="9" name="Text 5"/>
+      <p:sp>
+        <p:nvSpPr>
+          <p:cNvPr id="8" name="Text 5"/>
+          <p:cNvSpPr txBox="1"/>
+          <p:nvPr/>
+        </p:nvSpPr>
+        <p:spPr>
+          <a:xfrm>
+            <a:off x="685800" y="1371600"/>
+            <a:ext cx="914400" cy="731520"/>
+          </a:xfrm>
+          <a:prstGeom prst="rect">
+            <a:avLst/>
+          </a:prstGeom>
+          <a:noFill/>
+          <a:ln/>
+        </p:spPr>
+        <p:txBody>
+          <a:bodyPr wrap="square" lIns="0" tIns="0" rIns="0" bIns="0" rtlCol="0" anchor="ctr"/>
+          <a:lstStyle/>
+          <a:p>
+            <a:pPr indent="0" marL="0">
+              <a:buNone/>
+            </a:pPr>
+            <a:r>
+              <a:rPr lang="en-US" sz="4400" b="1" dirty="0">
+                <a:solidFill>
+                  <a:srgbClr val="000000"/>
+                </a:solidFill>
+                <a:latin typeface="Arial" pitchFamily="34" charset="0"/>
+                <a:ea typeface="Arial" pitchFamily="34" charset="-122"/>
+                <a:cs typeface="Arial" pitchFamily="34" charset="-120"/>
+              </a:rPr>
+              <a:t>1</a:t>
+            </a:r>
+            <a:endParaRPr lang="en-US" sz="4400" dirty="0"/>
+          </a:p>
+        </p:txBody>
+      </p:sp>
+      <p:sp>
+        <p:nvSpPr>
+          <p:cNvPr id="9" name="Text 6"/>
           <p:cNvSpPr txBox="1"/>
           <p:nvPr/>
         </p:nvSpPr>
@@ -5495,7 +5222,7 @@
       </p:sp>
       <p:sp>
         <p:nvSpPr>
-          <p:cNvPr id="10" name="Text 6"/>
+          <p:cNvPr id="10" name="Text 7"/>
           <p:cNvSpPr txBox="1"/>
           <p:nvPr/>
         </p:nvSpPr>
@@ -5534,7 +5261,7 @@
       </p:sp>
       <p:sp>
         <p:nvSpPr>
-          <p:cNvPr id="11" name="Shape 7"/>
+          <p:cNvPr id="11" name="Shape 8"/>
           <p:cNvSpPr/>
           <p:nvPr/>
         </p:nvSpPr>
@@ -5557,33 +5284,48 @@
           </a:ln>
         </p:spPr>
       </p:sp>
-      <p:pic>
-        <p:nvPicPr>
-          <p:cNvPr id="12" name="Image 1" descr="preencoded.png">    </p:cNvPr>
-          <p:cNvPicPr>
-            <a:picLocks noChangeAspect="1"/>
-          </p:cNvPicPr>
-          <p:nvPr/>
-        </p:nvPicPr>
-        <p:blipFill>
-          <a:blip r:embed="rId2"/>
-          <a:stretch>
-            <a:fillRect/>
-          </a:stretch>
-        </p:blipFill>
-        <p:spPr>
-          <a:xfrm>
-            <a:off x="3474720" y="1545336"/>
-            <a:ext cx="384048" cy="384048"/>
-          </a:xfrm>
-          <a:prstGeom prst="rect">
-            <a:avLst/>
-          </a:prstGeom>
-        </p:spPr>
-      </p:pic>
-      <p:sp>
-        <p:nvSpPr>
-          <p:cNvPr id="13" name="Text 8"/>
+      <p:sp>
+        <p:nvSpPr>
+          <p:cNvPr id="12" name="Text 9"/>
+          <p:cNvSpPr txBox="1"/>
+          <p:nvPr/>
+        </p:nvSpPr>
+        <p:spPr>
+          <a:xfrm>
+            <a:off x="3474720" y="1371600"/>
+            <a:ext cx="914400" cy="731520"/>
+          </a:xfrm>
+          <a:prstGeom prst="rect">
+            <a:avLst/>
+          </a:prstGeom>
+          <a:noFill/>
+          <a:ln/>
+        </p:spPr>
+        <p:txBody>
+          <a:bodyPr wrap="square" lIns="0" tIns="0" rIns="0" bIns="0" rtlCol="0" anchor="ctr"/>
+          <a:lstStyle/>
+          <a:p>
+            <a:pPr indent="0" marL="0">
+              <a:buNone/>
+            </a:pPr>
+            <a:r>
+              <a:rPr lang="en-US" sz="4400" b="1" dirty="0">
+                <a:solidFill>
+                  <a:srgbClr val="000000"/>
+                </a:solidFill>
+                <a:latin typeface="Arial" pitchFamily="34" charset="0"/>
+                <a:ea typeface="Arial" pitchFamily="34" charset="-122"/>
+                <a:cs typeface="Arial" pitchFamily="34" charset="-120"/>
+              </a:rPr>
+              <a:t>2</a:t>
+            </a:r>
+            <a:endParaRPr lang="en-US" sz="4400" dirty="0"/>
+          </a:p>
+        </p:txBody>
+      </p:sp>
+      <p:sp>
+        <p:nvSpPr>
+          <p:cNvPr id="13" name="Text 10"/>
           <p:cNvSpPr txBox="1"/>
           <p:nvPr/>
         </p:nvSpPr>
@@ -5622,7 +5364,7 @@
       </p:sp>
       <p:sp>
         <p:nvSpPr>
-          <p:cNvPr id="14" name="Text 9"/>
+          <p:cNvPr id="14" name="Text 11"/>
           <p:cNvSpPr txBox="1"/>
           <p:nvPr/>
         </p:nvSpPr>
@@ -5661,7 +5403,7 @@
       </p:sp>
       <p:sp>
         <p:nvSpPr>
-          <p:cNvPr id="15" name="Shape 10"/>
+          <p:cNvPr id="15" name="Shape 12"/>
           <p:cNvSpPr/>
           <p:nvPr/>
         </p:nvSpPr>
@@ -5684,33 +5426,48 @@
           </a:ln>
         </p:spPr>
       </p:sp>
-      <p:pic>
-        <p:nvPicPr>
-          <p:cNvPr id="16" name="Image 2" descr="preencoded.png">    </p:cNvPr>
-          <p:cNvPicPr>
-            <a:picLocks noChangeAspect="1"/>
-          </p:cNvPicPr>
-          <p:nvPr/>
-        </p:nvPicPr>
-        <p:blipFill>
-          <a:blip r:embed="rId3"/>
-          <a:stretch>
-            <a:fillRect/>
-          </a:stretch>
-        </p:blipFill>
-        <p:spPr>
-          <a:xfrm>
-            <a:off x="6263640" y="1545336"/>
-            <a:ext cx="384048" cy="384048"/>
-          </a:xfrm>
-          <a:prstGeom prst="rect">
-            <a:avLst/>
-          </a:prstGeom>
-        </p:spPr>
-      </p:pic>
-      <p:sp>
-        <p:nvSpPr>
-          <p:cNvPr id="17" name="Text 11"/>
+      <p:sp>
+        <p:nvSpPr>
+          <p:cNvPr id="16" name="Text 13"/>
+          <p:cNvSpPr txBox="1"/>
+          <p:nvPr/>
+        </p:nvSpPr>
+        <p:spPr>
+          <a:xfrm>
+            <a:off x="6263640" y="1371600"/>
+            <a:ext cx="914400" cy="731520"/>
+          </a:xfrm>
+          <a:prstGeom prst="rect">
+            <a:avLst/>
+          </a:prstGeom>
+          <a:noFill/>
+          <a:ln/>
+        </p:spPr>
+        <p:txBody>
+          <a:bodyPr wrap="square" lIns="0" tIns="0" rIns="0" bIns="0" rtlCol="0" anchor="ctr"/>
+          <a:lstStyle/>
+          <a:p>
+            <a:pPr indent="0" marL="0">
+              <a:buNone/>
+            </a:pPr>
+            <a:r>
+              <a:rPr lang="en-US" sz="4400" b="1" dirty="0">
+                <a:solidFill>
+                  <a:srgbClr val="000000"/>
+                </a:solidFill>
+                <a:latin typeface="Arial" pitchFamily="34" charset="0"/>
+                <a:ea typeface="Arial" pitchFamily="34" charset="-122"/>
+                <a:cs typeface="Arial" pitchFamily="34" charset="-120"/>
+              </a:rPr>
+              <a:t>3</a:t>
+            </a:r>
+            <a:endParaRPr lang="en-US" sz="4400" dirty="0"/>
+          </a:p>
+        </p:txBody>
+      </p:sp>
+      <p:sp>
+        <p:nvSpPr>
+          <p:cNvPr id="17" name="Text 14"/>
           <p:cNvSpPr txBox="1"/>
           <p:nvPr/>
         </p:nvSpPr>
@@ -5749,7 +5506,7 @@
       </p:sp>
       <p:sp>
         <p:nvSpPr>
-          <p:cNvPr id="18" name="Text 12"/>
+          <p:cNvPr id="18" name="Text 15"/>
           <p:cNvSpPr txBox="1"/>
           <p:nvPr/>
         </p:nvSpPr>
@@ -5788,7 +5545,7 @@
       </p:sp>
       <p:sp>
         <p:nvSpPr>
-          <p:cNvPr id="19" name="Shape 13"/>
+          <p:cNvPr id="19" name="Shape 16"/>
           <p:cNvSpPr/>
           <p:nvPr/>
         </p:nvSpPr>
@@ -5813,7 +5570,7 @@
       </p:sp>
       <p:sp>
         <p:nvSpPr>
-          <p:cNvPr id="20" name="Text 14"/>
+          <p:cNvPr id="20" name="Text 17"/>
           <p:cNvSpPr txBox="1"/>
           <p:nvPr/>
         </p:nvSpPr>
@@ -5960,56 +5717,32 @@
           </a:p>
         </p:txBody>
       </p:sp>
-      <p:pic>
-        <p:nvPicPr>
-          <p:cNvPr id="5" name="Image 0" descr="preencoded.png">    </p:cNvPr>
-          <p:cNvPicPr>
-            <a:picLocks noChangeAspect="1"/>
-          </p:cNvPicPr>
-          <p:nvPr/>
-        </p:nvPicPr>
-        <p:blipFill>
-          <a:blip r:embed="rId1"/>
-          <a:stretch>
-            <a:fillRect/>
-          </a:stretch>
-        </p:blipFill>
-        <p:spPr>
-          <a:xfrm>
-            <a:off x="548640" y="2880360"/>
-            <a:ext cx="548640" cy="548640"/>
-          </a:xfrm>
-          <a:prstGeom prst="rect">
-            <a:avLst/>
-          </a:prstGeom>
-        </p:spPr>
-      </p:pic>
-      <p:sp>
-        <p:nvSpPr>
-          <p:cNvPr id="6" name="Text 2"/>
-          <p:cNvSpPr txBox="1"/>
-          <p:nvPr/>
-        </p:nvSpPr>
-        <p:spPr>
-          <a:xfrm>
-            <a:off x="1691640" y="2697480"/>
-            <a:ext cx="2377440" cy="914400"/>
-          </a:xfrm>
-          <a:prstGeom prst="rect">
-            <a:avLst/>
-          </a:prstGeom>
-          <a:noFill/>
-          <a:ln/>
-        </p:spPr>
-        <p:txBody>
-          <a:bodyPr wrap="square" lIns="0" tIns="0" rIns="0" bIns="0" rtlCol="0" anchor="ctr"/>
-          <a:lstStyle/>
-          <a:p>
-            <a:pPr indent="0" marL="0">
-              <a:buNone/>
-            </a:pPr>
-            <a:r>
-              <a:rPr lang="en-US" sz="1500" i="1" dirty="0">
+      <p:sp>
+        <p:nvSpPr>
+          <p:cNvPr id="5" name="Text 2"/>
+          <p:cNvSpPr txBox="1"/>
+          <p:nvPr/>
+        </p:nvSpPr>
+        <p:spPr>
+          <a:xfrm>
+            <a:off x="548640" y="2697480"/>
+            <a:ext cx="3474720" cy="914400"/>
+          </a:xfrm>
+          <a:prstGeom prst="rect">
+            <a:avLst/>
+          </a:prstGeom>
+          <a:noFill/>
+          <a:ln/>
+        </p:spPr>
+        <p:txBody>
+          <a:bodyPr wrap="square" lIns="0" tIns="0" rIns="0" bIns="0" rtlCol="0" anchor="t"/>
+          <a:lstStyle/>
+          <a:p>
+            <a:pPr indent="0" marL="0">
+              <a:buNone/>
+            </a:pPr>
+            <a:r>
+              <a:rPr lang="en-US" sz="1800" i="1" dirty="0">
                 <a:solidFill>
                   <a:srgbClr val="BFBFBF"/>
                 </a:solidFill>
@@ -6019,13 +5752,13 @@
               </a:rPr>
               <a:t>Build it fast, build it real.</a:t>
             </a:r>
-            <a:endParaRPr lang="en-US" sz="1500" dirty="0"/>
-          </a:p>
-        </p:txBody>
-      </p:sp>
-      <p:sp>
-        <p:nvSpPr>
-          <p:cNvPr id="7" name="Shape 3"/>
+            <a:endParaRPr lang="en-US" sz="1800" dirty="0"/>
+          </a:p>
+        </p:txBody>
+      </p:sp>
+      <p:sp>
+        <p:nvSpPr>
+          <p:cNvPr id="6" name="Shape 3"/>
           <p:cNvSpPr/>
           <p:nvPr/>
         </p:nvSpPr>
@@ -6050,7 +5783,7 @@
       </p:sp>
       <p:sp>
         <p:nvSpPr>
-          <p:cNvPr id="8" name="Text 4"/>
+          <p:cNvPr id="7" name="Text 4"/>
           <p:cNvSpPr txBox="1"/>
           <p:nvPr/>
         </p:nvSpPr>
@@ -6089,7 +5822,7 @@
       </p:sp>
       <p:sp>
         <p:nvSpPr>
-          <p:cNvPr id="9" name="Text 5"/>
+          <p:cNvPr id="8" name="Text 5"/>
           <p:cNvSpPr txBox="1"/>
           <p:nvPr/>
         </p:nvSpPr>
@@ -6128,7 +5861,7 @@
       </p:sp>
       <p:sp>
         <p:nvSpPr>
-          <p:cNvPr id="10" name="Text 6"/>
+          <p:cNvPr id="9" name="Text 6"/>
           <p:cNvSpPr txBox="1"/>
           <p:nvPr/>
         </p:nvSpPr>
@@ -6167,7 +5900,7 @@
       </p:sp>
       <p:sp>
         <p:nvSpPr>
-          <p:cNvPr id="11" name="Text 7"/>
+          <p:cNvPr id="10" name="Text 7"/>
           <p:cNvSpPr txBox="1"/>
           <p:nvPr/>
         </p:nvSpPr>
@@ -6206,7 +5939,7 @@
       </p:sp>
       <p:sp>
         <p:nvSpPr>
-          <p:cNvPr id="12" name="Text 8"/>
+          <p:cNvPr id="11" name="Text 8"/>
           <p:cNvSpPr txBox="1"/>
           <p:nvPr/>
         </p:nvSpPr>
@@ -6245,7 +5978,7 @@
       </p:sp>
       <p:sp>
         <p:nvSpPr>
-          <p:cNvPr id="13" name="Text 9"/>
+          <p:cNvPr id="12" name="Text 9"/>
           <p:cNvSpPr txBox="1"/>
           <p:nvPr/>
         </p:nvSpPr>
@@ -6495,33 +6228,48 @@
           </a:ln>
         </p:spPr>
       </p:sp>
-      <p:pic>
-        <p:nvPicPr>
-          <p:cNvPr id="8" name="Image 0" descr="preencoded.png">    </p:cNvPr>
-          <p:cNvPicPr>
-            <a:picLocks noChangeAspect="1"/>
-          </p:cNvPicPr>
-          <p:nvPr/>
-        </p:nvPicPr>
-        <p:blipFill>
-          <a:blip r:embed="rId1"/>
-          <a:stretch>
-            <a:fillRect/>
-          </a:stretch>
-        </p:blipFill>
-        <p:spPr>
-          <a:xfrm>
-            <a:off x="685800" y="1545336"/>
-            <a:ext cx="384048" cy="384048"/>
-          </a:xfrm>
-          <a:prstGeom prst="rect">
-            <a:avLst/>
-          </a:prstGeom>
-        </p:spPr>
-      </p:pic>
-      <p:sp>
-        <p:nvSpPr>
-          <p:cNvPr id="9" name="Text 5"/>
+      <p:sp>
+        <p:nvSpPr>
+          <p:cNvPr id="8" name="Text 5"/>
+          <p:cNvSpPr txBox="1"/>
+          <p:nvPr/>
+        </p:nvSpPr>
+        <p:spPr>
+          <a:xfrm>
+            <a:off x="685800" y="1371600"/>
+            <a:ext cx="914400" cy="731520"/>
+          </a:xfrm>
+          <a:prstGeom prst="rect">
+            <a:avLst/>
+          </a:prstGeom>
+          <a:noFill/>
+          <a:ln/>
+        </p:spPr>
+        <p:txBody>
+          <a:bodyPr wrap="square" lIns="0" tIns="0" rIns="0" bIns="0" rtlCol="0" anchor="ctr"/>
+          <a:lstStyle/>
+          <a:p>
+            <a:pPr indent="0" marL="0">
+              <a:buNone/>
+            </a:pPr>
+            <a:r>
+              <a:rPr lang="en-US" sz="4400" b="1" dirty="0">
+                <a:solidFill>
+                  <a:srgbClr val="FFFFFF"/>
+                </a:solidFill>
+                <a:latin typeface="Arial" pitchFamily="34" charset="0"/>
+                <a:ea typeface="Arial" pitchFamily="34" charset="-122"/>
+                <a:cs typeface="Arial" pitchFamily="34" charset="-120"/>
+              </a:rPr>
+              <a:t>1</a:t>
+            </a:r>
+            <a:endParaRPr lang="en-US" sz="4400" dirty="0"/>
+          </a:p>
+        </p:txBody>
+      </p:sp>
+      <p:sp>
+        <p:nvSpPr>
+          <p:cNvPr id="9" name="Text 6"/>
           <p:cNvSpPr txBox="1"/>
           <p:nvPr/>
         </p:nvSpPr>
@@ -6560,7 +6308,7 @@
       </p:sp>
       <p:sp>
         <p:nvSpPr>
-          <p:cNvPr id="10" name="Text 6"/>
+          <p:cNvPr id="10" name="Text 7"/>
           <p:cNvSpPr txBox="1"/>
           <p:nvPr/>
         </p:nvSpPr>
@@ -6599,7 +6347,7 @@
       </p:sp>
       <p:sp>
         <p:nvSpPr>
-          <p:cNvPr id="11" name="Shape 7"/>
+          <p:cNvPr id="11" name="Shape 8"/>
           <p:cNvSpPr/>
           <p:nvPr/>
         </p:nvSpPr>
@@ -6622,33 +6370,48 @@
           </a:ln>
         </p:spPr>
       </p:sp>
-      <p:pic>
-        <p:nvPicPr>
-          <p:cNvPr id="12" name="Image 1" descr="preencoded.png">    </p:cNvPr>
-          <p:cNvPicPr>
-            <a:picLocks noChangeAspect="1"/>
-          </p:cNvPicPr>
-          <p:nvPr/>
-        </p:nvPicPr>
-        <p:blipFill>
-          <a:blip r:embed="rId2"/>
-          <a:stretch>
-            <a:fillRect/>
-          </a:stretch>
-        </p:blipFill>
-        <p:spPr>
-          <a:xfrm>
-            <a:off x="3474720" y="1545336"/>
-            <a:ext cx="384048" cy="384048"/>
-          </a:xfrm>
-          <a:prstGeom prst="rect">
-            <a:avLst/>
-          </a:prstGeom>
-        </p:spPr>
-      </p:pic>
-      <p:sp>
-        <p:nvSpPr>
-          <p:cNvPr id="13" name="Text 8"/>
+      <p:sp>
+        <p:nvSpPr>
+          <p:cNvPr id="12" name="Text 9"/>
+          <p:cNvSpPr txBox="1"/>
+          <p:nvPr/>
+        </p:nvSpPr>
+        <p:spPr>
+          <a:xfrm>
+            <a:off x="3474720" y="1371600"/>
+            <a:ext cx="914400" cy="731520"/>
+          </a:xfrm>
+          <a:prstGeom prst="rect">
+            <a:avLst/>
+          </a:prstGeom>
+          <a:noFill/>
+          <a:ln/>
+        </p:spPr>
+        <p:txBody>
+          <a:bodyPr wrap="square" lIns="0" tIns="0" rIns="0" bIns="0" rtlCol="0" anchor="ctr"/>
+          <a:lstStyle/>
+          <a:p>
+            <a:pPr indent="0" marL="0">
+              <a:buNone/>
+            </a:pPr>
+            <a:r>
+              <a:rPr lang="en-US" sz="4400" b="1" dirty="0">
+                <a:solidFill>
+                  <a:srgbClr val="000000"/>
+                </a:solidFill>
+                <a:latin typeface="Arial" pitchFamily="34" charset="0"/>
+                <a:ea typeface="Arial" pitchFamily="34" charset="-122"/>
+                <a:cs typeface="Arial" pitchFamily="34" charset="-120"/>
+              </a:rPr>
+              <a:t>2</a:t>
+            </a:r>
+            <a:endParaRPr lang="en-US" sz="4400" dirty="0"/>
+          </a:p>
+        </p:txBody>
+      </p:sp>
+      <p:sp>
+        <p:nvSpPr>
+          <p:cNvPr id="13" name="Text 10"/>
           <p:cNvSpPr txBox="1"/>
           <p:nvPr/>
         </p:nvSpPr>
@@ -6687,7 +6450,7 @@
       </p:sp>
       <p:sp>
         <p:nvSpPr>
-          <p:cNvPr id="14" name="Text 9"/>
+          <p:cNvPr id="14" name="Text 11"/>
           <p:cNvSpPr txBox="1"/>
           <p:nvPr/>
         </p:nvSpPr>
@@ -6726,7 +6489,7 @@
       </p:sp>
       <p:sp>
         <p:nvSpPr>
-          <p:cNvPr id="15" name="Shape 10"/>
+          <p:cNvPr id="15" name="Shape 12"/>
           <p:cNvSpPr/>
           <p:nvPr/>
         </p:nvSpPr>
@@ -6749,33 +6512,48 @@
           </a:ln>
         </p:spPr>
       </p:sp>
-      <p:pic>
-        <p:nvPicPr>
-          <p:cNvPr id="16" name="Image 2" descr="preencoded.png">    </p:cNvPr>
-          <p:cNvPicPr>
-            <a:picLocks noChangeAspect="1"/>
-          </p:cNvPicPr>
-          <p:nvPr/>
-        </p:nvPicPr>
-        <p:blipFill>
-          <a:blip r:embed="rId3"/>
-          <a:stretch>
-            <a:fillRect/>
-          </a:stretch>
-        </p:blipFill>
-        <p:spPr>
-          <a:xfrm>
-            <a:off x="6263640" y="1545336"/>
-            <a:ext cx="384048" cy="384048"/>
-          </a:xfrm>
-          <a:prstGeom prst="rect">
-            <a:avLst/>
-          </a:prstGeom>
-        </p:spPr>
-      </p:pic>
-      <p:sp>
-        <p:nvSpPr>
-          <p:cNvPr id="17" name="Text 11"/>
+      <p:sp>
+        <p:nvSpPr>
+          <p:cNvPr id="16" name="Text 13"/>
+          <p:cNvSpPr txBox="1"/>
+          <p:nvPr/>
+        </p:nvSpPr>
+        <p:spPr>
+          <a:xfrm>
+            <a:off x="6263640" y="1371600"/>
+            <a:ext cx="914400" cy="731520"/>
+          </a:xfrm>
+          <a:prstGeom prst="rect">
+            <a:avLst/>
+          </a:prstGeom>
+          <a:noFill/>
+          <a:ln/>
+        </p:spPr>
+        <p:txBody>
+          <a:bodyPr wrap="square" lIns="0" tIns="0" rIns="0" bIns="0" rtlCol="0" anchor="ctr"/>
+          <a:lstStyle/>
+          <a:p>
+            <a:pPr indent="0" marL="0">
+              <a:buNone/>
+            </a:pPr>
+            <a:r>
+              <a:rPr lang="en-US" sz="4400" b="1" dirty="0">
+                <a:solidFill>
+                  <a:srgbClr val="000000"/>
+                </a:solidFill>
+                <a:latin typeface="Arial" pitchFamily="34" charset="0"/>
+                <a:ea typeface="Arial" pitchFamily="34" charset="-122"/>
+                <a:cs typeface="Arial" pitchFamily="34" charset="-120"/>
+              </a:rPr>
+              <a:t>3</a:t>
+            </a:r>
+            <a:endParaRPr lang="en-US" sz="4400" dirty="0"/>
+          </a:p>
+        </p:txBody>
+      </p:sp>
+      <p:sp>
+        <p:nvSpPr>
+          <p:cNvPr id="17" name="Text 14"/>
           <p:cNvSpPr txBox="1"/>
           <p:nvPr/>
         </p:nvSpPr>
@@ -6814,7 +6592,7 @@
       </p:sp>
       <p:sp>
         <p:nvSpPr>
-          <p:cNvPr id="18" name="Text 12"/>
+          <p:cNvPr id="18" name="Text 15"/>
           <p:cNvSpPr txBox="1"/>
           <p:nvPr/>
         </p:nvSpPr>
@@ -6853,7 +6631,7 @@
       </p:sp>
       <p:sp>
         <p:nvSpPr>
-          <p:cNvPr id="19" name="Shape 13"/>
+          <p:cNvPr id="19" name="Shape 16"/>
           <p:cNvSpPr/>
           <p:nvPr/>
         </p:nvSpPr>
@@ -6878,7 +6656,7 @@
       </p:sp>
       <p:sp>
         <p:nvSpPr>
-          <p:cNvPr id="20" name="Text 14"/>
+          <p:cNvPr id="20" name="Text 17"/>
           <p:cNvSpPr txBox="1"/>
           <p:nvPr/>
         </p:nvSpPr>
@@ -7795,56 +7573,32 @@
           </a:p>
         </p:txBody>
       </p:sp>
-      <p:pic>
-        <p:nvPicPr>
-          <p:cNvPr id="5" name="Image 0" descr="preencoded.png">    </p:cNvPr>
-          <p:cNvPicPr>
-            <a:picLocks noChangeAspect="1"/>
-          </p:cNvPicPr>
-          <p:nvPr/>
-        </p:nvPicPr>
-        <p:blipFill>
-          <a:blip r:embed="rId1"/>
-          <a:stretch>
-            <a:fillRect/>
-          </a:stretch>
-        </p:blipFill>
-        <p:spPr>
-          <a:xfrm>
-            <a:off x="548640" y="2880360"/>
-            <a:ext cx="548640" cy="548640"/>
-          </a:xfrm>
-          <a:prstGeom prst="rect">
-            <a:avLst/>
-          </a:prstGeom>
-        </p:spPr>
-      </p:pic>
-      <p:sp>
-        <p:nvSpPr>
-          <p:cNvPr id="6" name="Text 2"/>
-          <p:cNvSpPr txBox="1"/>
-          <p:nvPr/>
-        </p:nvSpPr>
-        <p:spPr>
-          <a:xfrm>
-            <a:off x="1691640" y="2697480"/>
-            <a:ext cx="2377440" cy="914400"/>
-          </a:xfrm>
-          <a:prstGeom prst="rect">
-            <a:avLst/>
-          </a:prstGeom>
-          <a:noFill/>
-          <a:ln/>
-        </p:spPr>
-        <p:txBody>
-          <a:bodyPr wrap="square" lIns="0" tIns="0" rIns="0" bIns="0" rtlCol="0" anchor="ctr"/>
-          <a:lstStyle/>
-          <a:p>
-            <a:pPr indent="0" marL="0">
-              <a:buNone/>
-            </a:pPr>
-            <a:r>
-              <a:rPr lang="en-US" sz="1500" i="1" dirty="0">
+      <p:sp>
+        <p:nvSpPr>
+          <p:cNvPr id="5" name="Text 2"/>
+          <p:cNvSpPr txBox="1"/>
+          <p:nvPr/>
+        </p:nvSpPr>
+        <p:spPr>
+          <a:xfrm>
+            <a:off x="548640" y="2697480"/>
+            <a:ext cx="3474720" cy="914400"/>
+          </a:xfrm>
+          <a:prstGeom prst="rect">
+            <a:avLst/>
+          </a:prstGeom>
+          <a:noFill/>
+          <a:ln/>
+        </p:spPr>
+        <p:txBody>
+          <a:bodyPr wrap="square" lIns="0" tIns="0" rIns="0" bIns="0" rtlCol="0" anchor="t"/>
+          <a:lstStyle/>
+          <a:p>
+            <a:pPr indent="0" marL="0">
+              <a:buNone/>
+            </a:pPr>
+            <a:r>
+              <a:rPr lang="en-US" sz="1800" i="1" dirty="0">
                 <a:solidFill>
                   <a:srgbClr val="BFBFBF"/>
                 </a:solidFill>
@@ -7854,13 +7608,13 @@
               </a:rPr>
               <a:t>Measure honestly, even the bad news.</a:t>
             </a:r>
-            <a:endParaRPr lang="en-US" sz="1500" dirty="0"/>
-          </a:p>
-        </p:txBody>
-      </p:sp>
-      <p:sp>
-        <p:nvSpPr>
-          <p:cNvPr id="7" name="Shape 3"/>
+            <a:endParaRPr lang="en-US" sz="1800" dirty="0"/>
+          </a:p>
+        </p:txBody>
+      </p:sp>
+      <p:sp>
+        <p:nvSpPr>
+          <p:cNvPr id="6" name="Shape 3"/>
           <p:cNvSpPr/>
           <p:nvPr/>
         </p:nvSpPr>
@@ -7885,7 +7639,7 @@
       </p:sp>
       <p:sp>
         <p:nvSpPr>
-          <p:cNvPr id="8" name="Text 4"/>
+          <p:cNvPr id="7" name="Text 4"/>
           <p:cNvSpPr txBox="1"/>
           <p:nvPr/>
         </p:nvSpPr>
@@ -7924,7 +7678,7 @@
       </p:sp>
       <p:sp>
         <p:nvSpPr>
-          <p:cNvPr id="9" name="Text 5"/>
+          <p:cNvPr id="8" name="Text 5"/>
           <p:cNvSpPr txBox="1"/>
           <p:nvPr/>
         </p:nvSpPr>
@@ -7963,7 +7717,7 @@
       </p:sp>
       <p:sp>
         <p:nvSpPr>
-          <p:cNvPr id="10" name="Text 6"/>
+          <p:cNvPr id="9" name="Text 6"/>
           <p:cNvSpPr txBox="1"/>
           <p:nvPr/>
         </p:nvSpPr>
@@ -8002,7 +7756,7 @@
       </p:sp>
       <p:sp>
         <p:nvSpPr>
-          <p:cNvPr id="11" name="Text 7"/>
+          <p:cNvPr id="10" name="Text 7"/>
           <p:cNvSpPr txBox="1"/>
           <p:nvPr/>
         </p:nvSpPr>
@@ -8041,7 +7795,7 @@
       </p:sp>
       <p:sp>
         <p:nvSpPr>
-          <p:cNvPr id="12" name="Text 8"/>
+          <p:cNvPr id="11" name="Text 8"/>
           <p:cNvSpPr txBox="1"/>
           <p:nvPr/>
         </p:nvSpPr>
@@ -8080,7 +7834,7 @@
       </p:sp>
       <p:sp>
         <p:nvSpPr>
-          <p:cNvPr id="13" name="Text 9"/>
+          <p:cNvPr id="12" name="Text 9"/>
           <p:cNvSpPr txBox="1"/>
           <p:nvPr/>
         </p:nvSpPr>
@@ -8330,33 +8084,48 @@
           </a:ln>
         </p:spPr>
       </p:sp>
-      <p:pic>
-        <p:nvPicPr>
-          <p:cNvPr id="8" name="Image 0" descr="preencoded.png">    </p:cNvPr>
-          <p:cNvPicPr>
-            <a:picLocks noChangeAspect="1"/>
-          </p:cNvPicPr>
-          <p:nvPr/>
-        </p:nvPicPr>
-        <p:blipFill>
-          <a:blip r:embed="rId1"/>
-          <a:stretch>
-            <a:fillRect/>
-          </a:stretch>
-        </p:blipFill>
-        <p:spPr>
-          <a:xfrm>
-            <a:off x="685800" y="1536192"/>
-            <a:ext cx="356616" cy="356616"/>
-          </a:xfrm>
-          <a:prstGeom prst="rect">
-            <a:avLst/>
-          </a:prstGeom>
-        </p:spPr>
-      </p:pic>
-      <p:sp>
-        <p:nvSpPr>
-          <p:cNvPr id="9" name="Text 5"/>
+      <p:sp>
+        <p:nvSpPr>
+          <p:cNvPr id="8" name="Text 5"/>
+          <p:cNvSpPr txBox="1"/>
+          <p:nvPr/>
+        </p:nvSpPr>
+        <p:spPr>
+          <a:xfrm>
+            <a:off x="640080" y="1371600"/>
+            <a:ext cx="914400" cy="731520"/>
+          </a:xfrm>
+          <a:prstGeom prst="rect">
+            <a:avLst/>
+          </a:prstGeom>
+          <a:noFill/>
+          <a:ln/>
+        </p:spPr>
+        <p:txBody>
+          <a:bodyPr wrap="square" lIns="0" tIns="0" rIns="0" bIns="0" rtlCol="0" anchor="ctr"/>
+          <a:lstStyle/>
+          <a:p>
+            <a:pPr indent="0" marL="0">
+              <a:buNone/>
+            </a:pPr>
+            <a:r>
+              <a:rPr lang="en-US" sz="4000" b="1" dirty="0">
+                <a:solidFill>
+                  <a:srgbClr val="000000"/>
+                </a:solidFill>
+                <a:latin typeface="Arial" pitchFamily="34" charset="0"/>
+                <a:ea typeface="Arial" pitchFamily="34" charset="-122"/>
+                <a:cs typeface="Arial" pitchFamily="34" charset="-120"/>
+              </a:rPr>
+              <a:t>1</a:t>
+            </a:r>
+            <a:endParaRPr lang="en-US" sz="4000" dirty="0"/>
+          </a:p>
+        </p:txBody>
+      </p:sp>
+      <p:sp>
+        <p:nvSpPr>
+          <p:cNvPr id="9" name="Text 6"/>
           <p:cNvSpPr txBox="1"/>
           <p:nvPr/>
         </p:nvSpPr>
@@ -8395,7 +8164,7 @@
       </p:sp>
       <p:sp>
         <p:nvSpPr>
-          <p:cNvPr id="10" name="Text 6"/>
+          <p:cNvPr id="10" name="Text 7"/>
           <p:cNvSpPr txBox="1"/>
           <p:nvPr/>
         </p:nvSpPr>
@@ -8434,7 +8203,7 @@
       </p:sp>
       <p:sp>
         <p:nvSpPr>
-          <p:cNvPr id="11" name="Shape 7"/>
+          <p:cNvPr id="11" name="Shape 8"/>
           <p:cNvSpPr/>
           <p:nvPr/>
         </p:nvSpPr>
@@ -8457,33 +8226,48 @@
           </a:ln>
         </p:spPr>
       </p:sp>
-      <p:pic>
-        <p:nvPicPr>
-          <p:cNvPr id="12" name="Image 1" descr="preencoded.png">    </p:cNvPr>
-          <p:cNvPicPr>
-            <a:picLocks noChangeAspect="1"/>
-          </p:cNvPicPr>
-          <p:nvPr/>
-        </p:nvPicPr>
-        <p:blipFill>
-          <a:blip r:embed="rId2"/>
-          <a:stretch>
-            <a:fillRect/>
-          </a:stretch>
-        </p:blipFill>
-        <p:spPr>
-          <a:xfrm>
-            <a:off x="2770632" y="1536192"/>
-            <a:ext cx="356616" cy="356616"/>
-          </a:xfrm>
-          <a:prstGeom prst="rect">
-            <a:avLst/>
-          </a:prstGeom>
-        </p:spPr>
-      </p:pic>
-      <p:sp>
-        <p:nvSpPr>
-          <p:cNvPr id="13" name="Text 8"/>
+      <p:sp>
+        <p:nvSpPr>
+          <p:cNvPr id="12" name="Text 9"/>
+          <p:cNvSpPr txBox="1"/>
+          <p:nvPr/>
+        </p:nvSpPr>
+        <p:spPr>
+          <a:xfrm>
+            <a:off x="2724912" y="1371600"/>
+            <a:ext cx="914400" cy="731520"/>
+          </a:xfrm>
+          <a:prstGeom prst="rect">
+            <a:avLst/>
+          </a:prstGeom>
+          <a:noFill/>
+          <a:ln/>
+        </p:spPr>
+        <p:txBody>
+          <a:bodyPr wrap="square" lIns="0" tIns="0" rIns="0" bIns="0" rtlCol="0" anchor="ctr"/>
+          <a:lstStyle/>
+          <a:p>
+            <a:pPr indent="0" marL="0">
+              <a:buNone/>
+            </a:pPr>
+            <a:r>
+              <a:rPr lang="en-US" sz="4000" b="1" dirty="0">
+                <a:solidFill>
+                  <a:srgbClr val="000000"/>
+                </a:solidFill>
+                <a:latin typeface="Arial" pitchFamily="34" charset="0"/>
+                <a:ea typeface="Arial" pitchFamily="34" charset="-122"/>
+                <a:cs typeface="Arial" pitchFamily="34" charset="-120"/>
+              </a:rPr>
+              <a:t>2</a:t>
+            </a:r>
+            <a:endParaRPr lang="en-US" sz="4000" dirty="0"/>
+          </a:p>
+        </p:txBody>
+      </p:sp>
+      <p:sp>
+        <p:nvSpPr>
+          <p:cNvPr id="13" name="Text 10"/>
           <p:cNvSpPr txBox="1"/>
           <p:nvPr/>
         </p:nvSpPr>
@@ -8522,7 +8306,7 @@
       </p:sp>
       <p:sp>
         <p:nvSpPr>
-          <p:cNvPr id="14" name="Text 9"/>
+          <p:cNvPr id="14" name="Text 11"/>
           <p:cNvSpPr txBox="1"/>
           <p:nvPr/>
         </p:nvSpPr>
@@ -8561,7 +8345,7 @@
       </p:sp>
       <p:sp>
         <p:nvSpPr>
-          <p:cNvPr id="15" name="Shape 10"/>
+          <p:cNvPr id="15" name="Shape 12"/>
           <p:cNvSpPr/>
           <p:nvPr/>
         </p:nvSpPr>
@@ -8584,33 +8368,48 @@
           </a:ln>
         </p:spPr>
       </p:sp>
-      <p:pic>
-        <p:nvPicPr>
-          <p:cNvPr id="16" name="Image 2" descr="preencoded.png">    </p:cNvPr>
-          <p:cNvPicPr>
-            <a:picLocks noChangeAspect="1"/>
-          </p:cNvPicPr>
-          <p:nvPr/>
-        </p:nvPicPr>
-        <p:blipFill>
-          <a:blip r:embed="rId3"/>
-          <a:stretch>
-            <a:fillRect/>
-          </a:stretch>
-        </p:blipFill>
-        <p:spPr>
-          <a:xfrm>
-            <a:off x="4855464" y="1536192"/>
-            <a:ext cx="356616" cy="356616"/>
-          </a:xfrm>
-          <a:prstGeom prst="rect">
-            <a:avLst/>
-          </a:prstGeom>
-        </p:spPr>
-      </p:pic>
-      <p:sp>
-        <p:nvSpPr>
-          <p:cNvPr id="17" name="Text 11"/>
+      <p:sp>
+        <p:nvSpPr>
+          <p:cNvPr id="16" name="Text 13"/>
+          <p:cNvSpPr txBox="1"/>
+          <p:nvPr/>
+        </p:nvSpPr>
+        <p:spPr>
+          <a:xfrm>
+            <a:off x="4809744" y="1371600"/>
+            <a:ext cx="914400" cy="731520"/>
+          </a:xfrm>
+          <a:prstGeom prst="rect">
+            <a:avLst/>
+          </a:prstGeom>
+          <a:noFill/>
+          <a:ln/>
+        </p:spPr>
+        <p:txBody>
+          <a:bodyPr wrap="square" lIns="0" tIns="0" rIns="0" bIns="0" rtlCol="0" anchor="ctr"/>
+          <a:lstStyle/>
+          <a:p>
+            <a:pPr indent="0" marL="0">
+              <a:buNone/>
+            </a:pPr>
+            <a:r>
+              <a:rPr lang="en-US" sz="4000" b="1" dirty="0">
+                <a:solidFill>
+                  <a:srgbClr val="000000"/>
+                </a:solidFill>
+                <a:latin typeface="Arial" pitchFamily="34" charset="0"/>
+                <a:ea typeface="Arial" pitchFamily="34" charset="-122"/>
+                <a:cs typeface="Arial" pitchFamily="34" charset="-120"/>
+              </a:rPr>
+              <a:t>3</a:t>
+            </a:r>
+            <a:endParaRPr lang="en-US" sz="4000" dirty="0"/>
+          </a:p>
+        </p:txBody>
+      </p:sp>
+      <p:sp>
+        <p:nvSpPr>
+          <p:cNvPr id="17" name="Text 14"/>
           <p:cNvSpPr txBox="1"/>
           <p:nvPr/>
         </p:nvSpPr>
@@ -8649,7 +8448,7 @@
       </p:sp>
       <p:sp>
         <p:nvSpPr>
-          <p:cNvPr id="18" name="Text 12"/>
+          <p:cNvPr id="18" name="Text 15"/>
           <p:cNvSpPr txBox="1"/>
           <p:nvPr/>
         </p:nvSpPr>
@@ -8688,7 +8487,7 @@
       </p:sp>
       <p:sp>
         <p:nvSpPr>
-          <p:cNvPr id="19" name="Shape 13"/>
+          <p:cNvPr id="19" name="Shape 16"/>
           <p:cNvSpPr/>
           <p:nvPr/>
         </p:nvSpPr>
@@ -8711,33 +8510,48 @@
           </a:ln>
         </p:spPr>
       </p:sp>
-      <p:pic>
-        <p:nvPicPr>
-          <p:cNvPr id="20" name="Image 3" descr="preencoded.png">    </p:cNvPr>
-          <p:cNvPicPr>
-            <a:picLocks noChangeAspect="1"/>
-          </p:cNvPicPr>
-          <p:nvPr/>
-        </p:nvPicPr>
-        <p:blipFill>
-          <a:blip r:embed="rId4"/>
-          <a:stretch>
-            <a:fillRect/>
-          </a:stretch>
-        </p:blipFill>
-        <p:spPr>
-          <a:xfrm>
-            <a:off x="6940296" y="1536192"/>
-            <a:ext cx="356616" cy="356616"/>
-          </a:xfrm>
-          <a:prstGeom prst="rect">
-            <a:avLst/>
-          </a:prstGeom>
-        </p:spPr>
-      </p:pic>
-      <p:sp>
-        <p:nvSpPr>
-          <p:cNvPr id="21" name="Text 14"/>
+      <p:sp>
+        <p:nvSpPr>
+          <p:cNvPr id="20" name="Text 17"/>
+          <p:cNvSpPr txBox="1"/>
+          <p:nvPr/>
+        </p:nvSpPr>
+        <p:spPr>
+          <a:xfrm>
+            <a:off x="6894576" y="1371600"/>
+            <a:ext cx="914400" cy="731520"/>
+          </a:xfrm>
+          <a:prstGeom prst="rect">
+            <a:avLst/>
+          </a:prstGeom>
+          <a:noFill/>
+          <a:ln/>
+        </p:spPr>
+        <p:txBody>
+          <a:bodyPr wrap="square" lIns="0" tIns="0" rIns="0" bIns="0" rtlCol="0" anchor="ctr"/>
+          <a:lstStyle/>
+          <a:p>
+            <a:pPr indent="0" marL="0">
+              <a:buNone/>
+            </a:pPr>
+            <a:r>
+              <a:rPr lang="en-US" sz="4000" b="1" dirty="0">
+                <a:solidFill>
+                  <a:srgbClr val="FFFFFF"/>
+                </a:solidFill>
+                <a:latin typeface="Arial" pitchFamily="34" charset="0"/>
+                <a:ea typeface="Arial" pitchFamily="34" charset="-122"/>
+                <a:cs typeface="Arial" pitchFamily="34" charset="-120"/>
+              </a:rPr>
+              <a:t>4</a:t>
+            </a:r>
+            <a:endParaRPr lang="en-US" sz="4000" dirty="0"/>
+          </a:p>
+        </p:txBody>
+      </p:sp>
+      <p:sp>
+        <p:nvSpPr>
+          <p:cNvPr id="21" name="Text 18"/>
           <p:cNvSpPr txBox="1"/>
           <p:nvPr/>
         </p:nvSpPr>
@@ -8776,7 +8590,7 @@
       </p:sp>
       <p:sp>
         <p:nvSpPr>
-          <p:cNvPr id="22" name="Text 15"/>
+          <p:cNvPr id="22" name="Text 19"/>
           <p:cNvSpPr txBox="1"/>
           <p:nvPr/>
         </p:nvSpPr>
@@ -8815,7 +8629,7 @@
       </p:sp>
       <p:sp>
         <p:nvSpPr>
-          <p:cNvPr id="23" name="Text 16"/>
+          <p:cNvPr id="23" name="Text 20"/>
           <p:cNvSpPr txBox="1"/>
           <p:nvPr/>
         </p:nvSpPr>
@@ -9975,40 +9789,41 @@
           </a:p>
         </p:txBody>
       </p:sp>
-      <p:pic>
-        <p:nvPicPr>
-          <p:cNvPr id="7" name="Image 0" descr="preencoded.png">    </p:cNvPr>
-          <p:cNvPicPr>
-            <a:picLocks noChangeAspect="1"/>
-          </p:cNvPicPr>
-          <p:nvPr/>
-        </p:nvPicPr>
-        <p:blipFill>
-          <a:blip r:embed="rId1"/>
-          <a:stretch>
-            <a:fillRect/>
-          </a:stretch>
-        </p:blipFill>
-        <p:spPr>
-          <a:xfrm>
-            <a:off x="960120" y="1280160"/>
-            <a:ext cx="640080" cy="640080"/>
-          </a:xfrm>
-          <a:prstGeom prst="rect">
-            <a:avLst/>
-          </a:prstGeom>
-        </p:spPr>
-      </p:pic>
-      <p:sp>
-        <p:nvSpPr>
-          <p:cNvPr id="8" name="Text 4"/>
-          <p:cNvSpPr txBox="1"/>
-          <p:nvPr/>
-        </p:nvSpPr>
-        <p:spPr>
-          <a:xfrm>
-            <a:off x="411480" y="2194560"/>
-            <a:ext cx="1737360" cy="320040"/>
+      <p:sp>
+        <p:nvSpPr>
+          <p:cNvPr id="7" name="Shape 4"/>
+          <p:cNvSpPr/>
+          <p:nvPr/>
+        </p:nvSpPr>
+        <p:spPr>
+          <a:xfrm>
+            <a:off x="457200" y="1188720"/>
+            <a:ext cx="1783080" cy="1280160"/>
+          </a:xfrm>
+          <a:prstGeom prst="rect">
+            <a:avLst/>
+          </a:prstGeom>
+          <a:solidFill>
+            <a:srgbClr val="FFFFFF"/>
+          </a:solidFill>
+          <a:ln w="19050">
+            <a:solidFill>
+              <a:srgbClr val="000000"/>
+            </a:solidFill>
+            <a:prstDash val="solid"/>
+          </a:ln>
+        </p:spPr>
+      </p:sp>
+      <p:sp>
+        <p:nvSpPr>
+          <p:cNvPr id="8" name="Text 5"/>
+          <p:cNvSpPr txBox="1"/>
+          <p:nvPr/>
+        </p:nvSpPr>
+        <p:spPr>
+          <a:xfrm>
+            <a:off x="594360" y="1417320"/>
+            <a:ext cx="1508760" cy="365760"/>
           </a:xfrm>
           <a:prstGeom prst="rect">
             <a:avLst/>
@@ -10024,7 +9839,7 @@
               <a:buNone/>
             </a:pPr>
             <a:r>
-              <a:rPr lang="en-US" sz="1600" b="1" dirty="0">
+              <a:rPr lang="en-US" sz="1800" b="1" dirty="0">
                 <a:solidFill>
                   <a:srgbClr val="000000"/>
                 </a:solidFill>
@@ -10034,36 +9849,36 @@
               </a:rPr>
               <a:t>Your agent</a:t>
             </a:r>
-            <a:endParaRPr lang="en-US" sz="1600" dirty="0"/>
-          </a:p>
-        </p:txBody>
-      </p:sp>
-      <p:sp>
-        <p:nvSpPr>
-          <p:cNvPr id="9" name="Text 5"/>
-          <p:cNvSpPr txBox="1"/>
-          <p:nvPr/>
-        </p:nvSpPr>
-        <p:spPr>
-          <a:xfrm>
-            <a:off x="411480" y="2514600"/>
-            <a:ext cx="1737360" cy="274320"/>
-          </a:xfrm>
-          <a:prstGeom prst="rect">
-            <a:avLst/>
-          </a:prstGeom>
-          <a:noFill/>
-          <a:ln/>
-        </p:spPr>
-        <p:txBody>
-          <a:bodyPr wrap="square" lIns="0" tIns="0" rIns="0" bIns="0" rtlCol="0" anchor="ctr"/>
+            <a:endParaRPr lang="en-US" sz="1800" dirty="0"/>
+          </a:p>
+        </p:txBody>
+      </p:sp>
+      <p:sp>
+        <p:nvSpPr>
+          <p:cNvPr id="9" name="Text 6"/>
+          <p:cNvSpPr txBox="1"/>
+          <p:nvPr/>
+        </p:nvSpPr>
+        <p:spPr>
+          <a:xfrm>
+            <a:off x="594360" y="1828800"/>
+            <a:ext cx="1508760" cy="457200"/>
+          </a:xfrm>
+          <a:prstGeom prst="rect">
+            <a:avLst/>
+          </a:prstGeom>
+          <a:noFill/>
+          <a:ln/>
+        </p:spPr>
+        <p:txBody>
+          <a:bodyPr wrap="square" lIns="0" tIns="0" rIns="0" bIns="0" rtlCol="0" anchor="t"/>
           <a:lstStyle/>
           <a:p>
             <a:pPr algn="ctr" indent="0" marL="0">
               <a:buNone/>
             </a:pPr>
             <a:r>
-              <a:rPr lang="en-US" sz="1100" dirty="0">
+              <a:rPr lang="en-US" sz="1200" dirty="0">
                 <a:solidFill>
                   <a:srgbClr val="595959"/>
                 </a:solidFill>
@@ -10073,44 +9888,446 @@
               </a:rPr>
               <a:t>Claude Code, aider, pi</a:t>
             </a:r>
-            <a:endParaRPr lang="en-US" sz="1100" dirty="0"/>
-          </a:p>
-        </p:txBody>
-      </p:sp>
-      <p:pic>
-        <p:nvPicPr>
-          <p:cNvPr id="10" name="Image 1" descr="preencoded.png">    </p:cNvPr>
-          <p:cNvPicPr>
-            <a:picLocks noChangeAspect="1"/>
-          </p:cNvPicPr>
-          <p:nvPr/>
-        </p:nvPicPr>
-        <p:blipFill>
-          <a:blip r:embed="rId2"/>
-          <a:stretch>
-            <a:fillRect/>
-          </a:stretch>
-        </p:blipFill>
-        <p:spPr>
-          <a:xfrm>
-            <a:off x="2103120" y="1499616"/>
-            <a:ext cx="274320" cy="274320"/>
-          </a:xfrm>
-          <a:prstGeom prst="rect">
-            <a:avLst/>
-          </a:prstGeom>
-        </p:spPr>
-      </p:pic>
-      <p:sp>
-        <p:nvSpPr>
-          <p:cNvPr id="11" name="Shape 6"/>
+            <a:endParaRPr lang="en-US" sz="1200" dirty="0"/>
+          </a:p>
+        </p:txBody>
+      </p:sp>
+      <p:sp>
+        <p:nvSpPr>
+          <p:cNvPr id="10" name="Text 7"/>
+          <p:cNvSpPr txBox="1"/>
+          <p:nvPr/>
+        </p:nvSpPr>
+        <p:spPr>
+          <a:xfrm>
+            <a:off x="2240280" y="1554480"/>
+            <a:ext cx="365760" cy="548640"/>
+          </a:xfrm>
+          <a:prstGeom prst="rect">
+            <a:avLst/>
+          </a:prstGeom>
+          <a:noFill/>
+          <a:ln/>
+        </p:spPr>
+        <p:txBody>
+          <a:bodyPr wrap="square" lIns="0" tIns="0" rIns="0" bIns="0" rtlCol="0" anchor="ctr"/>
+          <a:lstStyle/>
+          <a:p>
+            <a:pPr algn="ctr" indent="0" marL="0">
+              <a:buNone/>
+            </a:pPr>
+            <a:r>
+              <a:rPr lang="en-US" sz="2400" dirty="0">
+                <a:solidFill>
+                  <a:srgbClr val="000000"/>
+                </a:solidFill>
+                <a:latin typeface="Arial" pitchFamily="34" charset="0"/>
+                <a:ea typeface="Arial" pitchFamily="34" charset="-122"/>
+                <a:cs typeface="Arial" pitchFamily="34" charset="-120"/>
+              </a:rPr>
+              <a:t>→</a:t>
+            </a:r>
+            <a:endParaRPr lang="en-US" sz="2400" dirty="0"/>
+          </a:p>
+        </p:txBody>
+      </p:sp>
+      <p:sp>
+        <p:nvSpPr>
+          <p:cNvPr id="11" name="Shape 8"/>
           <p:cNvSpPr/>
           <p:nvPr/>
         </p:nvSpPr>
         <p:spPr>
           <a:xfrm>
-            <a:off x="2560320" y="1097280"/>
-            <a:ext cx="1737360" cy="1783080"/>
+            <a:off x="2606040" y="1188720"/>
+            <a:ext cx="1783080" cy="1280160"/>
+          </a:xfrm>
+          <a:prstGeom prst="rect">
+            <a:avLst/>
+          </a:prstGeom>
+          <a:solidFill>
+            <a:srgbClr val="000000"/>
+          </a:solidFill>
+          <a:ln w="19050">
+            <a:solidFill>
+              <a:srgbClr val="000000"/>
+            </a:solidFill>
+            <a:prstDash val="solid"/>
+          </a:ln>
+        </p:spPr>
+      </p:sp>
+      <p:sp>
+        <p:nvSpPr>
+          <p:cNvPr id="12" name="Text 9"/>
+          <p:cNvSpPr txBox="1"/>
+          <p:nvPr/>
+        </p:nvSpPr>
+        <p:spPr>
+          <a:xfrm>
+            <a:off x="2743200" y="1417320"/>
+            <a:ext cx="1508760" cy="365760"/>
+          </a:xfrm>
+          <a:prstGeom prst="rect">
+            <a:avLst/>
+          </a:prstGeom>
+          <a:noFill/>
+          <a:ln/>
+        </p:spPr>
+        <p:txBody>
+          <a:bodyPr wrap="square" lIns="0" tIns="0" rIns="0" bIns="0" rtlCol="0" anchor="ctr"/>
+          <a:lstStyle/>
+          <a:p>
+            <a:pPr algn="ctr" indent="0" marL="0">
+              <a:buNone/>
+            </a:pPr>
+            <a:r>
+              <a:rPr lang="en-US" sz="1800" b="1" dirty="0">
+                <a:solidFill>
+                  <a:srgbClr val="FFFFFF"/>
+                </a:solidFill>
+                <a:latin typeface="Arial" pitchFamily="34" charset="0"/>
+                <a:ea typeface="Arial" pitchFamily="34" charset="-122"/>
+                <a:cs typeface="Arial" pitchFamily="34" charset="-120"/>
+              </a:rPr>
+              <a:t>Ramer</a:t>
+            </a:r>
+            <a:endParaRPr lang="en-US" sz="1800" dirty="0"/>
+          </a:p>
+        </p:txBody>
+      </p:sp>
+      <p:sp>
+        <p:nvSpPr>
+          <p:cNvPr id="13" name="Text 10"/>
+          <p:cNvSpPr txBox="1"/>
+          <p:nvPr/>
+        </p:nvSpPr>
+        <p:spPr>
+          <a:xfrm>
+            <a:off x="2743200" y="1828800"/>
+            <a:ext cx="1508760" cy="457200"/>
+          </a:xfrm>
+          <a:prstGeom prst="rect">
+            <a:avLst/>
+          </a:prstGeom>
+          <a:noFill/>
+          <a:ln/>
+        </p:spPr>
+        <p:txBody>
+          <a:bodyPr wrap="square" lIns="0" tIns="0" rIns="0" bIns="0" rtlCol="0" anchor="t"/>
+          <a:lstStyle/>
+          <a:p>
+            <a:pPr algn="ctr" indent="0" marL="0">
+              <a:buNone/>
+            </a:pPr>
+            <a:r>
+              <a:rPr lang="en-US" sz="1200" dirty="0">
+                <a:solidFill>
+                  <a:srgbClr val="BFBFBF"/>
+                </a:solidFill>
+                <a:latin typeface="Arial" pitchFamily="34" charset="0"/>
+                <a:ea typeface="Arial" pitchFamily="34" charset="-122"/>
+                <a:cs typeface="Arial" pitchFamily="34" charset="-120"/>
+              </a:rPr>
+              <a:t>the new middle layer</a:t>
+            </a:r>
+            <a:endParaRPr lang="en-US" sz="1200" dirty="0"/>
+          </a:p>
+        </p:txBody>
+      </p:sp>
+      <p:sp>
+        <p:nvSpPr>
+          <p:cNvPr id="14" name="Text 11"/>
+          <p:cNvSpPr txBox="1"/>
+          <p:nvPr/>
+        </p:nvSpPr>
+        <p:spPr>
+          <a:xfrm>
+            <a:off x="4389120" y="1554480"/>
+            <a:ext cx="365760" cy="548640"/>
+          </a:xfrm>
+          <a:prstGeom prst="rect">
+            <a:avLst/>
+          </a:prstGeom>
+          <a:noFill/>
+          <a:ln/>
+        </p:spPr>
+        <p:txBody>
+          <a:bodyPr wrap="square" lIns="0" tIns="0" rIns="0" bIns="0" rtlCol="0" anchor="ctr"/>
+          <a:lstStyle/>
+          <a:p>
+            <a:pPr algn="ctr" indent="0" marL="0">
+              <a:buNone/>
+            </a:pPr>
+            <a:r>
+              <a:rPr lang="en-US" sz="2400" dirty="0">
+                <a:solidFill>
+                  <a:srgbClr val="000000"/>
+                </a:solidFill>
+                <a:latin typeface="Arial" pitchFamily="34" charset="0"/>
+                <a:ea typeface="Arial" pitchFamily="34" charset="-122"/>
+                <a:cs typeface="Arial" pitchFamily="34" charset="-120"/>
+              </a:rPr>
+              <a:t>→</a:t>
+            </a:r>
+            <a:endParaRPr lang="en-US" sz="2400" dirty="0"/>
+          </a:p>
+        </p:txBody>
+      </p:sp>
+      <p:sp>
+        <p:nvSpPr>
+          <p:cNvPr id="15" name="Shape 12"/>
+          <p:cNvSpPr/>
+          <p:nvPr/>
+        </p:nvSpPr>
+        <p:spPr>
+          <a:xfrm>
+            <a:off x="4754880" y="1188720"/>
+            <a:ext cx="1783080" cy="1280160"/>
+          </a:xfrm>
+          <a:prstGeom prst="rect">
+            <a:avLst/>
+          </a:prstGeom>
+          <a:solidFill>
+            <a:srgbClr val="FFFFFF"/>
+          </a:solidFill>
+          <a:ln w="19050">
+            <a:solidFill>
+              <a:srgbClr val="000000"/>
+            </a:solidFill>
+            <a:prstDash val="solid"/>
+          </a:ln>
+        </p:spPr>
+      </p:sp>
+      <p:sp>
+        <p:nvSpPr>
+          <p:cNvPr id="16" name="Text 13"/>
+          <p:cNvSpPr txBox="1"/>
+          <p:nvPr/>
+        </p:nvSpPr>
+        <p:spPr>
+          <a:xfrm>
+            <a:off x="4892040" y="1417320"/>
+            <a:ext cx="1508760" cy="365760"/>
+          </a:xfrm>
+          <a:prstGeom prst="rect">
+            <a:avLst/>
+          </a:prstGeom>
+          <a:noFill/>
+          <a:ln/>
+        </p:spPr>
+        <p:txBody>
+          <a:bodyPr wrap="square" lIns="0" tIns="0" rIns="0" bIns="0" rtlCol="0" anchor="ctr"/>
+          <a:lstStyle/>
+          <a:p>
+            <a:pPr algn="ctr" indent="0" marL="0">
+              <a:buNone/>
+            </a:pPr>
+            <a:r>
+              <a:rPr lang="en-US" sz="1800" b="1" dirty="0">
+                <a:solidFill>
+                  <a:srgbClr val="000000"/>
+                </a:solidFill>
+                <a:latin typeface="Arial" pitchFamily="34" charset="0"/>
+                <a:ea typeface="Arial" pitchFamily="34" charset="-122"/>
+                <a:cs typeface="Arial" pitchFamily="34" charset="-120"/>
+              </a:rPr>
+              <a:t>Ollama</a:t>
+            </a:r>
+            <a:endParaRPr lang="en-US" sz="1800" dirty="0"/>
+          </a:p>
+        </p:txBody>
+      </p:sp>
+      <p:sp>
+        <p:nvSpPr>
+          <p:cNvPr id="17" name="Text 14"/>
+          <p:cNvSpPr txBox="1"/>
+          <p:nvPr/>
+        </p:nvSpPr>
+        <p:spPr>
+          <a:xfrm>
+            <a:off x="4892040" y="1828800"/>
+            <a:ext cx="1508760" cy="457200"/>
+          </a:xfrm>
+          <a:prstGeom prst="rect">
+            <a:avLst/>
+          </a:prstGeom>
+          <a:noFill/>
+          <a:ln/>
+        </p:spPr>
+        <p:txBody>
+          <a:bodyPr wrap="square" lIns="0" tIns="0" rIns="0" bIns="0" rtlCol="0" anchor="t"/>
+          <a:lstStyle/>
+          <a:p>
+            <a:pPr algn="ctr" indent="0" marL="0">
+              <a:buNone/>
+            </a:pPr>
+            <a:r>
+              <a:rPr lang="en-US" sz="1200" dirty="0">
+                <a:solidFill>
+                  <a:srgbClr val="595959"/>
+                </a:solidFill>
+                <a:latin typeface="Arial" pitchFamily="34" charset="0"/>
+                <a:ea typeface="Arial" pitchFamily="34" charset="-122"/>
+                <a:cs typeface="Arial" pitchFamily="34" charset="-120"/>
+              </a:rPr>
+              <a:t>runs the model</a:t>
+            </a:r>
+            <a:endParaRPr lang="en-US" sz="1200" dirty="0"/>
+          </a:p>
+        </p:txBody>
+      </p:sp>
+      <p:sp>
+        <p:nvSpPr>
+          <p:cNvPr id="18" name="Text 15"/>
+          <p:cNvSpPr txBox="1"/>
+          <p:nvPr/>
+        </p:nvSpPr>
+        <p:spPr>
+          <a:xfrm>
+            <a:off x="6537960" y="1554480"/>
+            <a:ext cx="365760" cy="548640"/>
+          </a:xfrm>
+          <a:prstGeom prst="rect">
+            <a:avLst/>
+          </a:prstGeom>
+          <a:noFill/>
+          <a:ln/>
+        </p:spPr>
+        <p:txBody>
+          <a:bodyPr wrap="square" lIns="0" tIns="0" rIns="0" bIns="0" rtlCol="0" anchor="ctr"/>
+          <a:lstStyle/>
+          <a:p>
+            <a:pPr algn="ctr" indent="0" marL="0">
+              <a:buNone/>
+            </a:pPr>
+            <a:r>
+              <a:rPr lang="en-US" sz="2400" dirty="0">
+                <a:solidFill>
+                  <a:srgbClr val="000000"/>
+                </a:solidFill>
+                <a:latin typeface="Arial" pitchFamily="34" charset="0"/>
+                <a:ea typeface="Arial" pitchFamily="34" charset="-122"/>
+                <a:cs typeface="Arial" pitchFamily="34" charset="-120"/>
+              </a:rPr>
+              <a:t>→</a:t>
+            </a:r>
+            <a:endParaRPr lang="en-US" sz="2400" dirty="0"/>
+          </a:p>
+        </p:txBody>
+      </p:sp>
+      <p:sp>
+        <p:nvSpPr>
+          <p:cNvPr id="19" name="Shape 16"/>
+          <p:cNvSpPr/>
+          <p:nvPr/>
+        </p:nvSpPr>
+        <p:spPr>
+          <a:xfrm>
+            <a:off x="6903720" y="1188720"/>
+            <a:ext cx="1783080" cy="1280160"/>
+          </a:xfrm>
+          <a:prstGeom prst="rect">
+            <a:avLst/>
+          </a:prstGeom>
+          <a:solidFill>
+            <a:srgbClr val="FFFFFF"/>
+          </a:solidFill>
+          <a:ln w="19050">
+            <a:solidFill>
+              <a:srgbClr val="000000"/>
+            </a:solidFill>
+            <a:prstDash val="solid"/>
+          </a:ln>
+        </p:spPr>
+      </p:sp>
+      <p:sp>
+        <p:nvSpPr>
+          <p:cNvPr id="20" name="Text 17"/>
+          <p:cNvSpPr txBox="1"/>
+          <p:nvPr/>
+        </p:nvSpPr>
+        <p:spPr>
+          <a:xfrm>
+            <a:off x="7040880" y="1417320"/>
+            <a:ext cx="1508760" cy="365760"/>
+          </a:xfrm>
+          <a:prstGeom prst="rect">
+            <a:avLst/>
+          </a:prstGeom>
+          <a:noFill/>
+          <a:ln/>
+        </p:spPr>
+        <p:txBody>
+          <a:bodyPr wrap="square" lIns="0" tIns="0" rIns="0" bIns="0" rtlCol="0" anchor="ctr"/>
+          <a:lstStyle/>
+          <a:p>
+            <a:pPr algn="ctr" indent="0" marL="0">
+              <a:buNone/>
+            </a:pPr>
+            <a:r>
+              <a:rPr lang="en-US" sz="1800" b="1" dirty="0">
+                <a:solidFill>
+                  <a:srgbClr val="000000"/>
+                </a:solidFill>
+                <a:latin typeface="Arial" pitchFamily="34" charset="0"/>
+                <a:ea typeface="Arial" pitchFamily="34" charset="-122"/>
+                <a:cs typeface="Arial" pitchFamily="34" charset="-120"/>
+              </a:rPr>
+              <a:t>Your GPU</a:t>
+            </a:r>
+            <a:endParaRPr lang="en-US" sz="1800" dirty="0"/>
+          </a:p>
+        </p:txBody>
+      </p:sp>
+      <p:sp>
+        <p:nvSpPr>
+          <p:cNvPr id="21" name="Text 18"/>
+          <p:cNvSpPr txBox="1"/>
+          <p:nvPr/>
+        </p:nvSpPr>
+        <p:spPr>
+          <a:xfrm>
+            <a:off x="7040880" y="1828800"/>
+            <a:ext cx="1508760" cy="457200"/>
+          </a:xfrm>
+          <a:prstGeom prst="rect">
+            <a:avLst/>
+          </a:prstGeom>
+          <a:noFill/>
+          <a:ln/>
+        </p:spPr>
+        <p:txBody>
+          <a:bodyPr wrap="square" lIns="0" tIns="0" rIns="0" bIns="0" rtlCol="0" anchor="t"/>
+          <a:lstStyle/>
+          <a:p>
+            <a:pPr algn="ctr" indent="0" marL="0">
+              <a:buNone/>
+            </a:pPr>
+            <a:r>
+              <a:rPr lang="en-US" sz="1200" dirty="0">
+                <a:solidFill>
+                  <a:srgbClr val="595959"/>
+                </a:solidFill>
+                <a:latin typeface="Arial" pitchFamily="34" charset="0"/>
+                <a:ea typeface="Arial" pitchFamily="34" charset="-122"/>
+                <a:cs typeface="Arial" pitchFamily="34" charset="-120"/>
+              </a:rPr>
+              <a:t>used far better</a:t>
+            </a:r>
+            <a:endParaRPr lang="en-US" sz="1200" dirty="0"/>
+          </a:p>
+        </p:txBody>
+      </p:sp>
+      <p:sp>
+        <p:nvSpPr>
+          <p:cNvPr id="22" name="Shape 19"/>
+          <p:cNvSpPr/>
+          <p:nvPr/>
+        </p:nvSpPr>
+        <p:spPr>
+          <a:xfrm>
+            <a:off x="457200" y="3063240"/>
+            <a:ext cx="2606040" cy="1508760"/>
           </a:xfrm>
           <a:prstGeom prst="rect">
             <a:avLst/>
@@ -10126,56 +10343,32 @@
           </a:ln>
         </p:spPr>
       </p:sp>
-      <p:pic>
-        <p:nvPicPr>
-          <p:cNvPr id="12" name="Image 2" descr="preencoded.png">    </p:cNvPr>
-          <p:cNvPicPr>
-            <a:picLocks noChangeAspect="1"/>
-          </p:cNvPicPr>
-          <p:nvPr/>
-        </p:nvPicPr>
-        <p:blipFill>
-          <a:blip r:embed="rId3"/>
-          <a:stretch>
-            <a:fillRect/>
-          </a:stretch>
-        </p:blipFill>
-        <p:spPr>
-          <a:xfrm>
-            <a:off x="3108960" y="1280160"/>
-            <a:ext cx="640080" cy="640080"/>
-          </a:xfrm>
-          <a:prstGeom prst="rect">
-            <a:avLst/>
-          </a:prstGeom>
-        </p:spPr>
-      </p:pic>
-      <p:sp>
-        <p:nvSpPr>
-          <p:cNvPr id="13" name="Text 7"/>
-          <p:cNvSpPr txBox="1"/>
-          <p:nvPr/>
-        </p:nvSpPr>
-        <p:spPr>
-          <a:xfrm>
-            <a:off x="2560320" y="2194560"/>
-            <a:ext cx="1737360" cy="320040"/>
-          </a:xfrm>
-          <a:prstGeom prst="rect">
-            <a:avLst/>
-          </a:prstGeom>
-          <a:noFill/>
-          <a:ln/>
-        </p:spPr>
-        <p:txBody>
-          <a:bodyPr wrap="square" lIns="0" tIns="0" rIns="0" bIns="0" rtlCol="0" anchor="ctr"/>
-          <a:lstStyle/>
-          <a:p>
-            <a:pPr algn="ctr" indent="0" marL="0">
-              <a:buNone/>
-            </a:pPr>
-            <a:r>
-              <a:rPr lang="en-US" sz="1600" b="1" dirty="0">
+      <p:sp>
+        <p:nvSpPr>
+          <p:cNvPr id="23" name="Text 20"/>
+          <p:cNvSpPr txBox="1"/>
+          <p:nvPr/>
+        </p:nvSpPr>
+        <p:spPr>
+          <a:xfrm>
+            <a:off x="640080" y="3200400"/>
+            <a:ext cx="2240280" cy="274320"/>
+          </a:xfrm>
+          <a:prstGeom prst="rect">
+            <a:avLst/>
+          </a:prstGeom>
+          <a:noFill/>
+          <a:ln/>
+        </p:spPr>
+        <p:txBody>
+          <a:bodyPr wrap="square" lIns="0" tIns="0" rIns="0" bIns="0" rtlCol="0" anchor="ctr"/>
+          <a:lstStyle/>
+          <a:p>
+            <a:pPr indent="0" marL="0">
+              <a:buNone/>
+            </a:pPr>
+            <a:r>
+              <a:rPr lang="en-US" sz="1400" b="1" dirty="0">
                 <a:solidFill>
                   <a:srgbClr val="000000"/>
                 </a:solidFill>
@@ -10183,312 +10376,60 @@
                 <a:ea typeface="Arial" pitchFamily="34" charset="-122"/>
                 <a:cs typeface="Arial" pitchFamily="34" charset="-120"/>
               </a:rPr>
-              <a:t>Ramer</a:t>
-            </a:r>
-            <a:endParaRPr lang="en-US" sz="1600" dirty="0"/>
-          </a:p>
-        </p:txBody>
-      </p:sp>
-      <p:sp>
-        <p:nvSpPr>
-          <p:cNvPr id="14" name="Text 8"/>
-          <p:cNvSpPr txBox="1"/>
-          <p:nvPr/>
-        </p:nvSpPr>
-        <p:spPr>
-          <a:xfrm>
-            <a:off x="2560320" y="2514600"/>
-            <a:ext cx="1737360" cy="274320"/>
-          </a:xfrm>
-          <a:prstGeom prst="rect">
-            <a:avLst/>
-          </a:prstGeom>
-          <a:noFill/>
-          <a:ln/>
-        </p:spPr>
-        <p:txBody>
-          <a:bodyPr wrap="square" lIns="0" tIns="0" rIns="0" bIns="0" rtlCol="0" anchor="ctr"/>
-          <a:lstStyle/>
-          <a:p>
-            <a:pPr algn="ctr" indent="0" marL="0">
-              <a:buNone/>
-            </a:pPr>
-            <a:r>
-              <a:rPr lang="en-US" sz="1100" dirty="0">
-                <a:solidFill>
-                  <a:srgbClr val="595959"/>
-                </a:solidFill>
-                <a:latin typeface="Arial" pitchFamily="34" charset="0"/>
-                <a:ea typeface="Arial" pitchFamily="34" charset="-122"/>
-                <a:cs typeface="Arial" pitchFamily="34" charset="-120"/>
-              </a:rPr>
-              <a:t>the new middle layer</a:t>
-            </a:r>
-            <a:endParaRPr lang="en-US" sz="1100" dirty="0"/>
-          </a:p>
-        </p:txBody>
-      </p:sp>
-      <p:pic>
-        <p:nvPicPr>
-          <p:cNvPr id="15" name="Image 3" descr="preencoded.png">    </p:cNvPr>
-          <p:cNvPicPr>
-            <a:picLocks noChangeAspect="1"/>
-          </p:cNvPicPr>
-          <p:nvPr/>
-        </p:nvPicPr>
-        <p:blipFill>
-          <a:blip r:embed="rId4"/>
-          <a:stretch>
-            <a:fillRect/>
-          </a:stretch>
-        </p:blipFill>
-        <p:spPr>
-          <a:xfrm>
-            <a:off x="4251960" y="1499616"/>
-            <a:ext cx="274320" cy="274320"/>
-          </a:xfrm>
-          <a:prstGeom prst="rect">
-            <a:avLst/>
-          </a:prstGeom>
-        </p:spPr>
-      </p:pic>
-      <p:pic>
-        <p:nvPicPr>
-          <p:cNvPr id="16" name="Image 4" descr="preencoded.png">    </p:cNvPr>
-          <p:cNvPicPr>
-            <a:picLocks noChangeAspect="1"/>
-          </p:cNvPicPr>
-          <p:nvPr/>
-        </p:nvPicPr>
-        <p:blipFill>
-          <a:blip r:embed="rId5"/>
-          <a:stretch>
-            <a:fillRect/>
-          </a:stretch>
-        </p:blipFill>
-        <p:spPr>
-          <a:xfrm>
-            <a:off x="5257800" y="1280160"/>
-            <a:ext cx="640080" cy="640080"/>
-          </a:xfrm>
-          <a:prstGeom prst="rect">
-            <a:avLst/>
-          </a:prstGeom>
-        </p:spPr>
-      </p:pic>
-      <p:sp>
-        <p:nvSpPr>
-          <p:cNvPr id="17" name="Text 9"/>
-          <p:cNvSpPr txBox="1"/>
-          <p:nvPr/>
-        </p:nvSpPr>
-        <p:spPr>
-          <a:xfrm>
-            <a:off x="4709160" y="2194560"/>
-            <a:ext cx="1737360" cy="320040"/>
-          </a:xfrm>
-          <a:prstGeom prst="rect">
-            <a:avLst/>
-          </a:prstGeom>
-          <a:noFill/>
-          <a:ln/>
-        </p:spPr>
-        <p:txBody>
-          <a:bodyPr wrap="square" lIns="0" tIns="0" rIns="0" bIns="0" rtlCol="0" anchor="ctr"/>
-          <a:lstStyle/>
-          <a:p>
-            <a:pPr algn="ctr" indent="0" marL="0">
-              <a:buNone/>
-            </a:pPr>
-            <a:r>
-              <a:rPr lang="en-US" sz="1600" b="1" dirty="0">
-                <a:solidFill>
-                  <a:srgbClr val="000000"/>
-                </a:solidFill>
-                <a:latin typeface="Arial" pitchFamily="34" charset="0"/>
-                <a:ea typeface="Arial" pitchFamily="34" charset="-122"/>
-                <a:cs typeface="Arial" pitchFamily="34" charset="-120"/>
-              </a:rPr>
-              <a:t>Ollama</a:t>
-            </a:r>
-            <a:endParaRPr lang="en-US" sz="1600" dirty="0"/>
-          </a:p>
-        </p:txBody>
-      </p:sp>
-      <p:sp>
-        <p:nvSpPr>
-          <p:cNvPr id="18" name="Text 10"/>
-          <p:cNvSpPr txBox="1"/>
-          <p:nvPr/>
-        </p:nvSpPr>
-        <p:spPr>
-          <a:xfrm>
-            <a:off x="4709160" y="2514600"/>
-            <a:ext cx="1737360" cy="274320"/>
-          </a:xfrm>
-          <a:prstGeom prst="rect">
-            <a:avLst/>
-          </a:prstGeom>
-          <a:noFill/>
-          <a:ln/>
-        </p:spPr>
-        <p:txBody>
-          <a:bodyPr wrap="square" lIns="0" tIns="0" rIns="0" bIns="0" rtlCol="0" anchor="ctr"/>
-          <a:lstStyle/>
-          <a:p>
-            <a:pPr algn="ctr" indent="0" marL="0">
-              <a:buNone/>
-            </a:pPr>
-            <a:r>
-              <a:rPr lang="en-US" sz="1100" dirty="0">
-                <a:solidFill>
-                  <a:srgbClr val="595959"/>
-                </a:solidFill>
-                <a:latin typeface="Arial" pitchFamily="34" charset="0"/>
-                <a:ea typeface="Arial" pitchFamily="34" charset="-122"/>
-                <a:cs typeface="Arial" pitchFamily="34" charset="-120"/>
-              </a:rPr>
-              <a:t>runs the model</a:t>
-            </a:r>
-            <a:endParaRPr lang="en-US" sz="1100" dirty="0"/>
-          </a:p>
-        </p:txBody>
-      </p:sp>
-      <p:pic>
-        <p:nvPicPr>
-          <p:cNvPr id="19" name="Image 5" descr="preencoded.png">    </p:cNvPr>
-          <p:cNvPicPr>
-            <a:picLocks noChangeAspect="1"/>
-          </p:cNvPicPr>
-          <p:nvPr/>
-        </p:nvPicPr>
-        <p:blipFill>
-          <a:blip r:embed="rId6"/>
-          <a:stretch>
-            <a:fillRect/>
-          </a:stretch>
-        </p:blipFill>
-        <p:spPr>
-          <a:xfrm>
-            <a:off x="6400800" y="1499616"/>
-            <a:ext cx="274320" cy="274320"/>
-          </a:xfrm>
-          <a:prstGeom prst="rect">
-            <a:avLst/>
-          </a:prstGeom>
-        </p:spPr>
-      </p:pic>
-      <p:pic>
-        <p:nvPicPr>
-          <p:cNvPr id="20" name="Image 6" descr="preencoded.png">    </p:cNvPr>
-          <p:cNvPicPr>
-            <a:picLocks noChangeAspect="1"/>
-          </p:cNvPicPr>
-          <p:nvPr/>
-        </p:nvPicPr>
-        <p:blipFill>
-          <a:blip r:embed="rId7"/>
-          <a:stretch>
-            <a:fillRect/>
-          </a:stretch>
-        </p:blipFill>
-        <p:spPr>
-          <a:xfrm>
-            <a:off x="7406640" y="1280160"/>
-            <a:ext cx="640080" cy="640080"/>
-          </a:xfrm>
-          <a:prstGeom prst="rect">
-            <a:avLst/>
-          </a:prstGeom>
-        </p:spPr>
-      </p:pic>
-      <p:sp>
-        <p:nvSpPr>
-          <p:cNvPr id="21" name="Text 11"/>
-          <p:cNvSpPr txBox="1"/>
-          <p:nvPr/>
-        </p:nvSpPr>
-        <p:spPr>
-          <a:xfrm>
-            <a:off x="6858000" y="2194560"/>
-            <a:ext cx="1737360" cy="320040"/>
-          </a:xfrm>
-          <a:prstGeom prst="rect">
-            <a:avLst/>
-          </a:prstGeom>
-          <a:noFill/>
-          <a:ln/>
-        </p:spPr>
-        <p:txBody>
-          <a:bodyPr wrap="square" lIns="0" tIns="0" rIns="0" bIns="0" rtlCol="0" anchor="ctr"/>
-          <a:lstStyle/>
-          <a:p>
-            <a:pPr algn="ctr" indent="0" marL="0">
-              <a:buNone/>
-            </a:pPr>
-            <a:r>
-              <a:rPr lang="en-US" sz="1600" b="1" dirty="0">
-                <a:solidFill>
-                  <a:srgbClr val="000000"/>
-                </a:solidFill>
-                <a:latin typeface="Arial" pitchFamily="34" charset="0"/>
-                <a:ea typeface="Arial" pitchFamily="34" charset="-122"/>
-                <a:cs typeface="Arial" pitchFamily="34" charset="-120"/>
-              </a:rPr>
-              <a:t>Your GPU</a:t>
-            </a:r>
-            <a:endParaRPr lang="en-US" sz="1600" dirty="0"/>
-          </a:p>
-        </p:txBody>
-      </p:sp>
-      <p:sp>
-        <p:nvSpPr>
-          <p:cNvPr id="22" name="Text 12"/>
-          <p:cNvSpPr txBox="1"/>
-          <p:nvPr/>
-        </p:nvSpPr>
-        <p:spPr>
-          <a:xfrm>
-            <a:off x="6858000" y="2514600"/>
-            <a:ext cx="1737360" cy="274320"/>
-          </a:xfrm>
-          <a:prstGeom prst="rect">
-            <a:avLst/>
-          </a:prstGeom>
-          <a:noFill/>
-          <a:ln/>
-        </p:spPr>
-        <p:txBody>
-          <a:bodyPr wrap="square" lIns="0" tIns="0" rIns="0" bIns="0" rtlCol="0" anchor="ctr"/>
-          <a:lstStyle/>
-          <a:p>
-            <a:pPr algn="ctr" indent="0" marL="0">
-              <a:buNone/>
-            </a:pPr>
-            <a:r>
-              <a:rPr lang="en-US" sz="1100" dirty="0">
-                <a:solidFill>
-                  <a:srgbClr val="595959"/>
-                </a:solidFill>
-                <a:latin typeface="Arial" pitchFamily="34" charset="0"/>
-                <a:ea typeface="Arial" pitchFamily="34" charset="-122"/>
-                <a:cs typeface="Arial" pitchFamily="34" charset="-120"/>
-              </a:rPr>
-              <a:t>used far better</a:t>
-            </a:r>
-            <a:endParaRPr lang="en-US" sz="1100" dirty="0"/>
-          </a:p>
-        </p:txBody>
-      </p:sp>
-      <p:sp>
-        <p:nvSpPr>
-          <p:cNvPr id="23" name="Shape 13"/>
+              <a:t>Finds the best split</a:t>
+            </a:r>
+            <a:endParaRPr lang="en-US" sz="1400" dirty="0"/>
+          </a:p>
+        </p:txBody>
+      </p:sp>
+      <p:sp>
+        <p:nvSpPr>
+          <p:cNvPr id="24" name="Text 21"/>
+          <p:cNvSpPr txBox="1"/>
+          <p:nvPr/>
+        </p:nvSpPr>
+        <p:spPr>
+          <a:xfrm>
+            <a:off x="640080" y="3520440"/>
+            <a:ext cx="2240280" cy="1005840"/>
+          </a:xfrm>
+          <a:prstGeom prst="rect">
+            <a:avLst/>
+          </a:prstGeom>
+          <a:noFill/>
+          <a:ln/>
+        </p:spPr>
+        <p:txBody>
+          <a:bodyPr wrap="square" lIns="0" tIns="0" rIns="0" bIns="0" rtlCol="0" anchor="t"/>
+          <a:lstStyle/>
+          <a:p>
+            <a:pPr indent="0" marL="0">
+              <a:buNone/>
+            </a:pPr>
+            <a:r>
+              <a:rPr lang="en-US" sz="1200" dirty="0">
+                <a:solidFill>
+                  <a:srgbClr val="262626"/>
+                </a:solidFill>
+                <a:latin typeface="Arial" pitchFamily="34" charset="0"/>
+                <a:ea typeface="Arial" pitchFamily="34" charset="-122"/>
+                <a:cs typeface="Arial" pitchFamily="34" charset="-120"/>
+              </a:rPr>
+              <a:t>Decides how much of a model sits on the GPU and how much on the CPU, instead of Ollama's cautious default.</a:t>
+            </a:r>
+            <a:endParaRPr lang="en-US" sz="1200" dirty="0"/>
+          </a:p>
+        </p:txBody>
+      </p:sp>
+      <p:sp>
+        <p:nvSpPr>
+          <p:cNvPr id="25" name="Shape 22"/>
           <p:cNvSpPr/>
           <p:nvPr/>
         </p:nvSpPr>
         <p:spPr>
           <a:xfrm>
-            <a:off x="457200" y="3063240"/>
+            <a:off x="3246120" y="3063240"/>
             <a:ext cx="2606040" cy="1508760"/>
           </a:xfrm>
           <a:prstGeom prst="rect">
@@ -10507,13 +10448,13 @@
       </p:sp>
       <p:sp>
         <p:nvSpPr>
-          <p:cNvPr id="24" name="Text 14"/>
-          <p:cNvSpPr txBox="1"/>
-          <p:nvPr/>
-        </p:nvSpPr>
-        <p:spPr>
-          <a:xfrm>
-            <a:off x="640080" y="3200400"/>
+          <p:cNvPr id="26" name="Text 23"/>
+          <p:cNvSpPr txBox="1"/>
+          <p:nvPr/>
+        </p:nvSpPr>
+        <p:spPr>
+          <a:xfrm>
+            <a:off x="3429000" y="3200400"/>
             <a:ext cx="2240280" cy="274320"/>
           </a:xfrm>
           <a:prstGeom prst="rect">
@@ -10538,7 +10479,7 @@
                 <a:ea typeface="Arial" pitchFamily="34" charset="-122"/>
                 <a:cs typeface="Arial" pitchFamily="34" charset="-120"/>
               </a:rPr>
-              <a:t>Finds the best split</a:t>
+              <a:t>Shares the GPU fairly</a:t>
             </a:r>
             <a:endParaRPr lang="en-US" sz="1400" dirty="0"/>
           </a:p>
@@ -10546,13 +10487,13 @@
       </p:sp>
       <p:sp>
         <p:nvSpPr>
-          <p:cNvPr id="25" name="Text 15"/>
-          <p:cNvSpPr txBox="1"/>
-          <p:nvPr/>
-        </p:nvSpPr>
-        <p:spPr>
-          <a:xfrm>
-            <a:off x="640080" y="3520440"/>
+          <p:cNvPr id="27" name="Text 24"/>
+          <p:cNvSpPr txBox="1"/>
+          <p:nvPr/>
+        </p:nvSpPr>
+        <p:spPr>
+          <a:xfrm>
+            <a:off x="3429000" y="3520440"/>
             <a:ext cx="2240280" cy="1005840"/>
           </a:xfrm>
           <a:prstGeom prst="rect">
@@ -10577,7 +10518,7 @@
                 <a:ea typeface="Arial" pitchFamily="34" charset="-122"/>
                 <a:cs typeface="Arial" pitchFamily="34" charset="-120"/>
               </a:rPr>
-              <a:t>Decides how much of a model sits on the GPU and how much on the CPU, instead of Ollama's cautious default.</a:t>
+              <a:t>When several agents want the GPU at once, Ramer lines them up so models are not constantly swapped out.</a:t>
             </a:r>
             <a:endParaRPr lang="en-US" sz="1200" dirty="0"/>
           </a:p>
@@ -10585,13 +10526,13 @@
       </p:sp>
       <p:sp>
         <p:nvSpPr>
-          <p:cNvPr id="26" name="Shape 16"/>
+          <p:cNvPr id="28" name="Shape 25"/>
           <p:cNvSpPr/>
           <p:nvPr/>
         </p:nvSpPr>
         <p:spPr>
           <a:xfrm>
-            <a:off x="3246120" y="3063240"/>
+            <a:off x="6035040" y="3063240"/>
             <a:ext cx="2606040" cy="1508760"/>
           </a:xfrm>
           <a:prstGeom prst="rect">
@@ -10610,110 +10551,7 @@
       </p:sp>
       <p:sp>
         <p:nvSpPr>
-          <p:cNvPr id="27" name="Text 17"/>
-          <p:cNvSpPr txBox="1"/>
-          <p:nvPr/>
-        </p:nvSpPr>
-        <p:spPr>
-          <a:xfrm>
-            <a:off x="3429000" y="3200400"/>
-            <a:ext cx="2240280" cy="274320"/>
-          </a:xfrm>
-          <a:prstGeom prst="rect">
-            <a:avLst/>
-          </a:prstGeom>
-          <a:noFill/>
-          <a:ln/>
-        </p:spPr>
-        <p:txBody>
-          <a:bodyPr wrap="square" lIns="0" tIns="0" rIns="0" bIns="0" rtlCol="0" anchor="ctr"/>
-          <a:lstStyle/>
-          <a:p>
-            <a:pPr indent="0" marL="0">
-              <a:buNone/>
-            </a:pPr>
-            <a:r>
-              <a:rPr lang="en-US" sz="1400" b="1" dirty="0">
-                <a:solidFill>
-                  <a:srgbClr val="000000"/>
-                </a:solidFill>
-                <a:latin typeface="Arial" pitchFamily="34" charset="0"/>
-                <a:ea typeface="Arial" pitchFamily="34" charset="-122"/>
-                <a:cs typeface="Arial" pitchFamily="34" charset="-120"/>
-              </a:rPr>
-              <a:t>Shares the GPU fairly</a:t>
-            </a:r>
-            <a:endParaRPr lang="en-US" sz="1400" dirty="0"/>
-          </a:p>
-        </p:txBody>
-      </p:sp>
-      <p:sp>
-        <p:nvSpPr>
-          <p:cNvPr id="28" name="Text 18"/>
-          <p:cNvSpPr txBox="1"/>
-          <p:nvPr/>
-        </p:nvSpPr>
-        <p:spPr>
-          <a:xfrm>
-            <a:off x="3429000" y="3520440"/>
-            <a:ext cx="2240280" cy="1005840"/>
-          </a:xfrm>
-          <a:prstGeom prst="rect">
-            <a:avLst/>
-          </a:prstGeom>
-          <a:noFill/>
-          <a:ln/>
-        </p:spPr>
-        <p:txBody>
-          <a:bodyPr wrap="square" lIns="0" tIns="0" rIns="0" bIns="0" rtlCol="0" anchor="t"/>
-          <a:lstStyle/>
-          <a:p>
-            <a:pPr indent="0" marL="0">
-              <a:buNone/>
-            </a:pPr>
-            <a:r>
-              <a:rPr lang="en-US" sz="1200" dirty="0">
-                <a:solidFill>
-                  <a:srgbClr val="262626"/>
-                </a:solidFill>
-                <a:latin typeface="Arial" pitchFamily="34" charset="0"/>
-                <a:ea typeface="Arial" pitchFamily="34" charset="-122"/>
-                <a:cs typeface="Arial" pitchFamily="34" charset="-120"/>
-              </a:rPr>
-              <a:t>When several agents want the GPU at once, Ramer lines them up so models are not constantly swapped out.</a:t>
-            </a:r>
-            <a:endParaRPr lang="en-US" sz="1200" dirty="0"/>
-          </a:p>
-        </p:txBody>
-      </p:sp>
-      <p:sp>
-        <p:nvSpPr>
-          <p:cNvPr id="29" name="Shape 19"/>
-          <p:cNvSpPr/>
-          <p:nvPr/>
-        </p:nvSpPr>
-        <p:spPr>
-          <a:xfrm>
-            <a:off x="6035040" y="3063240"/>
-            <a:ext cx="2606040" cy="1508760"/>
-          </a:xfrm>
-          <a:prstGeom prst="rect">
-            <a:avLst/>
-          </a:prstGeom>
-          <a:solidFill>
-            <a:srgbClr val="F2F2F2"/>
-          </a:solidFill>
-          <a:ln w="12700">
-            <a:solidFill>
-              <a:srgbClr val="F2F2F2"/>
-            </a:solidFill>
-            <a:prstDash val="solid"/>
-          </a:ln>
-        </p:spPr>
-      </p:sp>
-      <p:sp>
-        <p:nvSpPr>
-          <p:cNvPr id="30" name="Text 20"/>
+          <p:cNvPr id="29" name="Text 26"/>
           <p:cNvSpPr txBox="1"/>
           <p:nvPr/>
         </p:nvSpPr>
@@ -10752,7 +10590,7 @@
       </p:sp>
       <p:sp>
         <p:nvSpPr>
-          <p:cNvPr id="31" name="Text 21"/>
+          <p:cNvPr id="30" name="Text 27"/>
           <p:cNvSpPr txBox="1"/>
           <p:nvPr/>
         </p:nvSpPr>
@@ -11002,39 +10840,15 @@
           </a:ln>
         </p:spPr>
       </p:sp>
-      <p:pic>
-        <p:nvPicPr>
-          <p:cNvPr id="8" name="Image 0" descr="preencoded.png">    </p:cNvPr>
-          <p:cNvPicPr>
-            <a:picLocks noChangeAspect="1"/>
-          </p:cNvPicPr>
-          <p:nvPr/>
-        </p:nvPicPr>
-        <p:blipFill>
-          <a:blip r:embed="rId1"/>
-          <a:stretch>
-            <a:fillRect/>
-          </a:stretch>
-        </p:blipFill>
-        <p:spPr>
-          <a:xfrm>
-            <a:off x="731520" y="1527048"/>
-            <a:ext cx="329184" cy="329184"/>
-          </a:xfrm>
-          <a:prstGeom prst="rect">
-            <a:avLst/>
-          </a:prstGeom>
-        </p:spPr>
-      </p:pic>
-      <p:sp>
-        <p:nvSpPr>
-          <p:cNvPr id="9" name="Text 5"/>
-          <p:cNvSpPr txBox="1"/>
-          <p:nvPr/>
-        </p:nvSpPr>
-        <p:spPr>
-          <a:xfrm>
-            <a:off x="1463040" y="1417320"/>
+      <p:sp>
+        <p:nvSpPr>
+          <p:cNvPr id="8" name="Text 5"/>
+          <p:cNvSpPr txBox="1"/>
+          <p:nvPr/>
+        </p:nvSpPr>
+        <p:spPr>
+          <a:xfrm>
+            <a:off x="731520" y="1417320"/>
             <a:ext cx="2834640" cy="548640"/>
           </a:xfrm>
           <a:prstGeom prst="rect">
@@ -11067,7 +10881,7 @@
       </p:sp>
       <p:sp>
         <p:nvSpPr>
-          <p:cNvPr id="10" name="Text 6"/>
+          <p:cNvPr id="9" name="Text 6"/>
           <p:cNvSpPr txBox="1"/>
           <p:nvPr/>
         </p:nvSpPr>
@@ -11152,7 +10966,7 @@
       </p:sp>
       <p:sp>
         <p:nvSpPr>
-          <p:cNvPr id="11" name="Shape 7"/>
+          <p:cNvPr id="10" name="Shape 7"/>
           <p:cNvSpPr/>
           <p:nvPr/>
         </p:nvSpPr>
@@ -11175,39 +10989,15 @@
           </a:ln>
         </p:spPr>
       </p:sp>
-      <p:pic>
-        <p:nvPicPr>
-          <p:cNvPr id="12" name="Image 1" descr="preencoded.png">    </p:cNvPr>
-          <p:cNvPicPr>
-            <a:picLocks noChangeAspect="1"/>
-          </p:cNvPicPr>
-          <p:nvPr/>
-        </p:nvPicPr>
-        <p:blipFill>
-          <a:blip r:embed="rId2"/>
-          <a:stretch>
-            <a:fillRect/>
-          </a:stretch>
-        </p:blipFill>
-        <p:spPr>
-          <a:xfrm>
-            <a:off x="4937760" y="1527048"/>
-            <a:ext cx="329184" cy="329184"/>
-          </a:xfrm>
-          <a:prstGeom prst="rect">
-            <a:avLst/>
-          </a:prstGeom>
-        </p:spPr>
-      </p:pic>
-      <p:sp>
-        <p:nvSpPr>
-          <p:cNvPr id="13" name="Text 8"/>
-          <p:cNvSpPr txBox="1"/>
-          <p:nvPr/>
-        </p:nvSpPr>
-        <p:spPr>
-          <a:xfrm>
-            <a:off x="5669280" y="1417320"/>
+      <p:sp>
+        <p:nvSpPr>
+          <p:cNvPr id="11" name="Text 8"/>
+          <p:cNvSpPr txBox="1"/>
+          <p:nvPr/>
+        </p:nvSpPr>
+        <p:spPr>
+          <a:xfrm>
+            <a:off x="4937760" y="1417320"/>
             <a:ext cx="2834640" cy="548640"/>
           </a:xfrm>
           <a:prstGeom prst="rect">
@@ -11240,7 +11030,7 @@
       </p:sp>
       <p:sp>
         <p:nvSpPr>
-          <p:cNvPr id="14" name="Text 9"/>
+          <p:cNvPr id="12" name="Text 9"/>
           <p:cNvSpPr txBox="1"/>
           <p:nvPr/>
         </p:nvSpPr>
@@ -11589,33 +11379,9 @@
           </a:p>
         </p:txBody>
       </p:sp>
-      <p:pic>
-        <p:nvPicPr>
-          <p:cNvPr id="9" name="Image 0" descr="preencoded.png">    </p:cNvPr>
-          <p:cNvPicPr>
-            <a:picLocks noChangeAspect="1"/>
-          </p:cNvPicPr>
-          <p:nvPr/>
-        </p:nvPicPr>
-        <p:blipFill>
-          <a:blip r:embed="rId1"/>
-          <a:stretch>
-            <a:fillRect/>
-          </a:stretch>
-        </p:blipFill>
-        <p:spPr>
-          <a:xfrm>
-            <a:off x="3246120" y="1298448"/>
-            <a:ext cx="292608" cy="292608"/>
-          </a:xfrm>
-          <a:prstGeom prst="rect">
-            <a:avLst/>
-          </a:prstGeom>
-        </p:spPr>
-      </p:pic>
-      <p:sp>
-        <p:nvSpPr>
-          <p:cNvPr id="10" name="Text 6"/>
+      <p:sp>
+        <p:nvSpPr>
+          <p:cNvPr id="9" name="Text 6"/>
           <p:cNvSpPr txBox="1"/>
           <p:nvPr/>
         </p:nvSpPr>
@@ -11654,7 +11420,7 @@
       </p:sp>
       <p:sp>
         <p:nvSpPr>
-          <p:cNvPr id="11" name="Text 7"/>
+          <p:cNvPr id="10" name="Text 7"/>
           <p:cNvSpPr txBox="1"/>
           <p:nvPr/>
         </p:nvSpPr>
@@ -11691,33 +11457,9 @@
           </a:p>
         </p:txBody>
       </p:sp>
-      <p:pic>
-        <p:nvPicPr>
-          <p:cNvPr id="12" name="Image 1" descr="preencoded.png">    </p:cNvPr>
-          <p:cNvPicPr>
-            <a:picLocks noChangeAspect="1"/>
-          </p:cNvPicPr>
-          <p:nvPr/>
-        </p:nvPicPr>
-        <p:blipFill>
-          <a:blip r:embed="rId2"/>
-          <a:stretch>
-            <a:fillRect/>
-          </a:stretch>
-        </p:blipFill>
-        <p:spPr>
-          <a:xfrm>
-            <a:off x="3246120" y="1847088"/>
-            <a:ext cx="292608" cy="292608"/>
-          </a:xfrm>
-          <a:prstGeom prst="rect">
-            <a:avLst/>
-          </a:prstGeom>
-        </p:spPr>
-      </p:pic>
-      <p:sp>
-        <p:nvSpPr>
-          <p:cNvPr id="13" name="Text 8"/>
+      <p:sp>
+        <p:nvSpPr>
+          <p:cNvPr id="11" name="Text 8"/>
           <p:cNvSpPr txBox="1"/>
           <p:nvPr/>
         </p:nvSpPr>
@@ -11756,7 +11498,7 @@
       </p:sp>
       <p:sp>
         <p:nvSpPr>
-          <p:cNvPr id="14" name="Text 9"/>
+          <p:cNvPr id="12" name="Text 9"/>
           <p:cNvSpPr txBox="1"/>
           <p:nvPr/>
         </p:nvSpPr>
@@ -11793,33 +11535,9 @@
           </a:p>
         </p:txBody>
       </p:sp>
-      <p:pic>
-        <p:nvPicPr>
-          <p:cNvPr id="15" name="Image 2" descr="preencoded.png">    </p:cNvPr>
-          <p:cNvPicPr>
-            <a:picLocks noChangeAspect="1"/>
-          </p:cNvPicPr>
-          <p:nvPr/>
-        </p:nvPicPr>
-        <p:blipFill>
-          <a:blip r:embed="rId3"/>
-          <a:stretch>
-            <a:fillRect/>
-          </a:stretch>
-        </p:blipFill>
-        <p:spPr>
-          <a:xfrm>
-            <a:off x="3246120" y="2395728"/>
-            <a:ext cx="292608" cy="292608"/>
-          </a:xfrm>
-          <a:prstGeom prst="rect">
-            <a:avLst/>
-          </a:prstGeom>
-        </p:spPr>
-      </p:pic>
-      <p:sp>
-        <p:nvSpPr>
-          <p:cNvPr id="16" name="Text 10"/>
+      <p:sp>
+        <p:nvSpPr>
+          <p:cNvPr id="13" name="Text 10"/>
           <p:cNvSpPr txBox="1"/>
           <p:nvPr/>
         </p:nvSpPr>
@@ -11858,7 +11576,7 @@
       </p:sp>
       <p:sp>
         <p:nvSpPr>
-          <p:cNvPr id="17" name="Text 11"/>
+          <p:cNvPr id="14" name="Text 11"/>
           <p:cNvSpPr txBox="1"/>
           <p:nvPr/>
         </p:nvSpPr>
@@ -11895,33 +11613,9 @@
           </a:p>
         </p:txBody>
       </p:sp>
-      <p:pic>
-        <p:nvPicPr>
-          <p:cNvPr id="18" name="Image 3" descr="preencoded.png">    </p:cNvPr>
-          <p:cNvPicPr>
-            <a:picLocks noChangeAspect="1"/>
-          </p:cNvPicPr>
-          <p:nvPr/>
-        </p:nvPicPr>
-        <p:blipFill>
-          <a:blip r:embed="rId4"/>
-          <a:stretch>
-            <a:fillRect/>
-          </a:stretch>
-        </p:blipFill>
-        <p:spPr>
-          <a:xfrm>
-            <a:off x="3246120" y="2944368"/>
-            <a:ext cx="292608" cy="292608"/>
-          </a:xfrm>
-          <a:prstGeom prst="rect">
-            <a:avLst/>
-          </a:prstGeom>
-        </p:spPr>
-      </p:pic>
-      <p:sp>
-        <p:nvSpPr>
-          <p:cNvPr id="19" name="Text 12"/>
+      <p:sp>
+        <p:nvSpPr>
+          <p:cNvPr id="15" name="Text 12"/>
           <p:cNvSpPr txBox="1"/>
           <p:nvPr/>
         </p:nvSpPr>
@@ -11960,7 +11654,7 @@
       </p:sp>
       <p:sp>
         <p:nvSpPr>
-          <p:cNvPr id="20" name="Text 13"/>
+          <p:cNvPr id="16" name="Text 13"/>
           <p:cNvSpPr txBox="1"/>
           <p:nvPr/>
         </p:nvSpPr>
@@ -11997,57 +11691,9 @@
           </a:p>
         </p:txBody>
       </p:sp>
-      <p:pic>
-        <p:nvPicPr>
-          <p:cNvPr id="21" name="Image 4" descr="preencoded.png">    </p:cNvPr>
-          <p:cNvPicPr>
-            <a:picLocks noChangeAspect="1"/>
-          </p:cNvPicPr>
-          <p:nvPr/>
-        </p:nvPicPr>
-        <p:blipFill>
-          <a:blip r:embed="rId5"/>
-          <a:stretch>
-            <a:fillRect/>
-          </a:stretch>
-        </p:blipFill>
-        <p:spPr>
-          <a:xfrm>
-            <a:off x="3246120" y="3493008"/>
-            <a:ext cx="292608" cy="292608"/>
-          </a:xfrm>
-          <a:prstGeom prst="rect">
-            <a:avLst/>
-          </a:prstGeom>
-        </p:spPr>
-      </p:pic>
-      <p:pic>
-        <p:nvPicPr>
-          <p:cNvPr id="22" name="Image 5" descr="preencoded.png">    </p:cNvPr>
-          <p:cNvPicPr>
-            <a:picLocks noChangeAspect="1"/>
-          </p:cNvPicPr>
-          <p:nvPr/>
-        </p:nvPicPr>
-        <p:blipFill>
-          <a:blip r:embed="rId6"/>
-          <a:stretch>
-            <a:fillRect/>
-          </a:stretch>
-        </p:blipFill>
-        <p:spPr>
-          <a:xfrm>
-            <a:off x="457200" y="4069080"/>
-            <a:ext cx="320040" cy="320040"/>
-          </a:xfrm>
-          <a:prstGeom prst="rect">
-            <a:avLst/>
-          </a:prstGeom>
-        </p:spPr>
-      </p:pic>
-      <p:sp>
-        <p:nvSpPr>
-          <p:cNvPr id="23" name="Text 14"/>
+      <p:sp>
+        <p:nvSpPr>
+          <p:cNvPr id="17" name="Text 14"/>
           <p:cNvSpPr txBox="1"/>
           <p:nvPr/>
         </p:nvSpPr>
@@ -12086,7 +11732,7 @@
       </p:sp>
       <p:sp>
         <p:nvSpPr>
-          <p:cNvPr id="24" name="Text 15"/>
+          <p:cNvPr id="18" name="Text 15"/>
           <p:cNvSpPr txBox="1"/>
           <p:nvPr/>
         </p:nvSpPr>
@@ -12125,7 +11771,7 @@
       </p:sp>
       <p:sp>
         <p:nvSpPr>
-          <p:cNvPr id="25" name="Text 16"/>
+          <p:cNvPr id="19" name="Text 16"/>
           <p:cNvSpPr txBox="1"/>
           <p:nvPr/>
         </p:nvSpPr>
@@ -12566,40 +12212,16 @@
           </a:p>
         </p:txBody>
       </p:sp>
-      <p:pic>
-        <p:nvPicPr>
-          <p:cNvPr id="7" name="Image 0" descr="preencoded.png">    </p:cNvPr>
-          <p:cNvPicPr>
-            <a:picLocks noChangeAspect="1"/>
-          </p:cNvPicPr>
-          <p:nvPr/>
-        </p:nvPicPr>
-        <p:blipFill>
-          <a:blip r:embed="rId1"/>
-          <a:stretch>
-            <a:fillRect/>
-          </a:stretch>
-        </p:blipFill>
-        <p:spPr>
-          <a:xfrm>
-            <a:off x="758952" y="1353312"/>
-            <a:ext cx="493776" cy="493776"/>
-          </a:xfrm>
-          <a:prstGeom prst="rect">
-            <a:avLst/>
-          </a:prstGeom>
-        </p:spPr>
-      </p:pic>
-      <p:sp>
-        <p:nvSpPr>
-          <p:cNvPr id="8" name="Text 4"/>
-          <p:cNvSpPr txBox="1"/>
-          <p:nvPr/>
-        </p:nvSpPr>
-        <p:spPr>
-          <a:xfrm>
-            <a:off x="182880" y="2148840"/>
-            <a:ext cx="1645920" cy="228600"/>
+      <p:sp>
+        <p:nvSpPr>
+          <p:cNvPr id="7" name="Text 4"/>
+          <p:cNvSpPr txBox="1"/>
+          <p:nvPr/>
+        </p:nvSpPr>
+        <p:spPr>
+          <a:xfrm>
+            <a:off x="182880" y="1280160"/>
+            <a:ext cx="1645920" cy="731520"/>
           </a:xfrm>
           <a:prstGeom prst="rect">
             <a:avLst/>
@@ -12615,9 +12237,9 @@
               <a:buNone/>
             </a:pPr>
             <a:r>
-              <a:rPr lang="en-US" sz="1100" b="1" dirty="0">
-                <a:solidFill>
-                  <a:srgbClr val="8C8C8C"/>
+              <a:rPr lang="en-US" sz="4400" b="1" dirty="0">
+                <a:solidFill>
+                  <a:srgbClr val="000000"/>
                 </a:solidFill>
                 <a:latin typeface="Arial" pitchFamily="34" charset="0"/>
                 <a:ea typeface="Arial" pitchFamily="34" charset="-122"/>
@@ -12625,13 +12247,13 @@
               </a:rPr>
               <a:t>01</a:t>
             </a:r>
-            <a:endParaRPr lang="en-US" sz="1100" dirty="0"/>
-          </a:p>
-        </p:txBody>
-      </p:sp>
-      <p:sp>
-        <p:nvSpPr>
-          <p:cNvPr id="9" name="Text 5"/>
+            <a:endParaRPr lang="en-US" sz="4400" dirty="0"/>
+          </a:p>
+        </p:txBody>
+      </p:sp>
+      <p:sp>
+        <p:nvSpPr>
+          <p:cNvPr id="8" name="Text 5"/>
           <p:cNvSpPr txBox="1"/>
           <p:nvPr/>
         </p:nvSpPr>
@@ -12670,7 +12292,7 @@
       </p:sp>
       <p:sp>
         <p:nvSpPr>
-          <p:cNvPr id="10" name="Text 6"/>
+          <p:cNvPr id="9" name="Text 6"/>
           <p:cNvSpPr txBox="1"/>
           <p:nvPr/>
         </p:nvSpPr>
@@ -12707,40 +12329,16 @@
           </a:p>
         </p:txBody>
       </p:sp>
-      <p:pic>
-        <p:nvPicPr>
-          <p:cNvPr id="11" name="Image 1" descr="preencoded.png">    </p:cNvPr>
-          <p:cNvPicPr>
-            <a:picLocks noChangeAspect="1"/>
-          </p:cNvPicPr>
-          <p:nvPr/>
-        </p:nvPicPr>
-        <p:blipFill>
-          <a:blip r:embed="rId2"/>
-          <a:stretch>
-            <a:fillRect/>
-          </a:stretch>
-        </p:blipFill>
-        <p:spPr>
-          <a:xfrm>
-            <a:off x="2542032" y="1353312"/>
-            <a:ext cx="493776" cy="493776"/>
-          </a:xfrm>
-          <a:prstGeom prst="rect">
-            <a:avLst/>
-          </a:prstGeom>
-        </p:spPr>
-      </p:pic>
-      <p:sp>
-        <p:nvSpPr>
-          <p:cNvPr id="12" name="Text 7"/>
-          <p:cNvSpPr txBox="1"/>
-          <p:nvPr/>
-        </p:nvSpPr>
-        <p:spPr>
-          <a:xfrm>
-            <a:off x="1965960" y="2148840"/>
-            <a:ext cx="1645920" cy="228600"/>
+      <p:sp>
+        <p:nvSpPr>
+          <p:cNvPr id="10" name="Text 7"/>
+          <p:cNvSpPr txBox="1"/>
+          <p:nvPr/>
+        </p:nvSpPr>
+        <p:spPr>
+          <a:xfrm>
+            <a:off x="1965960" y="1280160"/>
+            <a:ext cx="1645920" cy="731520"/>
           </a:xfrm>
           <a:prstGeom prst="rect">
             <a:avLst/>
@@ -12756,9 +12354,9 @@
               <a:buNone/>
             </a:pPr>
             <a:r>
-              <a:rPr lang="en-US" sz="1100" b="1" dirty="0">
-                <a:solidFill>
-                  <a:srgbClr val="8C8C8C"/>
+              <a:rPr lang="en-US" sz="4400" b="1" dirty="0">
+                <a:solidFill>
+                  <a:srgbClr val="000000"/>
                 </a:solidFill>
                 <a:latin typeface="Arial" pitchFamily="34" charset="0"/>
                 <a:ea typeface="Arial" pitchFamily="34" charset="-122"/>
@@ -12766,13 +12364,13 @@
               </a:rPr>
               <a:t>02</a:t>
             </a:r>
-            <a:endParaRPr lang="en-US" sz="1100" dirty="0"/>
-          </a:p>
-        </p:txBody>
-      </p:sp>
-      <p:sp>
-        <p:nvSpPr>
-          <p:cNvPr id="13" name="Text 8"/>
+            <a:endParaRPr lang="en-US" sz="4400" dirty="0"/>
+          </a:p>
+        </p:txBody>
+      </p:sp>
+      <p:sp>
+        <p:nvSpPr>
+          <p:cNvPr id="11" name="Text 8"/>
           <p:cNvSpPr txBox="1"/>
           <p:nvPr/>
         </p:nvSpPr>
@@ -12811,7 +12409,7 @@
       </p:sp>
       <p:sp>
         <p:nvSpPr>
-          <p:cNvPr id="14" name="Text 9"/>
+          <p:cNvPr id="12" name="Text 9"/>
           <p:cNvSpPr txBox="1"/>
           <p:nvPr/>
         </p:nvSpPr>
@@ -12848,40 +12446,16 @@
           </a:p>
         </p:txBody>
       </p:sp>
-      <p:pic>
-        <p:nvPicPr>
-          <p:cNvPr id="15" name="Image 2" descr="preencoded.png">    </p:cNvPr>
-          <p:cNvPicPr>
-            <a:picLocks noChangeAspect="1"/>
-          </p:cNvPicPr>
-          <p:nvPr/>
-        </p:nvPicPr>
-        <p:blipFill>
-          <a:blip r:embed="rId3"/>
-          <a:stretch>
-            <a:fillRect/>
-          </a:stretch>
-        </p:blipFill>
-        <p:spPr>
-          <a:xfrm>
-            <a:off x="4325112" y="1353312"/>
-            <a:ext cx="493776" cy="493776"/>
-          </a:xfrm>
-          <a:prstGeom prst="rect">
-            <a:avLst/>
-          </a:prstGeom>
-        </p:spPr>
-      </p:pic>
-      <p:sp>
-        <p:nvSpPr>
-          <p:cNvPr id="16" name="Text 10"/>
-          <p:cNvSpPr txBox="1"/>
-          <p:nvPr/>
-        </p:nvSpPr>
-        <p:spPr>
-          <a:xfrm>
-            <a:off x="3749040" y="2148840"/>
-            <a:ext cx="1645920" cy="228600"/>
+      <p:sp>
+        <p:nvSpPr>
+          <p:cNvPr id="13" name="Text 10"/>
+          <p:cNvSpPr txBox="1"/>
+          <p:nvPr/>
+        </p:nvSpPr>
+        <p:spPr>
+          <a:xfrm>
+            <a:off x="3749040" y="1280160"/>
+            <a:ext cx="1645920" cy="731520"/>
           </a:xfrm>
           <a:prstGeom prst="rect">
             <a:avLst/>
@@ -12897,9 +12471,9 @@
               <a:buNone/>
             </a:pPr>
             <a:r>
-              <a:rPr lang="en-US" sz="1100" b="1" dirty="0">
-                <a:solidFill>
-                  <a:srgbClr val="8C8C8C"/>
+              <a:rPr lang="en-US" sz="4400" b="1" dirty="0">
+                <a:solidFill>
+                  <a:srgbClr val="000000"/>
                 </a:solidFill>
                 <a:latin typeface="Arial" pitchFamily="34" charset="0"/>
                 <a:ea typeface="Arial" pitchFamily="34" charset="-122"/>
@@ -12907,13 +12481,13 @@
               </a:rPr>
               <a:t>03</a:t>
             </a:r>
-            <a:endParaRPr lang="en-US" sz="1100" dirty="0"/>
-          </a:p>
-        </p:txBody>
-      </p:sp>
-      <p:sp>
-        <p:nvSpPr>
-          <p:cNvPr id="17" name="Text 11"/>
+            <a:endParaRPr lang="en-US" sz="4400" dirty="0"/>
+          </a:p>
+        </p:txBody>
+      </p:sp>
+      <p:sp>
+        <p:nvSpPr>
+          <p:cNvPr id="14" name="Text 11"/>
           <p:cNvSpPr txBox="1"/>
           <p:nvPr/>
         </p:nvSpPr>
@@ -12952,7 +12526,7 @@
       </p:sp>
       <p:sp>
         <p:nvSpPr>
-          <p:cNvPr id="18" name="Text 12"/>
+          <p:cNvPr id="15" name="Text 12"/>
           <p:cNvSpPr txBox="1"/>
           <p:nvPr/>
         </p:nvSpPr>
@@ -12989,40 +12563,16 @@
           </a:p>
         </p:txBody>
       </p:sp>
-      <p:pic>
-        <p:nvPicPr>
-          <p:cNvPr id="19" name="Image 3" descr="preencoded.png">    </p:cNvPr>
-          <p:cNvPicPr>
-            <a:picLocks noChangeAspect="1"/>
-          </p:cNvPicPr>
-          <p:nvPr/>
-        </p:nvPicPr>
-        <p:blipFill>
-          <a:blip r:embed="rId4"/>
-          <a:stretch>
-            <a:fillRect/>
-          </a:stretch>
-        </p:blipFill>
-        <p:spPr>
-          <a:xfrm>
-            <a:off x="6108192" y="1353312"/>
-            <a:ext cx="493776" cy="493776"/>
-          </a:xfrm>
-          <a:prstGeom prst="rect">
-            <a:avLst/>
-          </a:prstGeom>
-        </p:spPr>
-      </p:pic>
-      <p:sp>
-        <p:nvSpPr>
-          <p:cNvPr id="20" name="Text 13"/>
-          <p:cNvSpPr txBox="1"/>
-          <p:nvPr/>
-        </p:nvSpPr>
-        <p:spPr>
-          <a:xfrm>
-            <a:off x="5532120" y="2148840"/>
-            <a:ext cx="1645920" cy="228600"/>
+      <p:sp>
+        <p:nvSpPr>
+          <p:cNvPr id="16" name="Text 13"/>
+          <p:cNvSpPr txBox="1"/>
+          <p:nvPr/>
+        </p:nvSpPr>
+        <p:spPr>
+          <a:xfrm>
+            <a:off x="5532120" y="1280160"/>
+            <a:ext cx="1645920" cy="731520"/>
           </a:xfrm>
           <a:prstGeom prst="rect">
             <a:avLst/>
@@ -13038,9 +12588,9 @@
               <a:buNone/>
             </a:pPr>
             <a:r>
-              <a:rPr lang="en-US" sz="1100" b="1" dirty="0">
-                <a:solidFill>
-                  <a:srgbClr val="8C8C8C"/>
+              <a:rPr lang="en-US" sz="4400" b="1" dirty="0">
+                <a:solidFill>
+                  <a:srgbClr val="000000"/>
                 </a:solidFill>
                 <a:latin typeface="Arial" pitchFamily="34" charset="0"/>
                 <a:ea typeface="Arial" pitchFamily="34" charset="-122"/>
@@ -13048,13 +12598,13 @@
               </a:rPr>
               <a:t>04</a:t>
             </a:r>
-            <a:endParaRPr lang="en-US" sz="1100" dirty="0"/>
-          </a:p>
-        </p:txBody>
-      </p:sp>
-      <p:sp>
-        <p:nvSpPr>
-          <p:cNvPr id="21" name="Text 14"/>
+            <a:endParaRPr lang="en-US" sz="4400" dirty="0"/>
+          </a:p>
+        </p:txBody>
+      </p:sp>
+      <p:sp>
+        <p:nvSpPr>
+          <p:cNvPr id="17" name="Text 14"/>
           <p:cNvSpPr txBox="1"/>
           <p:nvPr/>
         </p:nvSpPr>
@@ -13093,7 +12643,7 @@
       </p:sp>
       <p:sp>
         <p:nvSpPr>
-          <p:cNvPr id="22" name="Text 15"/>
+          <p:cNvPr id="18" name="Text 15"/>
           <p:cNvSpPr txBox="1"/>
           <p:nvPr/>
         </p:nvSpPr>
@@ -13130,40 +12680,16 @@
           </a:p>
         </p:txBody>
       </p:sp>
-      <p:pic>
-        <p:nvPicPr>
-          <p:cNvPr id="23" name="Image 4" descr="preencoded.png">    </p:cNvPr>
-          <p:cNvPicPr>
-            <a:picLocks noChangeAspect="1"/>
-          </p:cNvPicPr>
-          <p:nvPr/>
-        </p:nvPicPr>
-        <p:blipFill>
-          <a:blip r:embed="rId5"/>
-          <a:stretch>
-            <a:fillRect/>
-          </a:stretch>
-        </p:blipFill>
-        <p:spPr>
-          <a:xfrm>
-            <a:off x="7891272" y="1353312"/>
-            <a:ext cx="493776" cy="493776"/>
-          </a:xfrm>
-          <a:prstGeom prst="rect">
-            <a:avLst/>
-          </a:prstGeom>
-        </p:spPr>
-      </p:pic>
-      <p:sp>
-        <p:nvSpPr>
-          <p:cNvPr id="24" name="Text 16"/>
-          <p:cNvSpPr txBox="1"/>
-          <p:nvPr/>
-        </p:nvSpPr>
-        <p:spPr>
-          <a:xfrm>
-            <a:off x="7315200" y="2148840"/>
-            <a:ext cx="1645920" cy="228600"/>
+      <p:sp>
+        <p:nvSpPr>
+          <p:cNvPr id="19" name="Text 16"/>
+          <p:cNvSpPr txBox="1"/>
+          <p:nvPr/>
+        </p:nvSpPr>
+        <p:spPr>
+          <a:xfrm>
+            <a:off x="7315200" y="1280160"/>
+            <a:ext cx="1645920" cy="731520"/>
           </a:xfrm>
           <a:prstGeom prst="rect">
             <a:avLst/>
@@ -13179,9 +12705,9 @@
               <a:buNone/>
             </a:pPr>
             <a:r>
-              <a:rPr lang="en-US" sz="1100" b="1" dirty="0">
-                <a:solidFill>
-                  <a:srgbClr val="8C8C8C"/>
+              <a:rPr lang="en-US" sz="4400" b="1" dirty="0">
+                <a:solidFill>
+                  <a:srgbClr val="000000"/>
                 </a:solidFill>
                 <a:latin typeface="Arial" pitchFamily="34" charset="0"/>
                 <a:ea typeface="Arial" pitchFamily="34" charset="-122"/>
@@ -13189,13 +12715,13 @@
               </a:rPr>
               <a:t>05</a:t>
             </a:r>
-            <a:endParaRPr lang="en-US" sz="1100" dirty="0"/>
-          </a:p>
-        </p:txBody>
-      </p:sp>
-      <p:sp>
-        <p:nvSpPr>
-          <p:cNvPr id="25" name="Text 17"/>
+            <a:endParaRPr lang="en-US" sz="4400" dirty="0"/>
+          </a:p>
+        </p:txBody>
+      </p:sp>
+      <p:sp>
+        <p:nvSpPr>
+          <p:cNvPr id="20" name="Text 17"/>
           <p:cNvSpPr txBox="1"/>
           <p:nvPr/>
         </p:nvSpPr>
@@ -13234,7 +12760,7 @@
       </p:sp>
       <p:sp>
         <p:nvSpPr>
-          <p:cNvPr id="26" name="Text 18"/>
+          <p:cNvPr id="21" name="Text 18"/>
           <p:cNvSpPr txBox="1"/>
           <p:nvPr/>
         </p:nvSpPr>
@@ -13273,7 +12799,7 @@
       </p:sp>
       <p:sp>
         <p:nvSpPr>
-          <p:cNvPr id="27" name="Shape 19"/>
+          <p:cNvPr id="22" name="Shape 19"/>
           <p:cNvSpPr/>
           <p:nvPr/>
         </p:nvSpPr>
@@ -13298,7 +12824,7 @@
       </p:sp>
       <p:sp>
         <p:nvSpPr>
-          <p:cNvPr id="28" name="Text 20"/>
+          <p:cNvPr id="23" name="Text 20"/>
           <p:cNvSpPr txBox="1"/>
           <p:nvPr/>
         </p:nvSpPr>
@@ -13445,56 +12971,32 @@
           </a:p>
         </p:txBody>
       </p:sp>
-      <p:pic>
-        <p:nvPicPr>
-          <p:cNvPr id="5" name="Image 0" descr="preencoded.png">    </p:cNvPr>
-          <p:cNvPicPr>
-            <a:picLocks noChangeAspect="1"/>
-          </p:cNvPicPr>
-          <p:nvPr/>
-        </p:nvPicPr>
-        <p:blipFill>
-          <a:blip r:embed="rId1"/>
-          <a:stretch>
-            <a:fillRect/>
-          </a:stretch>
-        </p:blipFill>
-        <p:spPr>
-          <a:xfrm>
-            <a:off x="548640" y="2880360"/>
-            <a:ext cx="548640" cy="548640"/>
-          </a:xfrm>
-          <a:prstGeom prst="rect">
-            <a:avLst/>
-          </a:prstGeom>
-        </p:spPr>
-      </p:pic>
-      <p:sp>
-        <p:nvSpPr>
-          <p:cNvPr id="6" name="Text 2"/>
-          <p:cNvSpPr txBox="1"/>
-          <p:nvPr/>
-        </p:nvSpPr>
-        <p:spPr>
-          <a:xfrm>
-            <a:off x="1691640" y="2697480"/>
-            <a:ext cx="2377440" cy="914400"/>
-          </a:xfrm>
-          <a:prstGeom prst="rect">
-            <a:avLst/>
-          </a:prstGeom>
-          <a:noFill/>
-          <a:ln/>
-        </p:spPr>
-        <p:txBody>
-          <a:bodyPr wrap="square" lIns="0" tIns="0" rIns="0" bIns="0" rtlCol="0" anchor="ctr"/>
-          <a:lstStyle/>
-          <a:p>
-            <a:pPr indent="0" marL="0">
-              <a:buNone/>
-            </a:pPr>
-            <a:r>
-              <a:rPr lang="en-US" sz="1500" i="1" dirty="0">
+      <p:sp>
+        <p:nvSpPr>
+          <p:cNvPr id="5" name="Text 2"/>
+          <p:cNvSpPr txBox="1"/>
+          <p:nvPr/>
+        </p:nvSpPr>
+        <p:spPr>
+          <a:xfrm>
+            <a:off x="548640" y="2697480"/>
+            <a:ext cx="3474720" cy="914400"/>
+          </a:xfrm>
+          <a:prstGeom prst="rect">
+            <a:avLst/>
+          </a:prstGeom>
+          <a:noFill/>
+          <a:ln/>
+        </p:spPr>
+        <p:txBody>
+          <a:bodyPr wrap="square" lIns="0" tIns="0" rIns="0" bIns="0" rtlCol="0" anchor="t"/>
+          <a:lstStyle/>
+          <a:p>
+            <a:pPr indent="0" marL="0">
+              <a:buNone/>
+            </a:pPr>
+            <a:r>
+              <a:rPr lang="en-US" sz="1800" i="1" dirty="0">
                 <a:solidFill>
                   <a:srgbClr val="BFBFBF"/>
                 </a:solidFill>
@@ -13504,13 +13006,13 @@
               </a:rPr>
               <a:t>Start with people, not technology.</a:t>
             </a:r>
-            <a:endParaRPr lang="en-US" sz="1500" dirty="0"/>
-          </a:p>
-        </p:txBody>
-      </p:sp>
-      <p:sp>
-        <p:nvSpPr>
-          <p:cNvPr id="7" name="Shape 3"/>
+            <a:endParaRPr lang="en-US" sz="1800" dirty="0"/>
+          </a:p>
+        </p:txBody>
+      </p:sp>
+      <p:sp>
+        <p:nvSpPr>
+          <p:cNvPr id="6" name="Shape 3"/>
           <p:cNvSpPr/>
           <p:nvPr/>
         </p:nvSpPr>
@@ -13535,7 +13037,7 @@
       </p:sp>
       <p:sp>
         <p:nvSpPr>
-          <p:cNvPr id="8" name="Text 4"/>
+          <p:cNvPr id="7" name="Text 4"/>
           <p:cNvSpPr txBox="1"/>
           <p:nvPr/>
         </p:nvSpPr>
@@ -13574,7 +13076,7 @@
       </p:sp>
       <p:sp>
         <p:nvSpPr>
-          <p:cNvPr id="9" name="Text 5"/>
+          <p:cNvPr id="8" name="Text 5"/>
           <p:cNvSpPr txBox="1"/>
           <p:nvPr/>
         </p:nvSpPr>
@@ -13613,7 +13115,7 @@
       </p:sp>
       <p:sp>
         <p:nvSpPr>
-          <p:cNvPr id="10" name="Text 6"/>
+          <p:cNvPr id="9" name="Text 6"/>
           <p:cNvSpPr txBox="1"/>
           <p:nvPr/>
         </p:nvSpPr>
@@ -13652,7 +13154,7 @@
       </p:sp>
       <p:sp>
         <p:nvSpPr>
-          <p:cNvPr id="11" name="Text 7"/>
+          <p:cNvPr id="10" name="Text 7"/>
           <p:cNvSpPr txBox="1"/>
           <p:nvPr/>
         </p:nvSpPr>
@@ -13691,7 +13193,7 @@
       </p:sp>
       <p:sp>
         <p:nvSpPr>
-          <p:cNvPr id="12" name="Text 8"/>
+          <p:cNvPr id="11" name="Text 8"/>
           <p:cNvSpPr txBox="1"/>
           <p:nvPr/>
         </p:nvSpPr>
@@ -13730,7 +13232,7 @@
       </p:sp>
       <p:sp>
         <p:nvSpPr>
-          <p:cNvPr id="13" name="Text 9"/>
+          <p:cNvPr id="12" name="Text 9"/>
           <p:cNvSpPr txBox="1"/>
           <p:nvPr/>
         </p:nvSpPr>
@@ -13980,40 +13482,16 @@
           </a:ln>
         </p:spPr>
       </p:sp>
-      <p:pic>
-        <p:nvPicPr>
-          <p:cNvPr id="8" name="Image 0" descr="preencoded.png">    </p:cNvPr>
-          <p:cNvPicPr>
-            <a:picLocks noChangeAspect="1"/>
-          </p:cNvPicPr>
-          <p:nvPr/>
-        </p:nvPicPr>
-        <p:blipFill>
-          <a:blip r:embed="rId1"/>
-          <a:stretch>
-            <a:fillRect/>
-          </a:stretch>
-        </p:blipFill>
-        <p:spPr>
-          <a:xfrm>
-            <a:off x="685800" y="1371600"/>
-            <a:ext cx="365760" cy="365760"/>
-          </a:xfrm>
-          <a:prstGeom prst="rect">
-            <a:avLst/>
-          </a:prstGeom>
-        </p:spPr>
-      </p:pic>
-      <p:sp>
-        <p:nvSpPr>
-          <p:cNvPr id="9" name="Text 5"/>
-          <p:cNvSpPr txBox="1"/>
-          <p:nvPr/>
-        </p:nvSpPr>
-        <p:spPr>
-          <a:xfrm>
-            <a:off x="685800" y="1874520"/>
-            <a:ext cx="2148840" cy="1051560"/>
+      <p:sp>
+        <p:nvSpPr>
+          <p:cNvPr id="8" name="Text 5"/>
+          <p:cNvSpPr txBox="1"/>
+          <p:nvPr/>
+        </p:nvSpPr>
+        <p:spPr>
+          <a:xfrm>
+            <a:off x="685800" y="1463040"/>
+            <a:ext cx="2148840" cy="1371600"/>
           </a:xfrm>
           <a:prstGeom prst="rect">
             <a:avLst/>
@@ -14029,7 +13507,7 @@
               <a:buNone/>
             </a:pPr>
             <a:r>
-              <a:rPr lang="en-US" sz="1600" b="1" dirty="0">
+              <a:rPr lang="en-US" sz="1800" b="1" dirty="0">
                 <a:solidFill>
                   <a:srgbClr val="000000"/>
                 </a:solidFill>
@@ -14039,13 +13517,13 @@
               </a:rPr>
               <a:t>“Still OOM Memory!”</a:t>
             </a:r>
-            <a:endParaRPr lang="en-US" sz="1600" dirty="0"/>
-          </a:p>
-        </p:txBody>
-      </p:sp>
-      <p:sp>
-        <p:nvSpPr>
-          <p:cNvPr id="10" name="Text 6"/>
+            <a:endParaRPr lang="en-US" sz="1800" dirty="0"/>
+          </a:p>
+        </p:txBody>
+      </p:sp>
+      <p:sp>
+        <p:nvSpPr>
+          <p:cNvPr id="9" name="Text 6"/>
           <p:cNvSpPr txBox="1"/>
           <p:nvPr/>
         </p:nvSpPr>
@@ -14084,7 +13562,7 @@
       </p:sp>
       <p:sp>
         <p:nvSpPr>
-          <p:cNvPr id="11" name="Shape 7"/>
+          <p:cNvPr id="10" name="Shape 7"/>
           <p:cNvSpPr/>
           <p:nvPr/>
         </p:nvSpPr>
@@ -14107,40 +13585,16 @@
           </a:ln>
         </p:spPr>
       </p:sp>
-      <p:pic>
-        <p:nvPicPr>
-          <p:cNvPr id="12" name="Image 1" descr="preencoded.png">    </p:cNvPr>
-          <p:cNvPicPr>
-            <a:picLocks noChangeAspect="1"/>
-          </p:cNvPicPr>
-          <p:nvPr/>
-        </p:nvPicPr>
-        <p:blipFill>
-          <a:blip r:embed="rId2"/>
-          <a:stretch>
-            <a:fillRect/>
-          </a:stretch>
-        </p:blipFill>
-        <p:spPr>
-          <a:xfrm>
-            <a:off x="3474720" y="1371600"/>
-            <a:ext cx="365760" cy="365760"/>
-          </a:xfrm>
-          <a:prstGeom prst="rect">
-            <a:avLst/>
-          </a:prstGeom>
-        </p:spPr>
-      </p:pic>
-      <p:sp>
-        <p:nvSpPr>
-          <p:cNvPr id="13" name="Text 8"/>
-          <p:cNvSpPr txBox="1"/>
-          <p:nvPr/>
-        </p:nvSpPr>
-        <p:spPr>
-          <a:xfrm>
-            <a:off x="3474720" y="1874520"/>
-            <a:ext cx="2148840" cy="1051560"/>
+      <p:sp>
+        <p:nvSpPr>
+          <p:cNvPr id="11" name="Text 8"/>
+          <p:cNvSpPr txBox="1"/>
+          <p:nvPr/>
+        </p:nvSpPr>
+        <p:spPr>
+          <a:xfrm>
+            <a:off x="3474720" y="1463040"/>
+            <a:ext cx="2148840" cy="1371600"/>
           </a:xfrm>
           <a:prstGeom prst="rect">
             <a:avLst/>
@@ -14156,7 +13610,7 @@
               <a:buNone/>
             </a:pPr>
             <a:r>
-              <a:rPr lang="en-US" sz="1600" b="1" dirty="0">
+              <a:rPr lang="en-US" sz="1800" b="1" dirty="0">
                 <a:solidFill>
                   <a:srgbClr val="FFFFFF"/>
                 </a:solidFill>
@@ -14166,13 +13620,13 @@
               </a:rPr>
               <a:t>“Ollama works fine directly, but the agent framework is slow.”</a:t>
             </a:r>
-            <a:endParaRPr lang="en-US" sz="1600" dirty="0"/>
-          </a:p>
-        </p:txBody>
-      </p:sp>
-      <p:sp>
-        <p:nvSpPr>
-          <p:cNvPr id="14" name="Text 9"/>
+            <a:endParaRPr lang="en-US" sz="1800" dirty="0"/>
+          </a:p>
+        </p:txBody>
+      </p:sp>
+      <p:sp>
+        <p:nvSpPr>
+          <p:cNvPr id="12" name="Text 9"/>
           <p:cNvSpPr txBox="1"/>
           <p:nvPr/>
         </p:nvSpPr>
@@ -14211,7 +13665,7 @@
       </p:sp>
       <p:sp>
         <p:nvSpPr>
-          <p:cNvPr id="15" name="Shape 10"/>
+          <p:cNvPr id="13" name="Shape 10"/>
           <p:cNvSpPr/>
           <p:nvPr/>
         </p:nvSpPr>
@@ -14234,40 +13688,16 @@
           </a:ln>
         </p:spPr>
       </p:sp>
-      <p:pic>
-        <p:nvPicPr>
-          <p:cNvPr id="16" name="Image 2" descr="preencoded.png">    </p:cNvPr>
-          <p:cNvPicPr>
-            <a:picLocks noChangeAspect="1"/>
-          </p:cNvPicPr>
-          <p:nvPr/>
-        </p:nvPicPr>
-        <p:blipFill>
-          <a:blip r:embed="rId3"/>
-          <a:stretch>
-            <a:fillRect/>
-          </a:stretch>
-        </p:blipFill>
-        <p:spPr>
-          <a:xfrm>
-            <a:off x="6263640" y="1371600"/>
-            <a:ext cx="365760" cy="365760"/>
-          </a:xfrm>
-          <a:prstGeom prst="rect">
-            <a:avLst/>
-          </a:prstGeom>
-        </p:spPr>
-      </p:pic>
-      <p:sp>
-        <p:nvSpPr>
-          <p:cNvPr id="17" name="Text 11"/>
-          <p:cNvSpPr txBox="1"/>
-          <p:nvPr/>
-        </p:nvSpPr>
-        <p:spPr>
-          <a:xfrm>
-            <a:off x="6263640" y="1874520"/>
-            <a:ext cx="2148840" cy="1051560"/>
+      <p:sp>
+        <p:nvSpPr>
+          <p:cNvPr id="14" name="Text 11"/>
+          <p:cNvSpPr txBox="1"/>
+          <p:nvPr/>
+        </p:nvSpPr>
+        <p:spPr>
+          <a:xfrm>
+            <a:off x="6263640" y="1463040"/>
+            <a:ext cx="2148840" cy="1371600"/>
           </a:xfrm>
           <a:prstGeom prst="rect">
             <a:avLst/>
@@ -14283,7 +13713,7 @@
               <a:buNone/>
             </a:pPr>
             <a:r>
-              <a:rPr lang="en-US" sz="1600" b="1" dirty="0">
+              <a:rPr lang="en-US" sz="1800" b="1" dirty="0">
                 <a:solidFill>
                   <a:srgbClr val="000000"/>
                 </a:solidFill>
@@ -14293,13 +13723,13 @@
               </a:rPr>
               <a:t>“99% wouldn't know what VRAM is.”</a:t>
             </a:r>
-            <a:endParaRPr lang="en-US" sz="1600" dirty="0"/>
-          </a:p>
-        </p:txBody>
-      </p:sp>
-      <p:sp>
-        <p:nvSpPr>
-          <p:cNvPr id="18" name="Text 12"/>
+            <a:endParaRPr lang="en-US" sz="1800" dirty="0"/>
+          </a:p>
+        </p:txBody>
+      </p:sp>
+      <p:sp>
+        <p:nvSpPr>
+          <p:cNvPr id="15" name="Text 12"/>
           <p:cNvSpPr txBox="1"/>
           <p:nvPr/>
         </p:nvSpPr>
@@ -14338,7 +13768,7 @@
       </p:sp>
       <p:sp>
         <p:nvSpPr>
-          <p:cNvPr id="19" name="Shape 13"/>
+          <p:cNvPr id="16" name="Shape 13"/>
           <p:cNvSpPr/>
           <p:nvPr/>
         </p:nvSpPr>
@@ -14363,7 +13793,7 @@
       </p:sp>
       <p:sp>
         <p:nvSpPr>
-          <p:cNvPr id="20" name="Text 14"/>
+          <p:cNvPr id="17" name="Text 14"/>
           <p:cNvSpPr txBox="1"/>
           <p:nvPr/>
         </p:nvSpPr>
@@ -14627,39 +14057,15 @@
           </a:ln>
         </p:spPr>
       </p:sp>
-      <p:pic>
-        <p:nvPicPr>
-          <p:cNvPr id="8" name="Image 0" descr="preencoded.png">    </p:cNvPr>
-          <p:cNvPicPr>
-            <a:picLocks noChangeAspect="1"/>
-          </p:cNvPicPr>
-          <p:nvPr/>
-        </p:nvPicPr>
-        <p:blipFill>
-          <a:blip r:embed="rId1"/>
-          <a:stretch>
-            <a:fillRect/>
-          </a:stretch>
-        </p:blipFill>
-        <p:spPr>
-          <a:xfrm>
-            <a:off x="1234440" y="1700784"/>
-            <a:ext cx="713232" cy="713232"/>
-          </a:xfrm>
-          <a:prstGeom prst="rect">
-            <a:avLst/>
-          </a:prstGeom>
-        </p:spPr>
-      </p:pic>
-      <p:sp>
-        <p:nvSpPr>
-          <p:cNvPr id="9" name="Text 5"/>
-          <p:cNvSpPr txBox="1"/>
-          <p:nvPr/>
-        </p:nvSpPr>
-        <p:spPr>
-          <a:xfrm>
-            <a:off x="640080" y="2834640"/>
+      <p:sp>
+        <p:nvSpPr>
+          <p:cNvPr id="8" name="Text 5"/>
+          <p:cNvSpPr txBox="1"/>
+          <p:nvPr/>
+        </p:nvSpPr>
+        <p:spPr>
+          <a:xfrm>
+            <a:off x="640080" y="1645920"/>
             <a:ext cx="2377440" cy="365760"/>
           </a:xfrm>
           <a:prstGeom prst="rect">
@@ -14692,14 +14098,14 @@
       </p:sp>
       <p:sp>
         <p:nvSpPr>
-          <p:cNvPr id="10" name="Text 6"/>
-          <p:cNvSpPr txBox="1"/>
-          <p:nvPr/>
-        </p:nvSpPr>
-        <p:spPr>
-          <a:xfrm>
-            <a:off x="685800" y="3291840"/>
-            <a:ext cx="2286000" cy="914400"/>
+          <p:cNvPr id="9" name="Text 6"/>
+          <p:cNvSpPr txBox="1"/>
+          <p:nvPr/>
+        </p:nvSpPr>
+        <p:spPr>
+          <a:xfrm>
+            <a:off x="685800" y="2194560"/>
+            <a:ext cx="2286000" cy="1097280"/>
           </a:xfrm>
           <a:prstGeom prst="rect">
             <a:avLst/>
@@ -14715,7 +14121,7 @@
               <a:buNone/>
             </a:pPr>
             <a:r>
-              <a:rPr lang="en-US" sz="1400" i="1" dirty="0">
+              <a:rPr lang="en-US" sz="1600" i="1" dirty="0">
                 <a:solidFill>
                   <a:srgbClr val="BFBFBF"/>
                 </a:solidFill>
@@ -14725,13 +14131,13 @@
               </a:rPr>
               <a:t>“I paid for this GPU. Why is my AI so slow?”</a:t>
             </a:r>
-            <a:endParaRPr lang="en-US" sz="1400" dirty="0"/>
-          </a:p>
-        </p:txBody>
-      </p:sp>
-      <p:sp>
-        <p:nvSpPr>
-          <p:cNvPr id="11" name="Text 7"/>
+            <a:endParaRPr lang="en-US" sz="1600" dirty="0"/>
+          </a:p>
+        </p:txBody>
+      </p:sp>
+      <p:sp>
+        <p:nvSpPr>
+          <p:cNvPr id="10" name="Text 7"/>
           <p:cNvSpPr txBox="1"/>
           <p:nvPr/>
         </p:nvSpPr>
@@ -14770,7 +14176,7 @@
       </p:sp>
       <p:sp>
         <p:nvSpPr>
-          <p:cNvPr id="12" name="Text 8"/>
+          <p:cNvPr id="11" name="Text 8"/>
           <p:cNvSpPr txBox="1"/>
           <p:nvPr/>
         </p:nvSpPr>
@@ -14809,7 +14215,7 @@
       </p:sp>
       <p:sp>
         <p:nvSpPr>
-          <p:cNvPr id="13" name="Text 9"/>
+          <p:cNvPr id="12" name="Text 9"/>
           <p:cNvSpPr txBox="1"/>
           <p:nvPr/>
         </p:nvSpPr>
@@ -14848,7 +14254,7 @@
       </p:sp>
       <p:sp>
         <p:nvSpPr>
-          <p:cNvPr id="14" name="Text 10"/>
+          <p:cNvPr id="13" name="Text 10"/>
           <p:cNvSpPr txBox="1"/>
           <p:nvPr/>
         </p:nvSpPr>
@@ -14887,7 +14293,7 @@
       </p:sp>
       <p:sp>
         <p:nvSpPr>
-          <p:cNvPr id="15" name="Text 11"/>
+          <p:cNvPr id="14" name="Text 11"/>
           <p:cNvSpPr txBox="1"/>
           <p:nvPr/>
         </p:nvSpPr>
@@ -14926,7 +14332,7 @@
       </p:sp>
       <p:sp>
         <p:nvSpPr>
-          <p:cNvPr id="16" name="Text 12"/>
+          <p:cNvPr id="15" name="Text 12"/>
           <p:cNvSpPr txBox="1"/>
           <p:nvPr/>
         </p:nvSpPr>
@@ -14965,7 +14371,7 @@
       </p:sp>
       <p:sp>
         <p:nvSpPr>
-          <p:cNvPr id="17" name="Text 13"/>
+          <p:cNvPr id="16" name="Text 13"/>
           <p:cNvSpPr txBox="1"/>
           <p:nvPr/>
         </p:nvSpPr>
@@ -15004,7 +14410,7 @@
       </p:sp>
       <p:sp>
         <p:nvSpPr>
-          <p:cNvPr id="18" name="Text 14"/>
+          <p:cNvPr id="17" name="Text 14"/>
           <p:cNvSpPr txBox="1"/>
           <p:nvPr/>
         </p:nvSpPr>
@@ -15151,56 +14557,32 @@
           </a:p>
         </p:txBody>
       </p:sp>
-      <p:pic>
-        <p:nvPicPr>
-          <p:cNvPr id="5" name="Image 0" descr="preencoded.png">    </p:cNvPr>
-          <p:cNvPicPr>
-            <a:picLocks noChangeAspect="1"/>
-          </p:cNvPicPr>
-          <p:nvPr/>
-        </p:nvPicPr>
-        <p:blipFill>
-          <a:blip r:embed="rId1"/>
-          <a:stretch>
-            <a:fillRect/>
-          </a:stretch>
-        </p:blipFill>
-        <p:spPr>
-          <a:xfrm>
-            <a:off x="548640" y="2880360"/>
-            <a:ext cx="548640" cy="548640"/>
-          </a:xfrm>
-          <a:prstGeom prst="rect">
-            <a:avLst/>
-          </a:prstGeom>
-        </p:spPr>
-      </p:pic>
-      <p:sp>
-        <p:nvSpPr>
-          <p:cNvPr id="6" name="Text 2"/>
-          <p:cNvSpPr txBox="1"/>
-          <p:nvPr/>
-        </p:nvSpPr>
-        <p:spPr>
-          <a:xfrm>
-            <a:off x="1691640" y="2697480"/>
-            <a:ext cx="2377440" cy="914400"/>
-          </a:xfrm>
-          <a:prstGeom prst="rect">
-            <a:avLst/>
-          </a:prstGeom>
-          <a:noFill/>
-          <a:ln/>
-        </p:spPr>
-        <p:txBody>
-          <a:bodyPr wrap="square" lIns="0" tIns="0" rIns="0" bIns="0" rtlCol="0" anchor="ctr"/>
-          <a:lstStyle/>
-          <a:p>
-            <a:pPr indent="0" marL="0">
-              <a:buNone/>
-            </a:pPr>
-            <a:r>
-              <a:rPr lang="en-US" sz="1500" i="1" dirty="0">
+      <p:sp>
+        <p:nvSpPr>
+          <p:cNvPr id="5" name="Text 2"/>
+          <p:cNvSpPr txBox="1"/>
+          <p:nvPr/>
+        </p:nvSpPr>
+        <p:spPr>
+          <a:xfrm>
+            <a:off x="548640" y="2697480"/>
+            <a:ext cx="3474720" cy="914400"/>
+          </a:xfrm>
+          <a:prstGeom prst="rect">
+            <a:avLst/>
+          </a:prstGeom>
+          <a:noFill/>
+          <a:ln/>
+        </p:spPr>
+        <p:txBody>
+          <a:bodyPr wrap="square" lIns="0" tIns="0" rIns="0" bIns="0" rtlCol="0" anchor="t"/>
+          <a:lstStyle/>
+          <a:p>
+            <a:pPr indent="0" marL="0">
+              <a:buNone/>
+            </a:pPr>
+            <a:r>
+              <a:rPr lang="en-US" sz="1800" i="1" dirty="0">
                 <a:solidFill>
                   <a:srgbClr val="BFBFBF"/>
                 </a:solidFill>
@@ -15210,13 +14592,13 @@
               </a:rPr>
               <a:t>A clear problem is half the solution.</a:t>
             </a:r>
-            <a:endParaRPr lang="en-US" sz="1500" dirty="0"/>
-          </a:p>
-        </p:txBody>
-      </p:sp>
-      <p:sp>
-        <p:nvSpPr>
-          <p:cNvPr id="7" name="Shape 3"/>
+            <a:endParaRPr lang="en-US" sz="1800" dirty="0"/>
+          </a:p>
+        </p:txBody>
+      </p:sp>
+      <p:sp>
+        <p:nvSpPr>
+          <p:cNvPr id="6" name="Shape 3"/>
           <p:cNvSpPr/>
           <p:nvPr/>
         </p:nvSpPr>
@@ -15241,7 +14623,7 @@
       </p:sp>
       <p:sp>
         <p:nvSpPr>
-          <p:cNvPr id="8" name="Text 4"/>
+          <p:cNvPr id="7" name="Text 4"/>
           <p:cNvSpPr txBox="1"/>
           <p:nvPr/>
         </p:nvSpPr>
@@ -15280,7 +14662,7 @@
       </p:sp>
       <p:sp>
         <p:nvSpPr>
-          <p:cNvPr id="9" name="Text 5"/>
+          <p:cNvPr id="8" name="Text 5"/>
           <p:cNvSpPr txBox="1"/>
           <p:nvPr/>
         </p:nvSpPr>
@@ -15319,7 +14701,7 @@
       </p:sp>
       <p:sp>
         <p:nvSpPr>
-          <p:cNvPr id="10" name="Text 6"/>
+          <p:cNvPr id="9" name="Text 6"/>
           <p:cNvSpPr txBox="1"/>
           <p:nvPr/>
         </p:nvSpPr>
@@ -15358,7 +14740,7 @@
       </p:sp>
       <p:sp>
         <p:nvSpPr>
-          <p:cNvPr id="11" name="Text 7"/>
+          <p:cNvPr id="10" name="Text 7"/>
           <p:cNvSpPr txBox="1"/>
           <p:nvPr/>
         </p:nvSpPr>
@@ -15397,7 +14779,7 @@
       </p:sp>
       <p:sp>
         <p:nvSpPr>
-          <p:cNvPr id="12" name="Text 8"/>
+          <p:cNvPr id="11" name="Text 8"/>
           <p:cNvSpPr txBox="1"/>
           <p:nvPr/>
         </p:nvSpPr>
@@ -15436,7 +14818,7 @@
       </p:sp>
       <p:sp>
         <p:nvSpPr>
-          <p:cNvPr id="13" name="Text 9"/>
+          <p:cNvPr id="12" name="Text 9"/>
           <p:cNvSpPr txBox="1"/>
           <p:nvPr/>
         </p:nvSpPr>
@@ -15764,39 +15146,15 @@
           </a:ln>
         </p:spPr>
       </p:sp>
-      <p:pic>
-        <p:nvPicPr>
-          <p:cNvPr id="10" name="Image 0" descr="preencoded.png">    </p:cNvPr>
-          <p:cNvPicPr>
-            <a:picLocks noChangeAspect="1"/>
-          </p:cNvPicPr>
-          <p:nvPr/>
-        </p:nvPicPr>
-        <p:blipFill>
-          <a:blip r:embed="rId1"/>
-          <a:stretch>
-            <a:fillRect/>
-          </a:stretch>
-        </p:blipFill>
-        <p:spPr>
-          <a:xfrm>
-            <a:off x="685800" y="3108960"/>
-            <a:ext cx="274320" cy="274320"/>
-          </a:xfrm>
-          <a:prstGeom prst="rect">
-            <a:avLst/>
-          </a:prstGeom>
-        </p:spPr>
-      </p:pic>
-      <p:sp>
-        <p:nvSpPr>
-          <p:cNvPr id="11" name="Text 7"/>
-          <p:cNvSpPr txBox="1"/>
-          <p:nvPr/>
-        </p:nvSpPr>
-        <p:spPr>
-          <a:xfrm>
-            <a:off x="685800" y="3611880"/>
+      <p:sp>
+        <p:nvSpPr>
+          <p:cNvPr id="10" name="Text 7"/>
+          <p:cNvSpPr txBox="1"/>
+          <p:nvPr/>
+        </p:nvSpPr>
+        <p:spPr>
+          <a:xfrm>
+            <a:off x="685800" y="3017520"/>
             <a:ext cx="2194560" cy="274320"/>
           </a:xfrm>
           <a:prstGeom prst="rect">
@@ -15813,7 +15171,46 @@
               <a:buNone/>
             </a:pPr>
             <a:r>
-              <a:rPr lang="en-US" sz="1500" b="1" dirty="0">
+              <a:rPr lang="en-US" sz="1200" b="1" spc="200" kern="0" dirty="0">
+                <a:solidFill>
+                  <a:srgbClr val="8C8C8C"/>
+                </a:solidFill>
+                <a:latin typeface="Arial" pitchFamily="34" charset="0"/>
+                <a:ea typeface="Arial" pitchFamily="34" charset="-122"/>
+                <a:cs typeface="Arial" pitchFamily="34" charset="-120"/>
+              </a:rPr>
+              <a:t>NOT</a:t>
+            </a:r>
+            <a:endParaRPr lang="en-US" sz="1200" dirty="0"/>
+          </a:p>
+        </p:txBody>
+      </p:sp>
+      <p:sp>
+        <p:nvSpPr>
+          <p:cNvPr id="11" name="Text 8"/>
+          <p:cNvSpPr txBox="1"/>
+          <p:nvPr/>
+        </p:nvSpPr>
+        <p:spPr>
+          <a:xfrm>
+            <a:off x="685800" y="3337560"/>
+            <a:ext cx="2194560" cy="320040"/>
+          </a:xfrm>
+          <a:prstGeom prst="rect">
+            <a:avLst/>
+          </a:prstGeom>
+          <a:noFill/>
+          <a:ln/>
+        </p:spPr>
+        <p:txBody>
+          <a:bodyPr wrap="square" lIns="0" tIns="0" rIns="0" bIns="0" rtlCol="0" anchor="ctr"/>
+          <a:lstStyle/>
+          <a:p>
+            <a:pPr indent="0" marL="0">
+              <a:buNone/>
+            </a:pPr>
+            <a:r>
+              <a:rPr lang="en-US" sz="1700" b="1" dirty="0">
                 <a:solidFill>
                   <a:srgbClr val="000000"/>
                 </a:solidFill>
@@ -15821,21 +15218,21 @@
                 <a:ea typeface="Arial" pitchFamily="34" charset="-122"/>
                 <a:cs typeface="Arial" pitchFamily="34" charset="-120"/>
               </a:rPr>
-              <a:t>Not a new model</a:t>
-            </a:r>
-            <a:endParaRPr lang="en-US" sz="1500" dirty="0"/>
-          </a:p>
-        </p:txBody>
-      </p:sp>
-      <p:sp>
-        <p:nvSpPr>
-          <p:cNvPr id="12" name="Text 8"/>
-          <p:cNvSpPr txBox="1"/>
-          <p:nvPr/>
-        </p:nvSpPr>
-        <p:spPr>
-          <a:xfrm>
-            <a:off x="685800" y="3931920"/>
+              <a:t>A new model</a:t>
+            </a:r>
+            <a:endParaRPr lang="en-US" sz="1700" dirty="0"/>
+          </a:p>
+        </p:txBody>
+      </p:sp>
+      <p:sp>
+        <p:nvSpPr>
+          <p:cNvPr id="12" name="Text 9"/>
+          <p:cNvSpPr txBox="1"/>
+          <p:nvPr/>
+        </p:nvSpPr>
+        <p:spPr>
+          <a:xfrm>
+            <a:off x="685800" y="3749040"/>
             <a:ext cx="2194560" cy="548640"/>
           </a:xfrm>
           <a:prstGeom prst="rect">
@@ -15868,7 +15265,7 @@
       </p:sp>
       <p:sp>
         <p:nvSpPr>
-          <p:cNvPr id="13" name="Shape 9"/>
+          <p:cNvPr id="13" name="Shape 10"/>
           <p:cNvSpPr/>
           <p:nvPr/>
         </p:nvSpPr>
@@ -15891,39 +15288,15 @@
           </a:ln>
         </p:spPr>
       </p:sp>
-      <p:pic>
-        <p:nvPicPr>
-          <p:cNvPr id="14" name="Image 1" descr="preencoded.png">    </p:cNvPr>
-          <p:cNvPicPr>
-            <a:picLocks noChangeAspect="1"/>
-          </p:cNvPicPr>
-          <p:nvPr/>
-        </p:nvPicPr>
-        <p:blipFill>
-          <a:blip r:embed="rId2"/>
-          <a:stretch>
-            <a:fillRect/>
-          </a:stretch>
-        </p:blipFill>
-        <p:spPr>
-          <a:xfrm>
-            <a:off x="3474720" y="3108960"/>
-            <a:ext cx="274320" cy="274320"/>
-          </a:xfrm>
-          <a:prstGeom prst="rect">
-            <a:avLst/>
-          </a:prstGeom>
-        </p:spPr>
-      </p:pic>
-      <p:sp>
-        <p:nvSpPr>
-          <p:cNvPr id="15" name="Text 10"/>
-          <p:cNvSpPr txBox="1"/>
-          <p:nvPr/>
-        </p:nvSpPr>
-        <p:spPr>
-          <a:xfrm>
-            <a:off x="3474720" y="3611880"/>
+      <p:sp>
+        <p:nvSpPr>
+          <p:cNvPr id="14" name="Text 11"/>
+          <p:cNvSpPr txBox="1"/>
+          <p:nvPr/>
+        </p:nvSpPr>
+        <p:spPr>
+          <a:xfrm>
+            <a:off x="3474720" y="3017520"/>
             <a:ext cx="2194560" cy="274320"/>
           </a:xfrm>
           <a:prstGeom prst="rect">
@@ -15940,7 +15313,46 @@
               <a:buNone/>
             </a:pPr>
             <a:r>
-              <a:rPr lang="en-US" sz="1500" b="1" dirty="0">
+              <a:rPr lang="en-US" sz="1200" b="1" spc="200" kern="0" dirty="0">
+                <a:solidFill>
+                  <a:srgbClr val="8C8C8C"/>
+                </a:solidFill>
+                <a:latin typeface="Arial" pitchFamily="34" charset="0"/>
+                <a:ea typeface="Arial" pitchFamily="34" charset="-122"/>
+                <a:cs typeface="Arial" pitchFamily="34" charset="-120"/>
+              </a:rPr>
+              <a:t>NOT</a:t>
+            </a:r>
+            <a:endParaRPr lang="en-US" sz="1200" dirty="0"/>
+          </a:p>
+        </p:txBody>
+      </p:sp>
+      <p:sp>
+        <p:nvSpPr>
+          <p:cNvPr id="15" name="Text 12"/>
+          <p:cNvSpPr txBox="1"/>
+          <p:nvPr/>
+        </p:nvSpPr>
+        <p:spPr>
+          <a:xfrm>
+            <a:off x="3474720" y="3337560"/>
+            <a:ext cx="2194560" cy="320040"/>
+          </a:xfrm>
+          <a:prstGeom prst="rect">
+            <a:avLst/>
+          </a:prstGeom>
+          <a:noFill/>
+          <a:ln/>
+        </p:spPr>
+        <p:txBody>
+          <a:bodyPr wrap="square" lIns="0" tIns="0" rIns="0" bIns="0" rtlCol="0" anchor="ctr"/>
+          <a:lstStyle/>
+          <a:p>
+            <a:pPr indent="0" marL="0">
+              <a:buNone/>
+            </a:pPr>
+            <a:r>
+              <a:rPr lang="en-US" sz="1700" b="1" dirty="0">
                 <a:solidFill>
                   <a:srgbClr val="000000"/>
                 </a:solidFill>
@@ -15948,21 +15360,21 @@
                 <a:ea typeface="Arial" pitchFamily="34" charset="-122"/>
                 <a:cs typeface="Arial" pitchFamily="34" charset="-120"/>
               </a:rPr>
-              <a:t>Not new hardware</a:t>
-            </a:r>
-            <a:endParaRPr lang="en-US" sz="1500" dirty="0"/>
-          </a:p>
-        </p:txBody>
-      </p:sp>
-      <p:sp>
-        <p:nvSpPr>
-          <p:cNvPr id="16" name="Text 11"/>
-          <p:cNvSpPr txBox="1"/>
-          <p:nvPr/>
-        </p:nvSpPr>
-        <p:spPr>
-          <a:xfrm>
-            <a:off x="3474720" y="3931920"/>
+              <a:t>New hardware</a:t>
+            </a:r>
+            <a:endParaRPr lang="en-US" sz="1700" dirty="0"/>
+          </a:p>
+        </p:txBody>
+      </p:sp>
+      <p:sp>
+        <p:nvSpPr>
+          <p:cNvPr id="16" name="Text 13"/>
+          <p:cNvSpPr txBox="1"/>
+          <p:nvPr/>
+        </p:nvSpPr>
+        <p:spPr>
+          <a:xfrm>
+            <a:off x="3474720" y="3749040"/>
             <a:ext cx="2194560" cy="548640"/>
           </a:xfrm>
           <a:prstGeom prst="rect">
@@ -15995,7 +15407,7 @@
       </p:sp>
       <p:sp>
         <p:nvSpPr>
-          <p:cNvPr id="17" name="Shape 12"/>
+          <p:cNvPr id="17" name="Shape 14"/>
           <p:cNvSpPr/>
           <p:nvPr/>
         </p:nvSpPr>
@@ -16018,39 +15430,15 @@
           </a:ln>
         </p:spPr>
       </p:sp>
-      <p:pic>
-        <p:nvPicPr>
-          <p:cNvPr id="18" name="Image 2" descr="preencoded.png">    </p:cNvPr>
-          <p:cNvPicPr>
-            <a:picLocks noChangeAspect="1"/>
-          </p:cNvPicPr>
-          <p:nvPr/>
-        </p:nvPicPr>
-        <p:blipFill>
-          <a:blip r:embed="rId3"/>
-          <a:stretch>
-            <a:fillRect/>
-          </a:stretch>
-        </p:blipFill>
-        <p:spPr>
-          <a:xfrm>
-            <a:off x="6263640" y="3108960"/>
-            <a:ext cx="274320" cy="274320"/>
-          </a:xfrm>
-          <a:prstGeom prst="rect">
-            <a:avLst/>
-          </a:prstGeom>
-        </p:spPr>
-      </p:pic>
-      <p:sp>
-        <p:nvSpPr>
-          <p:cNvPr id="19" name="Text 13"/>
-          <p:cNvSpPr txBox="1"/>
-          <p:nvPr/>
-        </p:nvSpPr>
-        <p:spPr>
-          <a:xfrm>
-            <a:off x="6263640" y="3611880"/>
+      <p:sp>
+        <p:nvSpPr>
+          <p:cNvPr id="18" name="Text 15"/>
+          <p:cNvSpPr txBox="1"/>
+          <p:nvPr/>
+        </p:nvSpPr>
+        <p:spPr>
+          <a:xfrm>
+            <a:off x="6263640" y="3017520"/>
             <a:ext cx="2194560" cy="274320"/>
           </a:xfrm>
           <a:prstGeom prst="rect">
@@ -16067,7 +15455,46 @@
               <a:buNone/>
             </a:pPr>
             <a:r>
-              <a:rPr lang="en-US" sz="1500" b="1" dirty="0">
+              <a:rPr lang="en-US" sz="1200" b="1" spc="200" kern="0" dirty="0">
+                <a:solidFill>
+                  <a:srgbClr val="8C8C8C"/>
+                </a:solidFill>
+                <a:latin typeface="Arial" pitchFamily="34" charset="0"/>
+                <a:ea typeface="Arial" pitchFamily="34" charset="-122"/>
+                <a:cs typeface="Arial" pitchFamily="34" charset="-120"/>
+              </a:rPr>
+              <a:t>MUST</a:t>
+            </a:r>
+            <a:endParaRPr lang="en-US" sz="1200" dirty="0"/>
+          </a:p>
+        </p:txBody>
+      </p:sp>
+      <p:sp>
+        <p:nvSpPr>
+          <p:cNvPr id="19" name="Text 16"/>
+          <p:cNvSpPr txBox="1"/>
+          <p:nvPr/>
+        </p:nvSpPr>
+        <p:spPr>
+          <a:xfrm>
+            <a:off x="6263640" y="3337560"/>
+            <a:ext cx="2194560" cy="320040"/>
+          </a:xfrm>
+          <a:prstGeom prst="rect">
+            <a:avLst/>
+          </a:prstGeom>
+          <a:noFill/>
+          <a:ln/>
+        </p:spPr>
+        <p:txBody>
+          <a:bodyPr wrap="square" lIns="0" tIns="0" rIns="0" bIns="0" rtlCol="0" anchor="ctr"/>
+          <a:lstStyle/>
+          <a:p>
+            <a:pPr indent="0" marL="0">
+              <a:buNone/>
+            </a:pPr>
+            <a:r>
+              <a:rPr lang="en-US" sz="1700" b="1" dirty="0">
                 <a:solidFill>
                   <a:srgbClr val="000000"/>
                 </a:solidFill>
@@ -16075,21 +15502,21 @@
                 <a:ea typeface="Arial" pitchFamily="34" charset="-122"/>
                 <a:cs typeface="Arial" pitchFamily="34" charset="-120"/>
               </a:rPr>
-              <a:t>Same workflow</a:t>
-            </a:r>
-            <a:endParaRPr lang="en-US" sz="1500" dirty="0"/>
-          </a:p>
-        </p:txBody>
-      </p:sp>
-      <p:sp>
-        <p:nvSpPr>
-          <p:cNvPr id="20" name="Text 14"/>
-          <p:cNvSpPr txBox="1"/>
-          <p:nvPr/>
-        </p:nvSpPr>
-        <p:spPr>
-          <a:xfrm>
-            <a:off x="6263640" y="3931920"/>
+              <a:t>Keep the workflow</a:t>
+            </a:r>
+            <a:endParaRPr lang="en-US" sz="1700" dirty="0"/>
+          </a:p>
+        </p:txBody>
+      </p:sp>
+      <p:sp>
+        <p:nvSpPr>
+          <p:cNvPr id="20" name="Text 17"/>
+          <p:cNvSpPr txBox="1"/>
+          <p:nvPr/>
+        </p:nvSpPr>
+        <p:spPr>
+          <a:xfrm>
+            <a:off x="6263640" y="3749040"/>
             <a:ext cx="2194560" cy="548640"/>
           </a:xfrm>
           <a:prstGeom prst="rect">

--- a/docs/Ramer_Design_Thinking.pptx
+++ b/docs/Ramer_Design_Thinking.pptx
@@ -3481,6 +3481,45 @@
           </a:p>
         </p:txBody>
       </p:sp>
+      <p:sp>
+        <p:nvSpPr>
+          <p:cNvPr id="6" name="Text 3"/>
+          <p:cNvSpPr txBox="1"/>
+          <p:nvPr/>
+        </p:nvSpPr>
+        <p:spPr>
+          <a:xfrm>
+            <a:off x="548640" y="4114800"/>
+            <a:ext cx="8046720" cy="320040"/>
+          </a:xfrm>
+          <a:prstGeom prst="rect">
+            <a:avLst/>
+          </a:prstGeom>
+          <a:noFill/>
+          <a:ln/>
+        </p:spPr>
+        <p:txBody>
+          <a:bodyPr wrap="square" lIns="0" tIns="0" rIns="0" bIns="0" rtlCol="0" anchor="ctr"/>
+          <a:lstStyle/>
+          <a:p>
+            <a:pPr indent="0" marL="0">
+              <a:buNone/>
+            </a:pPr>
+            <a:r>
+              <a:rPr lang="en-US" sz="1300" b="1" spc="200" kern="0" dirty="0">
+                <a:solidFill>
+                  <a:srgbClr val="8C8C8C"/>
+                </a:solidFill>
+                <a:latin typeface="Arial" pitchFamily="34" charset="0"/>
+                <a:ea typeface="Arial" pitchFamily="34" charset="-122"/>
+                <a:cs typeface="Arial" pitchFamily="34" charset="-120"/>
+              </a:rPr>
+              <a:t>EMPATHIZE   ·   DEFINE   ·   IDEATE   ·   PROTOTYPE   ·   TEST</a:t>
+            </a:r>
+            <a:endParaRPr lang="en-US" sz="1300" dirty="0"/>
+          </a:p>
+        </p:txBody>
+      </p:sp>
     </p:spTree>
   </p:cSld>
   <p:clrMapOvr>
@@ -3599,8 +3638,8 @@
         </p:nvSpPr>
         <p:spPr>
           <a:xfrm>
-            <a:off x="548640" y="2697480"/>
-            <a:ext cx="3474720" cy="914400"/>
+            <a:off x="548640" y="2560320"/>
+            <a:ext cx="3474720" cy="640080"/>
           </a:xfrm>
           <a:prstGeom prst="rect">
             <a:avLst/>
@@ -3616,7 +3655,7 @@
               <a:buNone/>
             </a:pPr>
             <a:r>
-              <a:rPr lang="en-US" sz="1800" i="1" dirty="0">
+              <a:rPr lang="en-US" sz="1600" i="1" dirty="0">
                 <a:solidFill>
                   <a:srgbClr val="BFBFBF"/>
                 </a:solidFill>
@@ -3626,13 +3665,403 @@
               </a:rPr>
               <a:t>Go wide first, then choose.</a:t>
             </a:r>
-            <a:endParaRPr lang="en-US" sz="1800" dirty="0"/>
-          </a:p>
-        </p:txBody>
-      </p:sp>
-      <p:sp>
-        <p:nvSpPr>
-          <p:cNvPr id="6" name="Shape 3"/>
+            <a:endParaRPr lang="en-US" sz="1600" dirty="0"/>
+          </a:p>
+        </p:txBody>
+      </p:sp>
+      <p:sp>
+        <p:nvSpPr>
+          <p:cNvPr id="6" name="Text 3"/>
+          <p:cNvSpPr txBox="1"/>
+          <p:nvPr/>
+        </p:nvSpPr>
+        <p:spPr>
+          <a:xfrm>
+            <a:off x="548640" y="3429000"/>
+            <a:ext cx="457200" cy="256032"/>
+          </a:xfrm>
+          <a:prstGeom prst="rect">
+            <a:avLst/>
+          </a:prstGeom>
+          <a:noFill/>
+          <a:ln/>
+        </p:spPr>
+        <p:txBody>
+          <a:bodyPr wrap="square" lIns="0" tIns="0" rIns="0" bIns="0" rtlCol="0" anchor="ctr"/>
+          <a:lstStyle/>
+          <a:p>
+            <a:pPr indent="0" marL="0">
+              <a:buNone/>
+            </a:pPr>
+            <a:r>
+              <a:rPr lang="en-US" sz="1200" b="1" dirty="0">
+                <a:solidFill>
+                  <a:srgbClr val="595959"/>
+                </a:solidFill>
+                <a:latin typeface="Arial" pitchFamily="34" charset="0"/>
+                <a:ea typeface="Arial" pitchFamily="34" charset="-122"/>
+                <a:cs typeface="Arial" pitchFamily="34" charset="-120"/>
+              </a:rPr>
+              <a:t>01</a:t>
+            </a:r>
+            <a:endParaRPr lang="en-US" sz="1200" dirty="0"/>
+          </a:p>
+        </p:txBody>
+      </p:sp>
+      <p:sp>
+        <p:nvSpPr>
+          <p:cNvPr id="7" name="Text 4"/>
+          <p:cNvSpPr txBox="1"/>
+          <p:nvPr/>
+        </p:nvSpPr>
+        <p:spPr>
+          <a:xfrm>
+            <a:off x="1005840" y="3429000"/>
+            <a:ext cx="2743200" cy="256032"/>
+          </a:xfrm>
+          <a:prstGeom prst="rect">
+            <a:avLst/>
+          </a:prstGeom>
+          <a:noFill/>
+          <a:ln/>
+        </p:spPr>
+        <p:txBody>
+          <a:bodyPr wrap="square" lIns="0" tIns="0" rIns="0" bIns="0" rtlCol="0" anchor="ctr"/>
+          <a:lstStyle/>
+          <a:p>
+            <a:pPr indent="0" marL="0">
+              <a:buNone/>
+            </a:pPr>
+            <a:r>
+              <a:rPr lang="en-US" sz="1200" dirty="0">
+                <a:solidFill>
+                  <a:srgbClr val="595959"/>
+                </a:solidFill>
+                <a:latin typeface="Arial" pitchFamily="34" charset="0"/>
+                <a:ea typeface="Arial" pitchFamily="34" charset="-122"/>
+                <a:cs typeface="Arial" pitchFamily="34" charset="-120"/>
+              </a:rPr>
+              <a:t>Empathize</a:t>
+            </a:r>
+            <a:endParaRPr lang="en-US" sz="1200" dirty="0"/>
+          </a:p>
+        </p:txBody>
+      </p:sp>
+      <p:sp>
+        <p:nvSpPr>
+          <p:cNvPr id="8" name="Text 5"/>
+          <p:cNvSpPr txBox="1"/>
+          <p:nvPr/>
+        </p:nvSpPr>
+        <p:spPr>
+          <a:xfrm>
+            <a:off x="548640" y="3685032"/>
+            <a:ext cx="457200" cy="256032"/>
+          </a:xfrm>
+          <a:prstGeom prst="rect">
+            <a:avLst/>
+          </a:prstGeom>
+          <a:noFill/>
+          <a:ln/>
+        </p:spPr>
+        <p:txBody>
+          <a:bodyPr wrap="square" lIns="0" tIns="0" rIns="0" bIns="0" rtlCol="0" anchor="ctr"/>
+          <a:lstStyle/>
+          <a:p>
+            <a:pPr indent="0" marL="0">
+              <a:buNone/>
+            </a:pPr>
+            <a:r>
+              <a:rPr lang="en-US" sz="1200" b="1" dirty="0">
+                <a:solidFill>
+                  <a:srgbClr val="595959"/>
+                </a:solidFill>
+                <a:latin typeface="Arial" pitchFamily="34" charset="0"/>
+                <a:ea typeface="Arial" pitchFamily="34" charset="-122"/>
+                <a:cs typeface="Arial" pitchFamily="34" charset="-120"/>
+              </a:rPr>
+              <a:t>02</a:t>
+            </a:r>
+            <a:endParaRPr lang="en-US" sz="1200" dirty="0"/>
+          </a:p>
+        </p:txBody>
+      </p:sp>
+      <p:sp>
+        <p:nvSpPr>
+          <p:cNvPr id="9" name="Text 6"/>
+          <p:cNvSpPr txBox="1"/>
+          <p:nvPr/>
+        </p:nvSpPr>
+        <p:spPr>
+          <a:xfrm>
+            <a:off x="1005840" y="3685032"/>
+            <a:ext cx="2743200" cy="256032"/>
+          </a:xfrm>
+          <a:prstGeom prst="rect">
+            <a:avLst/>
+          </a:prstGeom>
+          <a:noFill/>
+          <a:ln/>
+        </p:spPr>
+        <p:txBody>
+          <a:bodyPr wrap="square" lIns="0" tIns="0" rIns="0" bIns="0" rtlCol="0" anchor="ctr"/>
+          <a:lstStyle/>
+          <a:p>
+            <a:pPr indent="0" marL="0">
+              <a:buNone/>
+            </a:pPr>
+            <a:r>
+              <a:rPr lang="en-US" sz="1200" dirty="0">
+                <a:solidFill>
+                  <a:srgbClr val="595959"/>
+                </a:solidFill>
+                <a:latin typeface="Arial" pitchFamily="34" charset="0"/>
+                <a:ea typeface="Arial" pitchFamily="34" charset="-122"/>
+                <a:cs typeface="Arial" pitchFamily="34" charset="-120"/>
+              </a:rPr>
+              <a:t>Define</a:t>
+            </a:r>
+            <a:endParaRPr lang="en-US" sz="1200" dirty="0"/>
+          </a:p>
+        </p:txBody>
+      </p:sp>
+      <p:sp>
+        <p:nvSpPr>
+          <p:cNvPr id="10" name="Text 7"/>
+          <p:cNvSpPr txBox="1"/>
+          <p:nvPr/>
+        </p:nvSpPr>
+        <p:spPr>
+          <a:xfrm>
+            <a:off x="548640" y="3941064"/>
+            <a:ext cx="457200" cy="256032"/>
+          </a:xfrm>
+          <a:prstGeom prst="rect">
+            <a:avLst/>
+          </a:prstGeom>
+          <a:noFill/>
+          <a:ln/>
+        </p:spPr>
+        <p:txBody>
+          <a:bodyPr wrap="square" lIns="0" tIns="0" rIns="0" bIns="0" rtlCol="0" anchor="ctr"/>
+          <a:lstStyle/>
+          <a:p>
+            <a:pPr indent="0" marL="0">
+              <a:buNone/>
+            </a:pPr>
+            <a:r>
+              <a:rPr lang="en-US" sz="1200" b="1" dirty="0">
+                <a:solidFill>
+                  <a:srgbClr val="FFFFFF"/>
+                </a:solidFill>
+                <a:latin typeface="Arial" pitchFamily="34" charset="0"/>
+                <a:ea typeface="Arial" pitchFamily="34" charset="-122"/>
+                <a:cs typeface="Arial" pitchFamily="34" charset="-120"/>
+              </a:rPr>
+              <a:t>03</a:t>
+            </a:r>
+            <a:endParaRPr lang="en-US" sz="1200" dirty="0"/>
+          </a:p>
+        </p:txBody>
+      </p:sp>
+      <p:sp>
+        <p:nvSpPr>
+          <p:cNvPr id="11" name="Text 8"/>
+          <p:cNvSpPr txBox="1"/>
+          <p:nvPr/>
+        </p:nvSpPr>
+        <p:spPr>
+          <a:xfrm>
+            <a:off x="1005840" y="3941064"/>
+            <a:ext cx="2743200" cy="256032"/>
+          </a:xfrm>
+          <a:prstGeom prst="rect">
+            <a:avLst/>
+          </a:prstGeom>
+          <a:noFill/>
+          <a:ln/>
+        </p:spPr>
+        <p:txBody>
+          <a:bodyPr wrap="square" lIns="0" tIns="0" rIns="0" bIns="0" rtlCol="0" anchor="ctr"/>
+          <a:lstStyle/>
+          <a:p>
+            <a:pPr indent="0" marL="0">
+              <a:buNone/>
+            </a:pPr>
+            <a:r>
+              <a:rPr lang="en-US" sz="1200" b="1" dirty="0">
+                <a:solidFill>
+                  <a:srgbClr val="FFFFFF"/>
+                </a:solidFill>
+                <a:latin typeface="Arial" pitchFamily="34" charset="0"/>
+                <a:ea typeface="Arial" pitchFamily="34" charset="-122"/>
+                <a:cs typeface="Arial" pitchFamily="34" charset="-120"/>
+              </a:rPr>
+              <a:t>Ideate</a:t>
+            </a:r>
+            <a:endParaRPr lang="en-US" sz="1200" dirty="0"/>
+          </a:p>
+        </p:txBody>
+      </p:sp>
+      <p:sp>
+        <p:nvSpPr>
+          <p:cNvPr id="12" name="Text 9"/>
+          <p:cNvSpPr txBox="1"/>
+          <p:nvPr/>
+        </p:nvSpPr>
+        <p:spPr>
+          <a:xfrm>
+            <a:off x="548640" y="4197096"/>
+            <a:ext cx="457200" cy="256032"/>
+          </a:xfrm>
+          <a:prstGeom prst="rect">
+            <a:avLst/>
+          </a:prstGeom>
+          <a:noFill/>
+          <a:ln/>
+        </p:spPr>
+        <p:txBody>
+          <a:bodyPr wrap="square" lIns="0" tIns="0" rIns="0" bIns="0" rtlCol="0" anchor="ctr"/>
+          <a:lstStyle/>
+          <a:p>
+            <a:pPr indent="0" marL="0">
+              <a:buNone/>
+            </a:pPr>
+            <a:r>
+              <a:rPr lang="en-US" sz="1200" b="1" dirty="0">
+                <a:solidFill>
+                  <a:srgbClr val="595959"/>
+                </a:solidFill>
+                <a:latin typeface="Arial" pitchFamily="34" charset="0"/>
+                <a:ea typeface="Arial" pitchFamily="34" charset="-122"/>
+                <a:cs typeface="Arial" pitchFamily="34" charset="-120"/>
+              </a:rPr>
+              <a:t>04</a:t>
+            </a:r>
+            <a:endParaRPr lang="en-US" sz="1200" dirty="0"/>
+          </a:p>
+        </p:txBody>
+      </p:sp>
+      <p:sp>
+        <p:nvSpPr>
+          <p:cNvPr id="13" name="Text 10"/>
+          <p:cNvSpPr txBox="1"/>
+          <p:nvPr/>
+        </p:nvSpPr>
+        <p:spPr>
+          <a:xfrm>
+            <a:off x="1005840" y="4197096"/>
+            <a:ext cx="2743200" cy="256032"/>
+          </a:xfrm>
+          <a:prstGeom prst="rect">
+            <a:avLst/>
+          </a:prstGeom>
+          <a:noFill/>
+          <a:ln/>
+        </p:spPr>
+        <p:txBody>
+          <a:bodyPr wrap="square" lIns="0" tIns="0" rIns="0" bIns="0" rtlCol="0" anchor="ctr"/>
+          <a:lstStyle/>
+          <a:p>
+            <a:pPr indent="0" marL="0">
+              <a:buNone/>
+            </a:pPr>
+            <a:r>
+              <a:rPr lang="en-US" sz="1200" dirty="0">
+                <a:solidFill>
+                  <a:srgbClr val="595959"/>
+                </a:solidFill>
+                <a:latin typeface="Arial" pitchFamily="34" charset="0"/>
+                <a:ea typeface="Arial" pitchFamily="34" charset="-122"/>
+                <a:cs typeface="Arial" pitchFamily="34" charset="-120"/>
+              </a:rPr>
+              <a:t>Prototype</a:t>
+            </a:r>
+            <a:endParaRPr lang="en-US" sz="1200" dirty="0"/>
+          </a:p>
+        </p:txBody>
+      </p:sp>
+      <p:sp>
+        <p:nvSpPr>
+          <p:cNvPr id="14" name="Text 11"/>
+          <p:cNvSpPr txBox="1"/>
+          <p:nvPr/>
+        </p:nvSpPr>
+        <p:spPr>
+          <a:xfrm>
+            <a:off x="548640" y="4453128"/>
+            <a:ext cx="457200" cy="256032"/>
+          </a:xfrm>
+          <a:prstGeom prst="rect">
+            <a:avLst/>
+          </a:prstGeom>
+          <a:noFill/>
+          <a:ln/>
+        </p:spPr>
+        <p:txBody>
+          <a:bodyPr wrap="square" lIns="0" tIns="0" rIns="0" bIns="0" rtlCol="0" anchor="ctr"/>
+          <a:lstStyle/>
+          <a:p>
+            <a:pPr indent="0" marL="0">
+              <a:buNone/>
+            </a:pPr>
+            <a:r>
+              <a:rPr lang="en-US" sz="1200" b="1" dirty="0">
+                <a:solidFill>
+                  <a:srgbClr val="595959"/>
+                </a:solidFill>
+                <a:latin typeface="Arial" pitchFamily="34" charset="0"/>
+                <a:ea typeface="Arial" pitchFamily="34" charset="-122"/>
+                <a:cs typeface="Arial" pitchFamily="34" charset="-120"/>
+              </a:rPr>
+              <a:t>05</a:t>
+            </a:r>
+            <a:endParaRPr lang="en-US" sz="1200" dirty="0"/>
+          </a:p>
+        </p:txBody>
+      </p:sp>
+      <p:sp>
+        <p:nvSpPr>
+          <p:cNvPr id="15" name="Text 12"/>
+          <p:cNvSpPr txBox="1"/>
+          <p:nvPr/>
+        </p:nvSpPr>
+        <p:spPr>
+          <a:xfrm>
+            <a:off x="1005840" y="4453128"/>
+            <a:ext cx="2743200" cy="256032"/>
+          </a:xfrm>
+          <a:prstGeom prst="rect">
+            <a:avLst/>
+          </a:prstGeom>
+          <a:noFill/>
+          <a:ln/>
+        </p:spPr>
+        <p:txBody>
+          <a:bodyPr wrap="square" lIns="0" tIns="0" rIns="0" bIns="0" rtlCol="0" anchor="ctr"/>
+          <a:lstStyle/>
+          <a:p>
+            <a:pPr indent="0" marL="0">
+              <a:buNone/>
+            </a:pPr>
+            <a:r>
+              <a:rPr lang="en-US" sz="1200" dirty="0">
+                <a:solidFill>
+                  <a:srgbClr val="595959"/>
+                </a:solidFill>
+                <a:latin typeface="Arial" pitchFamily="34" charset="0"/>
+                <a:ea typeface="Arial" pitchFamily="34" charset="-122"/>
+                <a:cs typeface="Arial" pitchFamily="34" charset="-120"/>
+              </a:rPr>
+              <a:t>Test</a:t>
+            </a:r>
+            <a:endParaRPr lang="en-US" sz="1200" dirty="0"/>
+          </a:p>
+        </p:txBody>
+      </p:sp>
+      <p:sp>
+        <p:nvSpPr>
+          <p:cNvPr id="16" name="Shape 13"/>
           <p:cNvSpPr/>
           <p:nvPr/>
         </p:nvSpPr>
@@ -3657,7 +4086,7 @@
       </p:sp>
       <p:sp>
         <p:nvSpPr>
-          <p:cNvPr id="7" name="Text 4"/>
+          <p:cNvPr id="17" name="Text 14"/>
           <p:cNvSpPr txBox="1"/>
           <p:nvPr/>
         </p:nvSpPr>
@@ -3696,14 +4125,14 @@
       </p:sp>
       <p:sp>
         <p:nvSpPr>
-          <p:cNvPr id="8" name="Text 5"/>
-          <p:cNvSpPr txBox="1"/>
-          <p:nvPr/>
-        </p:nvSpPr>
-        <p:spPr>
-          <a:xfrm>
-            <a:off x="4754880" y="960120"/>
-            <a:ext cx="3657600" cy="960120"/>
+          <p:cNvPr id="18" name="Text 15"/>
+          <p:cNvSpPr txBox="1"/>
+          <p:nvPr/>
+        </p:nvSpPr>
+        <p:spPr>
+          <a:xfrm>
+            <a:off x="4754880" y="978408"/>
+            <a:ext cx="3657600" cy="1005840"/>
           </a:xfrm>
           <a:prstGeom prst="rect">
             <a:avLst/>
@@ -3719,7 +4148,7 @@
               <a:buNone/>
             </a:pPr>
             <a:r>
-              <a:rPr lang="en-US" sz="1400" dirty="0">
+              <a:rPr lang="en-US" sz="1500" dirty="0">
                 <a:solidFill>
                   <a:srgbClr val="000000"/>
                 </a:solidFill>
@@ -3729,13 +4158,13 @@
               </a:rPr>
               <a:t>Come up with as many possible solutions as you can, even bad ones. Only after that, pick the best.</a:t>
             </a:r>
-            <a:endParaRPr lang="en-US" sz="1400" dirty="0"/>
-          </a:p>
-        </p:txBody>
-      </p:sp>
-      <p:sp>
-        <p:nvSpPr>
-          <p:cNvPr id="9" name="Text 6"/>
+            <a:endParaRPr lang="en-US" sz="1500" dirty="0"/>
+          </a:p>
+        </p:txBody>
+      </p:sp>
+      <p:sp>
+        <p:nvSpPr>
+          <p:cNvPr id="19" name="Text 16"/>
           <p:cNvSpPr txBox="1"/>
           <p:nvPr/>
         </p:nvSpPr>
@@ -3774,14 +4203,14 @@
       </p:sp>
       <p:sp>
         <p:nvSpPr>
-          <p:cNvPr id="10" name="Text 7"/>
-          <p:cNvSpPr txBox="1"/>
-          <p:nvPr/>
-        </p:nvSpPr>
-        <p:spPr>
-          <a:xfrm>
-            <a:off x="4754880" y="2331720"/>
-            <a:ext cx="3657600" cy="960120"/>
+          <p:cNvPr id="20" name="Text 17"/>
+          <p:cNvSpPr txBox="1"/>
+          <p:nvPr/>
+        </p:nvSpPr>
+        <p:spPr>
+          <a:xfrm>
+            <a:off x="4754880" y="2350008"/>
+            <a:ext cx="3657600" cy="1005840"/>
           </a:xfrm>
           <a:prstGeom prst="rect">
             <a:avLst/>
@@ -3797,7 +4226,7 @@
               <a:buNone/>
             </a:pPr>
             <a:r>
-              <a:rPr lang="en-US" sz="1400" dirty="0">
+              <a:rPr lang="en-US" sz="1500" dirty="0">
                 <a:solidFill>
                   <a:srgbClr val="000000"/>
                 </a:solidFill>
@@ -3807,13 +4236,13 @@
               </a:rPr>
               <a:t>What are all the ways we could solve this?</a:t>
             </a:r>
-            <a:endParaRPr lang="en-US" sz="1400" dirty="0"/>
-          </a:p>
-        </p:txBody>
-      </p:sp>
-      <p:sp>
-        <p:nvSpPr>
-          <p:cNvPr id="11" name="Text 8"/>
+            <a:endParaRPr lang="en-US" sz="1500" dirty="0"/>
+          </a:p>
+        </p:txBody>
+      </p:sp>
+      <p:sp>
+        <p:nvSpPr>
+          <p:cNvPr id="21" name="Text 18"/>
           <p:cNvSpPr txBox="1"/>
           <p:nvPr/>
         </p:nvSpPr>
@@ -3852,14 +4281,14 @@
       </p:sp>
       <p:sp>
         <p:nvSpPr>
-          <p:cNvPr id="12" name="Text 9"/>
-          <p:cNvSpPr txBox="1"/>
-          <p:nvPr/>
-        </p:nvSpPr>
-        <p:spPr>
-          <a:xfrm>
-            <a:off x="4754880" y="3703320"/>
-            <a:ext cx="3657600" cy="960120"/>
+          <p:cNvPr id="22" name="Text 19"/>
+          <p:cNvSpPr txBox="1"/>
+          <p:nvPr/>
+        </p:nvSpPr>
+        <p:spPr>
+          <a:xfrm>
+            <a:off x="4754880" y="3721608"/>
+            <a:ext cx="3657600" cy="1005840"/>
           </a:xfrm>
           <a:prstGeom prst="rect">
             <a:avLst/>
@@ -3875,7 +4304,7 @@
               <a:buNone/>
             </a:pPr>
             <a:r>
-              <a:rPr lang="en-US" sz="1400" dirty="0">
+              <a:rPr lang="en-US" sz="1500" dirty="0">
                 <a:solidFill>
                   <a:srgbClr val="000000"/>
                 </a:solidFill>
@@ -3885,7 +4314,7 @@
               </a:rPr>
               <a:t>listed six different ideas, tested the promising ones, and dropped four with honest reasons.</a:t>
             </a:r>
-            <a:endParaRPr lang="en-US" sz="1400" dirty="0"/>
+            <a:endParaRPr lang="en-US" sz="1500" dirty="0"/>
           </a:p>
         </p:txBody>
       </p:sp>
@@ -5725,8 +6154,8 @@
         </p:nvSpPr>
         <p:spPr>
           <a:xfrm>
-            <a:off x="548640" y="2697480"/>
-            <a:ext cx="3474720" cy="914400"/>
+            <a:off x="548640" y="2560320"/>
+            <a:ext cx="3474720" cy="640080"/>
           </a:xfrm>
           <a:prstGeom prst="rect">
             <a:avLst/>
@@ -5742,7 +6171,7 @@
               <a:buNone/>
             </a:pPr>
             <a:r>
-              <a:rPr lang="en-US" sz="1800" i="1" dirty="0">
+              <a:rPr lang="en-US" sz="1600" i="1" dirty="0">
                 <a:solidFill>
                   <a:srgbClr val="BFBFBF"/>
                 </a:solidFill>
@@ -5752,13 +6181,403 @@
               </a:rPr>
               <a:t>Build it fast, build it real.</a:t>
             </a:r>
-            <a:endParaRPr lang="en-US" sz="1800" dirty="0"/>
-          </a:p>
-        </p:txBody>
-      </p:sp>
-      <p:sp>
-        <p:nvSpPr>
-          <p:cNvPr id="6" name="Shape 3"/>
+            <a:endParaRPr lang="en-US" sz="1600" dirty="0"/>
+          </a:p>
+        </p:txBody>
+      </p:sp>
+      <p:sp>
+        <p:nvSpPr>
+          <p:cNvPr id="6" name="Text 3"/>
+          <p:cNvSpPr txBox="1"/>
+          <p:nvPr/>
+        </p:nvSpPr>
+        <p:spPr>
+          <a:xfrm>
+            <a:off x="548640" y="3429000"/>
+            <a:ext cx="457200" cy="256032"/>
+          </a:xfrm>
+          <a:prstGeom prst="rect">
+            <a:avLst/>
+          </a:prstGeom>
+          <a:noFill/>
+          <a:ln/>
+        </p:spPr>
+        <p:txBody>
+          <a:bodyPr wrap="square" lIns="0" tIns="0" rIns="0" bIns="0" rtlCol="0" anchor="ctr"/>
+          <a:lstStyle/>
+          <a:p>
+            <a:pPr indent="0" marL="0">
+              <a:buNone/>
+            </a:pPr>
+            <a:r>
+              <a:rPr lang="en-US" sz="1200" b="1" dirty="0">
+                <a:solidFill>
+                  <a:srgbClr val="595959"/>
+                </a:solidFill>
+                <a:latin typeface="Arial" pitchFamily="34" charset="0"/>
+                <a:ea typeface="Arial" pitchFamily="34" charset="-122"/>
+                <a:cs typeface="Arial" pitchFamily="34" charset="-120"/>
+              </a:rPr>
+              <a:t>01</a:t>
+            </a:r>
+            <a:endParaRPr lang="en-US" sz="1200" dirty="0"/>
+          </a:p>
+        </p:txBody>
+      </p:sp>
+      <p:sp>
+        <p:nvSpPr>
+          <p:cNvPr id="7" name="Text 4"/>
+          <p:cNvSpPr txBox="1"/>
+          <p:nvPr/>
+        </p:nvSpPr>
+        <p:spPr>
+          <a:xfrm>
+            <a:off x="1005840" y="3429000"/>
+            <a:ext cx="2743200" cy="256032"/>
+          </a:xfrm>
+          <a:prstGeom prst="rect">
+            <a:avLst/>
+          </a:prstGeom>
+          <a:noFill/>
+          <a:ln/>
+        </p:spPr>
+        <p:txBody>
+          <a:bodyPr wrap="square" lIns="0" tIns="0" rIns="0" bIns="0" rtlCol="0" anchor="ctr"/>
+          <a:lstStyle/>
+          <a:p>
+            <a:pPr indent="0" marL="0">
+              <a:buNone/>
+            </a:pPr>
+            <a:r>
+              <a:rPr lang="en-US" sz="1200" dirty="0">
+                <a:solidFill>
+                  <a:srgbClr val="595959"/>
+                </a:solidFill>
+                <a:latin typeface="Arial" pitchFamily="34" charset="0"/>
+                <a:ea typeface="Arial" pitchFamily="34" charset="-122"/>
+                <a:cs typeface="Arial" pitchFamily="34" charset="-120"/>
+              </a:rPr>
+              <a:t>Empathize</a:t>
+            </a:r>
+            <a:endParaRPr lang="en-US" sz="1200" dirty="0"/>
+          </a:p>
+        </p:txBody>
+      </p:sp>
+      <p:sp>
+        <p:nvSpPr>
+          <p:cNvPr id="8" name="Text 5"/>
+          <p:cNvSpPr txBox="1"/>
+          <p:nvPr/>
+        </p:nvSpPr>
+        <p:spPr>
+          <a:xfrm>
+            <a:off x="548640" y="3685032"/>
+            <a:ext cx="457200" cy="256032"/>
+          </a:xfrm>
+          <a:prstGeom prst="rect">
+            <a:avLst/>
+          </a:prstGeom>
+          <a:noFill/>
+          <a:ln/>
+        </p:spPr>
+        <p:txBody>
+          <a:bodyPr wrap="square" lIns="0" tIns="0" rIns="0" bIns="0" rtlCol="0" anchor="ctr"/>
+          <a:lstStyle/>
+          <a:p>
+            <a:pPr indent="0" marL="0">
+              <a:buNone/>
+            </a:pPr>
+            <a:r>
+              <a:rPr lang="en-US" sz="1200" b="1" dirty="0">
+                <a:solidFill>
+                  <a:srgbClr val="595959"/>
+                </a:solidFill>
+                <a:latin typeface="Arial" pitchFamily="34" charset="0"/>
+                <a:ea typeface="Arial" pitchFamily="34" charset="-122"/>
+                <a:cs typeface="Arial" pitchFamily="34" charset="-120"/>
+              </a:rPr>
+              <a:t>02</a:t>
+            </a:r>
+            <a:endParaRPr lang="en-US" sz="1200" dirty="0"/>
+          </a:p>
+        </p:txBody>
+      </p:sp>
+      <p:sp>
+        <p:nvSpPr>
+          <p:cNvPr id="9" name="Text 6"/>
+          <p:cNvSpPr txBox="1"/>
+          <p:nvPr/>
+        </p:nvSpPr>
+        <p:spPr>
+          <a:xfrm>
+            <a:off x="1005840" y="3685032"/>
+            <a:ext cx="2743200" cy="256032"/>
+          </a:xfrm>
+          <a:prstGeom prst="rect">
+            <a:avLst/>
+          </a:prstGeom>
+          <a:noFill/>
+          <a:ln/>
+        </p:spPr>
+        <p:txBody>
+          <a:bodyPr wrap="square" lIns="0" tIns="0" rIns="0" bIns="0" rtlCol="0" anchor="ctr"/>
+          <a:lstStyle/>
+          <a:p>
+            <a:pPr indent="0" marL="0">
+              <a:buNone/>
+            </a:pPr>
+            <a:r>
+              <a:rPr lang="en-US" sz="1200" dirty="0">
+                <a:solidFill>
+                  <a:srgbClr val="595959"/>
+                </a:solidFill>
+                <a:latin typeface="Arial" pitchFamily="34" charset="0"/>
+                <a:ea typeface="Arial" pitchFamily="34" charset="-122"/>
+                <a:cs typeface="Arial" pitchFamily="34" charset="-120"/>
+              </a:rPr>
+              <a:t>Define</a:t>
+            </a:r>
+            <a:endParaRPr lang="en-US" sz="1200" dirty="0"/>
+          </a:p>
+        </p:txBody>
+      </p:sp>
+      <p:sp>
+        <p:nvSpPr>
+          <p:cNvPr id="10" name="Text 7"/>
+          <p:cNvSpPr txBox="1"/>
+          <p:nvPr/>
+        </p:nvSpPr>
+        <p:spPr>
+          <a:xfrm>
+            <a:off x="548640" y="3941064"/>
+            <a:ext cx="457200" cy="256032"/>
+          </a:xfrm>
+          <a:prstGeom prst="rect">
+            <a:avLst/>
+          </a:prstGeom>
+          <a:noFill/>
+          <a:ln/>
+        </p:spPr>
+        <p:txBody>
+          <a:bodyPr wrap="square" lIns="0" tIns="0" rIns="0" bIns="0" rtlCol="0" anchor="ctr"/>
+          <a:lstStyle/>
+          <a:p>
+            <a:pPr indent="0" marL="0">
+              <a:buNone/>
+            </a:pPr>
+            <a:r>
+              <a:rPr lang="en-US" sz="1200" b="1" dirty="0">
+                <a:solidFill>
+                  <a:srgbClr val="595959"/>
+                </a:solidFill>
+                <a:latin typeface="Arial" pitchFamily="34" charset="0"/>
+                <a:ea typeface="Arial" pitchFamily="34" charset="-122"/>
+                <a:cs typeface="Arial" pitchFamily="34" charset="-120"/>
+              </a:rPr>
+              <a:t>03</a:t>
+            </a:r>
+            <a:endParaRPr lang="en-US" sz="1200" dirty="0"/>
+          </a:p>
+        </p:txBody>
+      </p:sp>
+      <p:sp>
+        <p:nvSpPr>
+          <p:cNvPr id="11" name="Text 8"/>
+          <p:cNvSpPr txBox="1"/>
+          <p:nvPr/>
+        </p:nvSpPr>
+        <p:spPr>
+          <a:xfrm>
+            <a:off x="1005840" y="3941064"/>
+            <a:ext cx="2743200" cy="256032"/>
+          </a:xfrm>
+          <a:prstGeom prst="rect">
+            <a:avLst/>
+          </a:prstGeom>
+          <a:noFill/>
+          <a:ln/>
+        </p:spPr>
+        <p:txBody>
+          <a:bodyPr wrap="square" lIns="0" tIns="0" rIns="0" bIns="0" rtlCol="0" anchor="ctr"/>
+          <a:lstStyle/>
+          <a:p>
+            <a:pPr indent="0" marL="0">
+              <a:buNone/>
+            </a:pPr>
+            <a:r>
+              <a:rPr lang="en-US" sz="1200" dirty="0">
+                <a:solidFill>
+                  <a:srgbClr val="595959"/>
+                </a:solidFill>
+                <a:latin typeface="Arial" pitchFamily="34" charset="0"/>
+                <a:ea typeface="Arial" pitchFamily="34" charset="-122"/>
+                <a:cs typeface="Arial" pitchFamily="34" charset="-120"/>
+              </a:rPr>
+              <a:t>Ideate</a:t>
+            </a:r>
+            <a:endParaRPr lang="en-US" sz="1200" dirty="0"/>
+          </a:p>
+        </p:txBody>
+      </p:sp>
+      <p:sp>
+        <p:nvSpPr>
+          <p:cNvPr id="12" name="Text 9"/>
+          <p:cNvSpPr txBox="1"/>
+          <p:nvPr/>
+        </p:nvSpPr>
+        <p:spPr>
+          <a:xfrm>
+            <a:off x="548640" y="4197096"/>
+            <a:ext cx="457200" cy="256032"/>
+          </a:xfrm>
+          <a:prstGeom prst="rect">
+            <a:avLst/>
+          </a:prstGeom>
+          <a:noFill/>
+          <a:ln/>
+        </p:spPr>
+        <p:txBody>
+          <a:bodyPr wrap="square" lIns="0" tIns="0" rIns="0" bIns="0" rtlCol="0" anchor="ctr"/>
+          <a:lstStyle/>
+          <a:p>
+            <a:pPr indent="0" marL="0">
+              <a:buNone/>
+            </a:pPr>
+            <a:r>
+              <a:rPr lang="en-US" sz="1200" b="1" dirty="0">
+                <a:solidFill>
+                  <a:srgbClr val="FFFFFF"/>
+                </a:solidFill>
+                <a:latin typeface="Arial" pitchFamily="34" charset="0"/>
+                <a:ea typeface="Arial" pitchFamily="34" charset="-122"/>
+                <a:cs typeface="Arial" pitchFamily="34" charset="-120"/>
+              </a:rPr>
+              <a:t>04</a:t>
+            </a:r>
+            <a:endParaRPr lang="en-US" sz="1200" dirty="0"/>
+          </a:p>
+        </p:txBody>
+      </p:sp>
+      <p:sp>
+        <p:nvSpPr>
+          <p:cNvPr id="13" name="Text 10"/>
+          <p:cNvSpPr txBox="1"/>
+          <p:nvPr/>
+        </p:nvSpPr>
+        <p:spPr>
+          <a:xfrm>
+            <a:off x="1005840" y="4197096"/>
+            <a:ext cx="2743200" cy="256032"/>
+          </a:xfrm>
+          <a:prstGeom prst="rect">
+            <a:avLst/>
+          </a:prstGeom>
+          <a:noFill/>
+          <a:ln/>
+        </p:spPr>
+        <p:txBody>
+          <a:bodyPr wrap="square" lIns="0" tIns="0" rIns="0" bIns="0" rtlCol="0" anchor="ctr"/>
+          <a:lstStyle/>
+          <a:p>
+            <a:pPr indent="0" marL="0">
+              <a:buNone/>
+            </a:pPr>
+            <a:r>
+              <a:rPr lang="en-US" sz="1200" b="1" dirty="0">
+                <a:solidFill>
+                  <a:srgbClr val="FFFFFF"/>
+                </a:solidFill>
+                <a:latin typeface="Arial" pitchFamily="34" charset="0"/>
+                <a:ea typeface="Arial" pitchFamily="34" charset="-122"/>
+                <a:cs typeface="Arial" pitchFamily="34" charset="-120"/>
+              </a:rPr>
+              <a:t>Prototype</a:t>
+            </a:r>
+            <a:endParaRPr lang="en-US" sz="1200" dirty="0"/>
+          </a:p>
+        </p:txBody>
+      </p:sp>
+      <p:sp>
+        <p:nvSpPr>
+          <p:cNvPr id="14" name="Text 11"/>
+          <p:cNvSpPr txBox="1"/>
+          <p:nvPr/>
+        </p:nvSpPr>
+        <p:spPr>
+          <a:xfrm>
+            <a:off x="548640" y="4453128"/>
+            <a:ext cx="457200" cy="256032"/>
+          </a:xfrm>
+          <a:prstGeom prst="rect">
+            <a:avLst/>
+          </a:prstGeom>
+          <a:noFill/>
+          <a:ln/>
+        </p:spPr>
+        <p:txBody>
+          <a:bodyPr wrap="square" lIns="0" tIns="0" rIns="0" bIns="0" rtlCol="0" anchor="ctr"/>
+          <a:lstStyle/>
+          <a:p>
+            <a:pPr indent="0" marL="0">
+              <a:buNone/>
+            </a:pPr>
+            <a:r>
+              <a:rPr lang="en-US" sz="1200" b="1" dirty="0">
+                <a:solidFill>
+                  <a:srgbClr val="595959"/>
+                </a:solidFill>
+                <a:latin typeface="Arial" pitchFamily="34" charset="0"/>
+                <a:ea typeface="Arial" pitchFamily="34" charset="-122"/>
+                <a:cs typeface="Arial" pitchFamily="34" charset="-120"/>
+              </a:rPr>
+              <a:t>05</a:t>
+            </a:r>
+            <a:endParaRPr lang="en-US" sz="1200" dirty="0"/>
+          </a:p>
+        </p:txBody>
+      </p:sp>
+      <p:sp>
+        <p:nvSpPr>
+          <p:cNvPr id="15" name="Text 12"/>
+          <p:cNvSpPr txBox="1"/>
+          <p:nvPr/>
+        </p:nvSpPr>
+        <p:spPr>
+          <a:xfrm>
+            <a:off x="1005840" y="4453128"/>
+            <a:ext cx="2743200" cy="256032"/>
+          </a:xfrm>
+          <a:prstGeom prst="rect">
+            <a:avLst/>
+          </a:prstGeom>
+          <a:noFill/>
+          <a:ln/>
+        </p:spPr>
+        <p:txBody>
+          <a:bodyPr wrap="square" lIns="0" tIns="0" rIns="0" bIns="0" rtlCol="0" anchor="ctr"/>
+          <a:lstStyle/>
+          <a:p>
+            <a:pPr indent="0" marL="0">
+              <a:buNone/>
+            </a:pPr>
+            <a:r>
+              <a:rPr lang="en-US" sz="1200" dirty="0">
+                <a:solidFill>
+                  <a:srgbClr val="595959"/>
+                </a:solidFill>
+                <a:latin typeface="Arial" pitchFamily="34" charset="0"/>
+                <a:ea typeface="Arial" pitchFamily="34" charset="-122"/>
+                <a:cs typeface="Arial" pitchFamily="34" charset="-120"/>
+              </a:rPr>
+              <a:t>Test</a:t>
+            </a:r>
+            <a:endParaRPr lang="en-US" sz="1200" dirty="0"/>
+          </a:p>
+        </p:txBody>
+      </p:sp>
+      <p:sp>
+        <p:nvSpPr>
+          <p:cNvPr id="16" name="Shape 13"/>
           <p:cNvSpPr/>
           <p:nvPr/>
         </p:nvSpPr>
@@ -5783,7 +6602,7 @@
       </p:sp>
       <p:sp>
         <p:nvSpPr>
-          <p:cNvPr id="7" name="Text 4"/>
+          <p:cNvPr id="17" name="Text 14"/>
           <p:cNvSpPr txBox="1"/>
           <p:nvPr/>
         </p:nvSpPr>
@@ -5822,14 +6641,14 @@
       </p:sp>
       <p:sp>
         <p:nvSpPr>
-          <p:cNvPr id="8" name="Text 5"/>
-          <p:cNvSpPr txBox="1"/>
-          <p:nvPr/>
-        </p:nvSpPr>
-        <p:spPr>
-          <a:xfrm>
-            <a:off x="4754880" y="960120"/>
-            <a:ext cx="3657600" cy="960120"/>
+          <p:cNvPr id="18" name="Text 15"/>
+          <p:cNvSpPr txBox="1"/>
+          <p:nvPr/>
+        </p:nvSpPr>
+        <p:spPr>
+          <a:xfrm>
+            <a:off x="4754880" y="978408"/>
+            <a:ext cx="3657600" cy="1005840"/>
           </a:xfrm>
           <a:prstGeom prst="rect">
             <a:avLst/>
@@ -5845,7 +6664,7 @@
               <a:buNone/>
             </a:pPr>
             <a:r>
-              <a:rPr lang="en-US" sz="1400" dirty="0">
+              <a:rPr lang="en-US" sz="1500" dirty="0">
                 <a:solidFill>
                   <a:srgbClr val="000000"/>
                 </a:solidFill>
@@ -5855,13 +6674,13 @@
               </a:rPr>
               <a:t>Make the idea into something people can actually use, quickly and cheaply, so you can learn from it.</a:t>
             </a:r>
-            <a:endParaRPr lang="en-US" sz="1400" dirty="0"/>
-          </a:p>
-        </p:txBody>
-      </p:sp>
-      <p:sp>
-        <p:nvSpPr>
-          <p:cNvPr id="9" name="Text 6"/>
+            <a:endParaRPr lang="en-US" sz="1500" dirty="0"/>
+          </a:p>
+        </p:txBody>
+      </p:sp>
+      <p:sp>
+        <p:nvSpPr>
+          <p:cNvPr id="19" name="Text 16"/>
           <p:cNvSpPr txBox="1"/>
           <p:nvPr/>
         </p:nvSpPr>
@@ -5900,14 +6719,14 @@
       </p:sp>
       <p:sp>
         <p:nvSpPr>
-          <p:cNvPr id="10" name="Text 7"/>
-          <p:cNvSpPr txBox="1"/>
-          <p:nvPr/>
-        </p:nvSpPr>
-        <p:spPr>
-          <a:xfrm>
-            <a:off x="4754880" y="2331720"/>
-            <a:ext cx="3657600" cy="960120"/>
+          <p:cNvPr id="20" name="Text 17"/>
+          <p:cNvSpPr txBox="1"/>
+          <p:nvPr/>
+        </p:nvSpPr>
+        <p:spPr>
+          <a:xfrm>
+            <a:off x="4754880" y="2350008"/>
+            <a:ext cx="3657600" cy="1005840"/>
           </a:xfrm>
           <a:prstGeom prst="rect">
             <a:avLst/>
@@ -5923,7 +6742,7 @@
               <a:buNone/>
             </a:pPr>
             <a:r>
-              <a:rPr lang="en-US" sz="1400" dirty="0">
+              <a:rPr lang="en-US" sz="1500" dirty="0">
                 <a:solidFill>
                   <a:srgbClr val="000000"/>
                 </a:solidFill>
@@ -5933,13 +6752,13 @@
               </a:rPr>
               <a:t>Can we build a working version to try?</a:t>
             </a:r>
-            <a:endParaRPr lang="en-US" sz="1400" dirty="0"/>
-          </a:p>
-        </p:txBody>
-      </p:sp>
-      <p:sp>
-        <p:nvSpPr>
-          <p:cNvPr id="11" name="Text 8"/>
+            <a:endParaRPr lang="en-US" sz="1500" dirty="0"/>
+          </a:p>
+        </p:txBody>
+      </p:sp>
+      <p:sp>
+        <p:nvSpPr>
+          <p:cNvPr id="21" name="Text 18"/>
           <p:cNvSpPr txBox="1"/>
           <p:nvPr/>
         </p:nvSpPr>
@@ -5978,14 +6797,14 @@
       </p:sp>
       <p:sp>
         <p:nvSpPr>
-          <p:cNvPr id="12" name="Text 9"/>
-          <p:cNvSpPr txBox="1"/>
-          <p:nvPr/>
-        </p:nvSpPr>
-        <p:spPr>
-          <a:xfrm>
-            <a:off x="4754880" y="3703320"/>
-            <a:ext cx="3657600" cy="960120"/>
+          <p:cNvPr id="22" name="Text 19"/>
+          <p:cNvSpPr txBox="1"/>
+          <p:nvPr/>
+        </p:nvSpPr>
+        <p:spPr>
+          <a:xfrm>
+            <a:off x="4754880" y="3721608"/>
+            <a:ext cx="3657600" cy="1005840"/>
           </a:xfrm>
           <a:prstGeom prst="rect">
             <a:avLst/>
@@ -6001,7 +6820,7 @@
               <a:buNone/>
             </a:pPr>
             <a:r>
-              <a:rPr lang="en-US" sz="1400" dirty="0">
+              <a:rPr lang="en-US" sz="1500" dirty="0">
                 <a:solidFill>
                   <a:srgbClr val="000000"/>
                 </a:solidFill>
@@ -6011,7 +6830,7 @@
               </a:rPr>
               <a:t>built a working proxy, a command line tool and a desktop app, not just a mock-up.</a:t>
             </a:r>
-            <a:endParaRPr lang="en-US" sz="1400" dirty="0"/>
+            <a:endParaRPr lang="en-US" sz="1500" dirty="0"/>
           </a:p>
         </p:txBody>
       </p:sp>
@@ -7581,8 +8400,8 @@
         </p:nvSpPr>
         <p:spPr>
           <a:xfrm>
-            <a:off x="548640" y="2697480"/>
-            <a:ext cx="3474720" cy="914400"/>
+            <a:off x="548640" y="2560320"/>
+            <a:ext cx="3474720" cy="640080"/>
           </a:xfrm>
           <a:prstGeom prst="rect">
             <a:avLst/>
@@ -7598,7 +8417,7 @@
               <a:buNone/>
             </a:pPr>
             <a:r>
-              <a:rPr lang="en-US" sz="1800" i="1" dirty="0">
+              <a:rPr lang="en-US" sz="1600" i="1" dirty="0">
                 <a:solidFill>
                   <a:srgbClr val="BFBFBF"/>
                 </a:solidFill>
@@ -7608,13 +8427,403 @@
               </a:rPr>
               <a:t>Measure honestly, even the bad news.</a:t>
             </a:r>
-            <a:endParaRPr lang="en-US" sz="1800" dirty="0"/>
-          </a:p>
-        </p:txBody>
-      </p:sp>
-      <p:sp>
-        <p:nvSpPr>
-          <p:cNvPr id="6" name="Shape 3"/>
+            <a:endParaRPr lang="en-US" sz="1600" dirty="0"/>
+          </a:p>
+        </p:txBody>
+      </p:sp>
+      <p:sp>
+        <p:nvSpPr>
+          <p:cNvPr id="6" name="Text 3"/>
+          <p:cNvSpPr txBox="1"/>
+          <p:nvPr/>
+        </p:nvSpPr>
+        <p:spPr>
+          <a:xfrm>
+            <a:off x="548640" y="3429000"/>
+            <a:ext cx="457200" cy="256032"/>
+          </a:xfrm>
+          <a:prstGeom prst="rect">
+            <a:avLst/>
+          </a:prstGeom>
+          <a:noFill/>
+          <a:ln/>
+        </p:spPr>
+        <p:txBody>
+          <a:bodyPr wrap="square" lIns="0" tIns="0" rIns="0" bIns="0" rtlCol="0" anchor="ctr"/>
+          <a:lstStyle/>
+          <a:p>
+            <a:pPr indent="0" marL="0">
+              <a:buNone/>
+            </a:pPr>
+            <a:r>
+              <a:rPr lang="en-US" sz="1200" b="1" dirty="0">
+                <a:solidFill>
+                  <a:srgbClr val="595959"/>
+                </a:solidFill>
+                <a:latin typeface="Arial" pitchFamily="34" charset="0"/>
+                <a:ea typeface="Arial" pitchFamily="34" charset="-122"/>
+                <a:cs typeface="Arial" pitchFamily="34" charset="-120"/>
+              </a:rPr>
+              <a:t>01</a:t>
+            </a:r>
+            <a:endParaRPr lang="en-US" sz="1200" dirty="0"/>
+          </a:p>
+        </p:txBody>
+      </p:sp>
+      <p:sp>
+        <p:nvSpPr>
+          <p:cNvPr id="7" name="Text 4"/>
+          <p:cNvSpPr txBox="1"/>
+          <p:nvPr/>
+        </p:nvSpPr>
+        <p:spPr>
+          <a:xfrm>
+            <a:off x="1005840" y="3429000"/>
+            <a:ext cx="2743200" cy="256032"/>
+          </a:xfrm>
+          <a:prstGeom prst="rect">
+            <a:avLst/>
+          </a:prstGeom>
+          <a:noFill/>
+          <a:ln/>
+        </p:spPr>
+        <p:txBody>
+          <a:bodyPr wrap="square" lIns="0" tIns="0" rIns="0" bIns="0" rtlCol="0" anchor="ctr"/>
+          <a:lstStyle/>
+          <a:p>
+            <a:pPr indent="0" marL="0">
+              <a:buNone/>
+            </a:pPr>
+            <a:r>
+              <a:rPr lang="en-US" sz="1200" dirty="0">
+                <a:solidFill>
+                  <a:srgbClr val="595959"/>
+                </a:solidFill>
+                <a:latin typeface="Arial" pitchFamily="34" charset="0"/>
+                <a:ea typeface="Arial" pitchFamily="34" charset="-122"/>
+                <a:cs typeface="Arial" pitchFamily="34" charset="-120"/>
+              </a:rPr>
+              <a:t>Empathize</a:t>
+            </a:r>
+            <a:endParaRPr lang="en-US" sz="1200" dirty="0"/>
+          </a:p>
+        </p:txBody>
+      </p:sp>
+      <p:sp>
+        <p:nvSpPr>
+          <p:cNvPr id="8" name="Text 5"/>
+          <p:cNvSpPr txBox="1"/>
+          <p:nvPr/>
+        </p:nvSpPr>
+        <p:spPr>
+          <a:xfrm>
+            <a:off x="548640" y="3685032"/>
+            <a:ext cx="457200" cy="256032"/>
+          </a:xfrm>
+          <a:prstGeom prst="rect">
+            <a:avLst/>
+          </a:prstGeom>
+          <a:noFill/>
+          <a:ln/>
+        </p:spPr>
+        <p:txBody>
+          <a:bodyPr wrap="square" lIns="0" tIns="0" rIns="0" bIns="0" rtlCol="0" anchor="ctr"/>
+          <a:lstStyle/>
+          <a:p>
+            <a:pPr indent="0" marL="0">
+              <a:buNone/>
+            </a:pPr>
+            <a:r>
+              <a:rPr lang="en-US" sz="1200" b="1" dirty="0">
+                <a:solidFill>
+                  <a:srgbClr val="595959"/>
+                </a:solidFill>
+                <a:latin typeface="Arial" pitchFamily="34" charset="0"/>
+                <a:ea typeface="Arial" pitchFamily="34" charset="-122"/>
+                <a:cs typeface="Arial" pitchFamily="34" charset="-120"/>
+              </a:rPr>
+              <a:t>02</a:t>
+            </a:r>
+            <a:endParaRPr lang="en-US" sz="1200" dirty="0"/>
+          </a:p>
+        </p:txBody>
+      </p:sp>
+      <p:sp>
+        <p:nvSpPr>
+          <p:cNvPr id="9" name="Text 6"/>
+          <p:cNvSpPr txBox="1"/>
+          <p:nvPr/>
+        </p:nvSpPr>
+        <p:spPr>
+          <a:xfrm>
+            <a:off x="1005840" y="3685032"/>
+            <a:ext cx="2743200" cy="256032"/>
+          </a:xfrm>
+          <a:prstGeom prst="rect">
+            <a:avLst/>
+          </a:prstGeom>
+          <a:noFill/>
+          <a:ln/>
+        </p:spPr>
+        <p:txBody>
+          <a:bodyPr wrap="square" lIns="0" tIns="0" rIns="0" bIns="0" rtlCol="0" anchor="ctr"/>
+          <a:lstStyle/>
+          <a:p>
+            <a:pPr indent="0" marL="0">
+              <a:buNone/>
+            </a:pPr>
+            <a:r>
+              <a:rPr lang="en-US" sz="1200" dirty="0">
+                <a:solidFill>
+                  <a:srgbClr val="595959"/>
+                </a:solidFill>
+                <a:latin typeface="Arial" pitchFamily="34" charset="0"/>
+                <a:ea typeface="Arial" pitchFamily="34" charset="-122"/>
+                <a:cs typeface="Arial" pitchFamily="34" charset="-120"/>
+              </a:rPr>
+              <a:t>Define</a:t>
+            </a:r>
+            <a:endParaRPr lang="en-US" sz="1200" dirty="0"/>
+          </a:p>
+        </p:txBody>
+      </p:sp>
+      <p:sp>
+        <p:nvSpPr>
+          <p:cNvPr id="10" name="Text 7"/>
+          <p:cNvSpPr txBox="1"/>
+          <p:nvPr/>
+        </p:nvSpPr>
+        <p:spPr>
+          <a:xfrm>
+            <a:off x="548640" y="3941064"/>
+            <a:ext cx="457200" cy="256032"/>
+          </a:xfrm>
+          <a:prstGeom prst="rect">
+            <a:avLst/>
+          </a:prstGeom>
+          <a:noFill/>
+          <a:ln/>
+        </p:spPr>
+        <p:txBody>
+          <a:bodyPr wrap="square" lIns="0" tIns="0" rIns="0" bIns="0" rtlCol="0" anchor="ctr"/>
+          <a:lstStyle/>
+          <a:p>
+            <a:pPr indent="0" marL="0">
+              <a:buNone/>
+            </a:pPr>
+            <a:r>
+              <a:rPr lang="en-US" sz="1200" b="1" dirty="0">
+                <a:solidFill>
+                  <a:srgbClr val="595959"/>
+                </a:solidFill>
+                <a:latin typeface="Arial" pitchFamily="34" charset="0"/>
+                <a:ea typeface="Arial" pitchFamily="34" charset="-122"/>
+                <a:cs typeface="Arial" pitchFamily="34" charset="-120"/>
+              </a:rPr>
+              <a:t>03</a:t>
+            </a:r>
+            <a:endParaRPr lang="en-US" sz="1200" dirty="0"/>
+          </a:p>
+        </p:txBody>
+      </p:sp>
+      <p:sp>
+        <p:nvSpPr>
+          <p:cNvPr id="11" name="Text 8"/>
+          <p:cNvSpPr txBox="1"/>
+          <p:nvPr/>
+        </p:nvSpPr>
+        <p:spPr>
+          <a:xfrm>
+            <a:off x="1005840" y="3941064"/>
+            <a:ext cx="2743200" cy="256032"/>
+          </a:xfrm>
+          <a:prstGeom prst="rect">
+            <a:avLst/>
+          </a:prstGeom>
+          <a:noFill/>
+          <a:ln/>
+        </p:spPr>
+        <p:txBody>
+          <a:bodyPr wrap="square" lIns="0" tIns="0" rIns="0" bIns="0" rtlCol="0" anchor="ctr"/>
+          <a:lstStyle/>
+          <a:p>
+            <a:pPr indent="0" marL="0">
+              <a:buNone/>
+            </a:pPr>
+            <a:r>
+              <a:rPr lang="en-US" sz="1200" dirty="0">
+                <a:solidFill>
+                  <a:srgbClr val="595959"/>
+                </a:solidFill>
+                <a:latin typeface="Arial" pitchFamily="34" charset="0"/>
+                <a:ea typeface="Arial" pitchFamily="34" charset="-122"/>
+                <a:cs typeface="Arial" pitchFamily="34" charset="-120"/>
+              </a:rPr>
+              <a:t>Ideate</a:t>
+            </a:r>
+            <a:endParaRPr lang="en-US" sz="1200" dirty="0"/>
+          </a:p>
+        </p:txBody>
+      </p:sp>
+      <p:sp>
+        <p:nvSpPr>
+          <p:cNvPr id="12" name="Text 9"/>
+          <p:cNvSpPr txBox="1"/>
+          <p:nvPr/>
+        </p:nvSpPr>
+        <p:spPr>
+          <a:xfrm>
+            <a:off x="548640" y="4197096"/>
+            <a:ext cx="457200" cy="256032"/>
+          </a:xfrm>
+          <a:prstGeom prst="rect">
+            <a:avLst/>
+          </a:prstGeom>
+          <a:noFill/>
+          <a:ln/>
+        </p:spPr>
+        <p:txBody>
+          <a:bodyPr wrap="square" lIns="0" tIns="0" rIns="0" bIns="0" rtlCol="0" anchor="ctr"/>
+          <a:lstStyle/>
+          <a:p>
+            <a:pPr indent="0" marL="0">
+              <a:buNone/>
+            </a:pPr>
+            <a:r>
+              <a:rPr lang="en-US" sz="1200" b="1" dirty="0">
+                <a:solidFill>
+                  <a:srgbClr val="595959"/>
+                </a:solidFill>
+                <a:latin typeface="Arial" pitchFamily="34" charset="0"/>
+                <a:ea typeface="Arial" pitchFamily="34" charset="-122"/>
+                <a:cs typeface="Arial" pitchFamily="34" charset="-120"/>
+              </a:rPr>
+              <a:t>04</a:t>
+            </a:r>
+            <a:endParaRPr lang="en-US" sz="1200" dirty="0"/>
+          </a:p>
+        </p:txBody>
+      </p:sp>
+      <p:sp>
+        <p:nvSpPr>
+          <p:cNvPr id="13" name="Text 10"/>
+          <p:cNvSpPr txBox="1"/>
+          <p:nvPr/>
+        </p:nvSpPr>
+        <p:spPr>
+          <a:xfrm>
+            <a:off x="1005840" y="4197096"/>
+            <a:ext cx="2743200" cy="256032"/>
+          </a:xfrm>
+          <a:prstGeom prst="rect">
+            <a:avLst/>
+          </a:prstGeom>
+          <a:noFill/>
+          <a:ln/>
+        </p:spPr>
+        <p:txBody>
+          <a:bodyPr wrap="square" lIns="0" tIns="0" rIns="0" bIns="0" rtlCol="0" anchor="ctr"/>
+          <a:lstStyle/>
+          <a:p>
+            <a:pPr indent="0" marL="0">
+              <a:buNone/>
+            </a:pPr>
+            <a:r>
+              <a:rPr lang="en-US" sz="1200" dirty="0">
+                <a:solidFill>
+                  <a:srgbClr val="595959"/>
+                </a:solidFill>
+                <a:latin typeface="Arial" pitchFamily="34" charset="0"/>
+                <a:ea typeface="Arial" pitchFamily="34" charset="-122"/>
+                <a:cs typeface="Arial" pitchFamily="34" charset="-120"/>
+              </a:rPr>
+              <a:t>Prototype</a:t>
+            </a:r>
+            <a:endParaRPr lang="en-US" sz="1200" dirty="0"/>
+          </a:p>
+        </p:txBody>
+      </p:sp>
+      <p:sp>
+        <p:nvSpPr>
+          <p:cNvPr id="14" name="Text 11"/>
+          <p:cNvSpPr txBox="1"/>
+          <p:nvPr/>
+        </p:nvSpPr>
+        <p:spPr>
+          <a:xfrm>
+            <a:off x="548640" y="4453128"/>
+            <a:ext cx="457200" cy="256032"/>
+          </a:xfrm>
+          <a:prstGeom prst="rect">
+            <a:avLst/>
+          </a:prstGeom>
+          <a:noFill/>
+          <a:ln/>
+        </p:spPr>
+        <p:txBody>
+          <a:bodyPr wrap="square" lIns="0" tIns="0" rIns="0" bIns="0" rtlCol="0" anchor="ctr"/>
+          <a:lstStyle/>
+          <a:p>
+            <a:pPr indent="0" marL="0">
+              <a:buNone/>
+            </a:pPr>
+            <a:r>
+              <a:rPr lang="en-US" sz="1200" b="1" dirty="0">
+                <a:solidFill>
+                  <a:srgbClr val="FFFFFF"/>
+                </a:solidFill>
+                <a:latin typeface="Arial" pitchFamily="34" charset="0"/>
+                <a:ea typeface="Arial" pitchFamily="34" charset="-122"/>
+                <a:cs typeface="Arial" pitchFamily="34" charset="-120"/>
+              </a:rPr>
+              <a:t>05</a:t>
+            </a:r>
+            <a:endParaRPr lang="en-US" sz="1200" dirty="0"/>
+          </a:p>
+        </p:txBody>
+      </p:sp>
+      <p:sp>
+        <p:nvSpPr>
+          <p:cNvPr id="15" name="Text 12"/>
+          <p:cNvSpPr txBox="1"/>
+          <p:nvPr/>
+        </p:nvSpPr>
+        <p:spPr>
+          <a:xfrm>
+            <a:off x="1005840" y="4453128"/>
+            <a:ext cx="2743200" cy="256032"/>
+          </a:xfrm>
+          <a:prstGeom prst="rect">
+            <a:avLst/>
+          </a:prstGeom>
+          <a:noFill/>
+          <a:ln/>
+        </p:spPr>
+        <p:txBody>
+          <a:bodyPr wrap="square" lIns="0" tIns="0" rIns="0" bIns="0" rtlCol="0" anchor="ctr"/>
+          <a:lstStyle/>
+          <a:p>
+            <a:pPr indent="0" marL="0">
+              <a:buNone/>
+            </a:pPr>
+            <a:r>
+              <a:rPr lang="en-US" sz="1200" b="1" dirty="0">
+                <a:solidFill>
+                  <a:srgbClr val="FFFFFF"/>
+                </a:solidFill>
+                <a:latin typeface="Arial" pitchFamily="34" charset="0"/>
+                <a:ea typeface="Arial" pitchFamily="34" charset="-122"/>
+                <a:cs typeface="Arial" pitchFamily="34" charset="-120"/>
+              </a:rPr>
+              <a:t>Test</a:t>
+            </a:r>
+            <a:endParaRPr lang="en-US" sz="1200" dirty="0"/>
+          </a:p>
+        </p:txBody>
+      </p:sp>
+      <p:sp>
+        <p:nvSpPr>
+          <p:cNvPr id="16" name="Shape 13"/>
           <p:cNvSpPr/>
           <p:nvPr/>
         </p:nvSpPr>
@@ -7639,7 +8848,7 @@
       </p:sp>
       <p:sp>
         <p:nvSpPr>
-          <p:cNvPr id="7" name="Text 4"/>
+          <p:cNvPr id="17" name="Text 14"/>
           <p:cNvSpPr txBox="1"/>
           <p:nvPr/>
         </p:nvSpPr>
@@ -7678,14 +8887,14 @@
       </p:sp>
       <p:sp>
         <p:nvSpPr>
-          <p:cNvPr id="8" name="Text 5"/>
-          <p:cNvSpPr txBox="1"/>
-          <p:nvPr/>
-        </p:nvSpPr>
-        <p:spPr>
-          <a:xfrm>
-            <a:off x="4754880" y="960120"/>
-            <a:ext cx="3657600" cy="960120"/>
+          <p:cNvPr id="18" name="Text 15"/>
+          <p:cNvSpPr txBox="1"/>
+          <p:nvPr/>
+        </p:nvSpPr>
+        <p:spPr>
+          <a:xfrm>
+            <a:off x="4754880" y="978408"/>
+            <a:ext cx="3657600" cy="1005840"/>
           </a:xfrm>
           <a:prstGeom prst="rect">
             <a:avLst/>
@@ -7701,7 +8910,7 @@
               <a:buNone/>
             </a:pPr>
             <a:r>
-              <a:rPr lang="en-US" sz="1400" dirty="0">
+              <a:rPr lang="en-US" sz="1500" dirty="0">
                 <a:solidFill>
                   <a:srgbClr val="000000"/>
                 </a:solidFill>
@@ -7711,13 +8920,13 @@
               </a:rPr>
               <a:t>Try the prototype in the real world and measure what happens. Learn what works and what does not.</a:t>
             </a:r>
-            <a:endParaRPr lang="en-US" sz="1400" dirty="0"/>
-          </a:p>
-        </p:txBody>
-      </p:sp>
-      <p:sp>
-        <p:nvSpPr>
-          <p:cNvPr id="9" name="Text 6"/>
+            <a:endParaRPr lang="en-US" sz="1500" dirty="0"/>
+          </a:p>
+        </p:txBody>
+      </p:sp>
+      <p:sp>
+        <p:nvSpPr>
+          <p:cNvPr id="19" name="Text 16"/>
           <p:cNvSpPr txBox="1"/>
           <p:nvPr/>
         </p:nvSpPr>
@@ -7756,14 +8965,14 @@
       </p:sp>
       <p:sp>
         <p:nvSpPr>
-          <p:cNvPr id="10" name="Text 7"/>
-          <p:cNvSpPr txBox="1"/>
-          <p:nvPr/>
-        </p:nvSpPr>
-        <p:spPr>
-          <a:xfrm>
-            <a:off x="4754880" y="2331720"/>
-            <a:ext cx="3657600" cy="960120"/>
+          <p:cNvPr id="20" name="Text 17"/>
+          <p:cNvSpPr txBox="1"/>
+          <p:nvPr/>
+        </p:nvSpPr>
+        <p:spPr>
+          <a:xfrm>
+            <a:off x="4754880" y="2350008"/>
+            <a:ext cx="3657600" cy="1005840"/>
           </a:xfrm>
           <a:prstGeom prst="rect">
             <a:avLst/>
@@ -7779,7 +8988,7 @@
               <a:buNone/>
             </a:pPr>
             <a:r>
-              <a:rPr lang="en-US" sz="1400" dirty="0">
+              <a:rPr lang="en-US" sz="1500" dirty="0">
                 <a:solidFill>
                   <a:srgbClr val="000000"/>
                 </a:solidFill>
@@ -7789,13 +8998,13 @@
               </a:rPr>
               <a:t>Does it actually solve the problem?</a:t>
             </a:r>
-            <a:endParaRPr lang="en-US" sz="1400" dirty="0"/>
-          </a:p>
-        </p:txBody>
-      </p:sp>
-      <p:sp>
-        <p:nvSpPr>
-          <p:cNvPr id="11" name="Text 8"/>
+            <a:endParaRPr lang="en-US" sz="1500" dirty="0"/>
+          </a:p>
+        </p:txBody>
+      </p:sp>
+      <p:sp>
+        <p:nvSpPr>
+          <p:cNvPr id="21" name="Text 18"/>
           <p:cNvSpPr txBox="1"/>
           <p:nvPr/>
         </p:nvSpPr>
@@ -7834,14 +9043,14 @@
       </p:sp>
       <p:sp>
         <p:nvSpPr>
-          <p:cNvPr id="12" name="Text 9"/>
-          <p:cNvSpPr txBox="1"/>
-          <p:nvPr/>
-        </p:nvSpPr>
-        <p:spPr>
-          <a:xfrm>
-            <a:off x="4754880" y="3703320"/>
-            <a:ext cx="3657600" cy="960120"/>
+          <p:cNvPr id="22" name="Text 19"/>
+          <p:cNvSpPr txBox="1"/>
+          <p:nvPr/>
+        </p:nvSpPr>
+        <p:spPr>
+          <a:xfrm>
+            <a:off x="4754880" y="3721608"/>
+            <a:ext cx="3657600" cy="1005840"/>
           </a:xfrm>
           <a:prstGeom prst="rect">
             <a:avLst/>
@@ -7857,7 +9066,7 @@
               <a:buNone/>
             </a:pPr>
             <a:r>
-              <a:rPr lang="en-US" sz="1400" dirty="0">
+              <a:rPr lang="en-US" sz="1500" dirty="0">
                 <a:solidFill>
                   <a:srgbClr val="000000"/>
                 </a:solidFill>
@@ -7867,7 +9076,7 @@
               </a:rPr>
               <a:t>compared Ramer against Ollama's default on a real 8 GB RTX 5060, and checked results with git diff and pytest.</a:t>
             </a:r>
-            <a:endParaRPr lang="en-US" sz="1400" dirty="0"/>
+            <a:endParaRPr lang="en-US" sz="1500" dirty="0"/>
           </a:p>
         </p:txBody>
       </p:sp>
@@ -8068,7 +9277,7 @@
         <p:spPr>
           <a:xfrm>
             <a:off x="457200" y="1188720"/>
-            <a:ext cx="1938528" cy="2834640"/>
+            <a:ext cx="1938528" cy="2514600"/>
           </a:xfrm>
           <a:prstGeom prst="rect">
             <a:avLst/>
@@ -8170,8 +9379,8 @@
         </p:nvSpPr>
         <p:spPr>
           <a:xfrm>
-            <a:off x="640080" y="2834640"/>
-            <a:ext cx="1600200" cy="1097280"/>
+            <a:off x="640080" y="2743200"/>
+            <a:ext cx="1600200" cy="914400"/>
           </a:xfrm>
           <a:prstGeom prst="rect">
             <a:avLst/>
@@ -8210,7 +9419,7 @@
         <p:spPr>
           <a:xfrm>
             <a:off x="2542032" y="1188720"/>
-            <a:ext cx="1938528" cy="2834640"/>
+            <a:ext cx="1938528" cy="2514600"/>
           </a:xfrm>
           <a:prstGeom prst="rect">
             <a:avLst/>
@@ -8312,8 +9521,8 @@
         </p:nvSpPr>
         <p:spPr>
           <a:xfrm>
-            <a:off x="2724912" y="2834640"/>
-            <a:ext cx="1600200" cy="1097280"/>
+            <a:off x="2724912" y="2743200"/>
+            <a:ext cx="1600200" cy="914400"/>
           </a:xfrm>
           <a:prstGeom prst="rect">
             <a:avLst/>
@@ -8352,7 +9561,7 @@
         <p:spPr>
           <a:xfrm>
             <a:off x="4626864" y="1188720"/>
-            <a:ext cx="1938528" cy="2834640"/>
+            <a:ext cx="1938528" cy="2514600"/>
           </a:xfrm>
           <a:prstGeom prst="rect">
             <a:avLst/>
@@ -8454,8 +9663,8 @@
         </p:nvSpPr>
         <p:spPr>
           <a:xfrm>
-            <a:off x="4809744" y="2834640"/>
-            <a:ext cx="1600200" cy="1097280"/>
+            <a:off x="4809744" y="2743200"/>
+            <a:ext cx="1600200" cy="914400"/>
           </a:xfrm>
           <a:prstGeom prst="rect">
             <a:avLst/>
@@ -8494,7 +9703,7 @@
         <p:spPr>
           <a:xfrm>
             <a:off x="6711696" y="1188720"/>
-            <a:ext cx="1938528" cy="2834640"/>
+            <a:ext cx="1938528" cy="2514600"/>
           </a:xfrm>
           <a:prstGeom prst="rect">
             <a:avLst/>
@@ -8596,8 +9805,8 @@
         </p:nvSpPr>
         <p:spPr>
           <a:xfrm>
-            <a:off x="6894576" y="2834640"/>
-            <a:ext cx="1600200" cy="1097280"/>
+            <a:off x="6894576" y="2743200"/>
+            <a:ext cx="1600200" cy="914400"/>
           </a:xfrm>
           <a:prstGeom prst="rect">
             <a:avLst/>
@@ -8629,32 +9838,57 @@
       </p:sp>
       <p:sp>
         <p:nvSpPr>
-          <p:cNvPr id="23" name="Text 20"/>
-          <p:cNvSpPr txBox="1"/>
-          <p:nvPr/>
-        </p:nvSpPr>
-        <p:spPr>
-          <a:xfrm>
-            <a:off x="457200" y="4206240"/>
-            <a:ext cx="8229600" cy="365760"/>
-          </a:xfrm>
-          <a:prstGeom prst="rect">
-            <a:avLst/>
-          </a:prstGeom>
-          <a:noFill/>
-          <a:ln/>
-        </p:spPr>
-        <p:txBody>
-          <a:bodyPr wrap="square" lIns="0" tIns="0" rIns="0" bIns="0" rtlCol="0" anchor="ctr"/>
-          <a:lstStyle/>
-          <a:p>
-            <a:pPr indent="0" marL="0">
-              <a:buNone/>
-            </a:pPr>
-            <a:r>
-              <a:rPr lang="en-US" sz="1300" i="1" dirty="0">
-                <a:solidFill>
-                  <a:srgbClr val="595959"/>
+          <p:cNvPr id="23" name="Shape 20"/>
+          <p:cNvSpPr/>
+          <p:nvPr/>
+        </p:nvSpPr>
+        <p:spPr>
+          <a:xfrm>
+            <a:off x="457200" y="3886200"/>
+            <a:ext cx="8229600" cy="685800"/>
+          </a:xfrm>
+          <a:prstGeom prst="rect">
+            <a:avLst/>
+          </a:prstGeom>
+          <a:solidFill>
+            <a:srgbClr val="F2F2F2"/>
+          </a:solidFill>
+          <a:ln w="12700">
+            <a:solidFill>
+              <a:srgbClr val="F2F2F2"/>
+            </a:solidFill>
+            <a:prstDash val="solid"/>
+          </a:ln>
+        </p:spPr>
+      </p:sp>
+      <p:sp>
+        <p:nvSpPr>
+          <p:cNvPr id="24" name="Text 21"/>
+          <p:cNvSpPr txBox="1"/>
+          <p:nvPr/>
+        </p:nvSpPr>
+        <p:spPr>
+          <a:xfrm>
+            <a:off x="731520" y="3886200"/>
+            <a:ext cx="7680960" cy="685800"/>
+          </a:xfrm>
+          <a:prstGeom prst="rect">
+            <a:avLst/>
+          </a:prstGeom>
+          <a:noFill/>
+          <a:ln/>
+        </p:spPr>
+        <p:txBody>
+          <a:bodyPr wrap="square" lIns="0" tIns="0" rIns="0" bIns="0" rtlCol="0" anchor="ctr"/>
+          <a:lstStyle/>
+          <a:p>
+            <a:pPr indent="0" marL="0">
+              <a:buNone/>
+            </a:pPr>
+            <a:r>
+              <a:rPr lang="en-US" sz="1400" dirty="0">
+                <a:solidFill>
+                  <a:srgbClr val="000000"/>
                 </a:solidFill>
                 <a:latin typeface="Arial" pitchFamily="34" charset="0"/>
                 <a:ea typeface="Arial" pitchFamily="34" charset="-122"/>
@@ -8662,7 +9896,7 @@
               </a:rPr>
               <a:t>Not a benchmark suite and not a general guarantee: real measurements on one real machine.</a:t>
             </a:r>
-            <a:endParaRPr lang="en-US" sz="1300" dirty="0"/>
+            <a:endParaRPr lang="en-US" sz="1400" dirty="0"/>
           </a:p>
         </p:txBody>
       </p:sp>
@@ -8863,7 +10097,7 @@
         <p:spPr>
           <a:xfrm>
             <a:off x="457200" y="1188720"/>
-            <a:ext cx="2606040" cy="3291840"/>
+            <a:ext cx="2606040" cy="2697480"/>
           </a:xfrm>
           <a:prstGeom prst="rect">
             <a:avLst/>
@@ -8887,7 +10121,7 @@
         </p:nvSpPr>
         <p:spPr>
           <a:xfrm>
-            <a:off x="685800" y="1463040"/>
+            <a:off x="685800" y="1371600"/>
             <a:ext cx="2194560" cy="1005840"/>
           </a:xfrm>
           <a:prstGeom prst="rect">
@@ -8926,7 +10160,7 @@
         </p:nvSpPr>
         <p:spPr>
           <a:xfrm>
-            <a:off x="685800" y="2606040"/>
+            <a:off x="685800" y="2423160"/>
             <a:ext cx="2194560" cy="640080"/>
           </a:xfrm>
           <a:prstGeom prst="rect">
@@ -8965,8 +10199,8 @@
         </p:nvSpPr>
         <p:spPr>
           <a:xfrm>
-            <a:off x="685800" y="3383280"/>
-            <a:ext cx="2194560" cy="822960"/>
+            <a:off x="685800" y="3108960"/>
+            <a:ext cx="2194560" cy="640080"/>
           </a:xfrm>
           <a:prstGeom prst="rect">
             <a:avLst/>
@@ -9005,7 +10239,7 @@
         <p:spPr>
           <a:xfrm>
             <a:off x="3246120" y="1188720"/>
-            <a:ext cx="2606040" cy="3291840"/>
+            <a:ext cx="2606040" cy="2697480"/>
           </a:xfrm>
           <a:prstGeom prst="rect">
             <a:avLst/>
@@ -9029,7 +10263,7 @@
         </p:nvSpPr>
         <p:spPr>
           <a:xfrm>
-            <a:off x="3474720" y="1463040"/>
+            <a:off x="3474720" y="1371600"/>
             <a:ext cx="2194560" cy="1005840"/>
           </a:xfrm>
           <a:prstGeom prst="rect">
@@ -9068,7 +10302,7 @@
         </p:nvSpPr>
         <p:spPr>
           <a:xfrm>
-            <a:off x="3474720" y="2606040"/>
+            <a:off x="3474720" y="2423160"/>
             <a:ext cx="2194560" cy="640080"/>
           </a:xfrm>
           <a:prstGeom prst="rect">
@@ -9107,8 +10341,8 @@
         </p:nvSpPr>
         <p:spPr>
           <a:xfrm>
-            <a:off x="3474720" y="3383280"/>
-            <a:ext cx="2194560" cy="822960"/>
+            <a:off x="3474720" y="3108960"/>
+            <a:ext cx="2194560" cy="640080"/>
           </a:xfrm>
           <a:prstGeom prst="rect">
             <a:avLst/>
@@ -9147,7 +10381,7 @@
         <p:spPr>
           <a:xfrm>
             <a:off x="6035040" y="1188720"/>
-            <a:ext cx="2606040" cy="3291840"/>
+            <a:ext cx="2606040" cy="2697480"/>
           </a:xfrm>
           <a:prstGeom prst="rect">
             <a:avLst/>
@@ -9171,7 +10405,7 @@
         </p:nvSpPr>
         <p:spPr>
           <a:xfrm>
-            <a:off x="6263640" y="1463040"/>
+            <a:off x="6263640" y="1371600"/>
             <a:ext cx="2194560" cy="1005840"/>
           </a:xfrm>
           <a:prstGeom prst="rect">
@@ -9210,7 +10444,7 @@
         </p:nvSpPr>
         <p:spPr>
           <a:xfrm>
-            <a:off x="6263640" y="2606040"/>
+            <a:off x="6263640" y="2423160"/>
             <a:ext cx="2194560" cy="640080"/>
           </a:xfrm>
           <a:prstGeom prst="rect">
@@ -9249,8 +10483,8 @@
         </p:nvSpPr>
         <p:spPr>
           <a:xfrm>
-            <a:off x="6263640" y="3383280"/>
-            <a:ext cx="2194560" cy="822960"/>
+            <a:off x="6263640" y="3108960"/>
+            <a:ext cx="2194560" cy="640080"/>
           </a:xfrm>
           <a:prstGeom prst="rect">
             <a:avLst/>
@@ -9277,6 +10511,70 @@
               <a:t>89.2 s → 55.4 s, same correct result</a:t>
             </a:r>
             <a:endParaRPr lang="en-US" sz="1300" dirty="0"/>
+          </a:p>
+        </p:txBody>
+      </p:sp>
+      <p:sp>
+        <p:nvSpPr>
+          <p:cNvPr id="19" name="Shape 16"/>
+          <p:cNvSpPr/>
+          <p:nvPr/>
+        </p:nvSpPr>
+        <p:spPr>
+          <a:xfrm>
+            <a:off x="457200" y="4023360"/>
+            <a:ext cx="8229600" cy="548640"/>
+          </a:xfrm>
+          <a:prstGeom prst="rect">
+            <a:avLst/>
+          </a:prstGeom>
+          <a:solidFill>
+            <a:srgbClr val="F2F2F2"/>
+          </a:solidFill>
+          <a:ln w="12700">
+            <a:solidFill>
+              <a:srgbClr val="F2F2F2"/>
+            </a:solidFill>
+            <a:prstDash val="solid"/>
+          </a:ln>
+        </p:spPr>
+      </p:sp>
+      <p:sp>
+        <p:nvSpPr>
+          <p:cNvPr id="20" name="Text 17"/>
+          <p:cNvSpPr txBox="1"/>
+          <p:nvPr/>
+        </p:nvSpPr>
+        <p:spPr>
+          <a:xfrm>
+            <a:off x="731520" y="4023360"/>
+            <a:ext cx="7680960" cy="548640"/>
+          </a:xfrm>
+          <a:prstGeom prst="rect">
+            <a:avLst/>
+          </a:prstGeom>
+          <a:noFill/>
+          <a:ln/>
+        </p:spPr>
+        <p:txBody>
+          <a:bodyPr wrap="square" lIns="0" tIns="0" rIns="0" bIns="0" rtlCol="0" anchor="ctr"/>
+          <a:lstStyle/>
+          <a:p>
+            <a:pPr indent="0" marL="0">
+              <a:buNone/>
+            </a:pPr>
+            <a:r>
+              <a:rPr lang="en-US" sz="1400" dirty="0">
+                <a:solidFill>
+                  <a:srgbClr val="000000"/>
+                </a:solidFill>
+                <a:latin typeface="Arial" pitchFamily="34" charset="0"/>
+                <a:ea typeface="Arial" pitchFamily="34" charset="-122"/>
+                <a:cs typeface="Arial" pitchFamily="34" charset="-120"/>
+              </a:rPr>
+              <a:t>All compared with Ollama's default placement, on the same machine, with the result checked.</a:t>
+            </a:r>
+            <a:endParaRPr lang="en-US" sz="1400" dirty="0"/>
           </a:p>
         </p:txBody>
       </p:sp>
@@ -9492,7 +10790,7 @@
         </p:nvSpPr>
         <p:spPr>
           <a:xfrm>
-            <a:off x="5852160" y="1280160"/>
+            <a:off x="5852160" y="1188720"/>
             <a:ext cx="2834640" cy="822960"/>
           </a:xfrm>
           <a:prstGeom prst="rect">
@@ -9531,8 +10829,8 @@
         </p:nvSpPr>
         <p:spPr>
           <a:xfrm>
-            <a:off x="5852160" y="2103120"/>
-            <a:ext cx="2834640" cy="594360"/>
+            <a:off x="5852160" y="2011680"/>
+            <a:ext cx="2834640" cy="548640"/>
           </a:xfrm>
           <a:prstGeom prst="rect">
             <a:avLst/>
@@ -9570,8 +10868,47 @@
         </p:nvSpPr>
         <p:spPr>
           <a:xfrm>
-            <a:off x="5852160" y="2834640"/>
-            <a:ext cx="2834640" cy="1371600"/>
+            <a:off x="5852160" y="2743200"/>
+            <a:ext cx="2834640" cy="640080"/>
+          </a:xfrm>
+          <a:prstGeom prst="rect">
+            <a:avLst/>
+          </a:prstGeom>
+          <a:noFill/>
+          <a:ln/>
+        </p:spPr>
+        <p:txBody>
+          <a:bodyPr wrap="square" lIns="0" tIns="0" rIns="0" bIns="0" rtlCol="0" anchor="ctr"/>
+          <a:lstStyle/>
+          <a:p>
+            <a:pPr indent="0" marL="0">
+              <a:buNone/>
+            </a:pPr>
+            <a:r>
+              <a:rPr lang="en-US" sz="3600" b="1" dirty="0">
+                <a:solidFill>
+                  <a:srgbClr val="000000"/>
+                </a:solidFill>
+                <a:latin typeface="Arial" pitchFamily="34" charset="0"/>
+                <a:ea typeface="Arial" pitchFamily="34" charset="-122"/>
+                <a:cs typeface="Arial" pitchFamily="34" charset="-120"/>
+              </a:rPr>
+              <a:t>6.6 → 3.6</a:t>
+            </a:r>
+            <a:endParaRPr lang="en-US" sz="3600" dirty="0"/>
+          </a:p>
+        </p:txBody>
+      </p:sp>
+      <p:sp>
+        <p:nvSpPr>
+          <p:cNvPr id="11" name="Text 7"/>
+          <p:cNvSpPr txBox="1"/>
+          <p:nvPr/>
+        </p:nvSpPr>
+        <p:spPr>
+          <a:xfrm>
+            <a:off x="5852160" y="3429000"/>
+            <a:ext cx="2834640" cy="1005840"/>
           </a:xfrm>
           <a:prstGeom prst="rect">
             <a:avLst/>
@@ -9595,7 +10932,7 @@
                 <a:ea typeface="Arial" pitchFamily="34" charset="-122"/>
                 <a:cs typeface="Arial" pitchFamily="34" charset="-120"/>
               </a:rPr>
-              <a:t>Keeping the busy model loaded (“sticky”) is what stops the thrashing: model swaps fell from 6.6 to 3.6 per run.</a:t>
+              <a:t>model swaps per run. Keeping the busy model loaded (“sticky”) is what stops the thrashing.</a:t>
             </a:r>
             <a:endParaRPr lang="en-US" sz="1300" dirty="0"/>
           </a:p>
@@ -10824,7 +12161,7 @@
         <p:spPr>
           <a:xfrm>
             <a:off x="457200" y="1188720"/>
-            <a:ext cx="4023360" cy="3291840"/>
+            <a:ext cx="4023360" cy="2788920"/>
           </a:xfrm>
           <a:prstGeom prst="rect">
             <a:avLst/>
@@ -10973,7 +12310,7 @@
         <p:spPr>
           <a:xfrm>
             <a:off x="4663440" y="1188720"/>
-            <a:ext cx="4023360" cy="3291840"/>
+            <a:ext cx="4023360" cy="2788920"/>
           </a:xfrm>
           <a:prstGeom prst="rect">
             <a:avLst/>
@@ -11108,6 +12445,70 @@
                 <a:cs typeface="Arial" pitchFamily="34" charset="-120"/>
               </a:rPr>
               <a:t>Apple Silicon Macs: no separate VRAM to optimize</a:t>
+            </a:r>
+            <a:endParaRPr lang="en-US" sz="1400" dirty="0"/>
+          </a:p>
+        </p:txBody>
+      </p:sp>
+      <p:sp>
+        <p:nvSpPr>
+          <p:cNvPr id="13" name="Shape 10"/>
+          <p:cNvSpPr/>
+          <p:nvPr/>
+        </p:nvSpPr>
+        <p:spPr>
+          <a:xfrm>
+            <a:off x="457200" y="4114800"/>
+            <a:ext cx="8229600" cy="457200"/>
+          </a:xfrm>
+          <a:prstGeom prst="rect">
+            <a:avLst/>
+          </a:prstGeom>
+          <a:solidFill>
+            <a:srgbClr val="000000"/>
+          </a:solidFill>
+          <a:ln w="12700">
+            <a:solidFill>
+              <a:srgbClr val="000000"/>
+            </a:solidFill>
+            <a:prstDash val="solid"/>
+          </a:ln>
+        </p:spPr>
+      </p:sp>
+      <p:sp>
+        <p:nvSpPr>
+          <p:cNvPr id="14" name="Text 11"/>
+          <p:cNvSpPr txBox="1"/>
+          <p:nvPr/>
+        </p:nvSpPr>
+        <p:spPr>
+          <a:xfrm>
+            <a:off x="731520" y="4114800"/>
+            <a:ext cx="7680960" cy="457200"/>
+          </a:xfrm>
+          <a:prstGeom prst="rect">
+            <a:avLst/>
+          </a:prstGeom>
+          <a:noFill/>
+          <a:ln/>
+        </p:spPr>
+        <p:txBody>
+          <a:bodyPr wrap="square" lIns="0" tIns="0" rIns="0" bIns="0" rtlCol="0" anchor="ctr"/>
+          <a:lstStyle/>
+          <a:p>
+            <a:pPr indent="0" marL="0">
+              <a:buNone/>
+            </a:pPr>
+            <a:r>
+              <a:rPr lang="en-US" sz="1400" b="1" dirty="0">
+                <a:solidFill>
+                  <a:srgbClr val="FFFFFF"/>
+                </a:solidFill>
+                <a:latin typeface="Arial" pitchFamily="34" charset="0"/>
+                <a:ea typeface="Arial" pitchFamily="34" charset="-122"/>
+                <a:cs typeface="Arial" pitchFamily="34" charset="-120"/>
+              </a:rPr>
+              <a:t>The honest thesis: the benefit grows with how much of the work is local decoding.</a:t>
             </a:r>
             <a:endParaRPr lang="en-US" sz="1400" dirty="0"/>
           </a:p>
@@ -12979,8 +14380,8 @@
         </p:nvSpPr>
         <p:spPr>
           <a:xfrm>
-            <a:off x="548640" y="2697480"/>
-            <a:ext cx="3474720" cy="914400"/>
+            <a:off x="548640" y="2560320"/>
+            <a:ext cx="3474720" cy="640080"/>
           </a:xfrm>
           <a:prstGeom prst="rect">
             <a:avLst/>
@@ -12996,7 +14397,7 @@
               <a:buNone/>
             </a:pPr>
             <a:r>
-              <a:rPr lang="en-US" sz="1800" i="1" dirty="0">
+              <a:rPr lang="en-US" sz="1600" i="1" dirty="0">
                 <a:solidFill>
                   <a:srgbClr val="BFBFBF"/>
                 </a:solidFill>
@@ -13006,13 +14407,403 @@
               </a:rPr>
               <a:t>Start with people, not technology.</a:t>
             </a:r>
-            <a:endParaRPr lang="en-US" sz="1800" dirty="0"/>
-          </a:p>
-        </p:txBody>
-      </p:sp>
-      <p:sp>
-        <p:nvSpPr>
-          <p:cNvPr id="6" name="Shape 3"/>
+            <a:endParaRPr lang="en-US" sz="1600" dirty="0"/>
+          </a:p>
+        </p:txBody>
+      </p:sp>
+      <p:sp>
+        <p:nvSpPr>
+          <p:cNvPr id="6" name="Text 3"/>
+          <p:cNvSpPr txBox="1"/>
+          <p:nvPr/>
+        </p:nvSpPr>
+        <p:spPr>
+          <a:xfrm>
+            <a:off x="548640" y="3429000"/>
+            <a:ext cx="457200" cy="256032"/>
+          </a:xfrm>
+          <a:prstGeom prst="rect">
+            <a:avLst/>
+          </a:prstGeom>
+          <a:noFill/>
+          <a:ln/>
+        </p:spPr>
+        <p:txBody>
+          <a:bodyPr wrap="square" lIns="0" tIns="0" rIns="0" bIns="0" rtlCol="0" anchor="ctr"/>
+          <a:lstStyle/>
+          <a:p>
+            <a:pPr indent="0" marL="0">
+              <a:buNone/>
+            </a:pPr>
+            <a:r>
+              <a:rPr lang="en-US" sz="1200" b="1" dirty="0">
+                <a:solidFill>
+                  <a:srgbClr val="FFFFFF"/>
+                </a:solidFill>
+                <a:latin typeface="Arial" pitchFamily="34" charset="0"/>
+                <a:ea typeface="Arial" pitchFamily="34" charset="-122"/>
+                <a:cs typeface="Arial" pitchFamily="34" charset="-120"/>
+              </a:rPr>
+              <a:t>01</a:t>
+            </a:r>
+            <a:endParaRPr lang="en-US" sz="1200" dirty="0"/>
+          </a:p>
+        </p:txBody>
+      </p:sp>
+      <p:sp>
+        <p:nvSpPr>
+          <p:cNvPr id="7" name="Text 4"/>
+          <p:cNvSpPr txBox="1"/>
+          <p:nvPr/>
+        </p:nvSpPr>
+        <p:spPr>
+          <a:xfrm>
+            <a:off x="1005840" y="3429000"/>
+            <a:ext cx="2743200" cy="256032"/>
+          </a:xfrm>
+          <a:prstGeom prst="rect">
+            <a:avLst/>
+          </a:prstGeom>
+          <a:noFill/>
+          <a:ln/>
+        </p:spPr>
+        <p:txBody>
+          <a:bodyPr wrap="square" lIns="0" tIns="0" rIns="0" bIns="0" rtlCol="0" anchor="ctr"/>
+          <a:lstStyle/>
+          <a:p>
+            <a:pPr indent="0" marL="0">
+              <a:buNone/>
+            </a:pPr>
+            <a:r>
+              <a:rPr lang="en-US" sz="1200" b="1" dirty="0">
+                <a:solidFill>
+                  <a:srgbClr val="FFFFFF"/>
+                </a:solidFill>
+                <a:latin typeface="Arial" pitchFamily="34" charset="0"/>
+                <a:ea typeface="Arial" pitchFamily="34" charset="-122"/>
+                <a:cs typeface="Arial" pitchFamily="34" charset="-120"/>
+              </a:rPr>
+              <a:t>Empathize</a:t>
+            </a:r>
+            <a:endParaRPr lang="en-US" sz="1200" dirty="0"/>
+          </a:p>
+        </p:txBody>
+      </p:sp>
+      <p:sp>
+        <p:nvSpPr>
+          <p:cNvPr id="8" name="Text 5"/>
+          <p:cNvSpPr txBox="1"/>
+          <p:nvPr/>
+        </p:nvSpPr>
+        <p:spPr>
+          <a:xfrm>
+            <a:off x="548640" y="3685032"/>
+            <a:ext cx="457200" cy="256032"/>
+          </a:xfrm>
+          <a:prstGeom prst="rect">
+            <a:avLst/>
+          </a:prstGeom>
+          <a:noFill/>
+          <a:ln/>
+        </p:spPr>
+        <p:txBody>
+          <a:bodyPr wrap="square" lIns="0" tIns="0" rIns="0" bIns="0" rtlCol="0" anchor="ctr"/>
+          <a:lstStyle/>
+          <a:p>
+            <a:pPr indent="0" marL="0">
+              <a:buNone/>
+            </a:pPr>
+            <a:r>
+              <a:rPr lang="en-US" sz="1200" b="1" dirty="0">
+                <a:solidFill>
+                  <a:srgbClr val="595959"/>
+                </a:solidFill>
+                <a:latin typeface="Arial" pitchFamily="34" charset="0"/>
+                <a:ea typeface="Arial" pitchFamily="34" charset="-122"/>
+                <a:cs typeface="Arial" pitchFamily="34" charset="-120"/>
+              </a:rPr>
+              <a:t>02</a:t>
+            </a:r>
+            <a:endParaRPr lang="en-US" sz="1200" dirty="0"/>
+          </a:p>
+        </p:txBody>
+      </p:sp>
+      <p:sp>
+        <p:nvSpPr>
+          <p:cNvPr id="9" name="Text 6"/>
+          <p:cNvSpPr txBox="1"/>
+          <p:nvPr/>
+        </p:nvSpPr>
+        <p:spPr>
+          <a:xfrm>
+            <a:off x="1005840" y="3685032"/>
+            <a:ext cx="2743200" cy="256032"/>
+          </a:xfrm>
+          <a:prstGeom prst="rect">
+            <a:avLst/>
+          </a:prstGeom>
+          <a:noFill/>
+          <a:ln/>
+        </p:spPr>
+        <p:txBody>
+          <a:bodyPr wrap="square" lIns="0" tIns="0" rIns="0" bIns="0" rtlCol="0" anchor="ctr"/>
+          <a:lstStyle/>
+          <a:p>
+            <a:pPr indent="0" marL="0">
+              <a:buNone/>
+            </a:pPr>
+            <a:r>
+              <a:rPr lang="en-US" sz="1200" dirty="0">
+                <a:solidFill>
+                  <a:srgbClr val="595959"/>
+                </a:solidFill>
+                <a:latin typeface="Arial" pitchFamily="34" charset="0"/>
+                <a:ea typeface="Arial" pitchFamily="34" charset="-122"/>
+                <a:cs typeface="Arial" pitchFamily="34" charset="-120"/>
+              </a:rPr>
+              <a:t>Define</a:t>
+            </a:r>
+            <a:endParaRPr lang="en-US" sz="1200" dirty="0"/>
+          </a:p>
+        </p:txBody>
+      </p:sp>
+      <p:sp>
+        <p:nvSpPr>
+          <p:cNvPr id="10" name="Text 7"/>
+          <p:cNvSpPr txBox="1"/>
+          <p:nvPr/>
+        </p:nvSpPr>
+        <p:spPr>
+          <a:xfrm>
+            <a:off x="548640" y="3941064"/>
+            <a:ext cx="457200" cy="256032"/>
+          </a:xfrm>
+          <a:prstGeom prst="rect">
+            <a:avLst/>
+          </a:prstGeom>
+          <a:noFill/>
+          <a:ln/>
+        </p:spPr>
+        <p:txBody>
+          <a:bodyPr wrap="square" lIns="0" tIns="0" rIns="0" bIns="0" rtlCol="0" anchor="ctr"/>
+          <a:lstStyle/>
+          <a:p>
+            <a:pPr indent="0" marL="0">
+              <a:buNone/>
+            </a:pPr>
+            <a:r>
+              <a:rPr lang="en-US" sz="1200" b="1" dirty="0">
+                <a:solidFill>
+                  <a:srgbClr val="595959"/>
+                </a:solidFill>
+                <a:latin typeface="Arial" pitchFamily="34" charset="0"/>
+                <a:ea typeface="Arial" pitchFamily="34" charset="-122"/>
+                <a:cs typeface="Arial" pitchFamily="34" charset="-120"/>
+              </a:rPr>
+              <a:t>03</a:t>
+            </a:r>
+            <a:endParaRPr lang="en-US" sz="1200" dirty="0"/>
+          </a:p>
+        </p:txBody>
+      </p:sp>
+      <p:sp>
+        <p:nvSpPr>
+          <p:cNvPr id="11" name="Text 8"/>
+          <p:cNvSpPr txBox="1"/>
+          <p:nvPr/>
+        </p:nvSpPr>
+        <p:spPr>
+          <a:xfrm>
+            <a:off x="1005840" y="3941064"/>
+            <a:ext cx="2743200" cy="256032"/>
+          </a:xfrm>
+          <a:prstGeom prst="rect">
+            <a:avLst/>
+          </a:prstGeom>
+          <a:noFill/>
+          <a:ln/>
+        </p:spPr>
+        <p:txBody>
+          <a:bodyPr wrap="square" lIns="0" tIns="0" rIns="0" bIns="0" rtlCol="0" anchor="ctr"/>
+          <a:lstStyle/>
+          <a:p>
+            <a:pPr indent="0" marL="0">
+              <a:buNone/>
+            </a:pPr>
+            <a:r>
+              <a:rPr lang="en-US" sz="1200" dirty="0">
+                <a:solidFill>
+                  <a:srgbClr val="595959"/>
+                </a:solidFill>
+                <a:latin typeface="Arial" pitchFamily="34" charset="0"/>
+                <a:ea typeface="Arial" pitchFamily="34" charset="-122"/>
+                <a:cs typeface="Arial" pitchFamily="34" charset="-120"/>
+              </a:rPr>
+              <a:t>Ideate</a:t>
+            </a:r>
+            <a:endParaRPr lang="en-US" sz="1200" dirty="0"/>
+          </a:p>
+        </p:txBody>
+      </p:sp>
+      <p:sp>
+        <p:nvSpPr>
+          <p:cNvPr id="12" name="Text 9"/>
+          <p:cNvSpPr txBox="1"/>
+          <p:nvPr/>
+        </p:nvSpPr>
+        <p:spPr>
+          <a:xfrm>
+            <a:off x="548640" y="4197096"/>
+            <a:ext cx="457200" cy="256032"/>
+          </a:xfrm>
+          <a:prstGeom prst="rect">
+            <a:avLst/>
+          </a:prstGeom>
+          <a:noFill/>
+          <a:ln/>
+        </p:spPr>
+        <p:txBody>
+          <a:bodyPr wrap="square" lIns="0" tIns="0" rIns="0" bIns="0" rtlCol="0" anchor="ctr"/>
+          <a:lstStyle/>
+          <a:p>
+            <a:pPr indent="0" marL="0">
+              <a:buNone/>
+            </a:pPr>
+            <a:r>
+              <a:rPr lang="en-US" sz="1200" b="1" dirty="0">
+                <a:solidFill>
+                  <a:srgbClr val="595959"/>
+                </a:solidFill>
+                <a:latin typeface="Arial" pitchFamily="34" charset="0"/>
+                <a:ea typeface="Arial" pitchFamily="34" charset="-122"/>
+                <a:cs typeface="Arial" pitchFamily="34" charset="-120"/>
+              </a:rPr>
+              <a:t>04</a:t>
+            </a:r>
+            <a:endParaRPr lang="en-US" sz="1200" dirty="0"/>
+          </a:p>
+        </p:txBody>
+      </p:sp>
+      <p:sp>
+        <p:nvSpPr>
+          <p:cNvPr id="13" name="Text 10"/>
+          <p:cNvSpPr txBox="1"/>
+          <p:nvPr/>
+        </p:nvSpPr>
+        <p:spPr>
+          <a:xfrm>
+            <a:off x="1005840" y="4197096"/>
+            <a:ext cx="2743200" cy="256032"/>
+          </a:xfrm>
+          <a:prstGeom prst="rect">
+            <a:avLst/>
+          </a:prstGeom>
+          <a:noFill/>
+          <a:ln/>
+        </p:spPr>
+        <p:txBody>
+          <a:bodyPr wrap="square" lIns="0" tIns="0" rIns="0" bIns="0" rtlCol="0" anchor="ctr"/>
+          <a:lstStyle/>
+          <a:p>
+            <a:pPr indent="0" marL="0">
+              <a:buNone/>
+            </a:pPr>
+            <a:r>
+              <a:rPr lang="en-US" sz="1200" dirty="0">
+                <a:solidFill>
+                  <a:srgbClr val="595959"/>
+                </a:solidFill>
+                <a:latin typeface="Arial" pitchFamily="34" charset="0"/>
+                <a:ea typeface="Arial" pitchFamily="34" charset="-122"/>
+                <a:cs typeface="Arial" pitchFamily="34" charset="-120"/>
+              </a:rPr>
+              <a:t>Prototype</a:t>
+            </a:r>
+            <a:endParaRPr lang="en-US" sz="1200" dirty="0"/>
+          </a:p>
+        </p:txBody>
+      </p:sp>
+      <p:sp>
+        <p:nvSpPr>
+          <p:cNvPr id="14" name="Text 11"/>
+          <p:cNvSpPr txBox="1"/>
+          <p:nvPr/>
+        </p:nvSpPr>
+        <p:spPr>
+          <a:xfrm>
+            <a:off x="548640" y="4453128"/>
+            <a:ext cx="457200" cy="256032"/>
+          </a:xfrm>
+          <a:prstGeom prst="rect">
+            <a:avLst/>
+          </a:prstGeom>
+          <a:noFill/>
+          <a:ln/>
+        </p:spPr>
+        <p:txBody>
+          <a:bodyPr wrap="square" lIns="0" tIns="0" rIns="0" bIns="0" rtlCol="0" anchor="ctr"/>
+          <a:lstStyle/>
+          <a:p>
+            <a:pPr indent="0" marL="0">
+              <a:buNone/>
+            </a:pPr>
+            <a:r>
+              <a:rPr lang="en-US" sz="1200" b="1" dirty="0">
+                <a:solidFill>
+                  <a:srgbClr val="595959"/>
+                </a:solidFill>
+                <a:latin typeface="Arial" pitchFamily="34" charset="0"/>
+                <a:ea typeface="Arial" pitchFamily="34" charset="-122"/>
+                <a:cs typeface="Arial" pitchFamily="34" charset="-120"/>
+              </a:rPr>
+              <a:t>05</a:t>
+            </a:r>
+            <a:endParaRPr lang="en-US" sz="1200" dirty="0"/>
+          </a:p>
+        </p:txBody>
+      </p:sp>
+      <p:sp>
+        <p:nvSpPr>
+          <p:cNvPr id="15" name="Text 12"/>
+          <p:cNvSpPr txBox="1"/>
+          <p:nvPr/>
+        </p:nvSpPr>
+        <p:spPr>
+          <a:xfrm>
+            <a:off x="1005840" y="4453128"/>
+            <a:ext cx="2743200" cy="256032"/>
+          </a:xfrm>
+          <a:prstGeom prst="rect">
+            <a:avLst/>
+          </a:prstGeom>
+          <a:noFill/>
+          <a:ln/>
+        </p:spPr>
+        <p:txBody>
+          <a:bodyPr wrap="square" lIns="0" tIns="0" rIns="0" bIns="0" rtlCol="0" anchor="ctr"/>
+          <a:lstStyle/>
+          <a:p>
+            <a:pPr indent="0" marL="0">
+              <a:buNone/>
+            </a:pPr>
+            <a:r>
+              <a:rPr lang="en-US" sz="1200" dirty="0">
+                <a:solidFill>
+                  <a:srgbClr val="595959"/>
+                </a:solidFill>
+                <a:latin typeface="Arial" pitchFamily="34" charset="0"/>
+                <a:ea typeface="Arial" pitchFamily="34" charset="-122"/>
+                <a:cs typeface="Arial" pitchFamily="34" charset="-120"/>
+              </a:rPr>
+              <a:t>Test</a:t>
+            </a:r>
+            <a:endParaRPr lang="en-US" sz="1200" dirty="0"/>
+          </a:p>
+        </p:txBody>
+      </p:sp>
+      <p:sp>
+        <p:nvSpPr>
+          <p:cNvPr id="16" name="Shape 13"/>
           <p:cNvSpPr/>
           <p:nvPr/>
         </p:nvSpPr>
@@ -13037,7 +14828,7 @@
       </p:sp>
       <p:sp>
         <p:nvSpPr>
-          <p:cNvPr id="7" name="Text 4"/>
+          <p:cNvPr id="17" name="Text 14"/>
           <p:cNvSpPr txBox="1"/>
           <p:nvPr/>
         </p:nvSpPr>
@@ -13076,14 +14867,14 @@
       </p:sp>
       <p:sp>
         <p:nvSpPr>
-          <p:cNvPr id="8" name="Text 5"/>
-          <p:cNvSpPr txBox="1"/>
-          <p:nvPr/>
-        </p:nvSpPr>
-        <p:spPr>
-          <a:xfrm>
-            <a:off x="4754880" y="960120"/>
-            <a:ext cx="3657600" cy="960120"/>
+          <p:cNvPr id="18" name="Text 15"/>
+          <p:cNvSpPr txBox="1"/>
+          <p:nvPr/>
+        </p:nvSpPr>
+        <p:spPr>
+          <a:xfrm>
+            <a:off x="4754880" y="978408"/>
+            <a:ext cx="3657600" cy="1005840"/>
           </a:xfrm>
           <a:prstGeom prst="rect">
             <a:avLst/>
@@ -13099,7 +14890,7 @@
               <a:buNone/>
             </a:pPr>
             <a:r>
-              <a:rPr lang="en-US" sz="1400" dirty="0">
+              <a:rPr lang="en-US" sz="1500" dirty="0">
                 <a:solidFill>
                   <a:srgbClr val="000000"/>
                 </a:solidFill>
@@ -13109,13 +14900,13 @@
               </a:rPr>
               <a:t>Get to know the people who have the problem. Listen to what they say and watch what they do, before thinking about any solution.</a:t>
             </a:r>
-            <a:endParaRPr lang="en-US" sz="1400" dirty="0"/>
-          </a:p>
-        </p:txBody>
-      </p:sp>
-      <p:sp>
-        <p:nvSpPr>
-          <p:cNvPr id="9" name="Text 6"/>
+            <a:endParaRPr lang="en-US" sz="1500" dirty="0"/>
+          </a:p>
+        </p:txBody>
+      </p:sp>
+      <p:sp>
+        <p:nvSpPr>
+          <p:cNvPr id="19" name="Text 16"/>
           <p:cNvSpPr txBox="1"/>
           <p:nvPr/>
         </p:nvSpPr>
@@ -13154,14 +14945,14 @@
       </p:sp>
       <p:sp>
         <p:nvSpPr>
-          <p:cNvPr id="10" name="Text 7"/>
-          <p:cNvSpPr txBox="1"/>
-          <p:nvPr/>
-        </p:nvSpPr>
-        <p:spPr>
-          <a:xfrm>
-            <a:off x="4754880" y="2331720"/>
-            <a:ext cx="3657600" cy="960120"/>
+          <p:cNvPr id="20" name="Text 17"/>
+          <p:cNvSpPr txBox="1"/>
+          <p:nvPr/>
+        </p:nvSpPr>
+        <p:spPr>
+          <a:xfrm>
+            <a:off x="4754880" y="2350008"/>
+            <a:ext cx="3657600" cy="1005840"/>
           </a:xfrm>
           <a:prstGeom prst="rect">
             <a:avLst/>
@@ -13177,7 +14968,7 @@
               <a:buNone/>
             </a:pPr>
             <a:r>
-              <a:rPr lang="en-US" sz="1400" dirty="0">
+              <a:rPr lang="en-US" sz="1500" dirty="0">
                 <a:solidFill>
                   <a:srgbClr val="000000"/>
                 </a:solidFill>
@@ -13187,13 +14978,13 @@
               </a:rPr>
               <a:t>Who is struggling, and what is frustrating them?</a:t>
             </a:r>
-            <a:endParaRPr lang="en-US" sz="1400" dirty="0"/>
-          </a:p>
-        </p:txBody>
-      </p:sp>
-      <p:sp>
-        <p:nvSpPr>
-          <p:cNvPr id="11" name="Text 8"/>
+            <a:endParaRPr lang="en-US" sz="1500" dirty="0"/>
+          </a:p>
+        </p:txBody>
+      </p:sp>
+      <p:sp>
+        <p:nvSpPr>
+          <p:cNvPr id="21" name="Text 18"/>
           <p:cNvSpPr txBox="1"/>
           <p:nvPr/>
         </p:nvSpPr>
@@ -13232,14 +15023,14 @@
       </p:sp>
       <p:sp>
         <p:nvSpPr>
-          <p:cNvPr id="12" name="Text 9"/>
-          <p:cNvSpPr txBox="1"/>
-          <p:nvPr/>
-        </p:nvSpPr>
-        <p:spPr>
-          <a:xfrm>
-            <a:off x="4754880" y="3703320"/>
-            <a:ext cx="3657600" cy="960120"/>
+          <p:cNvPr id="22" name="Text 19"/>
+          <p:cNvSpPr txBox="1"/>
+          <p:nvPr/>
+        </p:nvSpPr>
+        <p:spPr>
+          <a:xfrm>
+            <a:off x="4754880" y="3721608"/>
+            <a:ext cx="3657600" cy="1005840"/>
           </a:xfrm>
           <a:prstGeom prst="rect">
             <a:avLst/>
@@ -13255,7 +15046,7 @@
               <a:buNone/>
             </a:pPr>
             <a:r>
-              <a:rPr lang="en-US" sz="1400" dirty="0">
+              <a:rPr lang="en-US" sz="1500" dirty="0">
                 <a:solidFill>
                   <a:srgbClr val="000000"/>
                 </a:solidFill>
@@ -13265,7 +15056,7 @@
               </a:rPr>
               <a:t>read real forum threads, GitHub issues and Reddit posts, and ran local AI on a normal 8 GB gaming GPU ourselves.</a:t>
             </a:r>
-            <a:endParaRPr lang="en-US" sz="1400" dirty="0"/>
+            <a:endParaRPr lang="en-US" sz="1500" dirty="0"/>
           </a:p>
         </p:txBody>
       </p:sp>
@@ -14065,8 +15856,8 @@
         </p:nvSpPr>
         <p:spPr>
           <a:xfrm>
-            <a:off x="640080" y="1645920"/>
-            <a:ext cx="2377440" cy="365760"/>
+            <a:off x="640080" y="1828800"/>
+            <a:ext cx="2377440" cy="457200"/>
           </a:xfrm>
           <a:prstGeom prst="rect">
             <a:avLst/>
@@ -14082,7 +15873,7 @@
               <a:buNone/>
             </a:pPr>
             <a:r>
-              <a:rPr lang="en-US" sz="1800" b="1" dirty="0">
+              <a:rPr lang="en-US" sz="2000" b="1" dirty="0">
                 <a:solidFill>
                   <a:srgbClr val="FFFFFF"/>
                 </a:solidFill>
@@ -14092,46 +15883,46 @@
               </a:rPr>
               <a:t>The local AI builder</a:t>
             </a:r>
+            <a:endParaRPr lang="en-US" sz="2000" dirty="0"/>
+          </a:p>
+        </p:txBody>
+      </p:sp>
+      <p:sp>
+        <p:nvSpPr>
+          <p:cNvPr id="9" name="Text 6"/>
+          <p:cNvSpPr txBox="1"/>
+          <p:nvPr/>
+        </p:nvSpPr>
+        <p:spPr>
+          <a:xfrm>
+            <a:off x="685800" y="2514600"/>
+            <a:ext cx="2286000" cy="1280160"/>
+          </a:xfrm>
+          <a:prstGeom prst="rect">
+            <a:avLst/>
+          </a:prstGeom>
+          <a:noFill/>
+          <a:ln/>
+        </p:spPr>
+        <p:txBody>
+          <a:bodyPr wrap="square" lIns="0" tIns="0" rIns="0" bIns="0" rtlCol="0" anchor="t"/>
+          <a:lstStyle/>
+          <a:p>
+            <a:pPr algn="ctr" indent="0" marL="0">
+              <a:buNone/>
+            </a:pPr>
+            <a:r>
+              <a:rPr lang="en-US" sz="1800" i="1" dirty="0">
+                <a:solidFill>
+                  <a:srgbClr val="BFBFBF"/>
+                </a:solidFill>
+                <a:latin typeface="Arial" pitchFamily="34" charset="0"/>
+                <a:ea typeface="Arial" pitchFamily="34" charset="-122"/>
+                <a:cs typeface="Arial" pitchFamily="34" charset="-120"/>
+              </a:rPr>
+              <a:t>“I paid for this GPU. Why is my AI so slow?”</a:t>
+            </a:r>
             <a:endParaRPr lang="en-US" sz="1800" dirty="0"/>
-          </a:p>
-        </p:txBody>
-      </p:sp>
-      <p:sp>
-        <p:nvSpPr>
-          <p:cNvPr id="9" name="Text 6"/>
-          <p:cNvSpPr txBox="1"/>
-          <p:nvPr/>
-        </p:nvSpPr>
-        <p:spPr>
-          <a:xfrm>
-            <a:off x="685800" y="2194560"/>
-            <a:ext cx="2286000" cy="1097280"/>
-          </a:xfrm>
-          <a:prstGeom prst="rect">
-            <a:avLst/>
-          </a:prstGeom>
-          <a:noFill/>
-          <a:ln/>
-        </p:spPr>
-        <p:txBody>
-          <a:bodyPr wrap="square" lIns="0" tIns="0" rIns="0" bIns="0" rtlCol="0" anchor="t"/>
-          <a:lstStyle/>
-          <a:p>
-            <a:pPr algn="ctr" indent="0" marL="0">
-              <a:buNone/>
-            </a:pPr>
-            <a:r>
-              <a:rPr lang="en-US" sz="1600" i="1" dirty="0">
-                <a:solidFill>
-                  <a:srgbClr val="BFBFBF"/>
-                </a:solidFill>
-                <a:latin typeface="Arial" pitchFamily="34" charset="0"/>
-                <a:ea typeface="Arial" pitchFamily="34" charset="-122"/>
-                <a:cs typeface="Arial" pitchFamily="34" charset="-120"/>
-              </a:rPr>
-              <a:t>“I paid for this GPU. Why is my AI so slow?”</a:t>
-            </a:r>
-            <a:endParaRPr lang="en-US" sz="1600" dirty="0"/>
           </a:p>
         </p:txBody>
       </p:sp>
@@ -14565,8 +16356,8 @@
         </p:nvSpPr>
         <p:spPr>
           <a:xfrm>
-            <a:off x="548640" y="2697480"/>
-            <a:ext cx="3474720" cy="914400"/>
+            <a:off x="548640" y="2560320"/>
+            <a:ext cx="3474720" cy="640080"/>
           </a:xfrm>
           <a:prstGeom prst="rect">
             <a:avLst/>
@@ -14582,7 +16373,7 @@
               <a:buNone/>
             </a:pPr>
             <a:r>
-              <a:rPr lang="en-US" sz="1800" i="1" dirty="0">
+              <a:rPr lang="en-US" sz="1600" i="1" dirty="0">
                 <a:solidFill>
                   <a:srgbClr val="BFBFBF"/>
                 </a:solidFill>
@@ -14592,13 +16383,403 @@
               </a:rPr>
               <a:t>A clear problem is half the solution.</a:t>
             </a:r>
-            <a:endParaRPr lang="en-US" sz="1800" dirty="0"/>
-          </a:p>
-        </p:txBody>
-      </p:sp>
-      <p:sp>
-        <p:nvSpPr>
-          <p:cNvPr id="6" name="Shape 3"/>
+            <a:endParaRPr lang="en-US" sz="1600" dirty="0"/>
+          </a:p>
+        </p:txBody>
+      </p:sp>
+      <p:sp>
+        <p:nvSpPr>
+          <p:cNvPr id="6" name="Text 3"/>
+          <p:cNvSpPr txBox="1"/>
+          <p:nvPr/>
+        </p:nvSpPr>
+        <p:spPr>
+          <a:xfrm>
+            <a:off x="548640" y="3429000"/>
+            <a:ext cx="457200" cy="256032"/>
+          </a:xfrm>
+          <a:prstGeom prst="rect">
+            <a:avLst/>
+          </a:prstGeom>
+          <a:noFill/>
+          <a:ln/>
+        </p:spPr>
+        <p:txBody>
+          <a:bodyPr wrap="square" lIns="0" tIns="0" rIns="0" bIns="0" rtlCol="0" anchor="ctr"/>
+          <a:lstStyle/>
+          <a:p>
+            <a:pPr indent="0" marL="0">
+              <a:buNone/>
+            </a:pPr>
+            <a:r>
+              <a:rPr lang="en-US" sz="1200" b="1" dirty="0">
+                <a:solidFill>
+                  <a:srgbClr val="595959"/>
+                </a:solidFill>
+                <a:latin typeface="Arial" pitchFamily="34" charset="0"/>
+                <a:ea typeface="Arial" pitchFamily="34" charset="-122"/>
+                <a:cs typeface="Arial" pitchFamily="34" charset="-120"/>
+              </a:rPr>
+              <a:t>01</a:t>
+            </a:r>
+            <a:endParaRPr lang="en-US" sz="1200" dirty="0"/>
+          </a:p>
+        </p:txBody>
+      </p:sp>
+      <p:sp>
+        <p:nvSpPr>
+          <p:cNvPr id="7" name="Text 4"/>
+          <p:cNvSpPr txBox="1"/>
+          <p:nvPr/>
+        </p:nvSpPr>
+        <p:spPr>
+          <a:xfrm>
+            <a:off x="1005840" y="3429000"/>
+            <a:ext cx="2743200" cy="256032"/>
+          </a:xfrm>
+          <a:prstGeom prst="rect">
+            <a:avLst/>
+          </a:prstGeom>
+          <a:noFill/>
+          <a:ln/>
+        </p:spPr>
+        <p:txBody>
+          <a:bodyPr wrap="square" lIns="0" tIns="0" rIns="0" bIns="0" rtlCol="0" anchor="ctr"/>
+          <a:lstStyle/>
+          <a:p>
+            <a:pPr indent="0" marL="0">
+              <a:buNone/>
+            </a:pPr>
+            <a:r>
+              <a:rPr lang="en-US" sz="1200" dirty="0">
+                <a:solidFill>
+                  <a:srgbClr val="595959"/>
+                </a:solidFill>
+                <a:latin typeface="Arial" pitchFamily="34" charset="0"/>
+                <a:ea typeface="Arial" pitchFamily="34" charset="-122"/>
+                <a:cs typeface="Arial" pitchFamily="34" charset="-120"/>
+              </a:rPr>
+              <a:t>Empathize</a:t>
+            </a:r>
+            <a:endParaRPr lang="en-US" sz="1200" dirty="0"/>
+          </a:p>
+        </p:txBody>
+      </p:sp>
+      <p:sp>
+        <p:nvSpPr>
+          <p:cNvPr id="8" name="Text 5"/>
+          <p:cNvSpPr txBox="1"/>
+          <p:nvPr/>
+        </p:nvSpPr>
+        <p:spPr>
+          <a:xfrm>
+            <a:off x="548640" y="3685032"/>
+            <a:ext cx="457200" cy="256032"/>
+          </a:xfrm>
+          <a:prstGeom prst="rect">
+            <a:avLst/>
+          </a:prstGeom>
+          <a:noFill/>
+          <a:ln/>
+        </p:spPr>
+        <p:txBody>
+          <a:bodyPr wrap="square" lIns="0" tIns="0" rIns="0" bIns="0" rtlCol="0" anchor="ctr"/>
+          <a:lstStyle/>
+          <a:p>
+            <a:pPr indent="0" marL="0">
+              <a:buNone/>
+            </a:pPr>
+            <a:r>
+              <a:rPr lang="en-US" sz="1200" b="1" dirty="0">
+                <a:solidFill>
+                  <a:srgbClr val="FFFFFF"/>
+                </a:solidFill>
+                <a:latin typeface="Arial" pitchFamily="34" charset="0"/>
+                <a:ea typeface="Arial" pitchFamily="34" charset="-122"/>
+                <a:cs typeface="Arial" pitchFamily="34" charset="-120"/>
+              </a:rPr>
+              <a:t>02</a:t>
+            </a:r>
+            <a:endParaRPr lang="en-US" sz="1200" dirty="0"/>
+          </a:p>
+        </p:txBody>
+      </p:sp>
+      <p:sp>
+        <p:nvSpPr>
+          <p:cNvPr id="9" name="Text 6"/>
+          <p:cNvSpPr txBox="1"/>
+          <p:nvPr/>
+        </p:nvSpPr>
+        <p:spPr>
+          <a:xfrm>
+            <a:off x="1005840" y="3685032"/>
+            <a:ext cx="2743200" cy="256032"/>
+          </a:xfrm>
+          <a:prstGeom prst="rect">
+            <a:avLst/>
+          </a:prstGeom>
+          <a:noFill/>
+          <a:ln/>
+        </p:spPr>
+        <p:txBody>
+          <a:bodyPr wrap="square" lIns="0" tIns="0" rIns="0" bIns="0" rtlCol="0" anchor="ctr"/>
+          <a:lstStyle/>
+          <a:p>
+            <a:pPr indent="0" marL="0">
+              <a:buNone/>
+            </a:pPr>
+            <a:r>
+              <a:rPr lang="en-US" sz="1200" b="1" dirty="0">
+                <a:solidFill>
+                  <a:srgbClr val="FFFFFF"/>
+                </a:solidFill>
+                <a:latin typeface="Arial" pitchFamily="34" charset="0"/>
+                <a:ea typeface="Arial" pitchFamily="34" charset="-122"/>
+                <a:cs typeface="Arial" pitchFamily="34" charset="-120"/>
+              </a:rPr>
+              <a:t>Define</a:t>
+            </a:r>
+            <a:endParaRPr lang="en-US" sz="1200" dirty="0"/>
+          </a:p>
+        </p:txBody>
+      </p:sp>
+      <p:sp>
+        <p:nvSpPr>
+          <p:cNvPr id="10" name="Text 7"/>
+          <p:cNvSpPr txBox="1"/>
+          <p:nvPr/>
+        </p:nvSpPr>
+        <p:spPr>
+          <a:xfrm>
+            <a:off x="548640" y="3941064"/>
+            <a:ext cx="457200" cy="256032"/>
+          </a:xfrm>
+          <a:prstGeom prst="rect">
+            <a:avLst/>
+          </a:prstGeom>
+          <a:noFill/>
+          <a:ln/>
+        </p:spPr>
+        <p:txBody>
+          <a:bodyPr wrap="square" lIns="0" tIns="0" rIns="0" bIns="0" rtlCol="0" anchor="ctr"/>
+          <a:lstStyle/>
+          <a:p>
+            <a:pPr indent="0" marL="0">
+              <a:buNone/>
+            </a:pPr>
+            <a:r>
+              <a:rPr lang="en-US" sz="1200" b="1" dirty="0">
+                <a:solidFill>
+                  <a:srgbClr val="595959"/>
+                </a:solidFill>
+                <a:latin typeface="Arial" pitchFamily="34" charset="0"/>
+                <a:ea typeface="Arial" pitchFamily="34" charset="-122"/>
+                <a:cs typeface="Arial" pitchFamily="34" charset="-120"/>
+              </a:rPr>
+              <a:t>03</a:t>
+            </a:r>
+            <a:endParaRPr lang="en-US" sz="1200" dirty="0"/>
+          </a:p>
+        </p:txBody>
+      </p:sp>
+      <p:sp>
+        <p:nvSpPr>
+          <p:cNvPr id="11" name="Text 8"/>
+          <p:cNvSpPr txBox="1"/>
+          <p:nvPr/>
+        </p:nvSpPr>
+        <p:spPr>
+          <a:xfrm>
+            <a:off x="1005840" y="3941064"/>
+            <a:ext cx="2743200" cy="256032"/>
+          </a:xfrm>
+          <a:prstGeom prst="rect">
+            <a:avLst/>
+          </a:prstGeom>
+          <a:noFill/>
+          <a:ln/>
+        </p:spPr>
+        <p:txBody>
+          <a:bodyPr wrap="square" lIns="0" tIns="0" rIns="0" bIns="0" rtlCol="0" anchor="ctr"/>
+          <a:lstStyle/>
+          <a:p>
+            <a:pPr indent="0" marL="0">
+              <a:buNone/>
+            </a:pPr>
+            <a:r>
+              <a:rPr lang="en-US" sz="1200" dirty="0">
+                <a:solidFill>
+                  <a:srgbClr val="595959"/>
+                </a:solidFill>
+                <a:latin typeface="Arial" pitchFamily="34" charset="0"/>
+                <a:ea typeface="Arial" pitchFamily="34" charset="-122"/>
+                <a:cs typeface="Arial" pitchFamily="34" charset="-120"/>
+              </a:rPr>
+              <a:t>Ideate</a:t>
+            </a:r>
+            <a:endParaRPr lang="en-US" sz="1200" dirty="0"/>
+          </a:p>
+        </p:txBody>
+      </p:sp>
+      <p:sp>
+        <p:nvSpPr>
+          <p:cNvPr id="12" name="Text 9"/>
+          <p:cNvSpPr txBox="1"/>
+          <p:nvPr/>
+        </p:nvSpPr>
+        <p:spPr>
+          <a:xfrm>
+            <a:off x="548640" y="4197096"/>
+            <a:ext cx="457200" cy="256032"/>
+          </a:xfrm>
+          <a:prstGeom prst="rect">
+            <a:avLst/>
+          </a:prstGeom>
+          <a:noFill/>
+          <a:ln/>
+        </p:spPr>
+        <p:txBody>
+          <a:bodyPr wrap="square" lIns="0" tIns="0" rIns="0" bIns="0" rtlCol="0" anchor="ctr"/>
+          <a:lstStyle/>
+          <a:p>
+            <a:pPr indent="0" marL="0">
+              <a:buNone/>
+            </a:pPr>
+            <a:r>
+              <a:rPr lang="en-US" sz="1200" b="1" dirty="0">
+                <a:solidFill>
+                  <a:srgbClr val="595959"/>
+                </a:solidFill>
+                <a:latin typeface="Arial" pitchFamily="34" charset="0"/>
+                <a:ea typeface="Arial" pitchFamily="34" charset="-122"/>
+                <a:cs typeface="Arial" pitchFamily="34" charset="-120"/>
+              </a:rPr>
+              <a:t>04</a:t>
+            </a:r>
+            <a:endParaRPr lang="en-US" sz="1200" dirty="0"/>
+          </a:p>
+        </p:txBody>
+      </p:sp>
+      <p:sp>
+        <p:nvSpPr>
+          <p:cNvPr id="13" name="Text 10"/>
+          <p:cNvSpPr txBox="1"/>
+          <p:nvPr/>
+        </p:nvSpPr>
+        <p:spPr>
+          <a:xfrm>
+            <a:off x="1005840" y="4197096"/>
+            <a:ext cx="2743200" cy="256032"/>
+          </a:xfrm>
+          <a:prstGeom prst="rect">
+            <a:avLst/>
+          </a:prstGeom>
+          <a:noFill/>
+          <a:ln/>
+        </p:spPr>
+        <p:txBody>
+          <a:bodyPr wrap="square" lIns="0" tIns="0" rIns="0" bIns="0" rtlCol="0" anchor="ctr"/>
+          <a:lstStyle/>
+          <a:p>
+            <a:pPr indent="0" marL="0">
+              <a:buNone/>
+            </a:pPr>
+            <a:r>
+              <a:rPr lang="en-US" sz="1200" dirty="0">
+                <a:solidFill>
+                  <a:srgbClr val="595959"/>
+                </a:solidFill>
+                <a:latin typeface="Arial" pitchFamily="34" charset="0"/>
+                <a:ea typeface="Arial" pitchFamily="34" charset="-122"/>
+                <a:cs typeface="Arial" pitchFamily="34" charset="-120"/>
+              </a:rPr>
+              <a:t>Prototype</a:t>
+            </a:r>
+            <a:endParaRPr lang="en-US" sz="1200" dirty="0"/>
+          </a:p>
+        </p:txBody>
+      </p:sp>
+      <p:sp>
+        <p:nvSpPr>
+          <p:cNvPr id="14" name="Text 11"/>
+          <p:cNvSpPr txBox="1"/>
+          <p:nvPr/>
+        </p:nvSpPr>
+        <p:spPr>
+          <a:xfrm>
+            <a:off x="548640" y="4453128"/>
+            <a:ext cx="457200" cy="256032"/>
+          </a:xfrm>
+          <a:prstGeom prst="rect">
+            <a:avLst/>
+          </a:prstGeom>
+          <a:noFill/>
+          <a:ln/>
+        </p:spPr>
+        <p:txBody>
+          <a:bodyPr wrap="square" lIns="0" tIns="0" rIns="0" bIns="0" rtlCol="0" anchor="ctr"/>
+          <a:lstStyle/>
+          <a:p>
+            <a:pPr indent="0" marL="0">
+              <a:buNone/>
+            </a:pPr>
+            <a:r>
+              <a:rPr lang="en-US" sz="1200" b="1" dirty="0">
+                <a:solidFill>
+                  <a:srgbClr val="595959"/>
+                </a:solidFill>
+                <a:latin typeface="Arial" pitchFamily="34" charset="0"/>
+                <a:ea typeface="Arial" pitchFamily="34" charset="-122"/>
+                <a:cs typeface="Arial" pitchFamily="34" charset="-120"/>
+              </a:rPr>
+              <a:t>05</a:t>
+            </a:r>
+            <a:endParaRPr lang="en-US" sz="1200" dirty="0"/>
+          </a:p>
+        </p:txBody>
+      </p:sp>
+      <p:sp>
+        <p:nvSpPr>
+          <p:cNvPr id="15" name="Text 12"/>
+          <p:cNvSpPr txBox="1"/>
+          <p:nvPr/>
+        </p:nvSpPr>
+        <p:spPr>
+          <a:xfrm>
+            <a:off x="1005840" y="4453128"/>
+            <a:ext cx="2743200" cy="256032"/>
+          </a:xfrm>
+          <a:prstGeom prst="rect">
+            <a:avLst/>
+          </a:prstGeom>
+          <a:noFill/>
+          <a:ln/>
+        </p:spPr>
+        <p:txBody>
+          <a:bodyPr wrap="square" lIns="0" tIns="0" rIns="0" bIns="0" rtlCol="0" anchor="ctr"/>
+          <a:lstStyle/>
+          <a:p>
+            <a:pPr indent="0" marL="0">
+              <a:buNone/>
+            </a:pPr>
+            <a:r>
+              <a:rPr lang="en-US" sz="1200" dirty="0">
+                <a:solidFill>
+                  <a:srgbClr val="595959"/>
+                </a:solidFill>
+                <a:latin typeface="Arial" pitchFamily="34" charset="0"/>
+                <a:ea typeface="Arial" pitchFamily="34" charset="-122"/>
+                <a:cs typeface="Arial" pitchFamily="34" charset="-120"/>
+              </a:rPr>
+              <a:t>Test</a:t>
+            </a:r>
+            <a:endParaRPr lang="en-US" sz="1200" dirty="0"/>
+          </a:p>
+        </p:txBody>
+      </p:sp>
+      <p:sp>
+        <p:nvSpPr>
+          <p:cNvPr id="16" name="Shape 13"/>
           <p:cNvSpPr/>
           <p:nvPr/>
         </p:nvSpPr>
@@ -14623,7 +16804,7 @@
       </p:sp>
       <p:sp>
         <p:nvSpPr>
-          <p:cNvPr id="7" name="Text 4"/>
+          <p:cNvPr id="17" name="Text 14"/>
           <p:cNvSpPr txBox="1"/>
           <p:nvPr/>
         </p:nvSpPr>
@@ -14662,14 +16843,14 @@
       </p:sp>
       <p:sp>
         <p:nvSpPr>
-          <p:cNvPr id="8" name="Text 5"/>
-          <p:cNvSpPr txBox="1"/>
-          <p:nvPr/>
-        </p:nvSpPr>
-        <p:spPr>
-          <a:xfrm>
-            <a:off x="4754880" y="960120"/>
-            <a:ext cx="3657600" cy="960120"/>
+          <p:cNvPr id="18" name="Text 15"/>
+          <p:cNvSpPr txBox="1"/>
+          <p:nvPr/>
+        </p:nvSpPr>
+        <p:spPr>
+          <a:xfrm>
+            <a:off x="4754880" y="978408"/>
+            <a:ext cx="3657600" cy="1005840"/>
           </a:xfrm>
           <a:prstGeom prst="rect">
             <a:avLst/>
@@ -14685,7 +16866,7 @@
               <a:buNone/>
             </a:pPr>
             <a:r>
-              <a:rPr lang="en-US" sz="1400" dirty="0">
+              <a:rPr lang="en-US" sz="1500" dirty="0">
                 <a:solidFill>
                   <a:srgbClr val="000000"/>
                 </a:solidFill>
@@ -14695,13 +16876,13 @@
               </a:rPr>
               <a:t>Turn everything you learned into one short, clear problem statement that the whole team agrees on.</a:t>
             </a:r>
-            <a:endParaRPr lang="en-US" sz="1400" dirty="0"/>
-          </a:p>
-        </p:txBody>
-      </p:sp>
-      <p:sp>
-        <p:nvSpPr>
-          <p:cNvPr id="9" name="Text 6"/>
+            <a:endParaRPr lang="en-US" sz="1500" dirty="0"/>
+          </a:p>
+        </p:txBody>
+      </p:sp>
+      <p:sp>
+        <p:nvSpPr>
+          <p:cNvPr id="19" name="Text 16"/>
           <p:cNvSpPr txBox="1"/>
           <p:nvPr/>
         </p:nvSpPr>
@@ -14740,14 +16921,14 @@
       </p:sp>
       <p:sp>
         <p:nvSpPr>
-          <p:cNvPr id="10" name="Text 7"/>
-          <p:cNvSpPr txBox="1"/>
-          <p:nvPr/>
-        </p:nvSpPr>
-        <p:spPr>
-          <a:xfrm>
-            <a:off x="4754880" y="2331720"/>
-            <a:ext cx="3657600" cy="960120"/>
+          <p:cNvPr id="20" name="Text 17"/>
+          <p:cNvSpPr txBox="1"/>
+          <p:nvPr/>
+        </p:nvSpPr>
+        <p:spPr>
+          <a:xfrm>
+            <a:off x="4754880" y="2350008"/>
+            <a:ext cx="3657600" cy="1005840"/>
           </a:xfrm>
           <a:prstGeom prst="rect">
             <a:avLst/>
@@ -14763,7 +16944,7 @@
               <a:buNone/>
             </a:pPr>
             <a:r>
-              <a:rPr lang="en-US" sz="1400" dirty="0">
+              <a:rPr lang="en-US" sz="1500" dirty="0">
                 <a:solidFill>
                   <a:srgbClr val="000000"/>
                 </a:solidFill>
@@ -14773,13 +16954,13 @@
               </a:rPr>
               <a:t>What is the real problem we are trying to solve?</a:t>
             </a:r>
-            <a:endParaRPr lang="en-US" sz="1400" dirty="0"/>
-          </a:p>
-        </p:txBody>
-      </p:sp>
-      <p:sp>
-        <p:nvSpPr>
-          <p:cNvPr id="11" name="Text 8"/>
+            <a:endParaRPr lang="en-US" sz="1500" dirty="0"/>
+          </a:p>
+        </p:txBody>
+      </p:sp>
+      <p:sp>
+        <p:nvSpPr>
+          <p:cNvPr id="21" name="Text 18"/>
           <p:cNvSpPr txBox="1"/>
           <p:nvPr/>
         </p:nvSpPr>
@@ -14818,14 +16999,14 @@
       </p:sp>
       <p:sp>
         <p:nvSpPr>
-          <p:cNvPr id="12" name="Text 9"/>
-          <p:cNvSpPr txBox="1"/>
-          <p:nvPr/>
-        </p:nvSpPr>
-        <p:spPr>
-          <a:xfrm>
-            <a:off x="4754880" y="3703320"/>
-            <a:ext cx="3657600" cy="960120"/>
+          <p:cNvPr id="22" name="Text 19"/>
+          <p:cNvSpPr txBox="1"/>
+          <p:nvPr/>
+        </p:nvSpPr>
+        <p:spPr>
+          <a:xfrm>
+            <a:off x="4754880" y="3721608"/>
+            <a:ext cx="3657600" cy="1005840"/>
           </a:xfrm>
           <a:prstGeom prst="rect">
             <a:avLst/>
@@ -14841,7 +17022,7 @@
               <a:buNone/>
             </a:pPr>
             <a:r>
-              <a:rPr lang="en-US" sz="1400" dirty="0">
+              <a:rPr lang="en-US" sz="1500" dirty="0">
                 <a:solidFill>
                   <a:srgbClr val="000000"/>
                 </a:solidFill>
@@ -14851,7 +17032,7 @@
               </a:rPr>
               <a:t>boiled the research down to a single “How might we” question and two measurable pains.</a:t>
             </a:r>
-            <a:endParaRPr lang="en-US" sz="1400" dirty="0"/>
+            <a:endParaRPr lang="en-US" sz="1500" dirty="0"/>
           </a:p>
         </p:txBody>
       </p:sp>
